--- a/public/slides/aa203/lecture_9.pptx
+++ b/public/slides/aa203/lecture_9.pptx
@@ -170,658 +170,56 @@
 </p:presentation>
 </file>
 
-<file path=ppt/revisionInfo.xml><?xml version="1.0" encoding="utf-8"?>
-<p1510:revInfo xmlns:a="http://schemas.openxmlformats.org/drawingml/2006/main" xmlns:r="http://schemas.openxmlformats.org/officeDocument/2006/relationships" xmlns:p1510="http://schemas.microsoft.com/office/powerpoint/2015/10/main">
-  <p1510:revLst>
-    <p1510:client id="{AD343518-F06D-4F22-B6F8-7F5E447018B4}" v="133" dt="2022-04-20T09:37:24.227"/>
-  </p1510:revLst>
-</p1510:revInfo>
-</file>
-
 <file path=ppt/changesInfos/changesInfo1.xml><?xml version="1.0" encoding="utf-8"?>
 <pc:chgInfo xmlns:a="http://schemas.openxmlformats.org/drawingml/2006/main" xmlns:r="http://schemas.openxmlformats.org/officeDocument/2006/relationships" xmlns:ac="http://schemas.microsoft.com/office/drawing/2013/main/command" xmlns:pc="http://schemas.microsoft.com/office/powerpoint/2013/main/command">
   <pc:docChgLst>
-    <pc:chgData name="Karen Yan Ming Leung" userId="5702c81a-7bc1-45f0-9e77-da815cac1d17" providerId="ADAL" clId="{49E13DDA-8E9C-EF4E-A745-6198926422FE}"/>
-    <pc:docChg chg="undo redo custSel addSld delSld modSld modSection">
-      <pc:chgData name="Karen Yan Ming Leung" userId="5702c81a-7bc1-45f0-9e77-da815cac1d17" providerId="ADAL" clId="{49E13DDA-8E9C-EF4E-A745-6198926422FE}" dt="2022-04-18T06:44:25.042" v="1236" actId="20577"/>
+    <pc:chgData name="Daniele Gammelli" userId="292b8a31-f1ba-4b4c-b196-a231dc095d13" providerId="ADAL" clId="{6E670754-AB6A-5789-AA0A-6F6FD9CE3EEA}"/>
+    <pc:docChg chg="modSld">
+      <pc:chgData name="Daniele Gammelli" userId="292b8a31-f1ba-4b4c-b196-a231dc095d13" providerId="ADAL" clId="{6E670754-AB6A-5789-AA0A-6F6FD9CE3EEA}" dt="2026-08-13T21:16:40.766" v="5" actId="20577"/>
       <pc:docMkLst>
         <pc:docMk/>
       </pc:docMkLst>
-      <pc:sldChg chg="modSp mod">
-        <pc:chgData name="Karen Yan Ming Leung" userId="5702c81a-7bc1-45f0-9e77-da815cac1d17" providerId="ADAL" clId="{49E13DDA-8E9C-EF4E-A745-6198926422FE}" dt="2022-04-17T23:45:14.254" v="18" actId="20577"/>
+      <pc:sldChg chg="modNotesTx">
+        <pc:chgData name="Daniele Gammelli" userId="292b8a31-f1ba-4b4c-b196-a231dc095d13" providerId="ADAL" clId="{6E670754-AB6A-5789-AA0A-6F6FD9CE3EEA}" dt="2026-08-13T21:16:31.423" v="3" actId="20577"/>
         <pc:sldMkLst>
           <pc:docMk/>
-          <pc:sldMk cId="1672827742" sldId="256"/>
+          <pc:sldMk cId="453171761" sldId="408"/>
         </pc:sldMkLst>
-        <pc:spChg chg="mod">
-          <ac:chgData name="Karen Yan Ming Leung" userId="5702c81a-7bc1-45f0-9e77-da815cac1d17" providerId="ADAL" clId="{49E13DDA-8E9C-EF4E-A745-6198926422FE}" dt="2022-04-17T23:45:14.254" v="18" actId="20577"/>
-          <ac:spMkLst>
-            <pc:docMk/>
-            <pc:sldMk cId="1672827742" sldId="256"/>
-            <ac:spMk id="3" creationId="{00000000-0000-0000-0000-000000000000}"/>
-          </ac:spMkLst>
-        </pc:spChg>
       </pc:sldChg>
-      <pc:sldChg chg="modSp mod">
-        <pc:chgData name="Karen Yan Ming Leung" userId="5702c81a-7bc1-45f0-9e77-da815cac1d17" providerId="ADAL" clId="{49E13DDA-8E9C-EF4E-A745-6198926422FE}" dt="2022-04-18T06:23:37.786" v="948" actId="20577"/>
+      <pc:sldChg chg="modNotesTx">
+        <pc:chgData name="Daniele Gammelli" userId="292b8a31-f1ba-4b4c-b196-a231dc095d13" providerId="ADAL" clId="{6E670754-AB6A-5789-AA0A-6F6FD9CE3EEA}" dt="2026-08-13T21:16:40.766" v="5" actId="20577"/>
         <pc:sldMkLst>
           <pc:docMk/>
-          <pc:sldMk cId="2149454889" sldId="373"/>
-        </pc:sldMkLst>
-        <pc:spChg chg="mod">
-          <ac:chgData name="Karen Yan Ming Leung" userId="5702c81a-7bc1-45f0-9e77-da815cac1d17" providerId="ADAL" clId="{49E13DDA-8E9C-EF4E-A745-6198926422FE}" dt="2022-04-18T06:23:37.786" v="948" actId="20577"/>
-          <ac:spMkLst>
-            <pc:docMk/>
-            <pc:sldMk cId="2149454889" sldId="373"/>
-            <ac:spMk id="3" creationId="{4643D3F6-0263-6F44-8A50-72BF67B01A82}"/>
-          </ac:spMkLst>
-        </pc:spChg>
-      </pc:sldChg>
-      <pc:sldChg chg="modSp add mod">
-        <pc:chgData name="Karen Yan Ming Leung" userId="5702c81a-7bc1-45f0-9e77-da815cac1d17" providerId="ADAL" clId="{49E13DDA-8E9C-EF4E-A745-6198926422FE}" dt="2022-04-18T00:01:58.499" v="53" actId="20577"/>
-        <pc:sldMkLst>
-          <pc:docMk/>
-          <pc:sldMk cId="1712032461" sldId="379"/>
-        </pc:sldMkLst>
-        <pc:spChg chg="mod">
-          <ac:chgData name="Karen Yan Ming Leung" userId="5702c81a-7bc1-45f0-9e77-da815cac1d17" providerId="ADAL" clId="{49E13DDA-8E9C-EF4E-A745-6198926422FE}" dt="2022-04-18T00:01:58.499" v="53" actId="20577"/>
-          <ac:spMkLst>
-            <pc:docMk/>
-            <pc:sldMk cId="1712032461" sldId="379"/>
-            <ac:spMk id="2" creationId="{205A5933-6BC8-2D4D-83B1-EFC90C73AC60}"/>
-          </ac:spMkLst>
-        </pc:spChg>
-      </pc:sldChg>
-      <pc:sldChg chg="modSp mod">
-        <pc:chgData name="Karen Yan Ming Leung" userId="5702c81a-7bc1-45f0-9e77-da815cac1d17" providerId="ADAL" clId="{49E13DDA-8E9C-EF4E-A745-6198926422FE}" dt="2022-04-18T00:20:48.227" v="190" actId="20577"/>
-        <pc:sldMkLst>
-          <pc:docMk/>
-          <pc:sldMk cId="259604979" sldId="388"/>
-        </pc:sldMkLst>
-        <pc:spChg chg="mod">
-          <ac:chgData name="Karen Yan Ming Leung" userId="5702c81a-7bc1-45f0-9e77-da815cac1d17" providerId="ADAL" clId="{49E13DDA-8E9C-EF4E-A745-6198926422FE}" dt="2022-04-18T00:20:48.227" v="190" actId="20577"/>
-          <ac:spMkLst>
-            <pc:docMk/>
-            <pc:sldMk cId="259604979" sldId="388"/>
-            <ac:spMk id="2" creationId="{783406FA-F965-EE43-9DCC-3C9B40F8BA94}"/>
-          </ac:spMkLst>
-        </pc:spChg>
-        <pc:spChg chg="mod">
-          <ac:chgData name="Karen Yan Ming Leung" userId="5702c81a-7bc1-45f0-9e77-da815cac1d17" providerId="ADAL" clId="{49E13DDA-8E9C-EF4E-A745-6198926422FE}" dt="2022-04-17T23:47:39.804" v="30" actId="20577"/>
-          <ac:spMkLst>
-            <pc:docMk/>
-            <pc:sldMk cId="259604979" sldId="388"/>
-            <ac:spMk id="3" creationId="{D88507FF-DF20-5F4B-9237-9A0C92B04815}"/>
-          </ac:spMkLst>
-        </pc:spChg>
-      </pc:sldChg>
-      <pc:sldChg chg="modSp modAnim">
-        <pc:chgData name="Karen Yan Ming Leung" userId="5702c81a-7bc1-45f0-9e77-da815cac1d17" providerId="ADAL" clId="{49E13DDA-8E9C-EF4E-A745-6198926422FE}" dt="2022-04-18T00:18:22.752" v="153" actId="5793"/>
-        <pc:sldMkLst>
-          <pc:docMk/>
-          <pc:sldMk cId="3345642446" sldId="389"/>
-        </pc:sldMkLst>
-        <pc:spChg chg="mod">
-          <ac:chgData name="Karen Yan Ming Leung" userId="5702c81a-7bc1-45f0-9e77-da815cac1d17" providerId="ADAL" clId="{49E13DDA-8E9C-EF4E-A745-6198926422FE}" dt="2022-04-18T00:18:22.752" v="153" actId="5793"/>
-          <ac:spMkLst>
-            <pc:docMk/>
-            <pc:sldMk cId="3345642446" sldId="389"/>
-            <ac:spMk id="3" creationId="{ADA0956A-7E82-714E-AF4B-9CE4E684B577}"/>
-          </ac:spMkLst>
-        </pc:spChg>
-      </pc:sldChg>
-      <pc:sldChg chg="modSp mod">
-        <pc:chgData name="Karen Yan Ming Leung" userId="5702c81a-7bc1-45f0-9e77-da815cac1d17" providerId="ADAL" clId="{49E13DDA-8E9C-EF4E-A745-6198926422FE}" dt="2022-04-18T01:48:46.252" v="191" actId="20577"/>
-        <pc:sldMkLst>
-          <pc:docMk/>
-          <pc:sldMk cId="2713135135" sldId="393"/>
-        </pc:sldMkLst>
-        <pc:spChg chg="mod">
-          <ac:chgData name="Karen Yan Ming Leung" userId="5702c81a-7bc1-45f0-9e77-da815cac1d17" providerId="ADAL" clId="{49E13DDA-8E9C-EF4E-A745-6198926422FE}" dt="2022-04-18T01:48:46.252" v="191" actId="20577"/>
-          <ac:spMkLst>
-            <pc:docMk/>
-            <pc:sldMk cId="2713135135" sldId="393"/>
-            <ac:spMk id="2" creationId="{4FE623C6-E23F-0941-93ED-8A405D5A30B1}"/>
-          </ac:spMkLst>
-        </pc:spChg>
-        <pc:spChg chg="mod">
-          <ac:chgData name="Karen Yan Ming Leung" userId="5702c81a-7bc1-45f0-9e77-da815cac1d17" providerId="ADAL" clId="{49E13DDA-8E9C-EF4E-A745-6198926422FE}" dt="2022-04-17T23:46:43.423" v="21" actId="27636"/>
-          <ac:spMkLst>
-            <pc:docMk/>
-            <pc:sldMk cId="2713135135" sldId="393"/>
-            <ac:spMk id="3" creationId="{FBD3295C-9725-3741-A55F-828934C217B7}"/>
-          </ac:spMkLst>
-        </pc:spChg>
-      </pc:sldChg>
-      <pc:sldChg chg="modSp mod">
-        <pc:chgData name="Karen Yan Ming Leung" userId="5702c81a-7bc1-45f0-9e77-da815cac1d17" providerId="ADAL" clId="{49E13DDA-8E9C-EF4E-A745-6198926422FE}" dt="2022-04-18T02:18:35.133" v="452" actId="20577"/>
-        <pc:sldMkLst>
-          <pc:docMk/>
-          <pc:sldMk cId="2391237028" sldId="394"/>
-        </pc:sldMkLst>
-        <pc:spChg chg="mod">
-          <ac:chgData name="Karen Yan Ming Leung" userId="5702c81a-7bc1-45f0-9e77-da815cac1d17" providerId="ADAL" clId="{49E13DDA-8E9C-EF4E-A745-6198926422FE}" dt="2022-04-18T01:48:54.310" v="193" actId="20577"/>
-          <ac:spMkLst>
-            <pc:docMk/>
-            <pc:sldMk cId="2391237028" sldId="394"/>
-            <ac:spMk id="2" creationId="{5EBA6E32-B6C3-F647-8EF9-5593232481A5}"/>
-          </ac:spMkLst>
-        </pc:spChg>
-        <pc:spChg chg="mod">
-          <ac:chgData name="Karen Yan Ming Leung" userId="5702c81a-7bc1-45f0-9e77-da815cac1d17" providerId="ADAL" clId="{49E13DDA-8E9C-EF4E-A745-6198926422FE}" dt="2022-04-18T02:18:35.133" v="452" actId="20577"/>
-          <ac:spMkLst>
-            <pc:docMk/>
-            <pc:sldMk cId="2391237028" sldId="394"/>
-            <ac:spMk id="3" creationId="{1A5F707F-C7CC-CC4C-8B5D-80C239C51709}"/>
-          </ac:spMkLst>
-        </pc:spChg>
-      </pc:sldChg>
-      <pc:sldChg chg="modSp mod">
-        <pc:chgData name="Karen Yan Ming Leung" userId="5702c81a-7bc1-45f0-9e77-da815cac1d17" providerId="ADAL" clId="{49E13DDA-8E9C-EF4E-A745-6198926422FE}" dt="2022-04-18T04:27:47.904" v="503" actId="20577"/>
-        <pc:sldMkLst>
-          <pc:docMk/>
-          <pc:sldMk cId="2118916703" sldId="395"/>
-        </pc:sldMkLst>
-        <pc:spChg chg="mod">
-          <ac:chgData name="Karen Yan Ming Leung" userId="5702c81a-7bc1-45f0-9e77-da815cac1d17" providerId="ADAL" clId="{49E13DDA-8E9C-EF4E-A745-6198926422FE}" dt="2022-04-18T02:18:57.356" v="453" actId="20577"/>
-          <ac:spMkLst>
-            <pc:docMk/>
-            <pc:sldMk cId="2118916703" sldId="395"/>
-            <ac:spMk id="2" creationId="{8B6DCE25-4CCD-994D-99D6-9ADF52CDEDC0}"/>
-          </ac:spMkLst>
-        </pc:spChg>
-        <pc:spChg chg="mod">
-          <ac:chgData name="Karen Yan Ming Leung" userId="5702c81a-7bc1-45f0-9e77-da815cac1d17" providerId="ADAL" clId="{49E13DDA-8E9C-EF4E-A745-6198926422FE}" dt="2022-04-18T04:27:47.904" v="503" actId="20577"/>
-          <ac:spMkLst>
-            <pc:docMk/>
-            <pc:sldMk cId="2118916703" sldId="395"/>
-            <ac:spMk id="3" creationId="{C6E1EC63-6A16-964A-85DB-4364E7BB510C}"/>
-          </ac:spMkLst>
-        </pc:spChg>
-      </pc:sldChg>
-      <pc:sldChg chg="modSp add mod">
-        <pc:chgData name="Karen Yan Ming Leung" userId="5702c81a-7bc1-45f0-9e77-da815cac1d17" providerId="ADAL" clId="{49E13DDA-8E9C-EF4E-A745-6198926422FE}" dt="2022-04-18T00:15:06.543" v="144" actId="20577"/>
-        <pc:sldMkLst>
-          <pc:docMk/>
-          <pc:sldMk cId="1967004324" sldId="396"/>
-        </pc:sldMkLst>
-        <pc:spChg chg="mod">
-          <ac:chgData name="Karen Yan Ming Leung" userId="5702c81a-7bc1-45f0-9e77-da815cac1d17" providerId="ADAL" clId="{49E13DDA-8E9C-EF4E-A745-6198926422FE}" dt="2022-04-18T00:15:06.543" v="144" actId="20577"/>
-          <ac:spMkLst>
-            <pc:docMk/>
-            <pc:sldMk cId="1967004324" sldId="396"/>
-            <ac:spMk id="12" creationId="{78396013-0C5E-8C45-B9AD-277699FF1E38}"/>
-          </ac:spMkLst>
-        </pc:spChg>
-      </pc:sldChg>
-      <pc:sldChg chg="modSp add mod">
-        <pc:chgData name="Karen Yan Ming Leung" userId="5702c81a-7bc1-45f0-9e77-da815cac1d17" providerId="ADAL" clId="{49E13DDA-8E9C-EF4E-A745-6198926422FE}" dt="2022-04-18T00:17:31.478" v="149" actId="12"/>
-        <pc:sldMkLst>
-          <pc:docMk/>
-          <pc:sldMk cId="3700698877" sldId="397"/>
-        </pc:sldMkLst>
-        <pc:spChg chg="mod">
-          <ac:chgData name="Karen Yan Ming Leung" userId="5702c81a-7bc1-45f0-9e77-da815cac1d17" providerId="ADAL" clId="{49E13DDA-8E9C-EF4E-A745-6198926422FE}" dt="2022-04-18T00:17:31.478" v="149" actId="12"/>
-          <ac:spMkLst>
-            <pc:docMk/>
-            <pc:sldMk cId="3700698877" sldId="397"/>
-            <ac:spMk id="12" creationId="{78396013-0C5E-8C45-B9AD-277699FF1E38}"/>
-          </ac:spMkLst>
-        </pc:spChg>
-      </pc:sldChg>
-      <pc:sldChg chg="add">
-        <pc:chgData name="Karen Yan Ming Leung" userId="5702c81a-7bc1-45f0-9e77-da815cac1d17" providerId="ADAL" clId="{49E13DDA-8E9C-EF4E-A745-6198926422FE}" dt="2022-04-17T23:46:56.523" v="22"/>
-        <pc:sldMkLst>
-          <pc:docMk/>
-          <pc:sldMk cId="1530462494" sldId="398"/>
+          <pc:sldMk cId="584587941" sldId="414"/>
         </pc:sldMkLst>
       </pc:sldChg>
-      <pc:sldChg chg="modAnim">
-        <pc:chgData name="Karen Yan Ming Leung" userId="5702c81a-7bc1-45f0-9e77-da815cac1d17" providerId="ADAL" clId="{49E13DDA-8E9C-EF4E-A745-6198926422FE}" dt="2022-04-18T05:49:59.758" v="896"/>
-        <pc:sldMkLst>
-          <pc:docMk/>
-          <pc:sldMk cId="2289386493" sldId="403"/>
-        </pc:sldMkLst>
-      </pc:sldChg>
-      <pc:sldChg chg="addSp delSp modSp mod">
-        <pc:chgData name="Karen Yan Ming Leung" userId="5702c81a-7bc1-45f0-9e77-da815cac1d17" providerId="ADAL" clId="{49E13DDA-8E9C-EF4E-A745-6198926422FE}" dt="2022-04-18T06:20:11.212" v="914" actId="20577"/>
-        <pc:sldMkLst>
-          <pc:docMk/>
-          <pc:sldMk cId="3790199888" sldId="408"/>
-        </pc:sldMkLst>
-        <pc:spChg chg="mod">
-          <ac:chgData name="Karen Yan Ming Leung" userId="5702c81a-7bc1-45f0-9e77-da815cac1d17" providerId="ADAL" clId="{49E13DDA-8E9C-EF4E-A745-6198926422FE}" dt="2022-04-18T06:20:11.212" v="914" actId="20577"/>
-          <ac:spMkLst>
-            <pc:docMk/>
-            <pc:sldMk cId="3790199888" sldId="408"/>
-            <ac:spMk id="3" creationId="{0004A9BC-A134-F34A-A79B-87A8C27F13C4}"/>
-          </ac:spMkLst>
-        </pc:spChg>
-        <pc:spChg chg="add del mod">
-          <ac:chgData name="Karen Yan Ming Leung" userId="5702c81a-7bc1-45f0-9e77-da815cac1d17" providerId="ADAL" clId="{49E13DDA-8E9C-EF4E-A745-6198926422FE}" dt="2022-04-18T06:19:40.367" v="901"/>
-          <ac:spMkLst>
-            <pc:docMk/>
-            <pc:sldMk cId="3790199888" sldId="408"/>
-            <ac:spMk id="4" creationId="{DABE4B75-4DE4-5243-AF44-05C6A1E3F79E}"/>
-          </ac:spMkLst>
-        </pc:spChg>
-      </pc:sldChg>
-      <pc:sldChg chg="modSp mod">
-        <pc:chgData name="Karen Yan Ming Leung" userId="5702c81a-7bc1-45f0-9e77-da815cac1d17" providerId="ADAL" clId="{49E13DDA-8E9C-EF4E-A745-6198926422FE}" dt="2022-04-18T06:43:19.114" v="1211" actId="27636"/>
-        <pc:sldMkLst>
-          <pc:docMk/>
-          <pc:sldMk cId="495761610" sldId="413"/>
-        </pc:sldMkLst>
-        <pc:spChg chg="mod">
-          <ac:chgData name="Karen Yan Ming Leung" userId="5702c81a-7bc1-45f0-9e77-da815cac1d17" providerId="ADAL" clId="{49E13DDA-8E9C-EF4E-A745-6198926422FE}" dt="2022-04-18T06:43:19.114" v="1211" actId="27636"/>
-          <ac:spMkLst>
-            <pc:docMk/>
-            <pc:sldMk cId="495761610" sldId="413"/>
-            <ac:spMk id="3" creationId="{5D5183B3-7C5D-3645-BBCD-2E3FC1B1BBCB}"/>
-          </ac:spMkLst>
-        </pc:spChg>
-      </pc:sldChg>
-      <pc:sldChg chg="modSp mod">
-        <pc:chgData name="Karen Yan Ming Leung" userId="5702c81a-7bc1-45f0-9e77-da815cac1d17" providerId="ADAL" clId="{49E13DDA-8E9C-EF4E-A745-6198926422FE}" dt="2022-04-18T06:44:25.042" v="1236" actId="20577"/>
-        <pc:sldMkLst>
-          <pc:docMk/>
-          <pc:sldMk cId="188365805" sldId="415"/>
-        </pc:sldMkLst>
-        <pc:spChg chg="mod">
-          <ac:chgData name="Karen Yan Ming Leung" userId="5702c81a-7bc1-45f0-9e77-da815cac1d17" providerId="ADAL" clId="{49E13DDA-8E9C-EF4E-A745-6198926422FE}" dt="2022-04-18T06:44:25.042" v="1236" actId="20577"/>
-          <ac:spMkLst>
-            <pc:docMk/>
-            <pc:sldMk cId="188365805" sldId="415"/>
-            <ac:spMk id="3" creationId="{8E7F06BD-E407-6C48-A91B-2306D19A9641}"/>
-          </ac:spMkLst>
-        </pc:spChg>
-      </pc:sldChg>
-      <pc:sldChg chg="modSp mod">
-        <pc:chgData name="Karen Yan Ming Leung" userId="5702c81a-7bc1-45f0-9e77-da815cac1d17" providerId="ADAL" clId="{49E13DDA-8E9C-EF4E-A745-6198926422FE}" dt="2022-04-18T06:37:28.842" v="1054" actId="20577"/>
-        <pc:sldMkLst>
-          <pc:docMk/>
-          <pc:sldMk cId="2630251705" sldId="419"/>
-        </pc:sldMkLst>
-        <pc:spChg chg="mod">
-          <ac:chgData name="Karen Yan Ming Leung" userId="5702c81a-7bc1-45f0-9e77-da815cac1d17" providerId="ADAL" clId="{49E13DDA-8E9C-EF4E-A745-6198926422FE}" dt="2022-04-18T06:24:51.801" v="981" actId="20577"/>
-          <ac:spMkLst>
-            <pc:docMk/>
-            <pc:sldMk cId="2630251705" sldId="419"/>
-            <ac:spMk id="2" creationId="{B61FEB43-38E2-6A44-8D6C-CF02AB6C210E}"/>
-          </ac:spMkLst>
-        </pc:spChg>
-        <pc:spChg chg="mod">
-          <ac:chgData name="Karen Yan Ming Leung" userId="5702c81a-7bc1-45f0-9e77-da815cac1d17" providerId="ADAL" clId="{49E13DDA-8E9C-EF4E-A745-6198926422FE}" dt="2022-04-18T06:37:28.842" v="1054" actId="20577"/>
-          <ac:spMkLst>
-            <pc:docMk/>
-            <pc:sldMk cId="2630251705" sldId="419"/>
-            <ac:spMk id="3" creationId="{9065FEE0-F04C-8E4D-A2E1-FA2CDDD31C9C}"/>
-          </ac:spMkLst>
-        </pc:spChg>
-      </pc:sldChg>
-      <pc:sldChg chg="modSp mod">
-        <pc:chgData name="Karen Yan Ming Leung" userId="5702c81a-7bc1-45f0-9e77-da815cac1d17" providerId="ADAL" clId="{49E13DDA-8E9C-EF4E-A745-6198926422FE}" dt="2022-04-18T06:22:58.036" v="944"/>
-        <pc:sldMkLst>
-          <pc:docMk/>
-          <pc:sldMk cId="3290296173" sldId="441"/>
-        </pc:sldMkLst>
-        <pc:spChg chg="mod">
-          <ac:chgData name="Karen Yan Ming Leung" userId="5702c81a-7bc1-45f0-9e77-da815cac1d17" providerId="ADAL" clId="{49E13DDA-8E9C-EF4E-A745-6198926422FE}" dt="2022-04-18T06:22:58.036" v="944"/>
-          <ac:spMkLst>
-            <pc:docMk/>
-            <pc:sldMk cId="3290296173" sldId="441"/>
-            <ac:spMk id="3" creationId="{B64CBBD7-6B2F-1A4A-A41F-D33D05AFE879}"/>
-          </ac:spMkLst>
-        </pc:spChg>
-      </pc:sldChg>
-      <pc:sldChg chg="modSp mod">
-        <pc:chgData name="Karen Yan Ming Leung" userId="5702c81a-7bc1-45f0-9e77-da815cac1d17" providerId="ADAL" clId="{49E13DDA-8E9C-EF4E-A745-6198926422FE}" dt="2022-04-18T04:45:04.910" v="650"/>
-        <pc:sldMkLst>
-          <pc:docMk/>
-          <pc:sldMk cId="3384035532" sldId="442"/>
-        </pc:sldMkLst>
-        <pc:spChg chg="mod">
-          <ac:chgData name="Karen Yan Ming Leung" userId="5702c81a-7bc1-45f0-9e77-da815cac1d17" providerId="ADAL" clId="{49E13DDA-8E9C-EF4E-A745-6198926422FE}" dt="2022-04-18T04:28:40.851" v="517" actId="20577"/>
-          <ac:spMkLst>
-            <pc:docMk/>
-            <pc:sldMk cId="3384035532" sldId="442"/>
-            <ac:spMk id="2" creationId="{F62EE7F4-FF5E-4E47-91F8-63F7D2C1CB1C}"/>
-          </ac:spMkLst>
-        </pc:spChg>
-        <pc:spChg chg="mod">
-          <ac:chgData name="Karen Yan Ming Leung" userId="5702c81a-7bc1-45f0-9e77-da815cac1d17" providerId="ADAL" clId="{49E13DDA-8E9C-EF4E-A745-6198926422FE}" dt="2022-04-18T04:45:04.910" v="650"/>
-          <ac:spMkLst>
-            <pc:docMk/>
-            <pc:sldMk cId="3384035532" sldId="442"/>
-            <ac:spMk id="3" creationId="{4CBE2445-7EE9-1F47-85D5-DFC6A1ACB99A}"/>
-          </ac:spMkLst>
-        </pc:spChg>
-      </pc:sldChg>
-      <pc:sldChg chg="addSp delSp modSp mod modNotesTx">
-        <pc:chgData name="Karen Yan Ming Leung" userId="5702c81a-7bc1-45f0-9e77-da815cac1d17" providerId="ADAL" clId="{49E13DDA-8E9C-EF4E-A745-6198926422FE}" dt="2022-04-18T05:46:45.466" v="695" actId="1036"/>
+      <pc:sldChg chg="modNotesTx">
+        <pc:chgData name="Daniele Gammelli" userId="292b8a31-f1ba-4b4c-b196-a231dc095d13" providerId="ADAL" clId="{6E670754-AB6A-5789-AA0A-6F6FD9CE3EEA}" dt="2026-08-13T21:16:24.742" v="0" actId="20577"/>
         <pc:sldMkLst>
           <pc:docMk/>
           <pc:sldMk cId="3931490999" sldId="443"/>
         </pc:sldMkLst>
-        <pc:spChg chg="mod">
-          <ac:chgData name="Karen Yan Ming Leung" userId="5702c81a-7bc1-45f0-9e77-da815cac1d17" providerId="ADAL" clId="{49E13DDA-8E9C-EF4E-A745-6198926422FE}" dt="2022-04-18T05:46:44.085" v="694" actId="20577"/>
-          <ac:spMkLst>
-            <pc:docMk/>
-            <pc:sldMk cId="3931490999" sldId="443"/>
-            <ac:spMk id="5" creationId="{E0961E8E-0C43-CD41-A238-AB339FB54AD2}"/>
-          </ac:spMkLst>
-        </pc:spChg>
-        <pc:picChg chg="add mod">
-          <ac:chgData name="Karen Yan Ming Leung" userId="5702c81a-7bc1-45f0-9e77-da815cac1d17" providerId="ADAL" clId="{49E13DDA-8E9C-EF4E-A745-6198926422FE}" dt="2022-04-18T05:46:45.466" v="695" actId="1036"/>
-          <ac:picMkLst>
-            <pc:docMk/>
-            <pc:sldMk cId="3931490999" sldId="443"/>
-            <ac:picMk id="3" creationId="{67DC2F92-FEF0-734C-8482-F8C6BE053404}"/>
-          </ac:picMkLst>
-        </pc:picChg>
-        <pc:picChg chg="add del mod">
-          <ac:chgData name="Karen Yan Ming Leung" userId="5702c81a-7bc1-45f0-9e77-da815cac1d17" providerId="ADAL" clId="{49E13DDA-8E9C-EF4E-A745-6198926422FE}" dt="2022-04-18T04:37:12.912" v="599" actId="478"/>
-          <ac:picMkLst>
-            <pc:docMk/>
-            <pc:sldMk cId="3931490999" sldId="443"/>
-            <ac:picMk id="4" creationId="{AE1F80AF-9355-FD45-9391-8193677ADB4C}"/>
-          </ac:picMkLst>
-        </pc:picChg>
-        <pc:picChg chg="add mod">
-          <ac:chgData name="Karen Yan Ming Leung" userId="5702c81a-7bc1-45f0-9e77-da815cac1d17" providerId="ADAL" clId="{49E13DDA-8E9C-EF4E-A745-6198926422FE}" dt="2022-04-18T05:46:20.477" v="660" actId="1076"/>
-          <ac:picMkLst>
-            <pc:docMk/>
-            <pc:sldMk cId="3931490999" sldId="443"/>
-            <ac:picMk id="6" creationId="{F73C6B96-DE29-D448-BF70-8E22BFCC95F1}"/>
-          </ac:picMkLst>
-        </pc:picChg>
-        <pc:picChg chg="add del mod">
-          <ac:chgData name="Karen Yan Ming Leung" userId="5702c81a-7bc1-45f0-9e77-da815cac1d17" providerId="ADAL" clId="{49E13DDA-8E9C-EF4E-A745-6198926422FE}" dt="2022-04-18T04:31:45.718" v="589" actId="478"/>
-          <ac:picMkLst>
-            <pc:docMk/>
-            <pc:sldMk cId="3931490999" sldId="443"/>
-            <ac:picMk id="7" creationId="{BD6DA1A1-88E0-E547-8851-284BB712F5B2}"/>
-          </ac:picMkLst>
-        </pc:picChg>
       </pc:sldChg>
-      <pc:sldChg chg="del">
-        <pc:chgData name="Karen Yan Ming Leung" userId="5702c81a-7bc1-45f0-9e77-da815cac1d17" providerId="ADAL" clId="{49E13DDA-8E9C-EF4E-A745-6198926422FE}" dt="2022-04-18T01:48:49.649" v="192" actId="2696"/>
+      <pc:sldChg chg="modNotesTx">
+        <pc:chgData name="Daniele Gammelli" userId="292b8a31-f1ba-4b4c-b196-a231dc095d13" providerId="ADAL" clId="{6E670754-AB6A-5789-AA0A-6F6FD9CE3EEA}" dt="2026-08-13T21:16:35.379" v="4" actId="20577"/>
         <pc:sldMkLst>
           <pc:docMk/>
-          <pc:sldMk cId="2913496960" sldId="444"/>
+          <pc:sldMk cId="3171233340" sldId="445"/>
         </pc:sldMkLst>
       </pc:sldChg>
-      <pc:sldChg chg="modSp add mod">
-        <pc:chgData name="Karen Yan Ming Leung" userId="5702c81a-7bc1-45f0-9e77-da815cac1d17" providerId="ADAL" clId="{49E13DDA-8E9C-EF4E-A745-6198926422FE}" dt="2022-04-18T00:02:32.224" v="69" actId="20577"/>
-        <pc:sldMkLst>
-          <pc:docMk/>
-          <pc:sldMk cId="1258241937" sldId="445"/>
-        </pc:sldMkLst>
-        <pc:spChg chg="mod">
-          <ac:chgData name="Karen Yan Ming Leung" userId="5702c81a-7bc1-45f0-9e77-da815cac1d17" providerId="ADAL" clId="{49E13DDA-8E9C-EF4E-A745-6198926422FE}" dt="2022-04-18T00:02:32.224" v="69" actId="20577"/>
-          <ac:spMkLst>
-            <pc:docMk/>
-            <pc:sldMk cId="1258241937" sldId="445"/>
-            <ac:spMk id="3" creationId="{539179D1-B249-9242-A6A6-532E50F4747C}"/>
-          </ac:spMkLst>
-        </pc:spChg>
-      </pc:sldChg>
-      <pc:sldChg chg="add">
-        <pc:chgData name="Karen Yan Ming Leung" userId="5702c81a-7bc1-45f0-9e77-da815cac1d17" providerId="ADAL" clId="{49E13DDA-8E9C-EF4E-A745-6198926422FE}" dt="2022-04-17T23:46:56.523" v="22"/>
-        <pc:sldMkLst>
-          <pc:docMk/>
-          <pc:sldMk cId="74076246" sldId="446"/>
-        </pc:sldMkLst>
-      </pc:sldChg>
-      <pc:sldChg chg="modSp add mod">
-        <pc:chgData name="Karen Yan Ming Leung" userId="5702c81a-7bc1-45f0-9e77-da815cac1d17" providerId="ADAL" clId="{49E13DDA-8E9C-EF4E-A745-6198926422FE}" dt="2022-04-18T00:12:47.620" v="104" actId="20577"/>
-        <pc:sldMkLst>
-          <pc:docMk/>
-          <pc:sldMk cId="4019876186" sldId="447"/>
-        </pc:sldMkLst>
-        <pc:spChg chg="mod">
-          <ac:chgData name="Karen Yan Ming Leung" userId="5702c81a-7bc1-45f0-9e77-da815cac1d17" providerId="ADAL" clId="{49E13DDA-8E9C-EF4E-A745-6198926422FE}" dt="2022-04-18T00:12:47.620" v="104" actId="20577"/>
-          <ac:spMkLst>
-            <pc:docMk/>
-            <pc:sldMk cId="4019876186" sldId="447"/>
-            <ac:spMk id="2" creationId="{F588C0BC-7DD7-AF48-9555-6F98FFEE85C8}"/>
-          </ac:spMkLst>
-        </pc:spChg>
-      </pc:sldChg>
-      <pc:sldChg chg="modSp add">
-        <pc:chgData name="Karen Yan Ming Leung" userId="5702c81a-7bc1-45f0-9e77-da815cac1d17" providerId="ADAL" clId="{49E13DDA-8E9C-EF4E-A745-6198926422FE}" dt="2022-04-18T00:12:53.577" v="105"/>
-        <pc:sldMkLst>
-          <pc:docMk/>
-          <pc:sldMk cId="260925825" sldId="448"/>
-        </pc:sldMkLst>
-        <pc:spChg chg="mod">
-          <ac:chgData name="Karen Yan Ming Leung" userId="5702c81a-7bc1-45f0-9e77-da815cac1d17" providerId="ADAL" clId="{49E13DDA-8E9C-EF4E-A745-6198926422FE}" dt="2022-04-18T00:12:53.577" v="105"/>
-          <ac:spMkLst>
-            <pc:docMk/>
-            <pc:sldMk cId="260925825" sldId="448"/>
-            <ac:spMk id="2" creationId="{F588C0BC-7DD7-AF48-9555-6F98FFEE85C8}"/>
-          </ac:spMkLst>
-        </pc:spChg>
-      </pc:sldChg>
-      <pc:sldChg chg="modSp add">
-        <pc:chgData name="Karen Yan Ming Leung" userId="5702c81a-7bc1-45f0-9e77-da815cac1d17" providerId="ADAL" clId="{49E13DDA-8E9C-EF4E-A745-6198926422FE}" dt="2022-04-18T00:12:57.275" v="106"/>
-        <pc:sldMkLst>
-          <pc:docMk/>
-          <pc:sldMk cId="3455344319" sldId="449"/>
-        </pc:sldMkLst>
-        <pc:spChg chg="mod">
-          <ac:chgData name="Karen Yan Ming Leung" userId="5702c81a-7bc1-45f0-9e77-da815cac1d17" providerId="ADAL" clId="{49E13DDA-8E9C-EF4E-A745-6198926422FE}" dt="2022-04-18T00:12:57.275" v="106"/>
-          <ac:spMkLst>
-            <pc:docMk/>
-            <pc:sldMk cId="3455344319" sldId="449"/>
-            <ac:spMk id="2" creationId="{F588C0BC-7DD7-AF48-9555-6F98FFEE85C8}"/>
-          </ac:spMkLst>
-        </pc:spChg>
-      </pc:sldChg>
-      <pc:sldChg chg="modSp add mod">
-        <pc:chgData name="Karen Yan Ming Leung" userId="5702c81a-7bc1-45f0-9e77-da815cac1d17" providerId="ADAL" clId="{49E13DDA-8E9C-EF4E-A745-6198926422FE}" dt="2022-04-18T00:14:13.838" v="125" actId="20577"/>
-        <pc:sldMkLst>
-          <pc:docMk/>
-          <pc:sldMk cId="477968170" sldId="450"/>
-        </pc:sldMkLst>
-        <pc:spChg chg="mod">
-          <ac:chgData name="Karen Yan Ming Leung" userId="5702c81a-7bc1-45f0-9e77-da815cac1d17" providerId="ADAL" clId="{49E13DDA-8E9C-EF4E-A745-6198926422FE}" dt="2022-04-18T00:14:13.838" v="125" actId="20577"/>
-          <ac:spMkLst>
-            <pc:docMk/>
-            <pc:sldMk cId="477968170" sldId="450"/>
-            <ac:spMk id="12" creationId="{78396013-0C5E-8C45-B9AD-277699FF1E38}"/>
-          </ac:spMkLst>
-        </pc:spChg>
-      </pc:sldChg>
-      <pc:sldChg chg="add modAnim">
-        <pc:chgData name="Karen Yan Ming Leung" userId="5702c81a-7bc1-45f0-9e77-da815cac1d17" providerId="ADAL" clId="{49E13DDA-8E9C-EF4E-A745-6198926422FE}" dt="2022-04-18T00:18:17.891" v="151"/>
-        <pc:sldMkLst>
-          <pc:docMk/>
-          <pc:sldMk cId="2867337344" sldId="451"/>
-        </pc:sldMkLst>
-      </pc:sldChg>
-      <pc:sldChg chg="addSp modSp add mod">
-        <pc:chgData name="Karen Yan Ming Leung" userId="5702c81a-7bc1-45f0-9e77-da815cac1d17" providerId="ADAL" clId="{49E13DDA-8E9C-EF4E-A745-6198926422FE}" dt="2022-04-18T02:18:07.508" v="450" actId="1076"/>
-        <pc:sldMkLst>
-          <pc:docMk/>
-          <pc:sldMk cId="1642799855" sldId="452"/>
-        </pc:sldMkLst>
-        <pc:spChg chg="add mod">
-          <ac:chgData name="Karen Yan Ming Leung" userId="5702c81a-7bc1-45f0-9e77-da815cac1d17" providerId="ADAL" clId="{49E13DDA-8E9C-EF4E-A745-6198926422FE}" dt="2022-04-18T02:18:07.508" v="450" actId="1076"/>
-          <ac:spMkLst>
-            <pc:docMk/>
-            <pc:sldMk cId="1642799855" sldId="452"/>
-            <ac:spMk id="4" creationId="{B9938763-2F61-1D4A-9756-F9A457F127E4}"/>
-          </ac:spMkLst>
-        </pc:spChg>
-      </pc:sldChg>
-      <pc:sldChg chg="addSp delSp modSp add mod">
-        <pc:chgData name="Karen Yan Ming Leung" userId="5702c81a-7bc1-45f0-9e77-da815cac1d17" providerId="ADAL" clId="{49E13DDA-8E9C-EF4E-A745-6198926422FE}" dt="2022-04-18T05:49:13.511" v="895" actId="20577"/>
+      <pc:sldChg chg="modNotesTx">
+        <pc:chgData name="Daniele Gammelli" userId="292b8a31-f1ba-4b4c-b196-a231dc095d13" providerId="ADAL" clId="{6E670754-AB6A-5789-AA0A-6F6FD9CE3EEA}" dt="2026-08-13T21:16:27.156" v="1" actId="20577"/>
         <pc:sldMkLst>
           <pc:docMk/>
           <pc:sldMk cId="1761670076" sldId="453"/>
         </pc:sldMkLst>
-        <pc:spChg chg="mod">
-          <ac:chgData name="Karen Yan Ming Leung" userId="5702c81a-7bc1-45f0-9e77-da815cac1d17" providerId="ADAL" clId="{49E13DDA-8E9C-EF4E-A745-6198926422FE}" dt="2022-04-18T05:49:13.511" v="895" actId="20577"/>
-          <ac:spMkLst>
-            <pc:docMk/>
-            <pc:sldMk cId="1761670076" sldId="453"/>
-            <ac:spMk id="5" creationId="{E0961E8E-0C43-CD41-A238-AB339FB54AD2}"/>
-          </ac:spMkLst>
-        </pc:spChg>
-        <pc:spChg chg="add del mod">
-          <ac:chgData name="Karen Yan Ming Leung" userId="5702c81a-7bc1-45f0-9e77-da815cac1d17" providerId="ADAL" clId="{49E13DDA-8E9C-EF4E-A745-6198926422FE}" dt="2022-04-18T05:46:57.917" v="698"/>
-          <ac:spMkLst>
-            <pc:docMk/>
-            <pc:sldMk cId="1761670076" sldId="453"/>
-            <ac:spMk id="11" creationId="{25DD975F-3268-3948-8B88-F76F1A250F91}"/>
-          </ac:spMkLst>
-        </pc:spChg>
       </pc:sldChg>
-    </pc:docChg>
-  </pc:docChgLst>
-  <pc:docChgLst>
-    <pc:chgData name="Edward Fu Schmerling" userId="c8b75dde-c097-4599-bb13-81e931e3f9a3" providerId="ADAL" clId="{AD343518-F06D-4F22-B6F8-7F5E447018B4}"/>
-    <pc:docChg chg="undo custSel modSld">
-      <pc:chgData name="Edward Fu Schmerling" userId="c8b75dde-c097-4599-bb13-81e931e3f9a3" providerId="ADAL" clId="{AD343518-F06D-4F22-B6F8-7F5E447018B4}" dt="2022-04-20T09:37:02.219" v="261" actId="21"/>
-      <pc:docMkLst>
-        <pc:docMk/>
-      </pc:docMkLst>
-      <pc:sldChg chg="modSp mod">
-        <pc:chgData name="Edward Fu Schmerling" userId="c8b75dde-c097-4599-bb13-81e931e3f9a3" providerId="ADAL" clId="{AD343518-F06D-4F22-B6F8-7F5E447018B4}" dt="2022-04-18T07:07:48.744" v="2" actId="27636"/>
+      <pc:sldChg chg="modNotesTx">
+        <pc:chgData name="Daniele Gammelli" userId="292b8a31-f1ba-4b4c-b196-a231dc095d13" providerId="ADAL" clId="{6E670754-AB6A-5789-AA0A-6F6FD9CE3EEA}" dt="2026-08-13T21:16:29.289" v="2" actId="20577"/>
         <pc:sldMkLst>
           <pc:docMk/>
-          <pc:sldMk cId="259604979" sldId="388"/>
+          <pc:sldMk cId="2267261963" sldId="549"/>
         </pc:sldMkLst>
-        <pc:spChg chg="mod">
-          <ac:chgData name="Edward Fu Schmerling" userId="c8b75dde-c097-4599-bb13-81e931e3f9a3" providerId="ADAL" clId="{AD343518-F06D-4F22-B6F8-7F5E447018B4}" dt="2022-04-18T07:07:48.744" v="2" actId="27636"/>
-          <ac:spMkLst>
-            <pc:docMk/>
-            <pc:sldMk cId="259604979" sldId="388"/>
-            <ac:spMk id="3" creationId="{D88507FF-DF20-5F4B-9237-9A0C92B04815}"/>
-          </ac:spMkLst>
-        </pc:spChg>
-      </pc:sldChg>
-      <pc:sldChg chg="modSp mod">
-        <pc:chgData name="Edward Fu Schmerling" userId="c8b75dde-c097-4599-bb13-81e931e3f9a3" providerId="ADAL" clId="{AD343518-F06D-4F22-B6F8-7F5E447018B4}" dt="2022-04-18T07:07:48.911" v="3" actId="27636"/>
-        <pc:sldMkLst>
-          <pc:docMk/>
-          <pc:sldMk cId="2713135135" sldId="393"/>
-        </pc:sldMkLst>
-        <pc:spChg chg="mod">
-          <ac:chgData name="Edward Fu Schmerling" userId="c8b75dde-c097-4599-bb13-81e931e3f9a3" providerId="ADAL" clId="{AD343518-F06D-4F22-B6F8-7F5E447018B4}" dt="2022-04-18T07:07:48.911" v="3" actId="27636"/>
-          <ac:spMkLst>
-            <pc:docMk/>
-            <pc:sldMk cId="2713135135" sldId="393"/>
-            <ac:spMk id="3" creationId="{FBD3295C-9725-3741-A55F-828934C217B7}"/>
-          </ac:spMkLst>
-        </pc:spChg>
-      </pc:sldChg>
-      <pc:sldChg chg="addSp delSp modSp mod">
-        <pc:chgData name="Edward Fu Schmerling" userId="c8b75dde-c097-4599-bb13-81e931e3f9a3" providerId="ADAL" clId="{AD343518-F06D-4F22-B6F8-7F5E447018B4}" dt="2022-04-20T09:37:02.219" v="261" actId="21"/>
-        <pc:sldMkLst>
-          <pc:docMk/>
-          <pc:sldMk cId="3651528683" sldId="399"/>
-        </pc:sldMkLst>
-        <pc:spChg chg="del mod">
-          <ac:chgData name="Edward Fu Schmerling" userId="c8b75dde-c097-4599-bb13-81e931e3f9a3" providerId="ADAL" clId="{AD343518-F06D-4F22-B6F8-7F5E447018B4}" dt="2022-04-18T07:29:01.974" v="8" actId="478"/>
-          <ac:spMkLst>
-            <pc:docMk/>
-            <pc:sldMk cId="3651528683" sldId="399"/>
-            <ac:spMk id="3" creationId="{041834AB-4990-1841-A099-C9C9563E417D}"/>
-          </ac:spMkLst>
-        </pc:spChg>
-        <pc:spChg chg="add mod">
-          <ac:chgData name="Edward Fu Schmerling" userId="c8b75dde-c097-4599-bb13-81e931e3f9a3" providerId="ADAL" clId="{AD343518-F06D-4F22-B6F8-7F5E447018B4}" dt="2022-04-20T09:37:02.219" v="261" actId="21"/>
-          <ac:spMkLst>
-            <pc:docMk/>
-            <pc:sldMk cId="3651528683" sldId="399"/>
-            <ac:spMk id="9" creationId="{D4A5E215-9088-48C4-AEBD-0DF18FDE67DE}"/>
-          </ac:spMkLst>
-        </pc:spChg>
-      </pc:sldChg>
-      <pc:sldChg chg="modSp mod">
-        <pc:chgData name="Edward Fu Schmerling" userId="c8b75dde-c097-4599-bb13-81e931e3f9a3" providerId="ADAL" clId="{AD343518-F06D-4F22-B6F8-7F5E447018B4}" dt="2022-04-20T07:32:10.306" v="77" actId="27636"/>
-        <pc:sldMkLst>
-          <pc:docMk/>
-          <pc:sldMk cId="3790199888" sldId="408"/>
-        </pc:sldMkLst>
-        <pc:spChg chg="mod">
-          <ac:chgData name="Edward Fu Schmerling" userId="c8b75dde-c097-4599-bb13-81e931e3f9a3" providerId="ADAL" clId="{AD343518-F06D-4F22-B6F8-7F5E447018B4}" dt="2022-04-20T07:32:10.306" v="77" actId="27636"/>
-          <ac:spMkLst>
-            <pc:docMk/>
-            <pc:sldMk cId="3790199888" sldId="408"/>
-            <ac:spMk id="3" creationId="{0004A9BC-A134-F34A-A79B-87A8C27F13C4}"/>
-          </ac:spMkLst>
-        </pc:spChg>
-      </pc:sldChg>
-      <pc:sldChg chg="modSp mod">
-        <pc:chgData name="Edward Fu Schmerling" userId="c8b75dde-c097-4599-bb13-81e931e3f9a3" providerId="ADAL" clId="{AD343518-F06D-4F22-B6F8-7F5E447018B4}" dt="2022-04-20T07:46:51.256" v="249" actId="14100"/>
-        <pc:sldMkLst>
-          <pc:docMk/>
-          <pc:sldMk cId="2630251705" sldId="419"/>
-        </pc:sldMkLst>
-        <pc:spChg chg="mod">
-          <ac:chgData name="Edward Fu Schmerling" userId="c8b75dde-c097-4599-bb13-81e931e3f9a3" providerId="ADAL" clId="{AD343518-F06D-4F22-B6F8-7F5E447018B4}" dt="2022-04-20T07:46:26.099" v="238" actId="27636"/>
-          <ac:spMkLst>
-            <pc:docMk/>
-            <pc:sldMk cId="2630251705" sldId="419"/>
-            <ac:spMk id="3" creationId="{9065FEE0-F04C-8E4D-A2E1-FA2CDDD31C9C}"/>
-          </ac:spMkLst>
-        </pc:spChg>
-        <pc:spChg chg="mod">
-          <ac:chgData name="Edward Fu Schmerling" userId="c8b75dde-c097-4599-bb13-81e931e3f9a3" providerId="ADAL" clId="{AD343518-F06D-4F22-B6F8-7F5E447018B4}" dt="2022-04-20T07:46:51.256" v="249" actId="14100"/>
-          <ac:spMkLst>
-            <pc:docMk/>
-            <pc:sldMk cId="2630251705" sldId="419"/>
-            <ac:spMk id="8" creationId="{B3860B6D-9BB9-0343-B60C-407BAE4A0868}"/>
-          </ac:spMkLst>
-        </pc:spChg>
-      </pc:sldChg>
-      <pc:sldChg chg="modSp">
-        <pc:chgData name="Edward Fu Schmerling" userId="c8b75dde-c097-4599-bb13-81e931e3f9a3" providerId="ADAL" clId="{AD343518-F06D-4F22-B6F8-7F5E447018B4}" dt="2022-04-20T07:44:48.335" v="102" actId="20577"/>
-        <pc:sldMkLst>
-          <pc:docMk/>
-          <pc:sldMk cId="3290296173" sldId="441"/>
-        </pc:sldMkLst>
-        <pc:spChg chg="mod">
-          <ac:chgData name="Edward Fu Schmerling" userId="c8b75dde-c097-4599-bb13-81e931e3f9a3" providerId="ADAL" clId="{AD343518-F06D-4F22-B6F8-7F5E447018B4}" dt="2022-04-20T07:44:48.335" v="102" actId="20577"/>
-          <ac:spMkLst>
-            <pc:docMk/>
-            <pc:sldMk cId="3290296173" sldId="441"/>
-            <ac:spMk id="3" creationId="{B64CBBD7-6B2F-1A4A-A41F-D33D05AFE879}"/>
-          </ac:spMkLst>
-        </pc:spChg>
-      </pc:sldChg>
-      <pc:sldChg chg="modSp mod">
-        <pc:chgData name="Edward Fu Schmerling" userId="c8b75dde-c097-4599-bb13-81e931e3f9a3" providerId="ADAL" clId="{AD343518-F06D-4F22-B6F8-7F5E447018B4}" dt="2022-04-18T07:07:49.125" v="5" actId="27636"/>
-        <pc:sldMkLst>
-          <pc:docMk/>
-          <pc:sldMk cId="3384035532" sldId="442"/>
-        </pc:sldMkLst>
-        <pc:spChg chg="mod">
-          <ac:chgData name="Edward Fu Schmerling" userId="c8b75dde-c097-4599-bb13-81e931e3f9a3" providerId="ADAL" clId="{AD343518-F06D-4F22-B6F8-7F5E447018B4}" dt="2022-04-18T07:07:49.125" v="5" actId="27636"/>
-          <ac:spMkLst>
-            <pc:docMk/>
-            <pc:sldMk cId="3384035532" sldId="442"/>
-            <ac:spMk id="3" creationId="{4CBE2445-7EE9-1F47-85D5-DFC6A1ACB99A}"/>
-          </ac:spMkLst>
-        </pc:spChg>
-      </pc:sldChg>
-      <pc:sldChg chg="modSp mod">
-        <pc:chgData name="Edward Fu Schmerling" userId="c8b75dde-c097-4599-bb13-81e931e3f9a3" providerId="ADAL" clId="{AD343518-F06D-4F22-B6F8-7F5E447018B4}" dt="2022-04-18T07:07:48.988" v="4" actId="27636"/>
-        <pc:sldMkLst>
-          <pc:docMk/>
-          <pc:sldMk cId="1642799855" sldId="452"/>
-        </pc:sldMkLst>
-        <pc:spChg chg="mod">
-          <ac:chgData name="Edward Fu Schmerling" userId="c8b75dde-c097-4599-bb13-81e931e3f9a3" providerId="ADAL" clId="{AD343518-F06D-4F22-B6F8-7F5E447018B4}" dt="2022-04-18T07:07:48.988" v="4" actId="27636"/>
-          <ac:spMkLst>
-            <pc:docMk/>
-            <pc:sldMk cId="1642799855" sldId="452"/>
-            <ac:spMk id="3" creationId="{FBD3295C-9725-3741-A55F-828934C217B7}"/>
-          </ac:spMkLst>
-        </pc:spChg>
       </pc:sldChg>
     </pc:docChg>
   </pc:docChgLst>
@@ -910,7 +308,7 @@
           <a:p>
             <a:fld id="{EBD6F028-2067-3740-AA48-A91E93570B1D}" type="datetimeFigureOut">
               <a:rPr lang="en-US" smtClean="0"/>
-              <a:t>4/26/26</a:t>
+              <a:t>8/13/26</a:t>
             </a:fld>
             <a:endParaRPr lang="en-US"/>
           </a:p>
@@ -1290,5017 +688,25 @@
         </p:nvSpPr>
         <p:spPr/>
       </p:sp>
-      <mc:AlternateContent xmlns:mc="http://schemas.openxmlformats.org/markup-compatibility/2006">
-        <mc:Choice xmlns:a14="http://schemas.microsoft.com/office/drawing/2010/main" Requires="a14">
-          <p:sp>
-            <p:nvSpPr>
-              <p:cNvPr id="3" name="Notes Placeholder 2"/>
-              <p:cNvSpPr>
-                <a:spLocks noGrp="1"/>
-              </p:cNvSpPr>
-              <p:nvPr>
-                <p:ph type="body" idx="1"/>
-              </p:nvPr>
-            </p:nvSpPr>
-            <p:spPr/>
-            <p:txBody>
-              <a:bodyPr/>
-              <a:lstStyle/>
-              <a:p>
-                <a:pPr algn="l"/>
-                <a:r>
-                  <a:rPr lang="en-US" dirty="0">
-                    <a:effectLst/>
-                  </a:rPr>
-                  <a:t>E⁡[𝜀^𝑇</a:t>
-                </a:r>
-                <a:r>
-                  <a:rPr lang="el-GR" dirty="0">
-                    <a:effectLst/>
-                  </a:rPr>
-                  <a:t>Λ𝜀]=</a:t>
-                </a:r>
-                <a:r>
-                  <a:rPr lang="en-US" dirty="0">
-                    <a:effectLst/>
-                  </a:rPr>
-                  <a:t>tr[</a:t>
-                </a:r>
-                <a:r>
-                  <a:rPr lang="el-GR" dirty="0">
-                    <a:effectLst/>
-                  </a:rPr>
-                  <a:t>ΛΣ]</a:t>
-                </a:r>
-                <a:r>
-                  <a:rPr lang="en-US" dirty="0">
-                    <a:effectLst/>
-                  </a:rPr>
-                  <a:t> </a:t>
-                </a:r>
-                <a:r>
-                  <a:rPr lang="el-GR" dirty="0">
-                    <a:effectLst/>
-                  </a:rPr>
-                  <a:t>+</a:t>
-                </a:r>
-                <a:r>
-                  <a:rPr lang="en-US" dirty="0">
-                    <a:effectLst/>
-                  </a:rPr>
-                  <a:t> </a:t>
-                </a:r>
-                <a:r>
-                  <a:rPr lang="el-GR" dirty="0">
-                    <a:effectLst/>
-                  </a:rPr>
-                  <a:t>𝜇𝑇Λ𝜇</a:t>
-                </a:r>
-                <a:r>
-                  <a:rPr lang="en-US" dirty="0">
-                    <a:effectLst/>
-                  </a:rPr>
-                  <a:t> </a:t>
-                </a:r>
-                <a:r>
-                  <a:rPr lang="en-US" b="0" i="0" dirty="0">
-                    <a:solidFill>
-                      <a:srgbClr val="202122"/>
-                    </a:solidFill>
-                    <a:effectLst/>
-                    <a:highlight>
-                      <a:srgbClr val="FFFFFF"/>
-                    </a:highlight>
-                    <a:latin typeface="Arial" panose="020B0604020202020204" pitchFamily="34" charset="0"/>
-                  </a:rPr>
-                  <a:t>where 𝜇 and </a:t>
-                </a:r>
-                <a:r>
-                  <a:rPr lang="el-GR" b="0" i="0" dirty="0">
-                    <a:solidFill>
-                      <a:srgbClr val="202122"/>
-                    </a:solidFill>
-                    <a:effectLst/>
-                    <a:highlight>
-                      <a:srgbClr val="FFFFFF"/>
-                    </a:highlight>
-                    <a:latin typeface="Arial" panose="020B0604020202020204" pitchFamily="34" charset="0"/>
-                  </a:rPr>
-                  <a:t>Σ </a:t>
-                </a:r>
-                <a:r>
-                  <a:rPr lang="en-US" b="0" i="0" dirty="0">
-                    <a:solidFill>
-                      <a:srgbClr val="202122"/>
-                    </a:solidFill>
-                    <a:effectLst/>
-                    <a:highlight>
-                      <a:srgbClr val="FFFFFF"/>
-                    </a:highlight>
-                    <a:latin typeface="Arial" panose="020B0604020202020204" pitchFamily="34" charset="0"/>
-                  </a:rPr>
-                  <a:t>are the </a:t>
-                </a:r>
-                <a:r>
-                  <a:rPr lang="en-US" b="0" i="0" u="none" strike="noStrike" dirty="0">
-                    <a:solidFill>
-                      <a:srgbClr val="3366CC"/>
-                    </a:solidFill>
-                    <a:effectLst/>
-                    <a:highlight>
-                      <a:srgbClr val="FFFFFF"/>
-                    </a:highlight>
-                    <a:latin typeface="Arial" panose="020B0604020202020204" pitchFamily="34" charset="0"/>
-                    <a:hlinkClick r:id="rId3" tooltip="Expected value"/>
-                  </a:rPr>
-                  <a:t>expected value</a:t>
-                </a:r>
-                <a:r>
-                  <a:rPr lang="en-US" b="0" i="0" dirty="0">
-                    <a:solidFill>
-                      <a:srgbClr val="202122"/>
-                    </a:solidFill>
-                    <a:effectLst/>
-                    <a:highlight>
-                      <a:srgbClr val="FFFFFF"/>
-                    </a:highlight>
-                    <a:latin typeface="Arial" panose="020B0604020202020204" pitchFamily="34" charset="0"/>
-                  </a:rPr>
-                  <a:t> and </a:t>
-                </a:r>
-                <a:r>
-                  <a:rPr lang="en-US" b="0" i="0" u="none" strike="noStrike" dirty="0">
-                    <a:solidFill>
-                      <a:srgbClr val="3366CC"/>
-                    </a:solidFill>
-                    <a:effectLst/>
-                    <a:highlight>
-                      <a:srgbClr val="FFFFFF"/>
-                    </a:highlight>
-                    <a:latin typeface="Arial" panose="020B0604020202020204" pitchFamily="34" charset="0"/>
-                    <a:hlinkClick r:id="rId4" tooltip="Covariance matrix"/>
-                  </a:rPr>
-                  <a:t>variance-covariance matrix</a:t>
-                </a:r>
-                <a:r>
-                  <a:rPr lang="en-US" b="0" i="0" dirty="0">
-                    <a:solidFill>
-                      <a:srgbClr val="202122"/>
-                    </a:solidFill>
-                    <a:effectLst/>
-                    <a:highlight>
-                      <a:srgbClr val="FFFFFF"/>
-                    </a:highlight>
-                    <a:latin typeface="Arial" panose="020B0604020202020204" pitchFamily="34" charset="0"/>
-                  </a:rPr>
-                  <a:t> of 𝜀, respectively, and tr denotes the </a:t>
-                </a:r>
-                <a:r>
-                  <a:rPr lang="en-US" b="0" i="0" u="none" strike="noStrike" dirty="0">
-                    <a:solidFill>
-                      <a:srgbClr val="3366CC"/>
-                    </a:solidFill>
-                    <a:effectLst/>
-                    <a:highlight>
-                      <a:srgbClr val="FFFFFF"/>
-                    </a:highlight>
-                    <a:latin typeface="Arial" panose="020B0604020202020204" pitchFamily="34" charset="0"/>
-                    <a:hlinkClick r:id="rId5" tooltip="Trace (linear algebra)"/>
-                  </a:rPr>
-                  <a:t>trace</a:t>
-                </a:r>
-                <a:r>
-                  <a:rPr lang="en-US" b="0" i="0" dirty="0">
-                    <a:solidFill>
-                      <a:srgbClr val="202122"/>
-                    </a:solidFill>
-                    <a:effectLst/>
-                    <a:highlight>
-                      <a:srgbClr val="FFFFFF"/>
-                    </a:highlight>
-                    <a:latin typeface="Arial" panose="020B0604020202020204" pitchFamily="34" charset="0"/>
-                  </a:rPr>
-                  <a:t> of a matrix.</a:t>
-                </a:r>
-              </a:p>
-              <a:p>
-                <a:pPr marL="0" marR="0" lvl="0" indent="0" algn="l" defTabSz="914400" rtl="0" eaLnBrk="1" fontAlgn="auto" latinLnBrk="0" hangingPunct="1">
-                  <a:lnSpc>
-                    <a:spcPct val="100000"/>
-                  </a:lnSpc>
-                  <a:spcBef>
-                    <a:spcPts val="0"/>
-                  </a:spcBef>
-                  <a:spcAft>
-                    <a:spcPts val="0"/>
-                  </a:spcAft>
-                  <a:buClrTx/>
-                  <a:buSzTx/>
-                  <a:buFontTx/>
-                  <a:buNone/>
-                  <a:tabLst/>
-                  <a:defRPr/>
-                </a:pPr>
-                <a:endParaRPr lang="en-US" sz="1200" kern="1200" dirty="0">
-                  <a:solidFill>
-                    <a:schemeClr val="tx1"/>
-                  </a:solidFill>
-                  <a:effectLst/>
-                  <a:latin typeface="+mn-lt"/>
-                  <a:ea typeface="+mn-ea"/>
-                  <a:cs typeface="+mn-cs"/>
-                </a:endParaRPr>
-              </a:p>
-              <a:p>
-                <a:pPr marL="0" marR="0" lvl="0" indent="0" algn="l" defTabSz="914400" rtl="0" eaLnBrk="1" fontAlgn="auto" latinLnBrk="0" hangingPunct="1">
-                  <a:lnSpc>
-                    <a:spcPct val="100000"/>
-                  </a:lnSpc>
-                  <a:spcBef>
-                    <a:spcPts val="0"/>
-                  </a:spcBef>
-                  <a:spcAft>
-                    <a:spcPts val="0"/>
-                  </a:spcAft>
-                  <a:buClrTx/>
-                  <a:buSzTx/>
-                  <a:buFontTx/>
-                  <a:buNone/>
-                  <a:tabLst/>
-                  <a:defRPr/>
-                </a:pPr>
-                <a:r>
-                  <a:rPr lang="en-US" sz="1200" b="0" i="0" kern="1200" dirty="0">
-                    <a:solidFill>
-                      <a:schemeClr val="tx1"/>
-                    </a:solidFill>
-                    <a:effectLst/>
-                    <a:latin typeface="+mn-lt"/>
-                    <a:ea typeface="+mn-ea"/>
-                    <a:cs typeface="+mn-cs"/>
-                  </a:rPr>
-                  <a:t> the </a:t>
-                </a:r>
-                <a:r>
-                  <a:rPr lang="en-US" sz="1200" b="1" i="0" kern="1200" dirty="0">
-                    <a:solidFill>
-                      <a:schemeClr val="tx1"/>
-                    </a:solidFill>
-                    <a:effectLst/>
-                    <a:latin typeface="+mn-lt"/>
-                    <a:ea typeface="+mn-ea"/>
-                    <a:cs typeface="+mn-cs"/>
-                  </a:rPr>
-                  <a:t>trace</a:t>
-                </a:r>
-                <a:r>
-                  <a:rPr lang="en-US" sz="1200" b="0" i="0" kern="1200" dirty="0">
-                    <a:solidFill>
-                      <a:schemeClr val="tx1"/>
-                    </a:solidFill>
-                    <a:effectLst/>
-                    <a:latin typeface="+mn-lt"/>
-                    <a:ea typeface="+mn-ea"/>
-                    <a:cs typeface="+mn-cs"/>
-                  </a:rPr>
-                  <a:t> of a </a:t>
-                </a:r>
-                <a:r>
-                  <a:rPr lang="en-US" sz="1200" b="0" i="0" u="none" strike="noStrike" kern="1200" dirty="0">
-                    <a:solidFill>
-                      <a:schemeClr val="tx1"/>
-                    </a:solidFill>
-                    <a:effectLst/>
-                    <a:latin typeface="+mn-lt"/>
-                    <a:ea typeface="+mn-ea"/>
-                    <a:cs typeface="+mn-cs"/>
-                    <a:hlinkClick r:id="rId6" tooltip="Square matrix"/>
-                  </a:rPr>
-                  <a:t>square matrix</a:t>
-                </a:r>
-                <a:r>
-                  <a:rPr lang="en-US" sz="1200" b="0" i="0" kern="1200" dirty="0">
-                    <a:solidFill>
-                      <a:schemeClr val="tx1"/>
-                    </a:solidFill>
-                    <a:effectLst/>
-                    <a:latin typeface="+mn-lt"/>
-                    <a:ea typeface="+mn-ea"/>
-                    <a:cs typeface="+mn-cs"/>
-                  </a:rPr>
-                  <a:t> </a:t>
-                </a:r>
-                <a:r>
-                  <a:rPr lang="en-US" sz="1200" b="1" i="0" kern="1200" dirty="0">
-                    <a:solidFill>
-                      <a:schemeClr val="tx1"/>
-                    </a:solidFill>
-                    <a:effectLst/>
-                    <a:latin typeface="+mn-lt"/>
-                    <a:ea typeface="+mn-ea"/>
-                    <a:cs typeface="+mn-cs"/>
-                  </a:rPr>
-                  <a:t>A</a:t>
-                </a:r>
-                <a:r>
-                  <a:rPr lang="en-US" sz="1200" b="0" i="0" kern="1200" dirty="0">
-                    <a:solidFill>
-                      <a:schemeClr val="tx1"/>
-                    </a:solidFill>
-                    <a:effectLst/>
-                    <a:latin typeface="+mn-lt"/>
-                    <a:ea typeface="+mn-ea"/>
-                    <a:cs typeface="+mn-cs"/>
-                  </a:rPr>
-                  <a:t>, denoted tr(</a:t>
-                </a:r>
-                <a:r>
-                  <a:rPr lang="en-US" sz="1200" b="1" i="0" kern="1200" dirty="0">
-                    <a:solidFill>
-                      <a:schemeClr val="tx1"/>
-                    </a:solidFill>
-                    <a:effectLst/>
-                    <a:latin typeface="+mn-lt"/>
-                    <a:ea typeface="+mn-ea"/>
-                    <a:cs typeface="+mn-cs"/>
-                  </a:rPr>
-                  <a:t>A</a:t>
-                </a:r>
-                <a:r>
-                  <a:rPr lang="en-US" sz="1200" b="0" i="0" kern="1200" dirty="0">
-                    <a:solidFill>
-                      <a:schemeClr val="tx1"/>
-                    </a:solidFill>
-                    <a:effectLst/>
-                    <a:latin typeface="+mn-lt"/>
-                    <a:ea typeface="+mn-ea"/>
-                    <a:cs typeface="+mn-cs"/>
-                  </a:rPr>
-                  <a:t>),</a:t>
-                </a:r>
-                <a:r>
-                  <a:rPr lang="en-US" sz="1200" b="0" i="0" u="none" strike="noStrike" kern="1200" baseline="30000" dirty="0">
-                    <a:solidFill>
-                      <a:schemeClr val="tx1"/>
-                    </a:solidFill>
-                    <a:effectLst/>
-                    <a:latin typeface="+mn-lt"/>
-                    <a:ea typeface="+mn-ea"/>
-                    <a:cs typeface="+mn-cs"/>
-                    <a:hlinkClick r:id="rId7"/>
-                  </a:rPr>
-                  <a:t>[1]</a:t>
-                </a:r>
-                <a:r>
-                  <a:rPr lang="en-US" sz="1200" b="0" i="0" kern="1200" dirty="0">
-                    <a:solidFill>
-                      <a:schemeClr val="tx1"/>
-                    </a:solidFill>
-                    <a:effectLst/>
-                    <a:latin typeface="+mn-lt"/>
-                    <a:ea typeface="+mn-ea"/>
-                    <a:cs typeface="+mn-cs"/>
-                  </a:rPr>
-                  <a:t> is the sum of the elements on its </a:t>
-                </a:r>
-                <a:r>
-                  <a:rPr lang="en-US" sz="1200" b="0" i="0" u="none" strike="noStrike" kern="1200" dirty="0">
-                    <a:solidFill>
-                      <a:schemeClr val="tx1"/>
-                    </a:solidFill>
-                    <a:effectLst/>
-                    <a:latin typeface="+mn-lt"/>
-                    <a:ea typeface="+mn-ea"/>
-                    <a:cs typeface="+mn-cs"/>
-                    <a:hlinkClick r:id="rId8" tooltip="Main diagonal"/>
-                  </a:rPr>
-                  <a:t>main diagonal</a:t>
-                </a:r>
-                <a:r>
-                  <a:rPr lang="en-US" sz="1200" b="0" i="0" kern="1200" dirty="0">
-                    <a:solidFill>
-                      <a:schemeClr val="tx1"/>
-                    </a:solidFill>
-                    <a:effectLst/>
-                    <a:latin typeface="+mn-lt"/>
-                    <a:ea typeface="+mn-ea"/>
-                    <a:cs typeface="+mn-cs"/>
-                  </a:rPr>
-                  <a:t>, </a:t>
-                </a:r>
-                <a14:m>
-                  <m:oMath xmlns:m="http://schemas.openxmlformats.org/officeDocument/2006/math">
-                    <m:sSub>
-                      <m:sSubPr>
-                        <m:ctrlPr>
-                          <a:rPr lang="ar-AE" sz="1200" kern="1200">
-                            <a:solidFill>
-                              <a:schemeClr val="tx1"/>
-                            </a:solidFill>
-                            <a:latin typeface="+mn-lt"/>
-                            <a:ea typeface="+mn-ea"/>
-                            <a:cs typeface="+mn-cs"/>
-                          </a:rPr>
-                        </m:ctrlPr>
-                      </m:sSubPr>
-                      <m:e>
-                        <m:r>
-                          <a:rPr lang="ar-AE" sz="1200" i="1" kern="1200">
-                            <a:solidFill>
-                              <a:schemeClr val="tx1"/>
-                            </a:solidFill>
-                            <a:latin typeface="+mn-lt"/>
-                            <a:ea typeface="+mn-ea"/>
-                            <a:cs typeface="+mn-cs"/>
-                          </a:rPr>
-                          <m:t>𝑎</m:t>
-                        </m:r>
-                      </m:e>
-                      <m:sub>
-                        <m:r>
-                          <a:rPr lang="ar-AE" sz="1200" i="0" kern="1200">
-                            <a:solidFill>
-                              <a:schemeClr val="tx1"/>
-                            </a:solidFill>
-                            <a:latin typeface="+mn-lt"/>
-                            <a:ea typeface="+mn-ea"/>
-                            <a:cs typeface="+mn-cs"/>
-                          </a:rPr>
-                          <m:t>11</m:t>
-                        </m:r>
-                      </m:sub>
-                    </m:sSub>
-                    <m:r>
-                      <a:rPr lang="ar-AE" sz="1200" i="0" kern="1200">
-                        <a:solidFill>
-                          <a:schemeClr val="tx1"/>
-                        </a:solidFill>
-                        <a:latin typeface="+mn-lt"/>
-                        <a:ea typeface="+mn-ea"/>
-                        <a:cs typeface="+mn-cs"/>
-                      </a:rPr>
-                      <m:t>+</m:t>
-                    </m:r>
-                    <m:sSub>
-                      <m:sSubPr>
-                        <m:ctrlPr>
-                          <a:rPr lang="ar-AE" sz="1200" i="1" kern="1200">
-                            <a:solidFill>
-                              <a:schemeClr val="tx1"/>
-                            </a:solidFill>
-                            <a:latin typeface="+mn-lt"/>
-                            <a:ea typeface="+mn-ea"/>
-                            <a:cs typeface="+mn-cs"/>
-                          </a:rPr>
-                        </m:ctrlPr>
-                      </m:sSubPr>
-                      <m:e>
-                        <m:r>
-                          <a:rPr lang="ar-AE" sz="1200" i="1" kern="1200">
-                            <a:solidFill>
-                              <a:schemeClr val="tx1"/>
-                            </a:solidFill>
-                            <a:latin typeface="+mn-lt"/>
-                            <a:ea typeface="+mn-ea"/>
-                            <a:cs typeface="+mn-cs"/>
-                          </a:rPr>
-                          <m:t>𝑎</m:t>
-                        </m:r>
-                      </m:e>
-                      <m:sub>
-                        <m:r>
-                          <a:rPr lang="ar-AE" sz="1200" i="0" kern="1200">
-                            <a:solidFill>
-                              <a:schemeClr val="tx1"/>
-                            </a:solidFill>
-                            <a:latin typeface="+mn-lt"/>
-                            <a:ea typeface="+mn-ea"/>
-                            <a:cs typeface="+mn-cs"/>
-                          </a:rPr>
-                          <m:t>22</m:t>
-                        </m:r>
-                      </m:sub>
-                    </m:sSub>
-                    <m:r>
-                      <a:rPr lang="ar-AE" sz="1200" i="0" kern="1200">
-                        <a:solidFill>
-                          <a:schemeClr val="tx1"/>
-                        </a:solidFill>
-                        <a:latin typeface="+mn-lt"/>
-                        <a:ea typeface="+mn-ea"/>
-                        <a:cs typeface="+mn-cs"/>
-                      </a:rPr>
-                      <m:t>+⋯+</m:t>
-                    </m:r>
-                    <m:sSub>
-                      <m:sSubPr>
-                        <m:ctrlPr>
-                          <a:rPr lang="ar-AE" sz="1200" i="1" kern="1200">
-                            <a:solidFill>
-                              <a:schemeClr val="tx1"/>
-                            </a:solidFill>
-                            <a:latin typeface="+mn-lt"/>
-                            <a:ea typeface="+mn-ea"/>
-                            <a:cs typeface="+mn-cs"/>
-                          </a:rPr>
-                        </m:ctrlPr>
-                      </m:sSubPr>
-                      <m:e>
-                        <m:r>
-                          <a:rPr lang="ar-AE" sz="1200" i="1" kern="1200">
-                            <a:solidFill>
-                              <a:schemeClr val="tx1"/>
-                            </a:solidFill>
-                            <a:latin typeface="+mn-lt"/>
-                            <a:ea typeface="+mn-ea"/>
-                            <a:cs typeface="+mn-cs"/>
-                          </a:rPr>
-                          <m:t>𝑎</m:t>
-                        </m:r>
-                      </m:e>
-                      <m:sub>
-                        <m:r>
-                          <a:rPr lang="ar-AE" sz="1200" i="1" kern="1200">
-                            <a:solidFill>
-                              <a:schemeClr val="tx1"/>
-                            </a:solidFill>
-                            <a:latin typeface="+mn-lt"/>
-                            <a:ea typeface="+mn-ea"/>
-                            <a:cs typeface="+mn-cs"/>
-                          </a:rPr>
-                          <m:t>𝑛𝑛</m:t>
-                        </m:r>
-                      </m:sub>
-                    </m:sSub>
-                  </m:oMath>
-                </a14:m>
-                <a:r>
-                  <a:rPr lang="ar-AE" sz="1200" b="0" i="0" kern="1200" dirty="0">
-                    <a:solidFill>
-                      <a:schemeClr val="tx1"/>
-                    </a:solidFill>
-                    <a:effectLst/>
-                    <a:latin typeface="+mn-lt"/>
-                    <a:ea typeface="+mn-ea"/>
-                    <a:cs typeface="+mn-cs"/>
-                  </a:rPr>
-                  <a:t>. </a:t>
-                </a:r>
-                <a:r>
-                  <a:rPr lang="en-US" sz="1200" b="0" i="0" kern="1200" dirty="0">
-                    <a:solidFill>
-                      <a:schemeClr val="tx1"/>
-                    </a:solidFill>
-                    <a:effectLst/>
-                    <a:latin typeface="+mn-lt"/>
-                    <a:ea typeface="+mn-ea"/>
-                    <a:cs typeface="+mn-cs"/>
-                  </a:rPr>
-                  <a:t>It is only defined for a square matrix (</a:t>
-                </a:r>
-                <a:r>
-                  <a:rPr lang="en-US" sz="1200" b="0" i="1" kern="1200" dirty="0">
-                    <a:solidFill>
-                      <a:schemeClr val="tx1"/>
-                    </a:solidFill>
-                    <a:effectLst/>
-                    <a:latin typeface="+mn-lt"/>
-                    <a:ea typeface="+mn-ea"/>
-                    <a:cs typeface="+mn-cs"/>
-                  </a:rPr>
-                  <a:t>n</a:t>
-                </a:r>
-                <a:r>
-                  <a:rPr lang="en-US" sz="1200" b="0" i="0" kern="1200" dirty="0">
-                    <a:solidFill>
-                      <a:schemeClr val="tx1"/>
-                    </a:solidFill>
-                    <a:effectLst/>
-                    <a:latin typeface="+mn-lt"/>
-                    <a:ea typeface="+mn-ea"/>
-                    <a:cs typeface="+mn-cs"/>
-                  </a:rPr>
-                  <a:t> × </a:t>
-                </a:r>
-                <a:r>
-                  <a:rPr lang="en-US" sz="1200" b="0" i="1" kern="1200" dirty="0">
-                    <a:solidFill>
-                      <a:schemeClr val="tx1"/>
-                    </a:solidFill>
-                    <a:effectLst/>
-                    <a:latin typeface="+mn-lt"/>
-                    <a:ea typeface="+mn-ea"/>
-                    <a:cs typeface="+mn-cs"/>
-                  </a:rPr>
-                  <a:t>n</a:t>
-                </a:r>
-                <a:r>
-                  <a:rPr lang="en-US" sz="1200" b="0" i="0" kern="1200" dirty="0">
-                    <a:solidFill>
-                      <a:schemeClr val="tx1"/>
-                    </a:solidFill>
-                    <a:effectLst/>
-                    <a:latin typeface="+mn-lt"/>
-                    <a:ea typeface="+mn-ea"/>
-                    <a:cs typeface="+mn-cs"/>
-                  </a:rPr>
-                  <a:t>).</a:t>
-                </a:r>
-                <a:endParaRPr lang="en-US" sz="1200" kern="1200" dirty="0">
-                  <a:solidFill>
-                    <a:schemeClr val="tx1"/>
-                  </a:solidFill>
-                  <a:effectLst/>
-                  <a:latin typeface="+mn-lt"/>
-                  <a:ea typeface="+mn-ea"/>
-                  <a:cs typeface="+mn-cs"/>
-                </a:endParaRPr>
-              </a:p>
-              <a:p>
-                <a:pPr marL="0" marR="0" lvl="0" indent="0" algn="l" defTabSz="914400" rtl="0" eaLnBrk="1" fontAlgn="auto" latinLnBrk="0" hangingPunct="1">
-                  <a:lnSpc>
-                    <a:spcPct val="100000"/>
-                  </a:lnSpc>
-                  <a:spcBef>
-                    <a:spcPts val="0"/>
-                  </a:spcBef>
-                  <a:spcAft>
-                    <a:spcPts val="0"/>
-                  </a:spcAft>
-                  <a:buClrTx/>
-                  <a:buSzTx/>
-                  <a:buFontTx/>
-                  <a:buNone/>
-                  <a:tabLst/>
-                  <a:defRPr/>
-                </a:pPr>
-                <a:endParaRPr lang="en-US" sz="1200" kern="1200" dirty="0">
-                  <a:solidFill>
-                    <a:schemeClr val="tx1"/>
-                  </a:solidFill>
-                  <a:effectLst/>
-                  <a:latin typeface="+mn-lt"/>
-                  <a:ea typeface="+mn-ea"/>
-                  <a:cs typeface="+mn-cs"/>
-                </a:endParaRPr>
-              </a:p>
-              <a:p>
-                <a:pPr marL="0" marR="0" lvl="0" indent="0" algn="l" defTabSz="914400" rtl="0" eaLnBrk="1" fontAlgn="auto" latinLnBrk="0" hangingPunct="1">
-                  <a:lnSpc>
-                    <a:spcPct val="100000"/>
-                  </a:lnSpc>
-                  <a:spcBef>
-                    <a:spcPts val="0"/>
-                  </a:spcBef>
-                  <a:spcAft>
-                    <a:spcPts val="0"/>
-                  </a:spcAft>
-                  <a:buClrTx/>
-                  <a:buSzTx/>
-                  <a:buFontTx/>
-                  <a:buNone/>
-                  <a:tabLst/>
-                  <a:defRPr/>
-                </a:pPr>
-                <a:endParaRPr lang="en-US" sz="1200" kern="1200" dirty="0">
-                  <a:solidFill>
-                    <a:schemeClr val="tx1"/>
-                  </a:solidFill>
-                  <a:effectLst/>
-                  <a:latin typeface="+mn-lt"/>
-                  <a:ea typeface="+mn-ea"/>
-                  <a:cs typeface="+mn-cs"/>
-                </a:endParaRPr>
-              </a:p>
-              <a:p>
-                <a:pPr marL="0" marR="0" lvl="0" indent="0" algn="l" defTabSz="914400" rtl="0" eaLnBrk="1" fontAlgn="auto" latinLnBrk="0" hangingPunct="1">
-                  <a:lnSpc>
-                    <a:spcPct val="100000"/>
-                  </a:lnSpc>
-                  <a:spcBef>
-                    <a:spcPts val="0"/>
-                  </a:spcBef>
-                  <a:spcAft>
-                    <a:spcPts val="0"/>
-                  </a:spcAft>
-                  <a:buClrTx/>
-                  <a:buSzTx/>
-                  <a:buFontTx/>
-                  <a:buNone/>
-                  <a:tabLst/>
-                  <a:defRPr/>
-                </a:pPr>
-                <a:r>
-                  <a:rPr lang="en-US" sz="1200" kern="1200" dirty="0">
-                    <a:solidFill>
-                      <a:schemeClr val="tx1"/>
-                    </a:solidFill>
-                    <a:effectLst/>
-                    <a:latin typeface="+mn-lt"/>
-                    <a:ea typeface="+mn-ea"/>
-                    <a:cs typeface="+mn-cs"/>
-                  </a:rPr>
-                  <a:t>J_{k+1}^*(\x_{k+1}) = \frac{1}{2}\x_{k+1}^T </a:t>
-                </a:r>
-                <a:r>
-                  <a:rPr lang="en-US" sz="1200" kern="1200" dirty="0" err="1">
-                    <a:solidFill>
-                      <a:schemeClr val="tx1"/>
-                    </a:solidFill>
-                    <a:effectLst/>
-                    <a:latin typeface="+mn-lt"/>
-                    <a:ea typeface="+mn-ea"/>
-                    <a:cs typeface="+mn-cs"/>
-                  </a:rPr>
-                  <a:t>P_k</a:t>
-                </a:r>
-                <a:r>
-                  <a:rPr lang="en-US" sz="1200" kern="1200" dirty="0">
-                    <a:solidFill>
-                      <a:schemeClr val="tx1"/>
-                    </a:solidFill>
-                    <a:effectLst/>
-                    <a:latin typeface="+mn-lt"/>
-                    <a:ea typeface="+mn-ea"/>
-                    <a:cs typeface="+mn-cs"/>
-                  </a:rPr>
-                  <a:t> \x_{k+1}</a:t>
-                </a:r>
-              </a:p>
-              <a:p>
-                <a:pPr marL="0" marR="0" lvl="0" indent="0" algn="l" defTabSz="914400" rtl="0" eaLnBrk="1" fontAlgn="auto" latinLnBrk="0" hangingPunct="1">
-                  <a:lnSpc>
-                    <a:spcPct val="100000"/>
-                  </a:lnSpc>
-                  <a:spcBef>
-                    <a:spcPts val="0"/>
-                  </a:spcBef>
-                  <a:spcAft>
-                    <a:spcPts val="0"/>
-                  </a:spcAft>
-                  <a:buClrTx/>
-                  <a:buSzTx/>
-                  <a:buFontTx/>
-                  <a:buNone/>
-                  <a:tabLst/>
-                  <a:defRPr/>
-                </a:pPr>
-                <a:endParaRPr lang="en-US" sz="1200" kern="1200" dirty="0">
-                  <a:solidFill>
-                    <a:schemeClr val="tx1"/>
-                  </a:solidFill>
-                  <a:effectLst/>
-                  <a:latin typeface="+mn-lt"/>
-                  <a:ea typeface="+mn-ea"/>
-                  <a:cs typeface="+mn-cs"/>
-                </a:endParaRPr>
-              </a:p>
-              <a:p>
-                <a:r>
-                  <a:rPr lang="en-US" sz="1200" kern="1200" dirty="0">
-                    <a:solidFill>
-                      <a:schemeClr val="tx1"/>
-                    </a:solidFill>
-                    <a:effectLst/>
-                    <a:latin typeface="+mn-lt"/>
-                    <a:ea typeface="+mn-ea"/>
-                    <a:cs typeface="+mn-cs"/>
-                  </a:rPr>
-                  <a:t>J_{k}^*(\x_{k+1}) &amp;= \min_{\</a:t>
-                </a:r>
-                <a:r>
-                  <a:rPr lang="en-US" sz="1200" kern="1200" dirty="0" err="1">
-                    <a:solidFill>
-                      <a:schemeClr val="tx1"/>
-                    </a:solidFill>
-                    <a:effectLst/>
-                    <a:latin typeface="+mn-lt"/>
-                    <a:ea typeface="+mn-ea"/>
-                    <a:cs typeface="+mn-cs"/>
-                  </a:rPr>
-                  <a:t>u_k</a:t>
-                </a:r>
-                <a:r>
-                  <a:rPr lang="en-US" sz="1200" kern="1200" dirty="0">
-                    <a:solidFill>
-                      <a:schemeClr val="tx1"/>
-                    </a:solidFill>
-                    <a:effectLst/>
-                    <a:latin typeface="+mn-lt"/>
-                    <a:ea typeface="+mn-ea"/>
-                    <a:cs typeface="+mn-cs"/>
-                  </a:rPr>
-                  <a:t>}\E_{\</a:t>
-                </a:r>
-                <a:r>
-                  <a:rPr lang="en-US" sz="1200" kern="1200" dirty="0" err="1">
-                    <a:solidFill>
-                      <a:schemeClr val="tx1"/>
-                    </a:solidFill>
-                    <a:effectLst/>
-                    <a:latin typeface="+mn-lt"/>
-                    <a:ea typeface="+mn-ea"/>
-                    <a:cs typeface="+mn-cs"/>
-                  </a:rPr>
-                  <a:t>w_k</a:t>
-                </a:r>
-                <a:r>
-                  <a:rPr lang="en-US" sz="1200" kern="1200" dirty="0">
-                    <a:solidFill>
-                      <a:schemeClr val="tx1"/>
-                    </a:solidFill>
-                    <a:effectLst/>
-                    <a:latin typeface="+mn-lt"/>
-                    <a:ea typeface="+mn-ea"/>
-                    <a:cs typeface="+mn-cs"/>
-                  </a:rPr>
-                  <a:t>}\left[</a:t>
-                </a:r>
-                <a:r>
-                  <a:rPr lang="en-US" sz="1200" kern="1200" dirty="0" err="1">
-                    <a:solidFill>
-                      <a:schemeClr val="tx1"/>
-                    </a:solidFill>
-                    <a:effectLst/>
-                    <a:latin typeface="+mn-lt"/>
-                    <a:ea typeface="+mn-ea"/>
-                    <a:cs typeface="+mn-cs"/>
-                  </a:rPr>
-                  <a:t>g_k</a:t>
-                </a:r>
-                <a:r>
-                  <a:rPr lang="en-US" sz="1200" kern="1200" dirty="0">
-                    <a:solidFill>
-                      <a:schemeClr val="tx1"/>
-                    </a:solidFill>
-                    <a:effectLst/>
-                    <a:latin typeface="+mn-lt"/>
-                    <a:ea typeface="+mn-ea"/>
-                    <a:cs typeface="+mn-cs"/>
-                  </a:rPr>
-                  <a:t>(\</a:t>
-                </a:r>
-                <a:r>
-                  <a:rPr lang="en-US" sz="1200" kern="1200" dirty="0" err="1">
-                    <a:solidFill>
-                      <a:schemeClr val="tx1"/>
-                    </a:solidFill>
-                    <a:effectLst/>
-                    <a:latin typeface="+mn-lt"/>
-                    <a:ea typeface="+mn-ea"/>
-                    <a:cs typeface="+mn-cs"/>
-                  </a:rPr>
-                  <a:t>x_k</a:t>
-                </a:r>
-                <a:r>
-                  <a:rPr lang="en-US" sz="1200" kern="1200" dirty="0">
-                    <a:solidFill>
-                      <a:schemeClr val="tx1"/>
-                    </a:solidFill>
-                    <a:effectLst/>
-                    <a:latin typeface="+mn-lt"/>
-                    <a:ea typeface="+mn-ea"/>
-                    <a:cs typeface="+mn-cs"/>
-                  </a:rPr>
-                  <a:t>, \</a:t>
-                </a:r>
-                <a:r>
-                  <a:rPr lang="en-US" sz="1200" kern="1200" dirty="0" err="1">
-                    <a:solidFill>
-                      <a:schemeClr val="tx1"/>
-                    </a:solidFill>
-                    <a:effectLst/>
-                    <a:latin typeface="+mn-lt"/>
-                    <a:ea typeface="+mn-ea"/>
-                    <a:cs typeface="+mn-cs"/>
-                  </a:rPr>
-                  <a:t>u_k</a:t>
-                </a:r>
-                <a:r>
-                  <a:rPr lang="en-US" sz="1200" kern="1200" dirty="0">
-                    <a:solidFill>
-                      <a:schemeClr val="tx1"/>
-                    </a:solidFill>
-                    <a:effectLst/>
-                    <a:latin typeface="+mn-lt"/>
-                    <a:ea typeface="+mn-ea"/>
-                    <a:cs typeface="+mn-cs"/>
-                  </a:rPr>
-                  <a:t>, \</a:t>
-                </a:r>
-                <a:r>
-                  <a:rPr lang="en-US" sz="1200" kern="1200" dirty="0" err="1">
-                    <a:solidFill>
-                      <a:schemeClr val="tx1"/>
-                    </a:solidFill>
-                    <a:effectLst/>
-                    <a:latin typeface="+mn-lt"/>
-                    <a:ea typeface="+mn-ea"/>
-                    <a:cs typeface="+mn-cs"/>
-                  </a:rPr>
-                  <a:t>w_k</a:t>
-                </a:r>
-                <a:r>
-                  <a:rPr lang="en-US" sz="1200" kern="1200" dirty="0">
-                    <a:solidFill>
-                      <a:schemeClr val="tx1"/>
-                    </a:solidFill>
-                    <a:effectLst/>
-                    <a:latin typeface="+mn-lt"/>
-                    <a:ea typeface="+mn-ea"/>
-                    <a:cs typeface="+mn-cs"/>
-                  </a:rPr>
-                  <a:t>) + J_{k+1}^*(f(\</a:t>
-                </a:r>
-                <a:r>
-                  <a:rPr lang="en-US" sz="1200" kern="1200" dirty="0" err="1">
-                    <a:solidFill>
-                      <a:schemeClr val="tx1"/>
-                    </a:solidFill>
-                    <a:effectLst/>
-                    <a:latin typeface="+mn-lt"/>
-                    <a:ea typeface="+mn-ea"/>
-                    <a:cs typeface="+mn-cs"/>
-                  </a:rPr>
-                  <a:t>x_k</a:t>
-                </a:r>
-                <a:r>
-                  <a:rPr lang="en-US" sz="1200" kern="1200" dirty="0">
-                    <a:solidFill>
-                      <a:schemeClr val="tx1"/>
-                    </a:solidFill>
-                    <a:effectLst/>
-                    <a:latin typeface="+mn-lt"/>
-                    <a:ea typeface="+mn-ea"/>
-                    <a:cs typeface="+mn-cs"/>
-                  </a:rPr>
-                  <a:t>, \</a:t>
-                </a:r>
-                <a:r>
-                  <a:rPr lang="en-US" sz="1200" kern="1200" dirty="0" err="1">
-                    <a:solidFill>
-                      <a:schemeClr val="tx1"/>
-                    </a:solidFill>
-                    <a:effectLst/>
-                    <a:latin typeface="+mn-lt"/>
-                    <a:ea typeface="+mn-ea"/>
-                    <a:cs typeface="+mn-cs"/>
-                  </a:rPr>
-                  <a:t>u_k</a:t>
-                </a:r>
-                <a:r>
-                  <a:rPr lang="en-US" sz="1200" kern="1200" dirty="0">
-                    <a:solidFill>
-                      <a:schemeClr val="tx1"/>
-                    </a:solidFill>
-                    <a:effectLst/>
-                    <a:latin typeface="+mn-lt"/>
-                    <a:ea typeface="+mn-ea"/>
-                    <a:cs typeface="+mn-cs"/>
-                  </a:rPr>
-                  <a:t>, \</a:t>
-                </a:r>
-                <a:r>
-                  <a:rPr lang="en-US" sz="1200" kern="1200" dirty="0" err="1">
-                    <a:solidFill>
-                      <a:schemeClr val="tx1"/>
-                    </a:solidFill>
-                    <a:effectLst/>
-                    <a:latin typeface="+mn-lt"/>
-                    <a:ea typeface="+mn-ea"/>
-                    <a:cs typeface="+mn-cs"/>
-                  </a:rPr>
-                  <a:t>w_k</a:t>
-                </a:r>
-                <a:r>
-                  <a:rPr lang="en-US" sz="1200" kern="1200" dirty="0">
-                    <a:solidFill>
-                      <a:schemeClr val="tx1"/>
-                    </a:solidFill>
-                    <a:effectLst/>
-                    <a:latin typeface="+mn-lt"/>
-                    <a:ea typeface="+mn-ea"/>
-                    <a:cs typeface="+mn-cs"/>
-                  </a:rPr>
-                  <a:t>))\right]\\</a:t>
-                </a:r>
-              </a:p>
-              <a:p>
-                <a:r>
-                  <a:rPr lang="en-US" sz="1200" kern="1200" dirty="0">
-                    <a:solidFill>
-                      <a:schemeClr val="tx1"/>
-                    </a:solidFill>
-                    <a:effectLst/>
-                    <a:latin typeface="+mn-lt"/>
-                    <a:ea typeface="+mn-ea"/>
-                    <a:cs typeface="+mn-cs"/>
-                  </a:rPr>
-                  <a:t>                  &amp;= \min_{\</a:t>
-                </a:r>
-                <a:r>
-                  <a:rPr lang="en-US" sz="1200" kern="1200" dirty="0" err="1">
-                    <a:solidFill>
-                      <a:schemeClr val="tx1"/>
-                    </a:solidFill>
-                    <a:effectLst/>
-                    <a:latin typeface="+mn-lt"/>
-                    <a:ea typeface="+mn-ea"/>
-                    <a:cs typeface="+mn-cs"/>
-                  </a:rPr>
-                  <a:t>u_k</a:t>
-                </a:r>
-                <a:r>
-                  <a:rPr lang="en-US" sz="1200" kern="1200" dirty="0">
-                    <a:solidFill>
-                      <a:schemeClr val="tx1"/>
-                    </a:solidFill>
-                    <a:effectLst/>
-                    <a:latin typeface="+mn-lt"/>
-                    <a:ea typeface="+mn-ea"/>
-                    <a:cs typeface="+mn-cs"/>
-                  </a:rPr>
-                  <a:t>}\frac{1}{2}\E_{\</a:t>
-                </a:r>
-                <a:r>
-                  <a:rPr lang="en-US" sz="1200" kern="1200" dirty="0" err="1">
-                    <a:solidFill>
-                      <a:schemeClr val="tx1"/>
-                    </a:solidFill>
-                    <a:effectLst/>
-                    <a:latin typeface="+mn-lt"/>
-                    <a:ea typeface="+mn-ea"/>
-                    <a:cs typeface="+mn-cs"/>
-                  </a:rPr>
-                  <a:t>w_k</a:t>
-                </a:r>
-                <a:r>
-                  <a:rPr lang="en-US" sz="1200" kern="1200" dirty="0">
-                    <a:solidFill>
-                      <a:schemeClr val="tx1"/>
-                    </a:solidFill>
-                    <a:effectLst/>
-                    <a:latin typeface="+mn-lt"/>
-                    <a:ea typeface="+mn-ea"/>
-                    <a:cs typeface="+mn-cs"/>
-                  </a:rPr>
-                  <a:t>}\left[\</a:t>
-                </a:r>
-                <a:r>
-                  <a:rPr lang="en-US" sz="1200" kern="1200" dirty="0" err="1">
-                    <a:solidFill>
-                      <a:schemeClr val="tx1"/>
-                    </a:solidFill>
-                    <a:effectLst/>
-                    <a:latin typeface="+mn-lt"/>
-                    <a:ea typeface="+mn-ea"/>
-                    <a:cs typeface="+mn-cs"/>
-                  </a:rPr>
-                  <a:t>x_k^T</a:t>
-                </a:r>
-                <a:r>
-                  <a:rPr lang="en-US" sz="1200" kern="1200" dirty="0">
-                    <a:solidFill>
-                      <a:schemeClr val="tx1"/>
-                    </a:solidFill>
-                    <a:effectLst/>
-                    <a:latin typeface="+mn-lt"/>
-                    <a:ea typeface="+mn-ea"/>
-                    <a:cs typeface="+mn-cs"/>
-                  </a:rPr>
-                  <a:t> </a:t>
-                </a:r>
-                <a:r>
-                  <a:rPr lang="en-US" sz="1200" kern="1200" dirty="0" err="1">
-                    <a:solidFill>
-                      <a:schemeClr val="tx1"/>
-                    </a:solidFill>
-                    <a:effectLst/>
-                    <a:latin typeface="+mn-lt"/>
-                    <a:ea typeface="+mn-ea"/>
-                    <a:cs typeface="+mn-cs"/>
-                  </a:rPr>
-                  <a:t>Q_k</a:t>
-                </a:r>
-                <a:r>
-                  <a:rPr lang="en-US" sz="1200" kern="1200" dirty="0">
-                    <a:solidFill>
-                      <a:schemeClr val="tx1"/>
-                    </a:solidFill>
-                    <a:effectLst/>
-                    <a:latin typeface="+mn-lt"/>
-                    <a:ea typeface="+mn-ea"/>
-                    <a:cs typeface="+mn-cs"/>
-                  </a:rPr>
-                  <a:t> \</a:t>
-                </a:r>
-                <a:r>
-                  <a:rPr lang="en-US" sz="1200" kern="1200" dirty="0" err="1">
-                    <a:solidFill>
-                      <a:schemeClr val="tx1"/>
-                    </a:solidFill>
-                    <a:effectLst/>
-                    <a:latin typeface="+mn-lt"/>
-                    <a:ea typeface="+mn-ea"/>
-                    <a:cs typeface="+mn-cs"/>
-                  </a:rPr>
-                  <a:t>x_k</a:t>
-                </a:r>
-                <a:r>
-                  <a:rPr lang="en-US" sz="1200" kern="1200" dirty="0">
-                    <a:solidFill>
-                      <a:schemeClr val="tx1"/>
-                    </a:solidFill>
-                    <a:effectLst/>
-                    <a:latin typeface="+mn-lt"/>
-                    <a:ea typeface="+mn-ea"/>
-                    <a:cs typeface="+mn-cs"/>
-                  </a:rPr>
-                  <a:t> + \</a:t>
-                </a:r>
-                <a:r>
-                  <a:rPr lang="en-US" sz="1200" kern="1200" dirty="0" err="1">
-                    <a:solidFill>
-                      <a:schemeClr val="tx1"/>
-                    </a:solidFill>
-                    <a:effectLst/>
-                    <a:latin typeface="+mn-lt"/>
-                    <a:ea typeface="+mn-ea"/>
-                    <a:cs typeface="+mn-cs"/>
-                  </a:rPr>
-                  <a:t>u_k^T</a:t>
-                </a:r>
-                <a:r>
-                  <a:rPr lang="en-US" sz="1200" kern="1200" dirty="0">
-                    <a:solidFill>
-                      <a:schemeClr val="tx1"/>
-                    </a:solidFill>
-                    <a:effectLst/>
-                    <a:latin typeface="+mn-lt"/>
-                    <a:ea typeface="+mn-ea"/>
-                    <a:cs typeface="+mn-cs"/>
-                  </a:rPr>
-                  <a:t> </a:t>
-                </a:r>
-                <a:r>
-                  <a:rPr lang="en-US" sz="1200" kern="1200" dirty="0" err="1">
-                    <a:solidFill>
-                      <a:schemeClr val="tx1"/>
-                    </a:solidFill>
-                    <a:effectLst/>
-                    <a:latin typeface="+mn-lt"/>
-                    <a:ea typeface="+mn-ea"/>
-                    <a:cs typeface="+mn-cs"/>
-                  </a:rPr>
-                  <a:t>R_k</a:t>
-                </a:r>
-                <a:r>
-                  <a:rPr lang="en-US" sz="1200" kern="1200" dirty="0">
-                    <a:solidFill>
-                      <a:schemeClr val="tx1"/>
-                    </a:solidFill>
-                    <a:effectLst/>
-                    <a:latin typeface="+mn-lt"/>
-                    <a:ea typeface="+mn-ea"/>
-                    <a:cs typeface="+mn-cs"/>
-                  </a:rPr>
-                  <a:t> \</a:t>
-                </a:r>
-                <a:r>
-                  <a:rPr lang="en-US" sz="1200" kern="1200" dirty="0" err="1">
-                    <a:solidFill>
-                      <a:schemeClr val="tx1"/>
-                    </a:solidFill>
-                    <a:effectLst/>
-                    <a:latin typeface="+mn-lt"/>
-                    <a:ea typeface="+mn-ea"/>
-                    <a:cs typeface="+mn-cs"/>
-                  </a:rPr>
-                  <a:t>u_k</a:t>
-                </a:r>
-                <a:r>
-                  <a:rPr lang="en-US" sz="1200" kern="1200" dirty="0">
-                    <a:solidFill>
-                      <a:schemeClr val="tx1"/>
-                    </a:solidFill>
-                    <a:effectLst/>
-                    <a:latin typeface="+mn-lt"/>
-                    <a:ea typeface="+mn-ea"/>
-                    <a:cs typeface="+mn-cs"/>
-                  </a:rPr>
-                  <a:t> + (</a:t>
-                </a:r>
-                <a:r>
-                  <a:rPr lang="en-US" sz="1200" kern="1200" dirty="0" err="1">
-                    <a:solidFill>
-                      <a:schemeClr val="tx1"/>
-                    </a:solidFill>
-                    <a:effectLst/>
-                    <a:latin typeface="+mn-lt"/>
-                    <a:ea typeface="+mn-ea"/>
-                    <a:cs typeface="+mn-cs"/>
-                  </a:rPr>
-                  <a:t>A_k</a:t>
-                </a:r>
-                <a:r>
-                  <a:rPr lang="en-US" sz="1200" kern="1200" dirty="0">
-                    <a:solidFill>
-                      <a:schemeClr val="tx1"/>
-                    </a:solidFill>
-                    <a:effectLst/>
-                    <a:latin typeface="+mn-lt"/>
-                    <a:ea typeface="+mn-ea"/>
-                    <a:cs typeface="+mn-cs"/>
-                  </a:rPr>
-                  <a:t>\</a:t>
-                </a:r>
-                <a:r>
-                  <a:rPr lang="en-US" sz="1200" kern="1200" dirty="0" err="1">
-                    <a:solidFill>
-                      <a:schemeClr val="tx1"/>
-                    </a:solidFill>
-                    <a:effectLst/>
-                    <a:latin typeface="+mn-lt"/>
-                    <a:ea typeface="+mn-ea"/>
-                    <a:cs typeface="+mn-cs"/>
-                  </a:rPr>
-                  <a:t>x_k</a:t>
-                </a:r>
-                <a:r>
-                  <a:rPr lang="en-US" sz="1200" kern="1200" dirty="0">
-                    <a:solidFill>
-                      <a:schemeClr val="tx1"/>
-                    </a:solidFill>
-                    <a:effectLst/>
-                    <a:latin typeface="+mn-lt"/>
-                    <a:ea typeface="+mn-ea"/>
-                    <a:cs typeface="+mn-cs"/>
-                  </a:rPr>
-                  <a:t> + </a:t>
-                </a:r>
-                <a:r>
-                  <a:rPr lang="en-US" sz="1200" kern="1200" dirty="0" err="1">
-                    <a:solidFill>
-                      <a:schemeClr val="tx1"/>
-                    </a:solidFill>
-                    <a:effectLst/>
-                    <a:latin typeface="+mn-lt"/>
-                    <a:ea typeface="+mn-ea"/>
-                    <a:cs typeface="+mn-cs"/>
-                  </a:rPr>
-                  <a:t>B_k</a:t>
-                </a:r>
-                <a:r>
-                  <a:rPr lang="en-US" sz="1200" kern="1200" dirty="0">
-                    <a:solidFill>
-                      <a:schemeClr val="tx1"/>
-                    </a:solidFill>
-                    <a:effectLst/>
-                    <a:latin typeface="+mn-lt"/>
-                    <a:ea typeface="+mn-ea"/>
-                    <a:cs typeface="+mn-cs"/>
-                  </a:rPr>
-                  <a:t>\</a:t>
-                </a:r>
-                <a:r>
-                  <a:rPr lang="en-US" sz="1200" kern="1200" dirty="0" err="1">
-                    <a:solidFill>
-                      <a:schemeClr val="tx1"/>
-                    </a:solidFill>
-                    <a:effectLst/>
-                    <a:latin typeface="+mn-lt"/>
-                    <a:ea typeface="+mn-ea"/>
-                    <a:cs typeface="+mn-cs"/>
-                  </a:rPr>
-                  <a:t>u_k</a:t>
-                </a:r>
-                <a:r>
-                  <a:rPr lang="en-US" sz="1200" kern="1200" dirty="0">
-                    <a:solidFill>
-                      <a:schemeClr val="tx1"/>
-                    </a:solidFill>
-                    <a:effectLst/>
-                    <a:latin typeface="+mn-lt"/>
-                    <a:ea typeface="+mn-ea"/>
-                    <a:cs typeface="+mn-cs"/>
-                  </a:rPr>
-                  <a:t> + \</a:t>
-                </a:r>
-                <a:r>
-                  <a:rPr lang="en-US" sz="1200" kern="1200" dirty="0" err="1">
-                    <a:solidFill>
-                      <a:schemeClr val="tx1"/>
-                    </a:solidFill>
-                    <a:effectLst/>
-                    <a:latin typeface="+mn-lt"/>
-                    <a:ea typeface="+mn-ea"/>
-                    <a:cs typeface="+mn-cs"/>
-                  </a:rPr>
-                  <a:t>w_k</a:t>
-                </a:r>
-                <a:r>
-                  <a:rPr lang="en-US" sz="1200" kern="1200" dirty="0">
-                    <a:solidFill>
-                      <a:schemeClr val="tx1"/>
-                    </a:solidFill>
-                    <a:effectLst/>
-                    <a:latin typeface="+mn-lt"/>
-                    <a:ea typeface="+mn-ea"/>
-                    <a:cs typeface="+mn-cs"/>
-                  </a:rPr>
-                  <a:t>)^T P_{k+1}(</a:t>
-                </a:r>
-                <a:r>
-                  <a:rPr lang="en-US" sz="1200" kern="1200" dirty="0" err="1">
-                    <a:solidFill>
-                      <a:schemeClr val="tx1"/>
-                    </a:solidFill>
-                    <a:effectLst/>
-                    <a:latin typeface="+mn-lt"/>
-                    <a:ea typeface="+mn-ea"/>
-                    <a:cs typeface="+mn-cs"/>
-                  </a:rPr>
-                  <a:t>A_k</a:t>
-                </a:r>
-                <a:r>
-                  <a:rPr lang="en-US" sz="1200" kern="1200" dirty="0">
-                    <a:solidFill>
-                      <a:schemeClr val="tx1"/>
-                    </a:solidFill>
-                    <a:effectLst/>
-                    <a:latin typeface="+mn-lt"/>
-                    <a:ea typeface="+mn-ea"/>
-                    <a:cs typeface="+mn-cs"/>
-                  </a:rPr>
-                  <a:t>\</a:t>
-                </a:r>
-                <a:r>
-                  <a:rPr lang="en-US" sz="1200" kern="1200" dirty="0" err="1">
-                    <a:solidFill>
-                      <a:schemeClr val="tx1"/>
-                    </a:solidFill>
-                    <a:effectLst/>
-                    <a:latin typeface="+mn-lt"/>
-                    <a:ea typeface="+mn-ea"/>
-                    <a:cs typeface="+mn-cs"/>
-                  </a:rPr>
-                  <a:t>x_k</a:t>
-                </a:r>
-                <a:r>
-                  <a:rPr lang="en-US" sz="1200" kern="1200" dirty="0">
-                    <a:solidFill>
-                      <a:schemeClr val="tx1"/>
-                    </a:solidFill>
-                    <a:effectLst/>
-                    <a:latin typeface="+mn-lt"/>
-                    <a:ea typeface="+mn-ea"/>
-                    <a:cs typeface="+mn-cs"/>
-                  </a:rPr>
-                  <a:t> + </a:t>
-                </a:r>
-                <a:r>
-                  <a:rPr lang="en-US" sz="1200" kern="1200" dirty="0" err="1">
-                    <a:solidFill>
-                      <a:schemeClr val="tx1"/>
-                    </a:solidFill>
-                    <a:effectLst/>
-                    <a:latin typeface="+mn-lt"/>
-                    <a:ea typeface="+mn-ea"/>
-                    <a:cs typeface="+mn-cs"/>
-                  </a:rPr>
-                  <a:t>B_k</a:t>
-                </a:r>
-                <a:r>
-                  <a:rPr lang="en-US" sz="1200" kern="1200" dirty="0">
-                    <a:solidFill>
-                      <a:schemeClr val="tx1"/>
-                    </a:solidFill>
-                    <a:effectLst/>
-                    <a:latin typeface="+mn-lt"/>
-                    <a:ea typeface="+mn-ea"/>
-                    <a:cs typeface="+mn-cs"/>
-                  </a:rPr>
-                  <a:t>\</a:t>
-                </a:r>
-                <a:r>
-                  <a:rPr lang="en-US" sz="1200" kern="1200" dirty="0" err="1">
-                    <a:solidFill>
-                      <a:schemeClr val="tx1"/>
-                    </a:solidFill>
-                    <a:effectLst/>
-                    <a:latin typeface="+mn-lt"/>
-                    <a:ea typeface="+mn-ea"/>
-                    <a:cs typeface="+mn-cs"/>
-                  </a:rPr>
-                  <a:t>u_k</a:t>
-                </a:r>
-                <a:r>
-                  <a:rPr lang="en-US" sz="1200" kern="1200" dirty="0">
-                    <a:solidFill>
-                      <a:schemeClr val="tx1"/>
-                    </a:solidFill>
-                    <a:effectLst/>
-                    <a:latin typeface="+mn-lt"/>
-                    <a:ea typeface="+mn-ea"/>
-                    <a:cs typeface="+mn-cs"/>
-                  </a:rPr>
-                  <a:t> + \</a:t>
-                </a:r>
-                <a:r>
-                  <a:rPr lang="en-US" sz="1200" kern="1200" dirty="0" err="1">
-                    <a:solidFill>
-                      <a:schemeClr val="tx1"/>
-                    </a:solidFill>
-                    <a:effectLst/>
-                    <a:latin typeface="+mn-lt"/>
-                    <a:ea typeface="+mn-ea"/>
-                    <a:cs typeface="+mn-cs"/>
-                  </a:rPr>
-                  <a:t>w_k</a:t>
-                </a:r>
-                <a:r>
-                  <a:rPr lang="en-US" sz="1200" kern="1200" dirty="0">
-                    <a:solidFill>
-                      <a:schemeClr val="tx1"/>
-                    </a:solidFill>
-                    <a:effectLst/>
-                    <a:latin typeface="+mn-lt"/>
-                    <a:ea typeface="+mn-ea"/>
-                    <a:cs typeface="+mn-cs"/>
-                  </a:rPr>
-                  <a:t>)\right]\\</a:t>
-                </a:r>
-              </a:p>
-              <a:p>
-                <a:r>
-                  <a:rPr lang="en-US" sz="1200" kern="1200" dirty="0">
-                    <a:solidFill>
-                      <a:schemeClr val="tx1"/>
-                    </a:solidFill>
-                    <a:effectLst/>
-                    <a:latin typeface="+mn-lt"/>
-                    <a:ea typeface="+mn-ea"/>
-                    <a:cs typeface="+mn-cs"/>
-                  </a:rPr>
-                  <a:t>                  &amp;= \min_{\</a:t>
-                </a:r>
-                <a:r>
-                  <a:rPr lang="en-US" sz="1200" kern="1200" dirty="0" err="1">
-                    <a:solidFill>
-                      <a:schemeClr val="tx1"/>
-                    </a:solidFill>
-                    <a:effectLst/>
-                    <a:latin typeface="+mn-lt"/>
-                    <a:ea typeface="+mn-ea"/>
-                    <a:cs typeface="+mn-cs"/>
-                  </a:rPr>
-                  <a:t>u_k</a:t>
-                </a:r>
-                <a:r>
-                  <a:rPr lang="en-US" sz="1200" kern="1200" dirty="0">
-                    <a:solidFill>
-                      <a:schemeClr val="tx1"/>
-                    </a:solidFill>
-                    <a:effectLst/>
-                    <a:latin typeface="+mn-lt"/>
-                    <a:ea typeface="+mn-ea"/>
-                    <a:cs typeface="+mn-cs"/>
-                  </a:rPr>
-                  <a:t>}\frac{1}{2}\E_{\</a:t>
-                </a:r>
-                <a:r>
-                  <a:rPr lang="en-US" sz="1200" kern="1200" dirty="0" err="1">
-                    <a:solidFill>
-                      <a:schemeClr val="tx1"/>
-                    </a:solidFill>
-                    <a:effectLst/>
-                    <a:latin typeface="+mn-lt"/>
-                    <a:ea typeface="+mn-ea"/>
-                    <a:cs typeface="+mn-cs"/>
-                  </a:rPr>
-                  <a:t>w_k</a:t>
-                </a:r>
-                <a:r>
-                  <a:rPr lang="en-US" sz="1200" kern="1200" dirty="0">
-                    <a:solidFill>
-                      <a:schemeClr val="tx1"/>
-                    </a:solidFill>
-                    <a:effectLst/>
-                    <a:latin typeface="+mn-lt"/>
-                    <a:ea typeface="+mn-ea"/>
-                    <a:cs typeface="+mn-cs"/>
-                  </a:rPr>
-                  <a:t>}\left[\</a:t>
-                </a:r>
-                <a:r>
-                  <a:rPr lang="en-US" sz="1200" kern="1200" dirty="0" err="1">
-                    <a:solidFill>
-                      <a:schemeClr val="tx1"/>
-                    </a:solidFill>
-                    <a:effectLst/>
-                    <a:latin typeface="+mn-lt"/>
-                    <a:ea typeface="+mn-ea"/>
-                    <a:cs typeface="+mn-cs"/>
-                  </a:rPr>
-                  <a:t>x_k^T</a:t>
-                </a:r>
-                <a:r>
-                  <a:rPr lang="en-US" sz="1200" kern="1200" dirty="0">
-                    <a:solidFill>
-                      <a:schemeClr val="tx1"/>
-                    </a:solidFill>
-                    <a:effectLst/>
-                    <a:latin typeface="+mn-lt"/>
-                    <a:ea typeface="+mn-ea"/>
-                    <a:cs typeface="+mn-cs"/>
-                  </a:rPr>
-                  <a:t> </a:t>
-                </a:r>
-                <a:r>
-                  <a:rPr lang="en-US" sz="1200" kern="1200" dirty="0" err="1">
-                    <a:solidFill>
-                      <a:schemeClr val="tx1"/>
-                    </a:solidFill>
-                    <a:effectLst/>
-                    <a:latin typeface="+mn-lt"/>
-                    <a:ea typeface="+mn-ea"/>
-                    <a:cs typeface="+mn-cs"/>
-                  </a:rPr>
-                  <a:t>Q_k</a:t>
-                </a:r>
-                <a:r>
-                  <a:rPr lang="en-US" sz="1200" kern="1200" dirty="0">
-                    <a:solidFill>
-                      <a:schemeClr val="tx1"/>
-                    </a:solidFill>
-                    <a:effectLst/>
-                    <a:latin typeface="+mn-lt"/>
-                    <a:ea typeface="+mn-ea"/>
-                    <a:cs typeface="+mn-cs"/>
-                  </a:rPr>
-                  <a:t> \</a:t>
-                </a:r>
-                <a:r>
-                  <a:rPr lang="en-US" sz="1200" kern="1200" dirty="0" err="1">
-                    <a:solidFill>
-                      <a:schemeClr val="tx1"/>
-                    </a:solidFill>
-                    <a:effectLst/>
-                    <a:latin typeface="+mn-lt"/>
-                    <a:ea typeface="+mn-ea"/>
-                    <a:cs typeface="+mn-cs"/>
-                  </a:rPr>
-                  <a:t>x_k</a:t>
-                </a:r>
-                <a:r>
-                  <a:rPr lang="en-US" sz="1200" kern="1200" dirty="0">
-                    <a:solidFill>
-                      <a:schemeClr val="tx1"/>
-                    </a:solidFill>
-                    <a:effectLst/>
-                    <a:latin typeface="+mn-lt"/>
-                    <a:ea typeface="+mn-ea"/>
-                    <a:cs typeface="+mn-cs"/>
-                  </a:rPr>
-                  <a:t> + \</a:t>
-                </a:r>
-                <a:r>
-                  <a:rPr lang="en-US" sz="1200" kern="1200" dirty="0" err="1">
-                    <a:solidFill>
-                      <a:schemeClr val="tx1"/>
-                    </a:solidFill>
-                    <a:effectLst/>
-                    <a:latin typeface="+mn-lt"/>
-                    <a:ea typeface="+mn-ea"/>
-                    <a:cs typeface="+mn-cs"/>
-                  </a:rPr>
-                  <a:t>u_k^T</a:t>
-                </a:r>
-                <a:r>
-                  <a:rPr lang="en-US" sz="1200" kern="1200" dirty="0">
-                    <a:solidFill>
-                      <a:schemeClr val="tx1"/>
-                    </a:solidFill>
-                    <a:effectLst/>
-                    <a:latin typeface="+mn-lt"/>
-                    <a:ea typeface="+mn-ea"/>
-                    <a:cs typeface="+mn-cs"/>
-                  </a:rPr>
-                  <a:t> </a:t>
-                </a:r>
-                <a:r>
-                  <a:rPr lang="en-US" sz="1200" kern="1200" dirty="0" err="1">
-                    <a:solidFill>
-                      <a:schemeClr val="tx1"/>
-                    </a:solidFill>
-                    <a:effectLst/>
-                    <a:latin typeface="+mn-lt"/>
-                    <a:ea typeface="+mn-ea"/>
-                    <a:cs typeface="+mn-cs"/>
-                  </a:rPr>
-                  <a:t>R_k</a:t>
-                </a:r>
-                <a:r>
-                  <a:rPr lang="en-US" sz="1200" kern="1200" dirty="0">
-                    <a:solidFill>
-                      <a:schemeClr val="tx1"/>
-                    </a:solidFill>
-                    <a:effectLst/>
-                    <a:latin typeface="+mn-lt"/>
-                    <a:ea typeface="+mn-ea"/>
-                    <a:cs typeface="+mn-cs"/>
-                  </a:rPr>
-                  <a:t> \</a:t>
-                </a:r>
-                <a:r>
-                  <a:rPr lang="en-US" sz="1200" kern="1200" dirty="0" err="1">
-                    <a:solidFill>
-                      <a:schemeClr val="tx1"/>
-                    </a:solidFill>
-                    <a:effectLst/>
-                    <a:latin typeface="+mn-lt"/>
-                    <a:ea typeface="+mn-ea"/>
-                    <a:cs typeface="+mn-cs"/>
-                  </a:rPr>
-                  <a:t>u_k</a:t>
-                </a:r>
-                <a:r>
-                  <a:rPr lang="en-US" sz="1200" kern="1200" dirty="0">
-                    <a:solidFill>
-                      <a:schemeClr val="tx1"/>
-                    </a:solidFill>
-                    <a:effectLst/>
-                    <a:latin typeface="+mn-lt"/>
-                    <a:ea typeface="+mn-ea"/>
-                    <a:cs typeface="+mn-cs"/>
-                  </a:rPr>
-                  <a:t> + (</a:t>
-                </a:r>
-                <a:r>
-                  <a:rPr lang="en-US" sz="1200" kern="1200" dirty="0" err="1">
-                    <a:solidFill>
-                      <a:schemeClr val="tx1"/>
-                    </a:solidFill>
-                    <a:effectLst/>
-                    <a:latin typeface="+mn-lt"/>
-                    <a:ea typeface="+mn-ea"/>
-                    <a:cs typeface="+mn-cs"/>
-                  </a:rPr>
-                  <a:t>A_k</a:t>
-                </a:r>
-                <a:r>
-                  <a:rPr lang="en-US" sz="1200" kern="1200" dirty="0">
-                    <a:solidFill>
-                      <a:schemeClr val="tx1"/>
-                    </a:solidFill>
-                    <a:effectLst/>
-                    <a:latin typeface="+mn-lt"/>
-                    <a:ea typeface="+mn-ea"/>
-                    <a:cs typeface="+mn-cs"/>
-                  </a:rPr>
-                  <a:t>\</a:t>
-                </a:r>
-                <a:r>
-                  <a:rPr lang="en-US" sz="1200" kern="1200" dirty="0" err="1">
-                    <a:solidFill>
-                      <a:schemeClr val="tx1"/>
-                    </a:solidFill>
-                    <a:effectLst/>
-                    <a:latin typeface="+mn-lt"/>
-                    <a:ea typeface="+mn-ea"/>
-                    <a:cs typeface="+mn-cs"/>
-                  </a:rPr>
-                  <a:t>x_k</a:t>
-                </a:r>
-                <a:r>
-                  <a:rPr lang="en-US" sz="1200" kern="1200" dirty="0">
-                    <a:solidFill>
-                      <a:schemeClr val="tx1"/>
-                    </a:solidFill>
-                    <a:effectLst/>
-                    <a:latin typeface="+mn-lt"/>
-                    <a:ea typeface="+mn-ea"/>
-                    <a:cs typeface="+mn-cs"/>
-                  </a:rPr>
-                  <a:t> + </a:t>
-                </a:r>
-                <a:r>
-                  <a:rPr lang="en-US" sz="1200" kern="1200" dirty="0" err="1">
-                    <a:solidFill>
-                      <a:schemeClr val="tx1"/>
-                    </a:solidFill>
-                    <a:effectLst/>
-                    <a:latin typeface="+mn-lt"/>
-                    <a:ea typeface="+mn-ea"/>
-                    <a:cs typeface="+mn-cs"/>
-                  </a:rPr>
-                  <a:t>B_k</a:t>
-                </a:r>
-                <a:r>
-                  <a:rPr lang="en-US" sz="1200" kern="1200" dirty="0">
-                    <a:solidFill>
-                      <a:schemeClr val="tx1"/>
-                    </a:solidFill>
-                    <a:effectLst/>
-                    <a:latin typeface="+mn-lt"/>
-                    <a:ea typeface="+mn-ea"/>
-                    <a:cs typeface="+mn-cs"/>
-                  </a:rPr>
-                  <a:t>\</a:t>
-                </a:r>
-                <a:r>
-                  <a:rPr lang="en-US" sz="1200" kern="1200" dirty="0" err="1">
-                    <a:solidFill>
-                      <a:schemeClr val="tx1"/>
-                    </a:solidFill>
-                    <a:effectLst/>
-                    <a:latin typeface="+mn-lt"/>
-                    <a:ea typeface="+mn-ea"/>
-                    <a:cs typeface="+mn-cs"/>
-                  </a:rPr>
-                  <a:t>u_k</a:t>
-                </a:r>
-                <a:r>
-                  <a:rPr lang="en-US" sz="1200" kern="1200" dirty="0">
-                    <a:solidFill>
-                      <a:schemeClr val="tx1"/>
-                    </a:solidFill>
-                    <a:effectLst/>
-                    <a:latin typeface="+mn-lt"/>
-                    <a:ea typeface="+mn-ea"/>
-                    <a:cs typeface="+mn-cs"/>
-                  </a:rPr>
-                  <a:t>)^T P_{k+1}(</a:t>
-                </a:r>
-                <a:r>
-                  <a:rPr lang="en-US" sz="1200" kern="1200" dirty="0" err="1">
-                    <a:solidFill>
-                      <a:schemeClr val="tx1"/>
-                    </a:solidFill>
-                    <a:effectLst/>
-                    <a:latin typeface="+mn-lt"/>
-                    <a:ea typeface="+mn-ea"/>
-                    <a:cs typeface="+mn-cs"/>
-                  </a:rPr>
-                  <a:t>A_k</a:t>
-                </a:r>
-                <a:r>
-                  <a:rPr lang="en-US" sz="1200" kern="1200" dirty="0">
-                    <a:solidFill>
-                      <a:schemeClr val="tx1"/>
-                    </a:solidFill>
-                    <a:effectLst/>
-                    <a:latin typeface="+mn-lt"/>
-                    <a:ea typeface="+mn-ea"/>
-                    <a:cs typeface="+mn-cs"/>
-                  </a:rPr>
-                  <a:t>\</a:t>
-                </a:r>
-                <a:r>
-                  <a:rPr lang="en-US" sz="1200" kern="1200" dirty="0" err="1">
-                    <a:solidFill>
-                      <a:schemeClr val="tx1"/>
-                    </a:solidFill>
-                    <a:effectLst/>
-                    <a:latin typeface="+mn-lt"/>
-                    <a:ea typeface="+mn-ea"/>
-                    <a:cs typeface="+mn-cs"/>
-                  </a:rPr>
-                  <a:t>x_k</a:t>
-                </a:r>
-                <a:r>
-                  <a:rPr lang="en-US" sz="1200" kern="1200" dirty="0">
-                    <a:solidFill>
-                      <a:schemeClr val="tx1"/>
-                    </a:solidFill>
-                    <a:effectLst/>
-                    <a:latin typeface="+mn-lt"/>
-                    <a:ea typeface="+mn-ea"/>
-                    <a:cs typeface="+mn-cs"/>
-                  </a:rPr>
-                  <a:t> + </a:t>
-                </a:r>
-                <a:r>
-                  <a:rPr lang="en-US" sz="1200" kern="1200" dirty="0" err="1">
-                    <a:solidFill>
-                      <a:schemeClr val="tx1"/>
-                    </a:solidFill>
-                    <a:effectLst/>
-                    <a:latin typeface="+mn-lt"/>
-                    <a:ea typeface="+mn-ea"/>
-                    <a:cs typeface="+mn-cs"/>
-                  </a:rPr>
-                  <a:t>B_k</a:t>
-                </a:r>
-                <a:r>
-                  <a:rPr lang="en-US" sz="1200" kern="1200" dirty="0">
-                    <a:solidFill>
-                      <a:schemeClr val="tx1"/>
-                    </a:solidFill>
-                    <a:effectLst/>
-                    <a:latin typeface="+mn-lt"/>
-                    <a:ea typeface="+mn-ea"/>
-                    <a:cs typeface="+mn-cs"/>
-                  </a:rPr>
-                  <a:t>\</a:t>
-                </a:r>
-                <a:r>
-                  <a:rPr lang="en-US" sz="1200" kern="1200" dirty="0" err="1">
-                    <a:solidFill>
-                      <a:schemeClr val="tx1"/>
-                    </a:solidFill>
-                    <a:effectLst/>
-                    <a:latin typeface="+mn-lt"/>
-                    <a:ea typeface="+mn-ea"/>
-                    <a:cs typeface="+mn-cs"/>
-                  </a:rPr>
-                  <a:t>u_k</a:t>
-                </a:r>
-                <a:r>
-                  <a:rPr lang="en-US" sz="1200" kern="1200" dirty="0">
-                    <a:solidFill>
-                      <a:schemeClr val="tx1"/>
-                    </a:solidFill>
-                    <a:effectLst/>
-                    <a:latin typeface="+mn-lt"/>
-                    <a:ea typeface="+mn-ea"/>
-                    <a:cs typeface="+mn-cs"/>
-                  </a:rPr>
-                  <a:t>)\right.\\</a:t>
-                </a:r>
-              </a:p>
-              <a:p>
-                <a:r>
-                  <a:rPr lang="en-US" sz="1200" kern="1200" dirty="0">
-                    <a:solidFill>
-                      <a:schemeClr val="tx1"/>
-                    </a:solidFill>
-                    <a:effectLst/>
-                    <a:latin typeface="+mn-lt"/>
-                    <a:ea typeface="+mn-ea"/>
-                    <a:cs typeface="+mn-cs"/>
-                  </a:rPr>
-                  <a:t>                  &amp;\</a:t>
-                </a:r>
-                <a:r>
-                  <a:rPr lang="en-US" sz="1200" kern="1200" dirty="0" err="1">
-                    <a:solidFill>
-                      <a:schemeClr val="tx1"/>
-                    </a:solidFill>
-                    <a:effectLst/>
-                    <a:latin typeface="+mn-lt"/>
-                    <a:ea typeface="+mn-ea"/>
-                    <a:cs typeface="+mn-cs"/>
-                  </a:rPr>
-                  <a:t>qquad</a:t>
-                </a:r>
-                <a:r>
-                  <a:rPr lang="en-US" sz="1200" kern="1200" dirty="0">
-                    <a:solidFill>
-                      <a:schemeClr val="tx1"/>
-                    </a:solidFill>
-                    <a:effectLst/>
-                    <a:latin typeface="+mn-lt"/>
-                    <a:ea typeface="+mn-ea"/>
-                    <a:cs typeface="+mn-cs"/>
-                  </a:rPr>
-                  <a:t>\</a:t>
-                </a:r>
-                <a:r>
-                  <a:rPr lang="en-US" sz="1200" kern="1200" dirty="0" err="1">
-                    <a:solidFill>
-                      <a:schemeClr val="tx1"/>
-                    </a:solidFill>
-                    <a:effectLst/>
-                    <a:latin typeface="+mn-lt"/>
-                    <a:ea typeface="+mn-ea"/>
-                    <a:cs typeface="+mn-cs"/>
-                  </a:rPr>
-                  <a:t>qquad</a:t>
-                </a:r>
-                <a:r>
-                  <a:rPr lang="en-US" sz="1200" kern="1200" dirty="0">
-                    <a:solidFill>
-                      <a:schemeClr val="tx1"/>
-                    </a:solidFill>
-                    <a:effectLst/>
-                    <a:latin typeface="+mn-lt"/>
-                    <a:ea typeface="+mn-ea"/>
-                    <a:cs typeface="+mn-cs"/>
-                  </a:rPr>
-                  <a:t>\</a:t>
-                </a:r>
-                <a:r>
-                  <a:rPr lang="en-US" sz="1200" kern="1200" dirty="0" err="1">
-                    <a:solidFill>
-                      <a:schemeClr val="tx1"/>
-                    </a:solidFill>
-                    <a:effectLst/>
-                    <a:latin typeface="+mn-lt"/>
-                    <a:ea typeface="+mn-ea"/>
-                    <a:cs typeface="+mn-cs"/>
-                  </a:rPr>
-                  <a:t>qquad</a:t>
-                </a:r>
-                <a:r>
-                  <a:rPr lang="en-US" sz="1200" kern="1200" dirty="0">
-                    <a:solidFill>
-                      <a:schemeClr val="tx1"/>
-                    </a:solidFill>
-                    <a:effectLst/>
-                    <a:latin typeface="+mn-lt"/>
-                    <a:ea typeface="+mn-ea"/>
-                    <a:cs typeface="+mn-cs"/>
-                  </a:rPr>
-                  <a:t>\</a:t>
-                </a:r>
-                <a:r>
-                  <a:rPr lang="en-US" sz="1200" kern="1200" dirty="0" err="1">
-                    <a:solidFill>
-                      <a:schemeClr val="tx1"/>
-                    </a:solidFill>
-                    <a:effectLst/>
-                    <a:latin typeface="+mn-lt"/>
-                    <a:ea typeface="+mn-ea"/>
-                    <a:cs typeface="+mn-cs"/>
-                  </a:rPr>
-                  <a:t>qquad</a:t>
-                </a:r>
-                <a:r>
-                  <a:rPr lang="en-US" sz="1200" kern="1200" dirty="0">
-                    <a:solidFill>
-                      <a:schemeClr val="tx1"/>
-                    </a:solidFill>
-                    <a:effectLst/>
-                    <a:latin typeface="+mn-lt"/>
-                    <a:ea typeface="+mn-ea"/>
-                    <a:cs typeface="+mn-cs"/>
-                  </a:rPr>
-                  <a:t>\left. 2(</a:t>
-                </a:r>
-                <a:r>
-                  <a:rPr lang="en-US" sz="1200" kern="1200" dirty="0" err="1">
-                    <a:solidFill>
-                      <a:schemeClr val="tx1"/>
-                    </a:solidFill>
-                    <a:effectLst/>
-                    <a:latin typeface="+mn-lt"/>
-                    <a:ea typeface="+mn-ea"/>
-                    <a:cs typeface="+mn-cs"/>
-                  </a:rPr>
-                  <a:t>A_k</a:t>
-                </a:r>
-                <a:r>
-                  <a:rPr lang="en-US" sz="1200" kern="1200" dirty="0">
-                    <a:solidFill>
-                      <a:schemeClr val="tx1"/>
-                    </a:solidFill>
-                    <a:effectLst/>
-                    <a:latin typeface="+mn-lt"/>
-                    <a:ea typeface="+mn-ea"/>
-                    <a:cs typeface="+mn-cs"/>
-                  </a:rPr>
-                  <a:t>\</a:t>
-                </a:r>
-                <a:r>
-                  <a:rPr lang="en-US" sz="1200" kern="1200" dirty="0" err="1">
-                    <a:solidFill>
-                      <a:schemeClr val="tx1"/>
-                    </a:solidFill>
-                    <a:effectLst/>
-                    <a:latin typeface="+mn-lt"/>
-                    <a:ea typeface="+mn-ea"/>
-                    <a:cs typeface="+mn-cs"/>
-                  </a:rPr>
-                  <a:t>x_k</a:t>
-                </a:r>
-                <a:r>
-                  <a:rPr lang="en-US" sz="1200" kern="1200" dirty="0">
-                    <a:solidFill>
-                      <a:schemeClr val="tx1"/>
-                    </a:solidFill>
-                    <a:effectLst/>
-                    <a:latin typeface="+mn-lt"/>
-                    <a:ea typeface="+mn-ea"/>
-                    <a:cs typeface="+mn-cs"/>
-                  </a:rPr>
-                  <a:t> + </a:t>
-                </a:r>
-                <a:r>
-                  <a:rPr lang="en-US" sz="1200" kern="1200" dirty="0" err="1">
-                    <a:solidFill>
-                      <a:schemeClr val="tx1"/>
-                    </a:solidFill>
-                    <a:effectLst/>
-                    <a:latin typeface="+mn-lt"/>
-                    <a:ea typeface="+mn-ea"/>
-                    <a:cs typeface="+mn-cs"/>
-                  </a:rPr>
-                  <a:t>B_k</a:t>
-                </a:r>
-                <a:r>
-                  <a:rPr lang="en-US" sz="1200" kern="1200" dirty="0">
-                    <a:solidFill>
-                      <a:schemeClr val="tx1"/>
-                    </a:solidFill>
-                    <a:effectLst/>
-                    <a:latin typeface="+mn-lt"/>
-                    <a:ea typeface="+mn-ea"/>
-                    <a:cs typeface="+mn-cs"/>
-                  </a:rPr>
-                  <a:t>\</a:t>
-                </a:r>
-                <a:r>
-                  <a:rPr lang="en-US" sz="1200" kern="1200" dirty="0" err="1">
-                    <a:solidFill>
-                      <a:schemeClr val="tx1"/>
-                    </a:solidFill>
-                    <a:effectLst/>
-                    <a:latin typeface="+mn-lt"/>
-                    <a:ea typeface="+mn-ea"/>
-                    <a:cs typeface="+mn-cs"/>
-                  </a:rPr>
-                  <a:t>u_k</a:t>
-                </a:r>
-                <a:r>
-                  <a:rPr lang="en-US" sz="1200" kern="1200" dirty="0">
-                    <a:solidFill>
-                      <a:schemeClr val="tx1"/>
-                    </a:solidFill>
-                    <a:effectLst/>
-                    <a:latin typeface="+mn-lt"/>
-                    <a:ea typeface="+mn-ea"/>
-                    <a:cs typeface="+mn-cs"/>
-                  </a:rPr>
-                  <a:t>)^T P_{k+1}\</a:t>
-                </a:r>
-                <a:r>
-                  <a:rPr lang="en-US" sz="1200" kern="1200" dirty="0" err="1">
-                    <a:solidFill>
-                      <a:schemeClr val="tx1"/>
-                    </a:solidFill>
-                    <a:effectLst/>
-                    <a:latin typeface="+mn-lt"/>
-                    <a:ea typeface="+mn-ea"/>
-                    <a:cs typeface="+mn-cs"/>
-                  </a:rPr>
-                  <a:t>w_k</a:t>
-                </a:r>
-                <a:r>
-                  <a:rPr lang="en-US" sz="1200" kern="1200" dirty="0">
-                    <a:solidFill>
-                      <a:schemeClr val="tx1"/>
-                    </a:solidFill>
-                    <a:effectLst/>
-                    <a:latin typeface="+mn-lt"/>
-                    <a:ea typeface="+mn-ea"/>
-                    <a:cs typeface="+mn-cs"/>
-                  </a:rPr>
-                  <a:t> + \</a:t>
-                </a:r>
-                <a:r>
-                  <a:rPr lang="en-US" sz="1200" kern="1200" dirty="0" err="1">
-                    <a:solidFill>
-                      <a:schemeClr val="tx1"/>
-                    </a:solidFill>
-                    <a:effectLst/>
-                    <a:latin typeface="+mn-lt"/>
-                    <a:ea typeface="+mn-ea"/>
-                    <a:cs typeface="+mn-cs"/>
-                  </a:rPr>
-                  <a:t>w_k^T</a:t>
-                </a:r>
-                <a:r>
-                  <a:rPr lang="en-US" sz="1200" kern="1200" dirty="0">
-                    <a:solidFill>
-                      <a:schemeClr val="tx1"/>
-                    </a:solidFill>
-                    <a:effectLst/>
-                    <a:latin typeface="+mn-lt"/>
-                    <a:ea typeface="+mn-ea"/>
-                    <a:cs typeface="+mn-cs"/>
-                  </a:rPr>
-                  <a:t> P_{k+1}\</a:t>
-                </a:r>
-                <a:r>
-                  <a:rPr lang="en-US" sz="1200" kern="1200" dirty="0" err="1">
-                    <a:solidFill>
-                      <a:schemeClr val="tx1"/>
-                    </a:solidFill>
-                    <a:effectLst/>
-                    <a:latin typeface="+mn-lt"/>
-                    <a:ea typeface="+mn-ea"/>
-                    <a:cs typeface="+mn-cs"/>
-                  </a:rPr>
-                  <a:t>w_k</a:t>
-                </a:r>
-                <a:r>
-                  <a:rPr lang="en-US" sz="1200" kern="1200" dirty="0">
-                    <a:solidFill>
-                      <a:schemeClr val="tx1"/>
-                    </a:solidFill>
-                    <a:effectLst/>
-                    <a:latin typeface="+mn-lt"/>
-                    <a:ea typeface="+mn-ea"/>
-                    <a:cs typeface="+mn-cs"/>
-                  </a:rPr>
-                  <a:t> \right]\\</a:t>
-                </a:r>
-              </a:p>
-              <a:p>
-                <a:r>
-                  <a:rPr lang="en-US" sz="1200" kern="1200" dirty="0">
-                    <a:solidFill>
-                      <a:schemeClr val="tx1"/>
-                    </a:solidFill>
-                    <a:effectLst/>
-                    <a:latin typeface="+mn-lt"/>
-                    <a:ea typeface="+mn-ea"/>
-                    <a:cs typeface="+mn-cs"/>
-                  </a:rPr>
-                  <a:t>                  &amp;= \min_{\</a:t>
-                </a:r>
-                <a:r>
-                  <a:rPr lang="en-US" sz="1200" kern="1200" dirty="0" err="1">
-                    <a:solidFill>
-                      <a:schemeClr val="tx1"/>
-                    </a:solidFill>
-                    <a:effectLst/>
-                    <a:latin typeface="+mn-lt"/>
-                    <a:ea typeface="+mn-ea"/>
-                    <a:cs typeface="+mn-cs"/>
-                  </a:rPr>
-                  <a:t>u_k</a:t>
-                </a:r>
-                <a:r>
-                  <a:rPr lang="en-US" sz="1200" kern="1200" dirty="0">
-                    <a:solidFill>
-                      <a:schemeClr val="tx1"/>
-                    </a:solidFill>
-                    <a:effectLst/>
-                    <a:latin typeface="+mn-lt"/>
-                    <a:ea typeface="+mn-ea"/>
-                    <a:cs typeface="+mn-cs"/>
-                  </a:rPr>
-                  <a:t>}\frac{1}{2}\left(\</a:t>
-                </a:r>
-                <a:r>
-                  <a:rPr lang="en-US" sz="1200" kern="1200" dirty="0" err="1">
-                    <a:solidFill>
-                      <a:schemeClr val="tx1"/>
-                    </a:solidFill>
-                    <a:effectLst/>
-                    <a:latin typeface="+mn-lt"/>
-                    <a:ea typeface="+mn-ea"/>
-                    <a:cs typeface="+mn-cs"/>
-                  </a:rPr>
-                  <a:t>x_k^T</a:t>
-                </a:r>
-                <a:r>
-                  <a:rPr lang="en-US" sz="1200" kern="1200" dirty="0">
-                    <a:solidFill>
-                      <a:schemeClr val="tx1"/>
-                    </a:solidFill>
-                    <a:effectLst/>
-                    <a:latin typeface="+mn-lt"/>
-                    <a:ea typeface="+mn-ea"/>
-                    <a:cs typeface="+mn-cs"/>
-                  </a:rPr>
-                  <a:t> </a:t>
-                </a:r>
-                <a:r>
-                  <a:rPr lang="en-US" sz="1200" kern="1200" dirty="0" err="1">
-                    <a:solidFill>
-                      <a:schemeClr val="tx1"/>
-                    </a:solidFill>
-                    <a:effectLst/>
-                    <a:latin typeface="+mn-lt"/>
-                    <a:ea typeface="+mn-ea"/>
-                    <a:cs typeface="+mn-cs"/>
-                  </a:rPr>
-                  <a:t>Q_k</a:t>
-                </a:r>
-                <a:r>
-                  <a:rPr lang="en-US" sz="1200" kern="1200" dirty="0">
-                    <a:solidFill>
-                      <a:schemeClr val="tx1"/>
-                    </a:solidFill>
-                    <a:effectLst/>
-                    <a:latin typeface="+mn-lt"/>
-                    <a:ea typeface="+mn-ea"/>
-                    <a:cs typeface="+mn-cs"/>
-                  </a:rPr>
-                  <a:t> \</a:t>
-                </a:r>
-                <a:r>
-                  <a:rPr lang="en-US" sz="1200" kern="1200" dirty="0" err="1">
-                    <a:solidFill>
-                      <a:schemeClr val="tx1"/>
-                    </a:solidFill>
-                    <a:effectLst/>
-                    <a:latin typeface="+mn-lt"/>
-                    <a:ea typeface="+mn-ea"/>
-                    <a:cs typeface="+mn-cs"/>
-                  </a:rPr>
-                  <a:t>x_k</a:t>
-                </a:r>
-                <a:r>
-                  <a:rPr lang="en-US" sz="1200" kern="1200" dirty="0">
-                    <a:solidFill>
-                      <a:schemeClr val="tx1"/>
-                    </a:solidFill>
-                    <a:effectLst/>
-                    <a:latin typeface="+mn-lt"/>
-                    <a:ea typeface="+mn-ea"/>
-                    <a:cs typeface="+mn-cs"/>
-                  </a:rPr>
-                  <a:t> + \</a:t>
-                </a:r>
-                <a:r>
-                  <a:rPr lang="en-US" sz="1200" kern="1200" dirty="0" err="1">
-                    <a:solidFill>
-                      <a:schemeClr val="tx1"/>
-                    </a:solidFill>
-                    <a:effectLst/>
-                    <a:latin typeface="+mn-lt"/>
-                    <a:ea typeface="+mn-ea"/>
-                    <a:cs typeface="+mn-cs"/>
-                  </a:rPr>
-                  <a:t>u_k^T</a:t>
-                </a:r>
-                <a:r>
-                  <a:rPr lang="en-US" sz="1200" kern="1200" dirty="0">
-                    <a:solidFill>
-                      <a:schemeClr val="tx1"/>
-                    </a:solidFill>
-                    <a:effectLst/>
-                    <a:latin typeface="+mn-lt"/>
-                    <a:ea typeface="+mn-ea"/>
-                    <a:cs typeface="+mn-cs"/>
-                  </a:rPr>
-                  <a:t> </a:t>
-                </a:r>
-                <a:r>
-                  <a:rPr lang="en-US" sz="1200" kern="1200" dirty="0" err="1">
-                    <a:solidFill>
-                      <a:schemeClr val="tx1"/>
-                    </a:solidFill>
-                    <a:effectLst/>
-                    <a:latin typeface="+mn-lt"/>
-                    <a:ea typeface="+mn-ea"/>
-                    <a:cs typeface="+mn-cs"/>
-                  </a:rPr>
-                  <a:t>R_k</a:t>
-                </a:r>
-                <a:r>
-                  <a:rPr lang="en-US" sz="1200" kern="1200" dirty="0">
-                    <a:solidFill>
-                      <a:schemeClr val="tx1"/>
-                    </a:solidFill>
-                    <a:effectLst/>
-                    <a:latin typeface="+mn-lt"/>
-                    <a:ea typeface="+mn-ea"/>
-                    <a:cs typeface="+mn-cs"/>
-                  </a:rPr>
-                  <a:t> \</a:t>
-                </a:r>
-                <a:r>
-                  <a:rPr lang="en-US" sz="1200" kern="1200" dirty="0" err="1">
-                    <a:solidFill>
-                      <a:schemeClr val="tx1"/>
-                    </a:solidFill>
-                    <a:effectLst/>
-                    <a:latin typeface="+mn-lt"/>
-                    <a:ea typeface="+mn-ea"/>
-                    <a:cs typeface="+mn-cs"/>
-                  </a:rPr>
-                  <a:t>u_k</a:t>
-                </a:r>
-                <a:r>
-                  <a:rPr lang="en-US" sz="1200" kern="1200" dirty="0">
-                    <a:solidFill>
-                      <a:schemeClr val="tx1"/>
-                    </a:solidFill>
-                    <a:effectLst/>
-                    <a:latin typeface="+mn-lt"/>
-                    <a:ea typeface="+mn-ea"/>
-                    <a:cs typeface="+mn-cs"/>
-                  </a:rPr>
-                  <a:t> + (</a:t>
-                </a:r>
-                <a:r>
-                  <a:rPr lang="en-US" sz="1200" kern="1200" dirty="0" err="1">
-                    <a:solidFill>
-                      <a:schemeClr val="tx1"/>
-                    </a:solidFill>
-                    <a:effectLst/>
-                    <a:latin typeface="+mn-lt"/>
-                    <a:ea typeface="+mn-ea"/>
-                    <a:cs typeface="+mn-cs"/>
-                  </a:rPr>
-                  <a:t>A_k</a:t>
-                </a:r>
-                <a:r>
-                  <a:rPr lang="en-US" sz="1200" kern="1200" dirty="0">
-                    <a:solidFill>
-                      <a:schemeClr val="tx1"/>
-                    </a:solidFill>
-                    <a:effectLst/>
-                    <a:latin typeface="+mn-lt"/>
-                    <a:ea typeface="+mn-ea"/>
-                    <a:cs typeface="+mn-cs"/>
-                  </a:rPr>
-                  <a:t>\</a:t>
-                </a:r>
-                <a:r>
-                  <a:rPr lang="en-US" sz="1200" kern="1200" dirty="0" err="1">
-                    <a:solidFill>
-                      <a:schemeClr val="tx1"/>
-                    </a:solidFill>
-                    <a:effectLst/>
-                    <a:latin typeface="+mn-lt"/>
-                    <a:ea typeface="+mn-ea"/>
-                    <a:cs typeface="+mn-cs"/>
-                  </a:rPr>
-                  <a:t>x_k</a:t>
-                </a:r>
-                <a:r>
-                  <a:rPr lang="en-US" sz="1200" kern="1200" dirty="0">
-                    <a:solidFill>
-                      <a:schemeClr val="tx1"/>
-                    </a:solidFill>
-                    <a:effectLst/>
-                    <a:latin typeface="+mn-lt"/>
-                    <a:ea typeface="+mn-ea"/>
-                    <a:cs typeface="+mn-cs"/>
-                  </a:rPr>
-                  <a:t> + </a:t>
-                </a:r>
-                <a:r>
-                  <a:rPr lang="en-US" sz="1200" kern="1200" dirty="0" err="1">
-                    <a:solidFill>
-                      <a:schemeClr val="tx1"/>
-                    </a:solidFill>
-                    <a:effectLst/>
-                    <a:latin typeface="+mn-lt"/>
-                    <a:ea typeface="+mn-ea"/>
-                    <a:cs typeface="+mn-cs"/>
-                  </a:rPr>
-                  <a:t>B_k</a:t>
-                </a:r>
-                <a:r>
-                  <a:rPr lang="en-US" sz="1200" kern="1200" dirty="0">
-                    <a:solidFill>
-                      <a:schemeClr val="tx1"/>
-                    </a:solidFill>
-                    <a:effectLst/>
-                    <a:latin typeface="+mn-lt"/>
-                    <a:ea typeface="+mn-ea"/>
-                    <a:cs typeface="+mn-cs"/>
-                  </a:rPr>
-                  <a:t>\</a:t>
-                </a:r>
-                <a:r>
-                  <a:rPr lang="en-US" sz="1200" kern="1200" dirty="0" err="1">
-                    <a:solidFill>
-                      <a:schemeClr val="tx1"/>
-                    </a:solidFill>
-                    <a:effectLst/>
-                    <a:latin typeface="+mn-lt"/>
-                    <a:ea typeface="+mn-ea"/>
-                    <a:cs typeface="+mn-cs"/>
-                  </a:rPr>
-                  <a:t>u_k</a:t>
-                </a:r>
-                <a:r>
-                  <a:rPr lang="en-US" sz="1200" kern="1200" dirty="0">
-                    <a:solidFill>
-                      <a:schemeClr val="tx1"/>
-                    </a:solidFill>
-                    <a:effectLst/>
-                    <a:latin typeface="+mn-lt"/>
-                    <a:ea typeface="+mn-ea"/>
-                    <a:cs typeface="+mn-cs"/>
-                  </a:rPr>
-                  <a:t>)^T P_{k+1}(</a:t>
-                </a:r>
-                <a:r>
-                  <a:rPr lang="en-US" sz="1200" kern="1200" dirty="0" err="1">
-                    <a:solidFill>
-                      <a:schemeClr val="tx1"/>
-                    </a:solidFill>
-                    <a:effectLst/>
-                    <a:latin typeface="+mn-lt"/>
-                    <a:ea typeface="+mn-ea"/>
-                    <a:cs typeface="+mn-cs"/>
-                  </a:rPr>
-                  <a:t>A_k</a:t>
-                </a:r>
-                <a:r>
-                  <a:rPr lang="en-US" sz="1200" kern="1200" dirty="0">
-                    <a:solidFill>
-                      <a:schemeClr val="tx1"/>
-                    </a:solidFill>
-                    <a:effectLst/>
-                    <a:latin typeface="+mn-lt"/>
-                    <a:ea typeface="+mn-ea"/>
-                    <a:cs typeface="+mn-cs"/>
-                  </a:rPr>
-                  <a:t>\</a:t>
-                </a:r>
-                <a:r>
-                  <a:rPr lang="en-US" sz="1200" kern="1200" dirty="0" err="1">
-                    <a:solidFill>
-                      <a:schemeClr val="tx1"/>
-                    </a:solidFill>
-                    <a:effectLst/>
-                    <a:latin typeface="+mn-lt"/>
-                    <a:ea typeface="+mn-ea"/>
-                    <a:cs typeface="+mn-cs"/>
-                  </a:rPr>
-                  <a:t>x_k</a:t>
-                </a:r>
-                <a:r>
-                  <a:rPr lang="en-US" sz="1200" kern="1200" dirty="0">
-                    <a:solidFill>
-                      <a:schemeClr val="tx1"/>
-                    </a:solidFill>
-                    <a:effectLst/>
-                    <a:latin typeface="+mn-lt"/>
-                    <a:ea typeface="+mn-ea"/>
-                    <a:cs typeface="+mn-cs"/>
-                  </a:rPr>
-                  <a:t> + </a:t>
-                </a:r>
-                <a:r>
-                  <a:rPr lang="en-US" sz="1200" kern="1200" dirty="0" err="1">
-                    <a:solidFill>
-                      <a:schemeClr val="tx1"/>
-                    </a:solidFill>
-                    <a:effectLst/>
-                    <a:latin typeface="+mn-lt"/>
-                    <a:ea typeface="+mn-ea"/>
-                    <a:cs typeface="+mn-cs"/>
-                  </a:rPr>
-                  <a:t>B_k</a:t>
-                </a:r>
-                <a:r>
-                  <a:rPr lang="en-US" sz="1200" kern="1200" dirty="0">
-                    <a:solidFill>
-                      <a:schemeClr val="tx1"/>
-                    </a:solidFill>
-                    <a:effectLst/>
-                    <a:latin typeface="+mn-lt"/>
-                    <a:ea typeface="+mn-ea"/>
-                    <a:cs typeface="+mn-cs"/>
-                  </a:rPr>
-                  <a:t>\</a:t>
-                </a:r>
-                <a:r>
-                  <a:rPr lang="en-US" sz="1200" kern="1200" dirty="0" err="1">
-                    <a:solidFill>
-                      <a:schemeClr val="tx1"/>
-                    </a:solidFill>
-                    <a:effectLst/>
-                    <a:latin typeface="+mn-lt"/>
-                    <a:ea typeface="+mn-ea"/>
-                    <a:cs typeface="+mn-cs"/>
-                  </a:rPr>
-                  <a:t>u_k</a:t>
-                </a:r>
-                <a:r>
-                  <a:rPr lang="en-US" sz="1200" kern="1200" dirty="0">
-                    <a:solidFill>
-                      <a:schemeClr val="tx1"/>
-                    </a:solidFill>
-                    <a:effectLst/>
-                    <a:latin typeface="+mn-lt"/>
-                    <a:ea typeface="+mn-ea"/>
-                    <a:cs typeface="+mn-cs"/>
-                  </a:rPr>
-                  <a:t>) + \</a:t>
-                </a:r>
-                <a:r>
-                  <a:rPr lang="en-US" sz="1200" kern="1200" dirty="0" err="1">
-                    <a:solidFill>
-                      <a:schemeClr val="tx1"/>
-                    </a:solidFill>
-                    <a:effectLst/>
-                    <a:latin typeface="+mn-lt"/>
-                    <a:ea typeface="+mn-ea"/>
-                    <a:cs typeface="+mn-cs"/>
-                  </a:rPr>
-                  <a:t>mathrm</a:t>
-                </a:r>
-                <a:r>
-                  <a:rPr lang="en-US" sz="1200" kern="1200" dirty="0">
-                    <a:solidFill>
-                      <a:schemeClr val="tx1"/>
-                    </a:solidFill>
-                    <a:effectLst/>
-                    <a:latin typeface="+mn-lt"/>
-                    <a:ea typeface="+mn-ea"/>
-                    <a:cs typeface="+mn-cs"/>
-                  </a:rPr>
-                  <a:t>{tr}(P_{k+1}\Sigma_{\</a:t>
-                </a:r>
-                <a:r>
-                  <a:rPr lang="en-US" sz="1200" kern="1200" dirty="0" err="1">
-                    <a:solidFill>
-                      <a:schemeClr val="tx1"/>
-                    </a:solidFill>
-                    <a:effectLst/>
-                    <a:latin typeface="+mn-lt"/>
-                    <a:ea typeface="+mn-ea"/>
-                    <a:cs typeface="+mn-cs"/>
-                  </a:rPr>
-                  <a:t>w_k</a:t>
-                </a:r>
-                <a:r>
-                  <a:rPr lang="en-US" sz="1200" kern="1200" dirty="0">
-                    <a:solidFill>
-                      <a:schemeClr val="tx1"/>
-                    </a:solidFill>
-                    <a:effectLst/>
-                    <a:latin typeface="+mn-lt"/>
-                    <a:ea typeface="+mn-ea"/>
-                    <a:cs typeface="+mn-cs"/>
-                  </a:rPr>
-                  <a:t>})\right)</a:t>
-                </a:r>
-              </a:p>
-              <a:p>
-                <a:pPr marL="0" marR="0" lvl="0" indent="0" algn="l" defTabSz="914400" rtl="0" eaLnBrk="1" fontAlgn="auto" latinLnBrk="0" hangingPunct="1">
-                  <a:lnSpc>
-                    <a:spcPct val="100000"/>
-                  </a:lnSpc>
-                  <a:spcBef>
-                    <a:spcPts val="0"/>
-                  </a:spcBef>
-                  <a:spcAft>
-                    <a:spcPts val="0"/>
-                  </a:spcAft>
-                  <a:buClrTx/>
-                  <a:buSzTx/>
-                  <a:buFontTx/>
-                  <a:buNone/>
-                  <a:tabLst/>
-                  <a:defRPr/>
-                </a:pPr>
-                <a:endParaRPr lang="en-US" sz="1200" kern="1200" dirty="0">
-                  <a:solidFill>
-                    <a:schemeClr val="tx1"/>
-                  </a:solidFill>
-                  <a:effectLst/>
-                  <a:latin typeface="+mn-lt"/>
-                  <a:ea typeface="+mn-ea"/>
-                  <a:cs typeface="+mn-cs"/>
-                </a:endParaRPr>
-              </a:p>
-              <a:p>
-                <a:endParaRPr lang="en-US" dirty="0"/>
-              </a:p>
-            </p:txBody>
-          </p:sp>
-        </mc:Choice>
-        <mc:Fallback>
-          <p:sp>
-            <p:nvSpPr>
-              <p:cNvPr id="3" name="Notes Placeholder 2"/>
-              <p:cNvSpPr>
-                <a:spLocks noGrp="1"/>
-              </p:cNvSpPr>
-              <p:nvPr>
-                <p:ph type="body" idx="1"/>
-              </p:nvPr>
-            </p:nvSpPr>
-            <p:spPr/>
-            <p:txBody>
-              <a:bodyPr/>
-              <a:lstStyle/>
-              <a:p>
-                <a:pPr algn="l"/>
-                <a:r>
-                  <a:rPr lang="en-US" dirty="0">
-                    <a:effectLst/>
-                  </a:rPr>
-                  <a:t>E⁡[𝜀^𝑇</a:t>
-                </a:r>
-                <a:r>
-                  <a:rPr lang="el-GR" dirty="0">
-                    <a:effectLst/>
-                  </a:rPr>
-                  <a:t>Λ𝜀]=</a:t>
-                </a:r>
-                <a:r>
-                  <a:rPr lang="en-US" dirty="0">
-                    <a:effectLst/>
-                  </a:rPr>
-                  <a:t>tr[</a:t>
-                </a:r>
-                <a:r>
-                  <a:rPr lang="el-GR" dirty="0">
-                    <a:effectLst/>
-                  </a:rPr>
-                  <a:t>ΛΣ]</a:t>
-                </a:r>
-                <a:r>
-                  <a:rPr lang="en-US" dirty="0">
-                    <a:effectLst/>
-                  </a:rPr>
-                  <a:t> </a:t>
-                </a:r>
-                <a:r>
-                  <a:rPr lang="el-GR" dirty="0">
-                    <a:effectLst/>
-                  </a:rPr>
-                  <a:t>+</a:t>
-                </a:r>
-                <a:r>
-                  <a:rPr lang="en-US" dirty="0">
-                    <a:effectLst/>
-                  </a:rPr>
-                  <a:t> </a:t>
-                </a:r>
-                <a:r>
-                  <a:rPr lang="el-GR" dirty="0">
-                    <a:effectLst/>
-                  </a:rPr>
-                  <a:t>𝜇𝑇Λ𝜇</a:t>
-                </a:r>
-                <a:r>
-                  <a:rPr lang="en-US" dirty="0">
-                    <a:effectLst/>
-                  </a:rPr>
-                  <a:t> </a:t>
-                </a:r>
-                <a:r>
-                  <a:rPr lang="en-US" b="0" i="0" dirty="0">
-                    <a:solidFill>
-                      <a:srgbClr val="202122"/>
-                    </a:solidFill>
-                    <a:effectLst/>
-                    <a:highlight>
-                      <a:srgbClr val="FFFFFF"/>
-                    </a:highlight>
-                    <a:latin typeface="Arial" panose="020B0604020202020204" pitchFamily="34" charset="0"/>
-                  </a:rPr>
-                  <a:t>where 𝜇 and </a:t>
-                </a:r>
-                <a:r>
-                  <a:rPr lang="el-GR" b="0" i="0" dirty="0">
-                    <a:solidFill>
-                      <a:srgbClr val="202122"/>
-                    </a:solidFill>
-                    <a:effectLst/>
-                    <a:highlight>
-                      <a:srgbClr val="FFFFFF"/>
-                    </a:highlight>
-                    <a:latin typeface="Arial" panose="020B0604020202020204" pitchFamily="34" charset="0"/>
-                  </a:rPr>
-                  <a:t>Σ </a:t>
-                </a:r>
-                <a:r>
-                  <a:rPr lang="en-US" b="0" i="0" dirty="0">
-                    <a:solidFill>
-                      <a:srgbClr val="202122"/>
-                    </a:solidFill>
-                    <a:effectLst/>
-                    <a:highlight>
-                      <a:srgbClr val="FFFFFF"/>
-                    </a:highlight>
-                    <a:latin typeface="Arial" panose="020B0604020202020204" pitchFamily="34" charset="0"/>
-                  </a:rPr>
-                  <a:t>are the </a:t>
-                </a:r>
-                <a:r>
-                  <a:rPr lang="en-US" b="0" i="0" u="none" strike="noStrike" dirty="0">
-                    <a:solidFill>
-                      <a:srgbClr val="3366CC"/>
-                    </a:solidFill>
-                    <a:effectLst/>
-                    <a:highlight>
-                      <a:srgbClr val="FFFFFF"/>
-                    </a:highlight>
-                    <a:latin typeface="Arial" panose="020B0604020202020204" pitchFamily="34" charset="0"/>
-                    <a:hlinkClick r:id="rId3" tooltip="Expected value"/>
-                  </a:rPr>
-                  <a:t>expected value</a:t>
-                </a:r>
-                <a:r>
-                  <a:rPr lang="en-US" b="0" i="0" dirty="0">
-                    <a:solidFill>
-                      <a:srgbClr val="202122"/>
-                    </a:solidFill>
-                    <a:effectLst/>
-                    <a:highlight>
-                      <a:srgbClr val="FFFFFF"/>
-                    </a:highlight>
-                    <a:latin typeface="Arial" panose="020B0604020202020204" pitchFamily="34" charset="0"/>
-                  </a:rPr>
-                  <a:t> and </a:t>
-                </a:r>
-                <a:r>
-                  <a:rPr lang="en-US" b="0" i="0" u="none" strike="noStrike" dirty="0">
-                    <a:solidFill>
-                      <a:srgbClr val="3366CC"/>
-                    </a:solidFill>
-                    <a:effectLst/>
-                    <a:highlight>
-                      <a:srgbClr val="FFFFFF"/>
-                    </a:highlight>
-                    <a:latin typeface="Arial" panose="020B0604020202020204" pitchFamily="34" charset="0"/>
-                    <a:hlinkClick r:id="rId4" tooltip="Covariance matrix"/>
-                  </a:rPr>
-                  <a:t>variance-covariance matrix</a:t>
-                </a:r>
-                <a:r>
-                  <a:rPr lang="en-US" b="0" i="0" dirty="0">
-                    <a:solidFill>
-                      <a:srgbClr val="202122"/>
-                    </a:solidFill>
-                    <a:effectLst/>
-                    <a:highlight>
-                      <a:srgbClr val="FFFFFF"/>
-                    </a:highlight>
-                    <a:latin typeface="Arial" panose="020B0604020202020204" pitchFamily="34" charset="0"/>
-                  </a:rPr>
-                  <a:t> of 𝜀, respectively, and tr denotes the </a:t>
-                </a:r>
-                <a:r>
-                  <a:rPr lang="en-US" b="0" i="0" u="none" strike="noStrike" dirty="0">
-                    <a:solidFill>
-                      <a:srgbClr val="3366CC"/>
-                    </a:solidFill>
-                    <a:effectLst/>
-                    <a:highlight>
-                      <a:srgbClr val="FFFFFF"/>
-                    </a:highlight>
-                    <a:latin typeface="Arial" panose="020B0604020202020204" pitchFamily="34" charset="0"/>
-                    <a:hlinkClick r:id="rId5" tooltip="Trace (linear algebra)"/>
-                  </a:rPr>
-                  <a:t>trace</a:t>
-                </a:r>
-                <a:r>
-                  <a:rPr lang="en-US" b="0" i="0" dirty="0">
-                    <a:solidFill>
-                      <a:srgbClr val="202122"/>
-                    </a:solidFill>
-                    <a:effectLst/>
-                    <a:highlight>
-                      <a:srgbClr val="FFFFFF"/>
-                    </a:highlight>
-                    <a:latin typeface="Arial" panose="020B0604020202020204" pitchFamily="34" charset="0"/>
-                  </a:rPr>
-                  <a:t> of a matrix.</a:t>
-                </a:r>
-              </a:p>
-              <a:p>
-                <a:pPr marL="0" marR="0" lvl="0" indent="0" algn="l" defTabSz="914400" rtl="0" eaLnBrk="1" fontAlgn="auto" latinLnBrk="0" hangingPunct="1">
-                  <a:lnSpc>
-                    <a:spcPct val="100000"/>
-                  </a:lnSpc>
-                  <a:spcBef>
-                    <a:spcPts val="0"/>
-                  </a:spcBef>
-                  <a:spcAft>
-                    <a:spcPts val="0"/>
-                  </a:spcAft>
-                  <a:buClrTx/>
-                  <a:buSzTx/>
-                  <a:buFontTx/>
-                  <a:buNone/>
-                  <a:tabLst/>
-                  <a:defRPr/>
-                </a:pPr>
-                <a:endParaRPr lang="en-US" sz="1200" kern="1200" dirty="0">
-                  <a:solidFill>
-                    <a:schemeClr val="tx1"/>
-                  </a:solidFill>
-                  <a:effectLst/>
-                  <a:latin typeface="+mn-lt"/>
-                  <a:ea typeface="+mn-ea"/>
-                  <a:cs typeface="+mn-cs"/>
-                </a:endParaRPr>
-              </a:p>
-              <a:p>
-                <a:pPr marL="0" marR="0" lvl="0" indent="0" algn="l" defTabSz="914400" rtl="0" eaLnBrk="1" fontAlgn="auto" latinLnBrk="0" hangingPunct="1">
-                  <a:lnSpc>
-                    <a:spcPct val="100000"/>
-                  </a:lnSpc>
-                  <a:spcBef>
-                    <a:spcPts val="0"/>
-                  </a:spcBef>
-                  <a:spcAft>
-                    <a:spcPts val="0"/>
-                  </a:spcAft>
-                  <a:buClrTx/>
-                  <a:buSzTx/>
-                  <a:buFontTx/>
-                  <a:buNone/>
-                  <a:tabLst/>
-                  <a:defRPr/>
-                </a:pPr>
-                <a:r>
-                  <a:rPr lang="en-US" sz="1200" b="0" i="0" kern="1200" dirty="0">
-                    <a:solidFill>
-                      <a:schemeClr val="tx1"/>
-                    </a:solidFill>
-                    <a:effectLst/>
-                    <a:latin typeface="+mn-lt"/>
-                    <a:ea typeface="+mn-ea"/>
-                    <a:cs typeface="+mn-cs"/>
-                  </a:rPr>
-                  <a:t> the </a:t>
-                </a:r>
-                <a:r>
-                  <a:rPr lang="en-US" sz="1200" b="1" i="0" kern="1200" dirty="0">
-                    <a:solidFill>
-                      <a:schemeClr val="tx1"/>
-                    </a:solidFill>
-                    <a:effectLst/>
-                    <a:latin typeface="+mn-lt"/>
-                    <a:ea typeface="+mn-ea"/>
-                    <a:cs typeface="+mn-cs"/>
-                  </a:rPr>
-                  <a:t>trace</a:t>
-                </a:r>
-                <a:r>
-                  <a:rPr lang="en-US" sz="1200" b="0" i="0" kern="1200" dirty="0">
-                    <a:solidFill>
-                      <a:schemeClr val="tx1"/>
-                    </a:solidFill>
-                    <a:effectLst/>
-                    <a:latin typeface="+mn-lt"/>
-                    <a:ea typeface="+mn-ea"/>
-                    <a:cs typeface="+mn-cs"/>
-                  </a:rPr>
-                  <a:t> of a </a:t>
-                </a:r>
-                <a:r>
-                  <a:rPr lang="en-US" sz="1200" b="0" i="0" u="none" strike="noStrike" kern="1200" dirty="0">
-                    <a:solidFill>
-                      <a:schemeClr val="tx1"/>
-                    </a:solidFill>
-                    <a:effectLst/>
-                    <a:latin typeface="+mn-lt"/>
-                    <a:ea typeface="+mn-ea"/>
-                    <a:cs typeface="+mn-cs"/>
-                    <a:hlinkClick r:id="rId6" tooltip="Square matrix"/>
-                  </a:rPr>
-                  <a:t>square matrix</a:t>
-                </a:r>
-                <a:r>
-                  <a:rPr lang="en-US" sz="1200" b="0" i="0" kern="1200" dirty="0">
-                    <a:solidFill>
-                      <a:schemeClr val="tx1"/>
-                    </a:solidFill>
-                    <a:effectLst/>
-                    <a:latin typeface="+mn-lt"/>
-                    <a:ea typeface="+mn-ea"/>
-                    <a:cs typeface="+mn-cs"/>
-                  </a:rPr>
-                  <a:t> </a:t>
-                </a:r>
-                <a:r>
-                  <a:rPr lang="en-US" sz="1200" b="1" i="0" kern="1200" dirty="0">
-                    <a:solidFill>
-                      <a:schemeClr val="tx1"/>
-                    </a:solidFill>
-                    <a:effectLst/>
-                    <a:latin typeface="+mn-lt"/>
-                    <a:ea typeface="+mn-ea"/>
-                    <a:cs typeface="+mn-cs"/>
-                  </a:rPr>
-                  <a:t>A</a:t>
-                </a:r>
-                <a:r>
-                  <a:rPr lang="en-US" sz="1200" b="0" i="0" kern="1200" dirty="0">
-                    <a:solidFill>
-                      <a:schemeClr val="tx1"/>
-                    </a:solidFill>
-                    <a:effectLst/>
-                    <a:latin typeface="+mn-lt"/>
-                    <a:ea typeface="+mn-ea"/>
-                    <a:cs typeface="+mn-cs"/>
-                  </a:rPr>
-                  <a:t>, denoted tr(</a:t>
-                </a:r>
-                <a:r>
-                  <a:rPr lang="en-US" sz="1200" b="1" i="0" kern="1200" dirty="0">
-                    <a:solidFill>
-                      <a:schemeClr val="tx1"/>
-                    </a:solidFill>
-                    <a:effectLst/>
-                    <a:latin typeface="+mn-lt"/>
-                    <a:ea typeface="+mn-ea"/>
-                    <a:cs typeface="+mn-cs"/>
-                  </a:rPr>
-                  <a:t>A</a:t>
-                </a:r>
-                <a:r>
-                  <a:rPr lang="en-US" sz="1200" b="0" i="0" kern="1200" dirty="0">
-                    <a:solidFill>
-                      <a:schemeClr val="tx1"/>
-                    </a:solidFill>
-                    <a:effectLst/>
-                    <a:latin typeface="+mn-lt"/>
-                    <a:ea typeface="+mn-ea"/>
-                    <a:cs typeface="+mn-cs"/>
-                  </a:rPr>
-                  <a:t>),</a:t>
-                </a:r>
-                <a:r>
-                  <a:rPr lang="en-US" sz="1200" b="0" i="0" u="none" strike="noStrike" kern="1200" baseline="30000" dirty="0">
-                    <a:solidFill>
-                      <a:schemeClr val="tx1"/>
-                    </a:solidFill>
-                    <a:effectLst/>
-                    <a:latin typeface="+mn-lt"/>
-                    <a:ea typeface="+mn-ea"/>
-                    <a:cs typeface="+mn-cs"/>
-                    <a:hlinkClick r:id="rId7"/>
-                  </a:rPr>
-                  <a:t>[1]</a:t>
-                </a:r>
-                <a:r>
-                  <a:rPr lang="en-US" sz="1200" b="0" i="0" kern="1200" dirty="0">
-                    <a:solidFill>
-                      <a:schemeClr val="tx1"/>
-                    </a:solidFill>
-                    <a:effectLst/>
-                    <a:latin typeface="+mn-lt"/>
-                    <a:ea typeface="+mn-ea"/>
-                    <a:cs typeface="+mn-cs"/>
-                  </a:rPr>
-                  <a:t> is the sum of the elements on its </a:t>
-                </a:r>
-                <a:r>
-                  <a:rPr lang="en-US" sz="1200" b="0" i="0" u="none" strike="noStrike" kern="1200" dirty="0">
-                    <a:solidFill>
-                      <a:schemeClr val="tx1"/>
-                    </a:solidFill>
-                    <a:effectLst/>
-                    <a:latin typeface="+mn-lt"/>
-                    <a:ea typeface="+mn-ea"/>
-                    <a:cs typeface="+mn-cs"/>
-                    <a:hlinkClick r:id="rId8" tooltip="Main diagonal"/>
-                  </a:rPr>
-                  <a:t>main diagonal</a:t>
-                </a:r>
-                <a:r>
-                  <a:rPr lang="en-US" sz="1200" b="0" i="0" kern="1200" dirty="0">
-                    <a:solidFill>
-                      <a:schemeClr val="tx1"/>
-                    </a:solidFill>
-                    <a:effectLst/>
-                    <a:latin typeface="+mn-lt"/>
-                    <a:ea typeface="+mn-ea"/>
-                    <a:cs typeface="+mn-cs"/>
-                  </a:rPr>
-                  <a:t>, </a:t>
-                </a:r>
-                <a:r>
-                  <a:rPr lang="ar-AE" sz="1200" i="0" kern="1200">
-                    <a:solidFill>
-                      <a:schemeClr val="tx1"/>
-                    </a:solidFill>
-                    <a:latin typeface="+mn-lt"/>
-                    <a:ea typeface="+mn-ea"/>
-                    <a:cs typeface="+mn-cs"/>
-                  </a:rPr>
-                  <a:t>𝑎_11+𝑎_22+⋯+𝑎_𝑛𝑛</a:t>
-                </a:r>
-                <a:r>
-                  <a:rPr lang="ar-AE" sz="1200" b="0" i="0" kern="1200" dirty="0">
-                    <a:solidFill>
-                      <a:schemeClr val="tx1"/>
-                    </a:solidFill>
-                    <a:effectLst/>
-                    <a:latin typeface="+mn-lt"/>
-                    <a:ea typeface="+mn-ea"/>
-                    <a:cs typeface="+mn-cs"/>
-                  </a:rPr>
-                  <a:t>. </a:t>
-                </a:r>
-                <a:r>
-                  <a:rPr lang="en-US" sz="1200" b="0" i="0" kern="1200" dirty="0">
-                    <a:solidFill>
-                      <a:schemeClr val="tx1"/>
-                    </a:solidFill>
-                    <a:effectLst/>
-                    <a:latin typeface="+mn-lt"/>
-                    <a:ea typeface="+mn-ea"/>
-                    <a:cs typeface="+mn-cs"/>
-                  </a:rPr>
-                  <a:t>It is only defined for a square matrix (</a:t>
-                </a:r>
-                <a:r>
-                  <a:rPr lang="en-US" sz="1200" b="0" i="1" kern="1200" dirty="0">
-                    <a:solidFill>
-                      <a:schemeClr val="tx1"/>
-                    </a:solidFill>
-                    <a:effectLst/>
-                    <a:latin typeface="+mn-lt"/>
-                    <a:ea typeface="+mn-ea"/>
-                    <a:cs typeface="+mn-cs"/>
-                  </a:rPr>
-                  <a:t>n</a:t>
-                </a:r>
-                <a:r>
-                  <a:rPr lang="en-US" sz="1200" b="0" i="0" kern="1200" dirty="0">
-                    <a:solidFill>
-                      <a:schemeClr val="tx1"/>
-                    </a:solidFill>
-                    <a:effectLst/>
-                    <a:latin typeface="+mn-lt"/>
-                    <a:ea typeface="+mn-ea"/>
-                    <a:cs typeface="+mn-cs"/>
-                  </a:rPr>
-                  <a:t> × </a:t>
-                </a:r>
-                <a:r>
-                  <a:rPr lang="en-US" sz="1200" b="0" i="1" kern="1200" dirty="0">
-                    <a:solidFill>
-                      <a:schemeClr val="tx1"/>
-                    </a:solidFill>
-                    <a:effectLst/>
-                    <a:latin typeface="+mn-lt"/>
-                    <a:ea typeface="+mn-ea"/>
-                    <a:cs typeface="+mn-cs"/>
-                  </a:rPr>
-                  <a:t>n</a:t>
-                </a:r>
-                <a:r>
-                  <a:rPr lang="en-US" sz="1200" b="0" i="0" kern="1200" dirty="0">
-                    <a:solidFill>
-                      <a:schemeClr val="tx1"/>
-                    </a:solidFill>
-                    <a:effectLst/>
-                    <a:latin typeface="+mn-lt"/>
-                    <a:ea typeface="+mn-ea"/>
-                    <a:cs typeface="+mn-cs"/>
-                  </a:rPr>
-                  <a:t>).</a:t>
-                </a:r>
-                <a:endParaRPr lang="en-US" sz="1200" kern="1200" dirty="0">
-                  <a:solidFill>
-                    <a:schemeClr val="tx1"/>
-                  </a:solidFill>
-                  <a:effectLst/>
-                  <a:latin typeface="+mn-lt"/>
-                  <a:ea typeface="+mn-ea"/>
-                  <a:cs typeface="+mn-cs"/>
-                </a:endParaRPr>
-              </a:p>
-              <a:p>
-                <a:pPr marL="0" marR="0" lvl="0" indent="0" algn="l" defTabSz="914400" rtl="0" eaLnBrk="1" fontAlgn="auto" latinLnBrk="0" hangingPunct="1">
-                  <a:lnSpc>
-                    <a:spcPct val="100000"/>
-                  </a:lnSpc>
-                  <a:spcBef>
-                    <a:spcPts val="0"/>
-                  </a:spcBef>
-                  <a:spcAft>
-                    <a:spcPts val="0"/>
-                  </a:spcAft>
-                  <a:buClrTx/>
-                  <a:buSzTx/>
-                  <a:buFontTx/>
-                  <a:buNone/>
-                  <a:tabLst/>
-                  <a:defRPr/>
-                </a:pPr>
-                <a:endParaRPr lang="en-US" sz="1200" kern="1200" dirty="0">
-                  <a:solidFill>
-                    <a:schemeClr val="tx1"/>
-                  </a:solidFill>
-                  <a:effectLst/>
-                  <a:latin typeface="+mn-lt"/>
-                  <a:ea typeface="+mn-ea"/>
-                  <a:cs typeface="+mn-cs"/>
-                </a:endParaRPr>
-              </a:p>
-              <a:p>
-                <a:pPr marL="0" marR="0" lvl="0" indent="0" algn="l" defTabSz="914400" rtl="0" eaLnBrk="1" fontAlgn="auto" latinLnBrk="0" hangingPunct="1">
-                  <a:lnSpc>
-                    <a:spcPct val="100000"/>
-                  </a:lnSpc>
-                  <a:spcBef>
-                    <a:spcPts val="0"/>
-                  </a:spcBef>
-                  <a:spcAft>
-                    <a:spcPts val="0"/>
-                  </a:spcAft>
-                  <a:buClrTx/>
-                  <a:buSzTx/>
-                  <a:buFontTx/>
-                  <a:buNone/>
-                  <a:tabLst/>
-                  <a:defRPr/>
-                </a:pPr>
-                <a:endParaRPr lang="en-US" sz="1200" kern="1200" dirty="0">
-                  <a:solidFill>
-                    <a:schemeClr val="tx1"/>
-                  </a:solidFill>
-                  <a:effectLst/>
-                  <a:latin typeface="+mn-lt"/>
-                  <a:ea typeface="+mn-ea"/>
-                  <a:cs typeface="+mn-cs"/>
-                </a:endParaRPr>
-              </a:p>
-              <a:p>
-                <a:pPr marL="0" marR="0" lvl="0" indent="0" algn="l" defTabSz="914400" rtl="0" eaLnBrk="1" fontAlgn="auto" latinLnBrk="0" hangingPunct="1">
-                  <a:lnSpc>
-                    <a:spcPct val="100000"/>
-                  </a:lnSpc>
-                  <a:spcBef>
-                    <a:spcPts val="0"/>
-                  </a:spcBef>
-                  <a:spcAft>
-                    <a:spcPts val="0"/>
-                  </a:spcAft>
-                  <a:buClrTx/>
-                  <a:buSzTx/>
-                  <a:buFontTx/>
-                  <a:buNone/>
-                  <a:tabLst/>
-                  <a:defRPr/>
-                </a:pPr>
-                <a:r>
-                  <a:rPr lang="en-US" sz="1200" kern="1200" dirty="0">
-                    <a:solidFill>
-                      <a:schemeClr val="tx1"/>
-                    </a:solidFill>
-                    <a:effectLst/>
-                    <a:latin typeface="+mn-lt"/>
-                    <a:ea typeface="+mn-ea"/>
-                    <a:cs typeface="+mn-cs"/>
-                  </a:rPr>
-                  <a:t>J_{k+1}^*(\x_{k+1}) = \frac{1}{2}\x_{k+1}^T </a:t>
-                </a:r>
-                <a:r>
-                  <a:rPr lang="en-US" sz="1200" kern="1200" dirty="0" err="1">
-                    <a:solidFill>
-                      <a:schemeClr val="tx1"/>
-                    </a:solidFill>
-                    <a:effectLst/>
-                    <a:latin typeface="+mn-lt"/>
-                    <a:ea typeface="+mn-ea"/>
-                    <a:cs typeface="+mn-cs"/>
-                  </a:rPr>
-                  <a:t>P_k</a:t>
-                </a:r>
-                <a:r>
-                  <a:rPr lang="en-US" sz="1200" kern="1200" dirty="0">
-                    <a:solidFill>
-                      <a:schemeClr val="tx1"/>
-                    </a:solidFill>
-                    <a:effectLst/>
-                    <a:latin typeface="+mn-lt"/>
-                    <a:ea typeface="+mn-ea"/>
-                    <a:cs typeface="+mn-cs"/>
-                  </a:rPr>
-                  <a:t> \x_{k+1}</a:t>
-                </a:r>
-              </a:p>
-              <a:p>
-                <a:pPr marL="0" marR="0" lvl="0" indent="0" algn="l" defTabSz="914400" rtl="0" eaLnBrk="1" fontAlgn="auto" latinLnBrk="0" hangingPunct="1">
-                  <a:lnSpc>
-                    <a:spcPct val="100000"/>
-                  </a:lnSpc>
-                  <a:spcBef>
-                    <a:spcPts val="0"/>
-                  </a:spcBef>
-                  <a:spcAft>
-                    <a:spcPts val="0"/>
-                  </a:spcAft>
-                  <a:buClrTx/>
-                  <a:buSzTx/>
-                  <a:buFontTx/>
-                  <a:buNone/>
-                  <a:tabLst/>
-                  <a:defRPr/>
-                </a:pPr>
-                <a:endParaRPr lang="en-US" sz="1200" kern="1200" dirty="0">
-                  <a:solidFill>
-                    <a:schemeClr val="tx1"/>
-                  </a:solidFill>
-                  <a:effectLst/>
-                  <a:latin typeface="+mn-lt"/>
-                  <a:ea typeface="+mn-ea"/>
-                  <a:cs typeface="+mn-cs"/>
-                </a:endParaRPr>
-              </a:p>
-              <a:p>
-                <a:r>
-                  <a:rPr lang="en-US" sz="1200" kern="1200" dirty="0">
-                    <a:solidFill>
-                      <a:schemeClr val="tx1"/>
-                    </a:solidFill>
-                    <a:effectLst/>
-                    <a:latin typeface="+mn-lt"/>
-                    <a:ea typeface="+mn-ea"/>
-                    <a:cs typeface="+mn-cs"/>
-                  </a:rPr>
-                  <a:t>J_{k}^*(\x_{k+1}) &amp;= \min_{\</a:t>
-                </a:r>
-                <a:r>
-                  <a:rPr lang="en-US" sz="1200" kern="1200" dirty="0" err="1">
-                    <a:solidFill>
-                      <a:schemeClr val="tx1"/>
-                    </a:solidFill>
-                    <a:effectLst/>
-                    <a:latin typeface="+mn-lt"/>
-                    <a:ea typeface="+mn-ea"/>
-                    <a:cs typeface="+mn-cs"/>
-                  </a:rPr>
-                  <a:t>u_k</a:t>
-                </a:r>
-                <a:r>
-                  <a:rPr lang="en-US" sz="1200" kern="1200" dirty="0">
-                    <a:solidFill>
-                      <a:schemeClr val="tx1"/>
-                    </a:solidFill>
-                    <a:effectLst/>
-                    <a:latin typeface="+mn-lt"/>
-                    <a:ea typeface="+mn-ea"/>
-                    <a:cs typeface="+mn-cs"/>
-                  </a:rPr>
-                  <a:t>}\E_{\</a:t>
-                </a:r>
-                <a:r>
-                  <a:rPr lang="en-US" sz="1200" kern="1200" dirty="0" err="1">
-                    <a:solidFill>
-                      <a:schemeClr val="tx1"/>
-                    </a:solidFill>
-                    <a:effectLst/>
-                    <a:latin typeface="+mn-lt"/>
-                    <a:ea typeface="+mn-ea"/>
-                    <a:cs typeface="+mn-cs"/>
-                  </a:rPr>
-                  <a:t>w_k</a:t>
-                </a:r>
-                <a:r>
-                  <a:rPr lang="en-US" sz="1200" kern="1200" dirty="0">
-                    <a:solidFill>
-                      <a:schemeClr val="tx1"/>
-                    </a:solidFill>
-                    <a:effectLst/>
-                    <a:latin typeface="+mn-lt"/>
-                    <a:ea typeface="+mn-ea"/>
-                    <a:cs typeface="+mn-cs"/>
-                  </a:rPr>
-                  <a:t>}\left[</a:t>
-                </a:r>
-                <a:r>
-                  <a:rPr lang="en-US" sz="1200" kern="1200" dirty="0" err="1">
-                    <a:solidFill>
-                      <a:schemeClr val="tx1"/>
-                    </a:solidFill>
-                    <a:effectLst/>
-                    <a:latin typeface="+mn-lt"/>
-                    <a:ea typeface="+mn-ea"/>
-                    <a:cs typeface="+mn-cs"/>
-                  </a:rPr>
-                  <a:t>g_k</a:t>
-                </a:r>
-                <a:r>
-                  <a:rPr lang="en-US" sz="1200" kern="1200" dirty="0">
-                    <a:solidFill>
-                      <a:schemeClr val="tx1"/>
-                    </a:solidFill>
-                    <a:effectLst/>
-                    <a:latin typeface="+mn-lt"/>
-                    <a:ea typeface="+mn-ea"/>
-                    <a:cs typeface="+mn-cs"/>
-                  </a:rPr>
-                  <a:t>(\</a:t>
-                </a:r>
-                <a:r>
-                  <a:rPr lang="en-US" sz="1200" kern="1200" dirty="0" err="1">
-                    <a:solidFill>
-                      <a:schemeClr val="tx1"/>
-                    </a:solidFill>
-                    <a:effectLst/>
-                    <a:latin typeface="+mn-lt"/>
-                    <a:ea typeface="+mn-ea"/>
-                    <a:cs typeface="+mn-cs"/>
-                  </a:rPr>
-                  <a:t>x_k</a:t>
-                </a:r>
-                <a:r>
-                  <a:rPr lang="en-US" sz="1200" kern="1200" dirty="0">
-                    <a:solidFill>
-                      <a:schemeClr val="tx1"/>
-                    </a:solidFill>
-                    <a:effectLst/>
-                    <a:latin typeface="+mn-lt"/>
-                    <a:ea typeface="+mn-ea"/>
-                    <a:cs typeface="+mn-cs"/>
-                  </a:rPr>
-                  <a:t>, \</a:t>
-                </a:r>
-                <a:r>
-                  <a:rPr lang="en-US" sz="1200" kern="1200" dirty="0" err="1">
-                    <a:solidFill>
-                      <a:schemeClr val="tx1"/>
-                    </a:solidFill>
-                    <a:effectLst/>
-                    <a:latin typeface="+mn-lt"/>
-                    <a:ea typeface="+mn-ea"/>
-                    <a:cs typeface="+mn-cs"/>
-                  </a:rPr>
-                  <a:t>u_k</a:t>
-                </a:r>
-                <a:r>
-                  <a:rPr lang="en-US" sz="1200" kern="1200" dirty="0">
-                    <a:solidFill>
-                      <a:schemeClr val="tx1"/>
-                    </a:solidFill>
-                    <a:effectLst/>
-                    <a:latin typeface="+mn-lt"/>
-                    <a:ea typeface="+mn-ea"/>
-                    <a:cs typeface="+mn-cs"/>
-                  </a:rPr>
-                  <a:t>, \</a:t>
-                </a:r>
-                <a:r>
-                  <a:rPr lang="en-US" sz="1200" kern="1200" dirty="0" err="1">
-                    <a:solidFill>
-                      <a:schemeClr val="tx1"/>
-                    </a:solidFill>
-                    <a:effectLst/>
-                    <a:latin typeface="+mn-lt"/>
-                    <a:ea typeface="+mn-ea"/>
-                    <a:cs typeface="+mn-cs"/>
-                  </a:rPr>
-                  <a:t>w_k</a:t>
-                </a:r>
-                <a:r>
-                  <a:rPr lang="en-US" sz="1200" kern="1200" dirty="0">
-                    <a:solidFill>
-                      <a:schemeClr val="tx1"/>
-                    </a:solidFill>
-                    <a:effectLst/>
-                    <a:latin typeface="+mn-lt"/>
-                    <a:ea typeface="+mn-ea"/>
-                    <a:cs typeface="+mn-cs"/>
-                  </a:rPr>
-                  <a:t>) + J_{k+1}^*(f(\</a:t>
-                </a:r>
-                <a:r>
-                  <a:rPr lang="en-US" sz="1200" kern="1200" dirty="0" err="1">
-                    <a:solidFill>
-                      <a:schemeClr val="tx1"/>
-                    </a:solidFill>
-                    <a:effectLst/>
-                    <a:latin typeface="+mn-lt"/>
-                    <a:ea typeface="+mn-ea"/>
-                    <a:cs typeface="+mn-cs"/>
-                  </a:rPr>
-                  <a:t>x_k</a:t>
-                </a:r>
-                <a:r>
-                  <a:rPr lang="en-US" sz="1200" kern="1200" dirty="0">
-                    <a:solidFill>
-                      <a:schemeClr val="tx1"/>
-                    </a:solidFill>
-                    <a:effectLst/>
-                    <a:latin typeface="+mn-lt"/>
-                    <a:ea typeface="+mn-ea"/>
-                    <a:cs typeface="+mn-cs"/>
-                  </a:rPr>
-                  <a:t>, \</a:t>
-                </a:r>
-                <a:r>
-                  <a:rPr lang="en-US" sz="1200" kern="1200" dirty="0" err="1">
-                    <a:solidFill>
-                      <a:schemeClr val="tx1"/>
-                    </a:solidFill>
-                    <a:effectLst/>
-                    <a:latin typeface="+mn-lt"/>
-                    <a:ea typeface="+mn-ea"/>
-                    <a:cs typeface="+mn-cs"/>
-                  </a:rPr>
-                  <a:t>u_k</a:t>
-                </a:r>
-                <a:r>
-                  <a:rPr lang="en-US" sz="1200" kern="1200" dirty="0">
-                    <a:solidFill>
-                      <a:schemeClr val="tx1"/>
-                    </a:solidFill>
-                    <a:effectLst/>
-                    <a:latin typeface="+mn-lt"/>
-                    <a:ea typeface="+mn-ea"/>
-                    <a:cs typeface="+mn-cs"/>
-                  </a:rPr>
-                  <a:t>, \</a:t>
-                </a:r>
-                <a:r>
-                  <a:rPr lang="en-US" sz="1200" kern="1200" dirty="0" err="1">
-                    <a:solidFill>
-                      <a:schemeClr val="tx1"/>
-                    </a:solidFill>
-                    <a:effectLst/>
-                    <a:latin typeface="+mn-lt"/>
-                    <a:ea typeface="+mn-ea"/>
-                    <a:cs typeface="+mn-cs"/>
-                  </a:rPr>
-                  <a:t>w_k</a:t>
-                </a:r>
-                <a:r>
-                  <a:rPr lang="en-US" sz="1200" kern="1200" dirty="0">
-                    <a:solidFill>
-                      <a:schemeClr val="tx1"/>
-                    </a:solidFill>
-                    <a:effectLst/>
-                    <a:latin typeface="+mn-lt"/>
-                    <a:ea typeface="+mn-ea"/>
-                    <a:cs typeface="+mn-cs"/>
-                  </a:rPr>
-                  <a:t>))\right]\\</a:t>
-                </a:r>
-              </a:p>
-              <a:p>
-                <a:r>
-                  <a:rPr lang="en-US" sz="1200" kern="1200" dirty="0">
-                    <a:solidFill>
-                      <a:schemeClr val="tx1"/>
-                    </a:solidFill>
-                    <a:effectLst/>
-                    <a:latin typeface="+mn-lt"/>
-                    <a:ea typeface="+mn-ea"/>
-                    <a:cs typeface="+mn-cs"/>
-                  </a:rPr>
-                  <a:t>                  &amp;= \min_{\</a:t>
-                </a:r>
-                <a:r>
-                  <a:rPr lang="en-US" sz="1200" kern="1200" dirty="0" err="1">
-                    <a:solidFill>
-                      <a:schemeClr val="tx1"/>
-                    </a:solidFill>
-                    <a:effectLst/>
-                    <a:latin typeface="+mn-lt"/>
-                    <a:ea typeface="+mn-ea"/>
-                    <a:cs typeface="+mn-cs"/>
-                  </a:rPr>
-                  <a:t>u_k</a:t>
-                </a:r>
-                <a:r>
-                  <a:rPr lang="en-US" sz="1200" kern="1200" dirty="0">
-                    <a:solidFill>
-                      <a:schemeClr val="tx1"/>
-                    </a:solidFill>
-                    <a:effectLst/>
-                    <a:latin typeface="+mn-lt"/>
-                    <a:ea typeface="+mn-ea"/>
-                    <a:cs typeface="+mn-cs"/>
-                  </a:rPr>
-                  <a:t>}\frac{1}{2}\E_{\</a:t>
-                </a:r>
-                <a:r>
-                  <a:rPr lang="en-US" sz="1200" kern="1200" dirty="0" err="1">
-                    <a:solidFill>
-                      <a:schemeClr val="tx1"/>
-                    </a:solidFill>
-                    <a:effectLst/>
-                    <a:latin typeface="+mn-lt"/>
-                    <a:ea typeface="+mn-ea"/>
-                    <a:cs typeface="+mn-cs"/>
-                  </a:rPr>
-                  <a:t>w_k</a:t>
-                </a:r>
-                <a:r>
-                  <a:rPr lang="en-US" sz="1200" kern="1200" dirty="0">
-                    <a:solidFill>
-                      <a:schemeClr val="tx1"/>
-                    </a:solidFill>
-                    <a:effectLst/>
-                    <a:latin typeface="+mn-lt"/>
-                    <a:ea typeface="+mn-ea"/>
-                    <a:cs typeface="+mn-cs"/>
-                  </a:rPr>
-                  <a:t>}\left[\</a:t>
-                </a:r>
-                <a:r>
-                  <a:rPr lang="en-US" sz="1200" kern="1200" dirty="0" err="1">
-                    <a:solidFill>
-                      <a:schemeClr val="tx1"/>
-                    </a:solidFill>
-                    <a:effectLst/>
-                    <a:latin typeface="+mn-lt"/>
-                    <a:ea typeface="+mn-ea"/>
-                    <a:cs typeface="+mn-cs"/>
-                  </a:rPr>
-                  <a:t>x_k^T</a:t>
-                </a:r>
-                <a:r>
-                  <a:rPr lang="en-US" sz="1200" kern="1200" dirty="0">
-                    <a:solidFill>
-                      <a:schemeClr val="tx1"/>
-                    </a:solidFill>
-                    <a:effectLst/>
-                    <a:latin typeface="+mn-lt"/>
-                    <a:ea typeface="+mn-ea"/>
-                    <a:cs typeface="+mn-cs"/>
-                  </a:rPr>
-                  <a:t> </a:t>
-                </a:r>
-                <a:r>
-                  <a:rPr lang="en-US" sz="1200" kern="1200" dirty="0" err="1">
-                    <a:solidFill>
-                      <a:schemeClr val="tx1"/>
-                    </a:solidFill>
-                    <a:effectLst/>
-                    <a:latin typeface="+mn-lt"/>
-                    <a:ea typeface="+mn-ea"/>
-                    <a:cs typeface="+mn-cs"/>
-                  </a:rPr>
-                  <a:t>Q_k</a:t>
-                </a:r>
-                <a:r>
-                  <a:rPr lang="en-US" sz="1200" kern="1200" dirty="0">
-                    <a:solidFill>
-                      <a:schemeClr val="tx1"/>
-                    </a:solidFill>
-                    <a:effectLst/>
-                    <a:latin typeface="+mn-lt"/>
-                    <a:ea typeface="+mn-ea"/>
-                    <a:cs typeface="+mn-cs"/>
-                  </a:rPr>
-                  <a:t> \</a:t>
-                </a:r>
-                <a:r>
-                  <a:rPr lang="en-US" sz="1200" kern="1200" dirty="0" err="1">
-                    <a:solidFill>
-                      <a:schemeClr val="tx1"/>
-                    </a:solidFill>
-                    <a:effectLst/>
-                    <a:latin typeface="+mn-lt"/>
-                    <a:ea typeface="+mn-ea"/>
-                    <a:cs typeface="+mn-cs"/>
-                  </a:rPr>
-                  <a:t>x_k</a:t>
-                </a:r>
-                <a:r>
-                  <a:rPr lang="en-US" sz="1200" kern="1200" dirty="0">
-                    <a:solidFill>
-                      <a:schemeClr val="tx1"/>
-                    </a:solidFill>
-                    <a:effectLst/>
-                    <a:latin typeface="+mn-lt"/>
-                    <a:ea typeface="+mn-ea"/>
-                    <a:cs typeface="+mn-cs"/>
-                  </a:rPr>
-                  <a:t> + \</a:t>
-                </a:r>
-                <a:r>
-                  <a:rPr lang="en-US" sz="1200" kern="1200" dirty="0" err="1">
-                    <a:solidFill>
-                      <a:schemeClr val="tx1"/>
-                    </a:solidFill>
-                    <a:effectLst/>
-                    <a:latin typeface="+mn-lt"/>
-                    <a:ea typeface="+mn-ea"/>
-                    <a:cs typeface="+mn-cs"/>
-                  </a:rPr>
-                  <a:t>u_k^T</a:t>
-                </a:r>
-                <a:r>
-                  <a:rPr lang="en-US" sz="1200" kern="1200" dirty="0">
-                    <a:solidFill>
-                      <a:schemeClr val="tx1"/>
-                    </a:solidFill>
-                    <a:effectLst/>
-                    <a:latin typeface="+mn-lt"/>
-                    <a:ea typeface="+mn-ea"/>
-                    <a:cs typeface="+mn-cs"/>
-                  </a:rPr>
-                  <a:t> </a:t>
-                </a:r>
-                <a:r>
-                  <a:rPr lang="en-US" sz="1200" kern="1200" dirty="0" err="1">
-                    <a:solidFill>
-                      <a:schemeClr val="tx1"/>
-                    </a:solidFill>
-                    <a:effectLst/>
-                    <a:latin typeface="+mn-lt"/>
-                    <a:ea typeface="+mn-ea"/>
-                    <a:cs typeface="+mn-cs"/>
-                  </a:rPr>
-                  <a:t>R_k</a:t>
-                </a:r>
-                <a:r>
-                  <a:rPr lang="en-US" sz="1200" kern="1200" dirty="0">
-                    <a:solidFill>
-                      <a:schemeClr val="tx1"/>
-                    </a:solidFill>
-                    <a:effectLst/>
-                    <a:latin typeface="+mn-lt"/>
-                    <a:ea typeface="+mn-ea"/>
-                    <a:cs typeface="+mn-cs"/>
-                  </a:rPr>
-                  <a:t> \</a:t>
-                </a:r>
-                <a:r>
-                  <a:rPr lang="en-US" sz="1200" kern="1200" dirty="0" err="1">
-                    <a:solidFill>
-                      <a:schemeClr val="tx1"/>
-                    </a:solidFill>
-                    <a:effectLst/>
-                    <a:latin typeface="+mn-lt"/>
-                    <a:ea typeface="+mn-ea"/>
-                    <a:cs typeface="+mn-cs"/>
-                  </a:rPr>
-                  <a:t>u_k</a:t>
-                </a:r>
-                <a:r>
-                  <a:rPr lang="en-US" sz="1200" kern="1200" dirty="0">
-                    <a:solidFill>
-                      <a:schemeClr val="tx1"/>
-                    </a:solidFill>
-                    <a:effectLst/>
-                    <a:latin typeface="+mn-lt"/>
-                    <a:ea typeface="+mn-ea"/>
-                    <a:cs typeface="+mn-cs"/>
-                  </a:rPr>
-                  <a:t> + (</a:t>
-                </a:r>
-                <a:r>
-                  <a:rPr lang="en-US" sz="1200" kern="1200" dirty="0" err="1">
-                    <a:solidFill>
-                      <a:schemeClr val="tx1"/>
-                    </a:solidFill>
-                    <a:effectLst/>
-                    <a:latin typeface="+mn-lt"/>
-                    <a:ea typeface="+mn-ea"/>
-                    <a:cs typeface="+mn-cs"/>
-                  </a:rPr>
-                  <a:t>A_k</a:t>
-                </a:r>
-                <a:r>
-                  <a:rPr lang="en-US" sz="1200" kern="1200" dirty="0">
-                    <a:solidFill>
-                      <a:schemeClr val="tx1"/>
-                    </a:solidFill>
-                    <a:effectLst/>
-                    <a:latin typeface="+mn-lt"/>
-                    <a:ea typeface="+mn-ea"/>
-                    <a:cs typeface="+mn-cs"/>
-                  </a:rPr>
-                  <a:t>\</a:t>
-                </a:r>
-                <a:r>
-                  <a:rPr lang="en-US" sz="1200" kern="1200" dirty="0" err="1">
-                    <a:solidFill>
-                      <a:schemeClr val="tx1"/>
-                    </a:solidFill>
-                    <a:effectLst/>
-                    <a:latin typeface="+mn-lt"/>
-                    <a:ea typeface="+mn-ea"/>
-                    <a:cs typeface="+mn-cs"/>
-                  </a:rPr>
-                  <a:t>x_k</a:t>
-                </a:r>
-                <a:r>
-                  <a:rPr lang="en-US" sz="1200" kern="1200" dirty="0">
-                    <a:solidFill>
-                      <a:schemeClr val="tx1"/>
-                    </a:solidFill>
-                    <a:effectLst/>
-                    <a:latin typeface="+mn-lt"/>
-                    <a:ea typeface="+mn-ea"/>
-                    <a:cs typeface="+mn-cs"/>
-                  </a:rPr>
-                  <a:t> + </a:t>
-                </a:r>
-                <a:r>
-                  <a:rPr lang="en-US" sz="1200" kern="1200" dirty="0" err="1">
-                    <a:solidFill>
-                      <a:schemeClr val="tx1"/>
-                    </a:solidFill>
-                    <a:effectLst/>
-                    <a:latin typeface="+mn-lt"/>
-                    <a:ea typeface="+mn-ea"/>
-                    <a:cs typeface="+mn-cs"/>
-                  </a:rPr>
-                  <a:t>B_k</a:t>
-                </a:r>
-                <a:r>
-                  <a:rPr lang="en-US" sz="1200" kern="1200" dirty="0">
-                    <a:solidFill>
-                      <a:schemeClr val="tx1"/>
-                    </a:solidFill>
-                    <a:effectLst/>
-                    <a:latin typeface="+mn-lt"/>
-                    <a:ea typeface="+mn-ea"/>
-                    <a:cs typeface="+mn-cs"/>
-                  </a:rPr>
-                  <a:t>\</a:t>
-                </a:r>
-                <a:r>
-                  <a:rPr lang="en-US" sz="1200" kern="1200" dirty="0" err="1">
-                    <a:solidFill>
-                      <a:schemeClr val="tx1"/>
-                    </a:solidFill>
-                    <a:effectLst/>
-                    <a:latin typeface="+mn-lt"/>
-                    <a:ea typeface="+mn-ea"/>
-                    <a:cs typeface="+mn-cs"/>
-                  </a:rPr>
-                  <a:t>u_k</a:t>
-                </a:r>
-                <a:r>
-                  <a:rPr lang="en-US" sz="1200" kern="1200" dirty="0">
-                    <a:solidFill>
-                      <a:schemeClr val="tx1"/>
-                    </a:solidFill>
-                    <a:effectLst/>
-                    <a:latin typeface="+mn-lt"/>
-                    <a:ea typeface="+mn-ea"/>
-                    <a:cs typeface="+mn-cs"/>
-                  </a:rPr>
-                  <a:t> + \</a:t>
-                </a:r>
-                <a:r>
-                  <a:rPr lang="en-US" sz="1200" kern="1200" dirty="0" err="1">
-                    <a:solidFill>
-                      <a:schemeClr val="tx1"/>
-                    </a:solidFill>
-                    <a:effectLst/>
-                    <a:latin typeface="+mn-lt"/>
-                    <a:ea typeface="+mn-ea"/>
-                    <a:cs typeface="+mn-cs"/>
-                  </a:rPr>
-                  <a:t>w_k</a:t>
-                </a:r>
-                <a:r>
-                  <a:rPr lang="en-US" sz="1200" kern="1200" dirty="0">
-                    <a:solidFill>
-                      <a:schemeClr val="tx1"/>
-                    </a:solidFill>
-                    <a:effectLst/>
-                    <a:latin typeface="+mn-lt"/>
-                    <a:ea typeface="+mn-ea"/>
-                    <a:cs typeface="+mn-cs"/>
-                  </a:rPr>
-                  <a:t>)^T P_{k+1}(</a:t>
-                </a:r>
-                <a:r>
-                  <a:rPr lang="en-US" sz="1200" kern="1200" dirty="0" err="1">
-                    <a:solidFill>
-                      <a:schemeClr val="tx1"/>
-                    </a:solidFill>
-                    <a:effectLst/>
-                    <a:latin typeface="+mn-lt"/>
-                    <a:ea typeface="+mn-ea"/>
-                    <a:cs typeface="+mn-cs"/>
-                  </a:rPr>
-                  <a:t>A_k</a:t>
-                </a:r>
-                <a:r>
-                  <a:rPr lang="en-US" sz="1200" kern="1200" dirty="0">
-                    <a:solidFill>
-                      <a:schemeClr val="tx1"/>
-                    </a:solidFill>
-                    <a:effectLst/>
-                    <a:latin typeface="+mn-lt"/>
-                    <a:ea typeface="+mn-ea"/>
-                    <a:cs typeface="+mn-cs"/>
-                  </a:rPr>
-                  <a:t>\</a:t>
-                </a:r>
-                <a:r>
-                  <a:rPr lang="en-US" sz="1200" kern="1200" dirty="0" err="1">
-                    <a:solidFill>
-                      <a:schemeClr val="tx1"/>
-                    </a:solidFill>
-                    <a:effectLst/>
-                    <a:latin typeface="+mn-lt"/>
-                    <a:ea typeface="+mn-ea"/>
-                    <a:cs typeface="+mn-cs"/>
-                  </a:rPr>
-                  <a:t>x_k</a:t>
-                </a:r>
-                <a:r>
-                  <a:rPr lang="en-US" sz="1200" kern="1200" dirty="0">
-                    <a:solidFill>
-                      <a:schemeClr val="tx1"/>
-                    </a:solidFill>
-                    <a:effectLst/>
-                    <a:latin typeface="+mn-lt"/>
-                    <a:ea typeface="+mn-ea"/>
-                    <a:cs typeface="+mn-cs"/>
-                  </a:rPr>
-                  <a:t> + </a:t>
-                </a:r>
-                <a:r>
-                  <a:rPr lang="en-US" sz="1200" kern="1200" dirty="0" err="1">
-                    <a:solidFill>
-                      <a:schemeClr val="tx1"/>
-                    </a:solidFill>
-                    <a:effectLst/>
-                    <a:latin typeface="+mn-lt"/>
-                    <a:ea typeface="+mn-ea"/>
-                    <a:cs typeface="+mn-cs"/>
-                  </a:rPr>
-                  <a:t>B_k</a:t>
-                </a:r>
-                <a:r>
-                  <a:rPr lang="en-US" sz="1200" kern="1200" dirty="0">
-                    <a:solidFill>
-                      <a:schemeClr val="tx1"/>
-                    </a:solidFill>
-                    <a:effectLst/>
-                    <a:latin typeface="+mn-lt"/>
-                    <a:ea typeface="+mn-ea"/>
-                    <a:cs typeface="+mn-cs"/>
-                  </a:rPr>
-                  <a:t>\</a:t>
-                </a:r>
-                <a:r>
-                  <a:rPr lang="en-US" sz="1200" kern="1200" dirty="0" err="1">
-                    <a:solidFill>
-                      <a:schemeClr val="tx1"/>
-                    </a:solidFill>
-                    <a:effectLst/>
-                    <a:latin typeface="+mn-lt"/>
-                    <a:ea typeface="+mn-ea"/>
-                    <a:cs typeface="+mn-cs"/>
-                  </a:rPr>
-                  <a:t>u_k</a:t>
-                </a:r>
-                <a:r>
-                  <a:rPr lang="en-US" sz="1200" kern="1200" dirty="0">
-                    <a:solidFill>
-                      <a:schemeClr val="tx1"/>
-                    </a:solidFill>
-                    <a:effectLst/>
-                    <a:latin typeface="+mn-lt"/>
-                    <a:ea typeface="+mn-ea"/>
-                    <a:cs typeface="+mn-cs"/>
-                  </a:rPr>
-                  <a:t> + \</a:t>
-                </a:r>
-                <a:r>
-                  <a:rPr lang="en-US" sz="1200" kern="1200" dirty="0" err="1">
-                    <a:solidFill>
-                      <a:schemeClr val="tx1"/>
-                    </a:solidFill>
-                    <a:effectLst/>
-                    <a:latin typeface="+mn-lt"/>
-                    <a:ea typeface="+mn-ea"/>
-                    <a:cs typeface="+mn-cs"/>
-                  </a:rPr>
-                  <a:t>w_k</a:t>
-                </a:r>
-                <a:r>
-                  <a:rPr lang="en-US" sz="1200" kern="1200" dirty="0">
-                    <a:solidFill>
-                      <a:schemeClr val="tx1"/>
-                    </a:solidFill>
-                    <a:effectLst/>
-                    <a:latin typeface="+mn-lt"/>
-                    <a:ea typeface="+mn-ea"/>
-                    <a:cs typeface="+mn-cs"/>
-                  </a:rPr>
-                  <a:t>)\right]\\</a:t>
-                </a:r>
-              </a:p>
-              <a:p>
-                <a:r>
-                  <a:rPr lang="en-US" sz="1200" kern="1200" dirty="0">
-                    <a:solidFill>
-                      <a:schemeClr val="tx1"/>
-                    </a:solidFill>
-                    <a:effectLst/>
-                    <a:latin typeface="+mn-lt"/>
-                    <a:ea typeface="+mn-ea"/>
-                    <a:cs typeface="+mn-cs"/>
-                  </a:rPr>
-                  <a:t>                  &amp;= \min_{\</a:t>
-                </a:r>
-                <a:r>
-                  <a:rPr lang="en-US" sz="1200" kern="1200" dirty="0" err="1">
-                    <a:solidFill>
-                      <a:schemeClr val="tx1"/>
-                    </a:solidFill>
-                    <a:effectLst/>
-                    <a:latin typeface="+mn-lt"/>
-                    <a:ea typeface="+mn-ea"/>
-                    <a:cs typeface="+mn-cs"/>
-                  </a:rPr>
-                  <a:t>u_k</a:t>
-                </a:r>
-                <a:r>
-                  <a:rPr lang="en-US" sz="1200" kern="1200" dirty="0">
-                    <a:solidFill>
-                      <a:schemeClr val="tx1"/>
-                    </a:solidFill>
-                    <a:effectLst/>
-                    <a:latin typeface="+mn-lt"/>
-                    <a:ea typeface="+mn-ea"/>
-                    <a:cs typeface="+mn-cs"/>
-                  </a:rPr>
-                  <a:t>}\frac{1}{2}\E_{\</a:t>
-                </a:r>
-                <a:r>
-                  <a:rPr lang="en-US" sz="1200" kern="1200" dirty="0" err="1">
-                    <a:solidFill>
-                      <a:schemeClr val="tx1"/>
-                    </a:solidFill>
-                    <a:effectLst/>
-                    <a:latin typeface="+mn-lt"/>
-                    <a:ea typeface="+mn-ea"/>
-                    <a:cs typeface="+mn-cs"/>
-                  </a:rPr>
-                  <a:t>w_k</a:t>
-                </a:r>
-                <a:r>
-                  <a:rPr lang="en-US" sz="1200" kern="1200" dirty="0">
-                    <a:solidFill>
-                      <a:schemeClr val="tx1"/>
-                    </a:solidFill>
-                    <a:effectLst/>
-                    <a:latin typeface="+mn-lt"/>
-                    <a:ea typeface="+mn-ea"/>
-                    <a:cs typeface="+mn-cs"/>
-                  </a:rPr>
-                  <a:t>}\left[\</a:t>
-                </a:r>
-                <a:r>
-                  <a:rPr lang="en-US" sz="1200" kern="1200" dirty="0" err="1">
-                    <a:solidFill>
-                      <a:schemeClr val="tx1"/>
-                    </a:solidFill>
-                    <a:effectLst/>
-                    <a:latin typeface="+mn-lt"/>
-                    <a:ea typeface="+mn-ea"/>
-                    <a:cs typeface="+mn-cs"/>
-                  </a:rPr>
-                  <a:t>x_k^T</a:t>
-                </a:r>
-                <a:r>
-                  <a:rPr lang="en-US" sz="1200" kern="1200" dirty="0">
-                    <a:solidFill>
-                      <a:schemeClr val="tx1"/>
-                    </a:solidFill>
-                    <a:effectLst/>
-                    <a:latin typeface="+mn-lt"/>
-                    <a:ea typeface="+mn-ea"/>
-                    <a:cs typeface="+mn-cs"/>
-                  </a:rPr>
-                  <a:t> </a:t>
-                </a:r>
-                <a:r>
-                  <a:rPr lang="en-US" sz="1200" kern="1200" dirty="0" err="1">
-                    <a:solidFill>
-                      <a:schemeClr val="tx1"/>
-                    </a:solidFill>
-                    <a:effectLst/>
-                    <a:latin typeface="+mn-lt"/>
-                    <a:ea typeface="+mn-ea"/>
-                    <a:cs typeface="+mn-cs"/>
-                  </a:rPr>
-                  <a:t>Q_k</a:t>
-                </a:r>
-                <a:r>
-                  <a:rPr lang="en-US" sz="1200" kern="1200" dirty="0">
-                    <a:solidFill>
-                      <a:schemeClr val="tx1"/>
-                    </a:solidFill>
-                    <a:effectLst/>
-                    <a:latin typeface="+mn-lt"/>
-                    <a:ea typeface="+mn-ea"/>
-                    <a:cs typeface="+mn-cs"/>
-                  </a:rPr>
-                  <a:t> \</a:t>
-                </a:r>
-                <a:r>
-                  <a:rPr lang="en-US" sz="1200" kern="1200" dirty="0" err="1">
-                    <a:solidFill>
-                      <a:schemeClr val="tx1"/>
-                    </a:solidFill>
-                    <a:effectLst/>
-                    <a:latin typeface="+mn-lt"/>
-                    <a:ea typeface="+mn-ea"/>
-                    <a:cs typeface="+mn-cs"/>
-                  </a:rPr>
-                  <a:t>x_k</a:t>
-                </a:r>
-                <a:r>
-                  <a:rPr lang="en-US" sz="1200" kern="1200" dirty="0">
-                    <a:solidFill>
-                      <a:schemeClr val="tx1"/>
-                    </a:solidFill>
-                    <a:effectLst/>
-                    <a:latin typeface="+mn-lt"/>
-                    <a:ea typeface="+mn-ea"/>
-                    <a:cs typeface="+mn-cs"/>
-                  </a:rPr>
-                  <a:t> + \</a:t>
-                </a:r>
-                <a:r>
-                  <a:rPr lang="en-US" sz="1200" kern="1200" dirty="0" err="1">
-                    <a:solidFill>
-                      <a:schemeClr val="tx1"/>
-                    </a:solidFill>
-                    <a:effectLst/>
-                    <a:latin typeface="+mn-lt"/>
-                    <a:ea typeface="+mn-ea"/>
-                    <a:cs typeface="+mn-cs"/>
-                  </a:rPr>
-                  <a:t>u_k^T</a:t>
-                </a:r>
-                <a:r>
-                  <a:rPr lang="en-US" sz="1200" kern="1200" dirty="0">
-                    <a:solidFill>
-                      <a:schemeClr val="tx1"/>
-                    </a:solidFill>
-                    <a:effectLst/>
-                    <a:latin typeface="+mn-lt"/>
-                    <a:ea typeface="+mn-ea"/>
-                    <a:cs typeface="+mn-cs"/>
-                  </a:rPr>
-                  <a:t> </a:t>
-                </a:r>
-                <a:r>
-                  <a:rPr lang="en-US" sz="1200" kern="1200" dirty="0" err="1">
-                    <a:solidFill>
-                      <a:schemeClr val="tx1"/>
-                    </a:solidFill>
-                    <a:effectLst/>
-                    <a:latin typeface="+mn-lt"/>
-                    <a:ea typeface="+mn-ea"/>
-                    <a:cs typeface="+mn-cs"/>
-                  </a:rPr>
-                  <a:t>R_k</a:t>
-                </a:r>
-                <a:r>
-                  <a:rPr lang="en-US" sz="1200" kern="1200" dirty="0">
-                    <a:solidFill>
-                      <a:schemeClr val="tx1"/>
-                    </a:solidFill>
-                    <a:effectLst/>
-                    <a:latin typeface="+mn-lt"/>
-                    <a:ea typeface="+mn-ea"/>
-                    <a:cs typeface="+mn-cs"/>
-                  </a:rPr>
-                  <a:t> \</a:t>
-                </a:r>
-                <a:r>
-                  <a:rPr lang="en-US" sz="1200" kern="1200" dirty="0" err="1">
-                    <a:solidFill>
-                      <a:schemeClr val="tx1"/>
-                    </a:solidFill>
-                    <a:effectLst/>
-                    <a:latin typeface="+mn-lt"/>
-                    <a:ea typeface="+mn-ea"/>
-                    <a:cs typeface="+mn-cs"/>
-                  </a:rPr>
-                  <a:t>u_k</a:t>
-                </a:r>
-                <a:r>
-                  <a:rPr lang="en-US" sz="1200" kern="1200" dirty="0">
-                    <a:solidFill>
-                      <a:schemeClr val="tx1"/>
-                    </a:solidFill>
-                    <a:effectLst/>
-                    <a:latin typeface="+mn-lt"/>
-                    <a:ea typeface="+mn-ea"/>
-                    <a:cs typeface="+mn-cs"/>
-                  </a:rPr>
-                  <a:t> + (</a:t>
-                </a:r>
-                <a:r>
-                  <a:rPr lang="en-US" sz="1200" kern="1200" dirty="0" err="1">
-                    <a:solidFill>
-                      <a:schemeClr val="tx1"/>
-                    </a:solidFill>
-                    <a:effectLst/>
-                    <a:latin typeface="+mn-lt"/>
-                    <a:ea typeface="+mn-ea"/>
-                    <a:cs typeface="+mn-cs"/>
-                  </a:rPr>
-                  <a:t>A_k</a:t>
-                </a:r>
-                <a:r>
-                  <a:rPr lang="en-US" sz="1200" kern="1200" dirty="0">
-                    <a:solidFill>
-                      <a:schemeClr val="tx1"/>
-                    </a:solidFill>
-                    <a:effectLst/>
-                    <a:latin typeface="+mn-lt"/>
-                    <a:ea typeface="+mn-ea"/>
-                    <a:cs typeface="+mn-cs"/>
-                  </a:rPr>
-                  <a:t>\</a:t>
-                </a:r>
-                <a:r>
-                  <a:rPr lang="en-US" sz="1200" kern="1200" dirty="0" err="1">
-                    <a:solidFill>
-                      <a:schemeClr val="tx1"/>
-                    </a:solidFill>
-                    <a:effectLst/>
-                    <a:latin typeface="+mn-lt"/>
-                    <a:ea typeface="+mn-ea"/>
-                    <a:cs typeface="+mn-cs"/>
-                  </a:rPr>
-                  <a:t>x_k</a:t>
-                </a:r>
-                <a:r>
-                  <a:rPr lang="en-US" sz="1200" kern="1200" dirty="0">
-                    <a:solidFill>
-                      <a:schemeClr val="tx1"/>
-                    </a:solidFill>
-                    <a:effectLst/>
-                    <a:latin typeface="+mn-lt"/>
-                    <a:ea typeface="+mn-ea"/>
-                    <a:cs typeface="+mn-cs"/>
-                  </a:rPr>
-                  <a:t> + </a:t>
-                </a:r>
-                <a:r>
-                  <a:rPr lang="en-US" sz="1200" kern="1200" dirty="0" err="1">
-                    <a:solidFill>
-                      <a:schemeClr val="tx1"/>
-                    </a:solidFill>
-                    <a:effectLst/>
-                    <a:latin typeface="+mn-lt"/>
-                    <a:ea typeface="+mn-ea"/>
-                    <a:cs typeface="+mn-cs"/>
-                  </a:rPr>
-                  <a:t>B_k</a:t>
-                </a:r>
-                <a:r>
-                  <a:rPr lang="en-US" sz="1200" kern="1200" dirty="0">
-                    <a:solidFill>
-                      <a:schemeClr val="tx1"/>
-                    </a:solidFill>
-                    <a:effectLst/>
-                    <a:latin typeface="+mn-lt"/>
-                    <a:ea typeface="+mn-ea"/>
-                    <a:cs typeface="+mn-cs"/>
-                  </a:rPr>
-                  <a:t>\</a:t>
-                </a:r>
-                <a:r>
-                  <a:rPr lang="en-US" sz="1200" kern="1200" dirty="0" err="1">
-                    <a:solidFill>
-                      <a:schemeClr val="tx1"/>
-                    </a:solidFill>
-                    <a:effectLst/>
-                    <a:latin typeface="+mn-lt"/>
-                    <a:ea typeface="+mn-ea"/>
-                    <a:cs typeface="+mn-cs"/>
-                  </a:rPr>
-                  <a:t>u_k</a:t>
-                </a:r>
-                <a:r>
-                  <a:rPr lang="en-US" sz="1200" kern="1200" dirty="0">
-                    <a:solidFill>
-                      <a:schemeClr val="tx1"/>
-                    </a:solidFill>
-                    <a:effectLst/>
-                    <a:latin typeface="+mn-lt"/>
-                    <a:ea typeface="+mn-ea"/>
-                    <a:cs typeface="+mn-cs"/>
-                  </a:rPr>
-                  <a:t>)^T P_{k+1}(</a:t>
-                </a:r>
-                <a:r>
-                  <a:rPr lang="en-US" sz="1200" kern="1200" dirty="0" err="1">
-                    <a:solidFill>
-                      <a:schemeClr val="tx1"/>
-                    </a:solidFill>
-                    <a:effectLst/>
-                    <a:latin typeface="+mn-lt"/>
-                    <a:ea typeface="+mn-ea"/>
-                    <a:cs typeface="+mn-cs"/>
-                  </a:rPr>
-                  <a:t>A_k</a:t>
-                </a:r>
-                <a:r>
-                  <a:rPr lang="en-US" sz="1200" kern="1200" dirty="0">
-                    <a:solidFill>
-                      <a:schemeClr val="tx1"/>
-                    </a:solidFill>
-                    <a:effectLst/>
-                    <a:latin typeface="+mn-lt"/>
-                    <a:ea typeface="+mn-ea"/>
-                    <a:cs typeface="+mn-cs"/>
-                  </a:rPr>
-                  <a:t>\</a:t>
-                </a:r>
-                <a:r>
-                  <a:rPr lang="en-US" sz="1200" kern="1200" dirty="0" err="1">
-                    <a:solidFill>
-                      <a:schemeClr val="tx1"/>
-                    </a:solidFill>
-                    <a:effectLst/>
-                    <a:latin typeface="+mn-lt"/>
-                    <a:ea typeface="+mn-ea"/>
-                    <a:cs typeface="+mn-cs"/>
-                  </a:rPr>
-                  <a:t>x_k</a:t>
-                </a:r>
-                <a:r>
-                  <a:rPr lang="en-US" sz="1200" kern="1200" dirty="0">
-                    <a:solidFill>
-                      <a:schemeClr val="tx1"/>
-                    </a:solidFill>
-                    <a:effectLst/>
-                    <a:latin typeface="+mn-lt"/>
-                    <a:ea typeface="+mn-ea"/>
-                    <a:cs typeface="+mn-cs"/>
-                  </a:rPr>
-                  <a:t> + </a:t>
-                </a:r>
-                <a:r>
-                  <a:rPr lang="en-US" sz="1200" kern="1200" dirty="0" err="1">
-                    <a:solidFill>
-                      <a:schemeClr val="tx1"/>
-                    </a:solidFill>
-                    <a:effectLst/>
-                    <a:latin typeface="+mn-lt"/>
-                    <a:ea typeface="+mn-ea"/>
-                    <a:cs typeface="+mn-cs"/>
-                  </a:rPr>
-                  <a:t>B_k</a:t>
-                </a:r>
-                <a:r>
-                  <a:rPr lang="en-US" sz="1200" kern="1200" dirty="0">
-                    <a:solidFill>
-                      <a:schemeClr val="tx1"/>
-                    </a:solidFill>
-                    <a:effectLst/>
-                    <a:latin typeface="+mn-lt"/>
-                    <a:ea typeface="+mn-ea"/>
-                    <a:cs typeface="+mn-cs"/>
-                  </a:rPr>
-                  <a:t>\</a:t>
-                </a:r>
-                <a:r>
-                  <a:rPr lang="en-US" sz="1200" kern="1200" dirty="0" err="1">
-                    <a:solidFill>
-                      <a:schemeClr val="tx1"/>
-                    </a:solidFill>
-                    <a:effectLst/>
-                    <a:latin typeface="+mn-lt"/>
-                    <a:ea typeface="+mn-ea"/>
-                    <a:cs typeface="+mn-cs"/>
-                  </a:rPr>
-                  <a:t>u_k</a:t>
-                </a:r>
-                <a:r>
-                  <a:rPr lang="en-US" sz="1200" kern="1200" dirty="0">
-                    <a:solidFill>
-                      <a:schemeClr val="tx1"/>
-                    </a:solidFill>
-                    <a:effectLst/>
-                    <a:latin typeface="+mn-lt"/>
-                    <a:ea typeface="+mn-ea"/>
-                    <a:cs typeface="+mn-cs"/>
-                  </a:rPr>
-                  <a:t>)\right.\\</a:t>
-                </a:r>
-              </a:p>
-              <a:p>
-                <a:r>
-                  <a:rPr lang="en-US" sz="1200" kern="1200" dirty="0">
-                    <a:solidFill>
-                      <a:schemeClr val="tx1"/>
-                    </a:solidFill>
-                    <a:effectLst/>
-                    <a:latin typeface="+mn-lt"/>
-                    <a:ea typeface="+mn-ea"/>
-                    <a:cs typeface="+mn-cs"/>
-                  </a:rPr>
-                  <a:t>                  &amp;\</a:t>
-                </a:r>
-                <a:r>
-                  <a:rPr lang="en-US" sz="1200" kern="1200" dirty="0" err="1">
-                    <a:solidFill>
-                      <a:schemeClr val="tx1"/>
-                    </a:solidFill>
-                    <a:effectLst/>
-                    <a:latin typeface="+mn-lt"/>
-                    <a:ea typeface="+mn-ea"/>
-                    <a:cs typeface="+mn-cs"/>
-                  </a:rPr>
-                  <a:t>qquad</a:t>
-                </a:r>
-                <a:r>
-                  <a:rPr lang="en-US" sz="1200" kern="1200" dirty="0">
-                    <a:solidFill>
-                      <a:schemeClr val="tx1"/>
-                    </a:solidFill>
-                    <a:effectLst/>
-                    <a:latin typeface="+mn-lt"/>
-                    <a:ea typeface="+mn-ea"/>
-                    <a:cs typeface="+mn-cs"/>
-                  </a:rPr>
-                  <a:t>\</a:t>
-                </a:r>
-                <a:r>
-                  <a:rPr lang="en-US" sz="1200" kern="1200" dirty="0" err="1">
-                    <a:solidFill>
-                      <a:schemeClr val="tx1"/>
-                    </a:solidFill>
-                    <a:effectLst/>
-                    <a:latin typeface="+mn-lt"/>
-                    <a:ea typeface="+mn-ea"/>
-                    <a:cs typeface="+mn-cs"/>
-                  </a:rPr>
-                  <a:t>qquad</a:t>
-                </a:r>
-                <a:r>
-                  <a:rPr lang="en-US" sz="1200" kern="1200" dirty="0">
-                    <a:solidFill>
-                      <a:schemeClr val="tx1"/>
-                    </a:solidFill>
-                    <a:effectLst/>
-                    <a:latin typeface="+mn-lt"/>
-                    <a:ea typeface="+mn-ea"/>
-                    <a:cs typeface="+mn-cs"/>
-                  </a:rPr>
-                  <a:t>\</a:t>
-                </a:r>
-                <a:r>
-                  <a:rPr lang="en-US" sz="1200" kern="1200" dirty="0" err="1">
-                    <a:solidFill>
-                      <a:schemeClr val="tx1"/>
-                    </a:solidFill>
-                    <a:effectLst/>
-                    <a:latin typeface="+mn-lt"/>
-                    <a:ea typeface="+mn-ea"/>
-                    <a:cs typeface="+mn-cs"/>
-                  </a:rPr>
-                  <a:t>qquad</a:t>
-                </a:r>
-                <a:r>
-                  <a:rPr lang="en-US" sz="1200" kern="1200" dirty="0">
-                    <a:solidFill>
-                      <a:schemeClr val="tx1"/>
-                    </a:solidFill>
-                    <a:effectLst/>
-                    <a:latin typeface="+mn-lt"/>
-                    <a:ea typeface="+mn-ea"/>
-                    <a:cs typeface="+mn-cs"/>
-                  </a:rPr>
-                  <a:t>\</a:t>
-                </a:r>
-                <a:r>
-                  <a:rPr lang="en-US" sz="1200" kern="1200" dirty="0" err="1">
-                    <a:solidFill>
-                      <a:schemeClr val="tx1"/>
-                    </a:solidFill>
-                    <a:effectLst/>
-                    <a:latin typeface="+mn-lt"/>
-                    <a:ea typeface="+mn-ea"/>
-                    <a:cs typeface="+mn-cs"/>
-                  </a:rPr>
-                  <a:t>qquad</a:t>
-                </a:r>
-                <a:r>
-                  <a:rPr lang="en-US" sz="1200" kern="1200" dirty="0">
-                    <a:solidFill>
-                      <a:schemeClr val="tx1"/>
-                    </a:solidFill>
-                    <a:effectLst/>
-                    <a:latin typeface="+mn-lt"/>
-                    <a:ea typeface="+mn-ea"/>
-                    <a:cs typeface="+mn-cs"/>
-                  </a:rPr>
-                  <a:t>\left. 2(</a:t>
-                </a:r>
-                <a:r>
-                  <a:rPr lang="en-US" sz="1200" kern="1200" dirty="0" err="1">
-                    <a:solidFill>
-                      <a:schemeClr val="tx1"/>
-                    </a:solidFill>
-                    <a:effectLst/>
-                    <a:latin typeface="+mn-lt"/>
-                    <a:ea typeface="+mn-ea"/>
-                    <a:cs typeface="+mn-cs"/>
-                  </a:rPr>
-                  <a:t>A_k</a:t>
-                </a:r>
-                <a:r>
-                  <a:rPr lang="en-US" sz="1200" kern="1200" dirty="0">
-                    <a:solidFill>
-                      <a:schemeClr val="tx1"/>
-                    </a:solidFill>
-                    <a:effectLst/>
-                    <a:latin typeface="+mn-lt"/>
-                    <a:ea typeface="+mn-ea"/>
-                    <a:cs typeface="+mn-cs"/>
-                  </a:rPr>
-                  <a:t>\</a:t>
-                </a:r>
-                <a:r>
-                  <a:rPr lang="en-US" sz="1200" kern="1200" dirty="0" err="1">
-                    <a:solidFill>
-                      <a:schemeClr val="tx1"/>
-                    </a:solidFill>
-                    <a:effectLst/>
-                    <a:latin typeface="+mn-lt"/>
-                    <a:ea typeface="+mn-ea"/>
-                    <a:cs typeface="+mn-cs"/>
-                  </a:rPr>
-                  <a:t>x_k</a:t>
-                </a:r>
-                <a:r>
-                  <a:rPr lang="en-US" sz="1200" kern="1200" dirty="0">
-                    <a:solidFill>
-                      <a:schemeClr val="tx1"/>
-                    </a:solidFill>
-                    <a:effectLst/>
-                    <a:latin typeface="+mn-lt"/>
-                    <a:ea typeface="+mn-ea"/>
-                    <a:cs typeface="+mn-cs"/>
-                  </a:rPr>
-                  <a:t> + </a:t>
-                </a:r>
-                <a:r>
-                  <a:rPr lang="en-US" sz="1200" kern="1200" dirty="0" err="1">
-                    <a:solidFill>
-                      <a:schemeClr val="tx1"/>
-                    </a:solidFill>
-                    <a:effectLst/>
-                    <a:latin typeface="+mn-lt"/>
-                    <a:ea typeface="+mn-ea"/>
-                    <a:cs typeface="+mn-cs"/>
-                  </a:rPr>
-                  <a:t>B_k</a:t>
-                </a:r>
-                <a:r>
-                  <a:rPr lang="en-US" sz="1200" kern="1200" dirty="0">
-                    <a:solidFill>
-                      <a:schemeClr val="tx1"/>
-                    </a:solidFill>
-                    <a:effectLst/>
-                    <a:latin typeface="+mn-lt"/>
-                    <a:ea typeface="+mn-ea"/>
-                    <a:cs typeface="+mn-cs"/>
-                  </a:rPr>
-                  <a:t>\</a:t>
-                </a:r>
-                <a:r>
-                  <a:rPr lang="en-US" sz="1200" kern="1200" dirty="0" err="1">
-                    <a:solidFill>
-                      <a:schemeClr val="tx1"/>
-                    </a:solidFill>
-                    <a:effectLst/>
-                    <a:latin typeface="+mn-lt"/>
-                    <a:ea typeface="+mn-ea"/>
-                    <a:cs typeface="+mn-cs"/>
-                  </a:rPr>
-                  <a:t>u_k</a:t>
-                </a:r>
-                <a:r>
-                  <a:rPr lang="en-US" sz="1200" kern="1200" dirty="0">
-                    <a:solidFill>
-                      <a:schemeClr val="tx1"/>
-                    </a:solidFill>
-                    <a:effectLst/>
-                    <a:latin typeface="+mn-lt"/>
-                    <a:ea typeface="+mn-ea"/>
-                    <a:cs typeface="+mn-cs"/>
-                  </a:rPr>
-                  <a:t>)^T P_{k+1}\</a:t>
-                </a:r>
-                <a:r>
-                  <a:rPr lang="en-US" sz="1200" kern="1200" dirty="0" err="1">
-                    <a:solidFill>
-                      <a:schemeClr val="tx1"/>
-                    </a:solidFill>
-                    <a:effectLst/>
-                    <a:latin typeface="+mn-lt"/>
-                    <a:ea typeface="+mn-ea"/>
-                    <a:cs typeface="+mn-cs"/>
-                  </a:rPr>
-                  <a:t>w_k</a:t>
-                </a:r>
-                <a:r>
-                  <a:rPr lang="en-US" sz="1200" kern="1200" dirty="0">
-                    <a:solidFill>
-                      <a:schemeClr val="tx1"/>
-                    </a:solidFill>
-                    <a:effectLst/>
-                    <a:latin typeface="+mn-lt"/>
-                    <a:ea typeface="+mn-ea"/>
-                    <a:cs typeface="+mn-cs"/>
-                  </a:rPr>
-                  <a:t> + \</a:t>
-                </a:r>
-                <a:r>
-                  <a:rPr lang="en-US" sz="1200" kern="1200" dirty="0" err="1">
-                    <a:solidFill>
-                      <a:schemeClr val="tx1"/>
-                    </a:solidFill>
-                    <a:effectLst/>
-                    <a:latin typeface="+mn-lt"/>
-                    <a:ea typeface="+mn-ea"/>
-                    <a:cs typeface="+mn-cs"/>
-                  </a:rPr>
-                  <a:t>w_k^T</a:t>
-                </a:r>
-                <a:r>
-                  <a:rPr lang="en-US" sz="1200" kern="1200" dirty="0">
-                    <a:solidFill>
-                      <a:schemeClr val="tx1"/>
-                    </a:solidFill>
-                    <a:effectLst/>
-                    <a:latin typeface="+mn-lt"/>
-                    <a:ea typeface="+mn-ea"/>
-                    <a:cs typeface="+mn-cs"/>
-                  </a:rPr>
-                  <a:t> P_{k+1}\</a:t>
-                </a:r>
-                <a:r>
-                  <a:rPr lang="en-US" sz="1200" kern="1200" dirty="0" err="1">
-                    <a:solidFill>
-                      <a:schemeClr val="tx1"/>
-                    </a:solidFill>
-                    <a:effectLst/>
-                    <a:latin typeface="+mn-lt"/>
-                    <a:ea typeface="+mn-ea"/>
-                    <a:cs typeface="+mn-cs"/>
-                  </a:rPr>
-                  <a:t>w_k</a:t>
-                </a:r>
-                <a:r>
-                  <a:rPr lang="en-US" sz="1200" kern="1200" dirty="0">
-                    <a:solidFill>
-                      <a:schemeClr val="tx1"/>
-                    </a:solidFill>
-                    <a:effectLst/>
-                    <a:latin typeface="+mn-lt"/>
-                    <a:ea typeface="+mn-ea"/>
-                    <a:cs typeface="+mn-cs"/>
-                  </a:rPr>
-                  <a:t> \right]\\</a:t>
-                </a:r>
-              </a:p>
-              <a:p>
-                <a:r>
-                  <a:rPr lang="en-US" sz="1200" kern="1200" dirty="0">
-                    <a:solidFill>
-                      <a:schemeClr val="tx1"/>
-                    </a:solidFill>
-                    <a:effectLst/>
-                    <a:latin typeface="+mn-lt"/>
-                    <a:ea typeface="+mn-ea"/>
-                    <a:cs typeface="+mn-cs"/>
-                  </a:rPr>
-                  <a:t>                  &amp;= \min_{\</a:t>
-                </a:r>
-                <a:r>
-                  <a:rPr lang="en-US" sz="1200" kern="1200" dirty="0" err="1">
-                    <a:solidFill>
-                      <a:schemeClr val="tx1"/>
-                    </a:solidFill>
-                    <a:effectLst/>
-                    <a:latin typeface="+mn-lt"/>
-                    <a:ea typeface="+mn-ea"/>
-                    <a:cs typeface="+mn-cs"/>
-                  </a:rPr>
-                  <a:t>u_k</a:t>
-                </a:r>
-                <a:r>
-                  <a:rPr lang="en-US" sz="1200" kern="1200" dirty="0">
-                    <a:solidFill>
-                      <a:schemeClr val="tx1"/>
-                    </a:solidFill>
-                    <a:effectLst/>
-                    <a:latin typeface="+mn-lt"/>
-                    <a:ea typeface="+mn-ea"/>
-                    <a:cs typeface="+mn-cs"/>
-                  </a:rPr>
-                  <a:t>}\frac{1}{2}\left(\</a:t>
-                </a:r>
-                <a:r>
-                  <a:rPr lang="en-US" sz="1200" kern="1200" dirty="0" err="1">
-                    <a:solidFill>
-                      <a:schemeClr val="tx1"/>
-                    </a:solidFill>
-                    <a:effectLst/>
-                    <a:latin typeface="+mn-lt"/>
-                    <a:ea typeface="+mn-ea"/>
-                    <a:cs typeface="+mn-cs"/>
-                  </a:rPr>
-                  <a:t>x_k^T</a:t>
-                </a:r>
-                <a:r>
-                  <a:rPr lang="en-US" sz="1200" kern="1200" dirty="0">
-                    <a:solidFill>
-                      <a:schemeClr val="tx1"/>
-                    </a:solidFill>
-                    <a:effectLst/>
-                    <a:latin typeface="+mn-lt"/>
-                    <a:ea typeface="+mn-ea"/>
-                    <a:cs typeface="+mn-cs"/>
-                  </a:rPr>
-                  <a:t> </a:t>
-                </a:r>
-                <a:r>
-                  <a:rPr lang="en-US" sz="1200" kern="1200" dirty="0" err="1">
-                    <a:solidFill>
-                      <a:schemeClr val="tx1"/>
-                    </a:solidFill>
-                    <a:effectLst/>
-                    <a:latin typeface="+mn-lt"/>
-                    <a:ea typeface="+mn-ea"/>
-                    <a:cs typeface="+mn-cs"/>
-                  </a:rPr>
-                  <a:t>Q_k</a:t>
-                </a:r>
-                <a:r>
-                  <a:rPr lang="en-US" sz="1200" kern="1200" dirty="0">
-                    <a:solidFill>
-                      <a:schemeClr val="tx1"/>
-                    </a:solidFill>
-                    <a:effectLst/>
-                    <a:latin typeface="+mn-lt"/>
-                    <a:ea typeface="+mn-ea"/>
-                    <a:cs typeface="+mn-cs"/>
-                  </a:rPr>
-                  <a:t> \</a:t>
-                </a:r>
-                <a:r>
-                  <a:rPr lang="en-US" sz="1200" kern="1200" dirty="0" err="1">
-                    <a:solidFill>
-                      <a:schemeClr val="tx1"/>
-                    </a:solidFill>
-                    <a:effectLst/>
-                    <a:latin typeface="+mn-lt"/>
-                    <a:ea typeface="+mn-ea"/>
-                    <a:cs typeface="+mn-cs"/>
-                  </a:rPr>
-                  <a:t>x_k</a:t>
-                </a:r>
-                <a:r>
-                  <a:rPr lang="en-US" sz="1200" kern="1200" dirty="0">
-                    <a:solidFill>
-                      <a:schemeClr val="tx1"/>
-                    </a:solidFill>
-                    <a:effectLst/>
-                    <a:latin typeface="+mn-lt"/>
-                    <a:ea typeface="+mn-ea"/>
-                    <a:cs typeface="+mn-cs"/>
-                  </a:rPr>
-                  <a:t> + \</a:t>
-                </a:r>
-                <a:r>
-                  <a:rPr lang="en-US" sz="1200" kern="1200" dirty="0" err="1">
-                    <a:solidFill>
-                      <a:schemeClr val="tx1"/>
-                    </a:solidFill>
-                    <a:effectLst/>
-                    <a:latin typeface="+mn-lt"/>
-                    <a:ea typeface="+mn-ea"/>
-                    <a:cs typeface="+mn-cs"/>
-                  </a:rPr>
-                  <a:t>u_k^T</a:t>
-                </a:r>
-                <a:r>
-                  <a:rPr lang="en-US" sz="1200" kern="1200" dirty="0">
-                    <a:solidFill>
-                      <a:schemeClr val="tx1"/>
-                    </a:solidFill>
-                    <a:effectLst/>
-                    <a:latin typeface="+mn-lt"/>
-                    <a:ea typeface="+mn-ea"/>
-                    <a:cs typeface="+mn-cs"/>
-                  </a:rPr>
-                  <a:t> </a:t>
-                </a:r>
-                <a:r>
-                  <a:rPr lang="en-US" sz="1200" kern="1200" dirty="0" err="1">
-                    <a:solidFill>
-                      <a:schemeClr val="tx1"/>
-                    </a:solidFill>
-                    <a:effectLst/>
-                    <a:latin typeface="+mn-lt"/>
-                    <a:ea typeface="+mn-ea"/>
-                    <a:cs typeface="+mn-cs"/>
-                  </a:rPr>
-                  <a:t>R_k</a:t>
-                </a:r>
-                <a:r>
-                  <a:rPr lang="en-US" sz="1200" kern="1200" dirty="0">
-                    <a:solidFill>
-                      <a:schemeClr val="tx1"/>
-                    </a:solidFill>
-                    <a:effectLst/>
-                    <a:latin typeface="+mn-lt"/>
-                    <a:ea typeface="+mn-ea"/>
-                    <a:cs typeface="+mn-cs"/>
-                  </a:rPr>
-                  <a:t> \</a:t>
-                </a:r>
-                <a:r>
-                  <a:rPr lang="en-US" sz="1200" kern="1200" dirty="0" err="1">
-                    <a:solidFill>
-                      <a:schemeClr val="tx1"/>
-                    </a:solidFill>
-                    <a:effectLst/>
-                    <a:latin typeface="+mn-lt"/>
-                    <a:ea typeface="+mn-ea"/>
-                    <a:cs typeface="+mn-cs"/>
-                  </a:rPr>
-                  <a:t>u_k</a:t>
-                </a:r>
-                <a:r>
-                  <a:rPr lang="en-US" sz="1200" kern="1200" dirty="0">
-                    <a:solidFill>
-                      <a:schemeClr val="tx1"/>
-                    </a:solidFill>
-                    <a:effectLst/>
-                    <a:latin typeface="+mn-lt"/>
-                    <a:ea typeface="+mn-ea"/>
-                    <a:cs typeface="+mn-cs"/>
-                  </a:rPr>
-                  <a:t> + (</a:t>
-                </a:r>
-                <a:r>
-                  <a:rPr lang="en-US" sz="1200" kern="1200" dirty="0" err="1">
-                    <a:solidFill>
-                      <a:schemeClr val="tx1"/>
-                    </a:solidFill>
-                    <a:effectLst/>
-                    <a:latin typeface="+mn-lt"/>
-                    <a:ea typeface="+mn-ea"/>
-                    <a:cs typeface="+mn-cs"/>
-                  </a:rPr>
-                  <a:t>A_k</a:t>
-                </a:r>
-                <a:r>
-                  <a:rPr lang="en-US" sz="1200" kern="1200" dirty="0">
-                    <a:solidFill>
-                      <a:schemeClr val="tx1"/>
-                    </a:solidFill>
-                    <a:effectLst/>
-                    <a:latin typeface="+mn-lt"/>
-                    <a:ea typeface="+mn-ea"/>
-                    <a:cs typeface="+mn-cs"/>
-                  </a:rPr>
-                  <a:t>\</a:t>
-                </a:r>
-                <a:r>
-                  <a:rPr lang="en-US" sz="1200" kern="1200" dirty="0" err="1">
-                    <a:solidFill>
-                      <a:schemeClr val="tx1"/>
-                    </a:solidFill>
-                    <a:effectLst/>
-                    <a:latin typeface="+mn-lt"/>
-                    <a:ea typeface="+mn-ea"/>
-                    <a:cs typeface="+mn-cs"/>
-                  </a:rPr>
-                  <a:t>x_k</a:t>
-                </a:r>
-                <a:r>
-                  <a:rPr lang="en-US" sz="1200" kern="1200" dirty="0">
-                    <a:solidFill>
-                      <a:schemeClr val="tx1"/>
-                    </a:solidFill>
-                    <a:effectLst/>
-                    <a:latin typeface="+mn-lt"/>
-                    <a:ea typeface="+mn-ea"/>
-                    <a:cs typeface="+mn-cs"/>
-                  </a:rPr>
-                  <a:t> + </a:t>
-                </a:r>
-                <a:r>
-                  <a:rPr lang="en-US" sz="1200" kern="1200" dirty="0" err="1">
-                    <a:solidFill>
-                      <a:schemeClr val="tx1"/>
-                    </a:solidFill>
-                    <a:effectLst/>
-                    <a:latin typeface="+mn-lt"/>
-                    <a:ea typeface="+mn-ea"/>
-                    <a:cs typeface="+mn-cs"/>
-                  </a:rPr>
-                  <a:t>B_k</a:t>
-                </a:r>
-                <a:r>
-                  <a:rPr lang="en-US" sz="1200" kern="1200" dirty="0">
-                    <a:solidFill>
-                      <a:schemeClr val="tx1"/>
-                    </a:solidFill>
-                    <a:effectLst/>
-                    <a:latin typeface="+mn-lt"/>
-                    <a:ea typeface="+mn-ea"/>
-                    <a:cs typeface="+mn-cs"/>
-                  </a:rPr>
-                  <a:t>\</a:t>
-                </a:r>
-                <a:r>
-                  <a:rPr lang="en-US" sz="1200" kern="1200" dirty="0" err="1">
-                    <a:solidFill>
-                      <a:schemeClr val="tx1"/>
-                    </a:solidFill>
-                    <a:effectLst/>
-                    <a:latin typeface="+mn-lt"/>
-                    <a:ea typeface="+mn-ea"/>
-                    <a:cs typeface="+mn-cs"/>
-                  </a:rPr>
-                  <a:t>u_k</a:t>
-                </a:r>
-                <a:r>
-                  <a:rPr lang="en-US" sz="1200" kern="1200" dirty="0">
-                    <a:solidFill>
-                      <a:schemeClr val="tx1"/>
-                    </a:solidFill>
-                    <a:effectLst/>
-                    <a:latin typeface="+mn-lt"/>
-                    <a:ea typeface="+mn-ea"/>
-                    <a:cs typeface="+mn-cs"/>
-                  </a:rPr>
-                  <a:t>)^T P_{k+1}(</a:t>
-                </a:r>
-                <a:r>
-                  <a:rPr lang="en-US" sz="1200" kern="1200" dirty="0" err="1">
-                    <a:solidFill>
-                      <a:schemeClr val="tx1"/>
-                    </a:solidFill>
-                    <a:effectLst/>
-                    <a:latin typeface="+mn-lt"/>
-                    <a:ea typeface="+mn-ea"/>
-                    <a:cs typeface="+mn-cs"/>
-                  </a:rPr>
-                  <a:t>A_k</a:t>
-                </a:r>
-                <a:r>
-                  <a:rPr lang="en-US" sz="1200" kern="1200" dirty="0">
-                    <a:solidFill>
-                      <a:schemeClr val="tx1"/>
-                    </a:solidFill>
-                    <a:effectLst/>
-                    <a:latin typeface="+mn-lt"/>
-                    <a:ea typeface="+mn-ea"/>
-                    <a:cs typeface="+mn-cs"/>
-                  </a:rPr>
-                  <a:t>\</a:t>
-                </a:r>
-                <a:r>
-                  <a:rPr lang="en-US" sz="1200" kern="1200" dirty="0" err="1">
-                    <a:solidFill>
-                      <a:schemeClr val="tx1"/>
-                    </a:solidFill>
-                    <a:effectLst/>
-                    <a:latin typeface="+mn-lt"/>
-                    <a:ea typeface="+mn-ea"/>
-                    <a:cs typeface="+mn-cs"/>
-                  </a:rPr>
-                  <a:t>x_k</a:t>
-                </a:r>
-                <a:r>
-                  <a:rPr lang="en-US" sz="1200" kern="1200" dirty="0">
-                    <a:solidFill>
-                      <a:schemeClr val="tx1"/>
-                    </a:solidFill>
-                    <a:effectLst/>
-                    <a:latin typeface="+mn-lt"/>
-                    <a:ea typeface="+mn-ea"/>
-                    <a:cs typeface="+mn-cs"/>
-                  </a:rPr>
-                  <a:t> + </a:t>
-                </a:r>
-                <a:r>
-                  <a:rPr lang="en-US" sz="1200" kern="1200" dirty="0" err="1">
-                    <a:solidFill>
-                      <a:schemeClr val="tx1"/>
-                    </a:solidFill>
-                    <a:effectLst/>
-                    <a:latin typeface="+mn-lt"/>
-                    <a:ea typeface="+mn-ea"/>
-                    <a:cs typeface="+mn-cs"/>
-                  </a:rPr>
-                  <a:t>B_k</a:t>
-                </a:r>
-                <a:r>
-                  <a:rPr lang="en-US" sz="1200" kern="1200" dirty="0">
-                    <a:solidFill>
-                      <a:schemeClr val="tx1"/>
-                    </a:solidFill>
-                    <a:effectLst/>
-                    <a:latin typeface="+mn-lt"/>
-                    <a:ea typeface="+mn-ea"/>
-                    <a:cs typeface="+mn-cs"/>
-                  </a:rPr>
-                  <a:t>\</a:t>
-                </a:r>
-                <a:r>
-                  <a:rPr lang="en-US" sz="1200" kern="1200" dirty="0" err="1">
-                    <a:solidFill>
-                      <a:schemeClr val="tx1"/>
-                    </a:solidFill>
-                    <a:effectLst/>
-                    <a:latin typeface="+mn-lt"/>
-                    <a:ea typeface="+mn-ea"/>
-                    <a:cs typeface="+mn-cs"/>
-                  </a:rPr>
-                  <a:t>u_k</a:t>
-                </a:r>
-                <a:r>
-                  <a:rPr lang="en-US" sz="1200" kern="1200" dirty="0">
-                    <a:solidFill>
-                      <a:schemeClr val="tx1"/>
-                    </a:solidFill>
-                    <a:effectLst/>
-                    <a:latin typeface="+mn-lt"/>
-                    <a:ea typeface="+mn-ea"/>
-                    <a:cs typeface="+mn-cs"/>
-                  </a:rPr>
-                  <a:t>) + \</a:t>
-                </a:r>
-                <a:r>
-                  <a:rPr lang="en-US" sz="1200" kern="1200" dirty="0" err="1">
-                    <a:solidFill>
-                      <a:schemeClr val="tx1"/>
-                    </a:solidFill>
-                    <a:effectLst/>
-                    <a:latin typeface="+mn-lt"/>
-                    <a:ea typeface="+mn-ea"/>
-                    <a:cs typeface="+mn-cs"/>
-                  </a:rPr>
-                  <a:t>mathrm</a:t>
-                </a:r>
-                <a:r>
-                  <a:rPr lang="en-US" sz="1200" kern="1200" dirty="0">
-                    <a:solidFill>
-                      <a:schemeClr val="tx1"/>
-                    </a:solidFill>
-                    <a:effectLst/>
-                    <a:latin typeface="+mn-lt"/>
-                    <a:ea typeface="+mn-ea"/>
-                    <a:cs typeface="+mn-cs"/>
-                  </a:rPr>
-                  <a:t>{tr}(P_{k+1}\Sigma_{\</a:t>
-                </a:r>
-                <a:r>
-                  <a:rPr lang="en-US" sz="1200" kern="1200" dirty="0" err="1">
-                    <a:solidFill>
-                      <a:schemeClr val="tx1"/>
-                    </a:solidFill>
-                    <a:effectLst/>
-                    <a:latin typeface="+mn-lt"/>
-                    <a:ea typeface="+mn-ea"/>
-                    <a:cs typeface="+mn-cs"/>
-                  </a:rPr>
-                  <a:t>w_k</a:t>
-                </a:r>
-                <a:r>
-                  <a:rPr lang="en-US" sz="1200" kern="1200" dirty="0">
-                    <a:solidFill>
-                      <a:schemeClr val="tx1"/>
-                    </a:solidFill>
-                    <a:effectLst/>
-                    <a:latin typeface="+mn-lt"/>
-                    <a:ea typeface="+mn-ea"/>
-                    <a:cs typeface="+mn-cs"/>
-                  </a:rPr>
-                  <a:t>})\right)</a:t>
-                </a:r>
-              </a:p>
-              <a:p>
-                <a:pPr marL="0" marR="0" lvl="0" indent="0" algn="l" defTabSz="914400" rtl="0" eaLnBrk="1" fontAlgn="auto" latinLnBrk="0" hangingPunct="1">
-                  <a:lnSpc>
-                    <a:spcPct val="100000"/>
-                  </a:lnSpc>
-                  <a:spcBef>
-                    <a:spcPts val="0"/>
-                  </a:spcBef>
-                  <a:spcAft>
-                    <a:spcPts val="0"/>
-                  </a:spcAft>
-                  <a:buClrTx/>
-                  <a:buSzTx/>
-                  <a:buFontTx/>
-                  <a:buNone/>
-                  <a:tabLst/>
-                  <a:defRPr/>
-                </a:pPr>
-                <a:endParaRPr lang="en-US" sz="1200" kern="1200" dirty="0">
-                  <a:solidFill>
-                    <a:schemeClr val="tx1"/>
-                  </a:solidFill>
-                  <a:effectLst/>
-                  <a:latin typeface="+mn-lt"/>
-                  <a:ea typeface="+mn-ea"/>
-                  <a:cs typeface="+mn-cs"/>
-                </a:endParaRPr>
-              </a:p>
-              <a:p>
-                <a:endParaRPr lang="en-US" dirty="0"/>
-              </a:p>
-            </p:txBody>
-          </p:sp>
-        </mc:Fallback>
-      </mc:AlternateContent>
+      <p:sp>
+        <p:nvSpPr>
+          <p:cNvPr id="3" name="Notes Placeholder 2"/>
+          <p:cNvSpPr>
+            <a:spLocks noGrp="1"/>
+          </p:cNvSpPr>
+          <p:nvPr>
+            <p:ph type="body" idx="1"/>
+          </p:nvPr>
+        </p:nvSpPr>
+        <p:spPr/>
+        <p:txBody>
+          <a:bodyPr/>
+          <a:lstStyle/>
+          <a:p>
+            <a:endParaRPr lang="en-US" dirty="0"/>
+          </a:p>
+        </p:txBody>
+      </p:sp>
       <p:sp>
         <p:nvSpPr>
           <p:cNvPr id="4" name="Slide Number Placeholder 3"/>
@@ -6380,1891 +786,6 @@
         <p:txBody>
           <a:bodyPr/>
           <a:lstStyle/>
-          <a:p>
-            <a:pPr marL="0" marR="0" lvl="0" indent="0" algn="l" defTabSz="914400" rtl="0" eaLnBrk="1" fontAlgn="auto" latinLnBrk="0" hangingPunct="1">
-              <a:lnSpc>
-                <a:spcPct val="100000"/>
-              </a:lnSpc>
-              <a:spcBef>
-                <a:spcPts val="0"/>
-              </a:spcBef>
-              <a:spcAft>
-                <a:spcPts val="0"/>
-              </a:spcAft>
-              <a:buClrTx/>
-              <a:buSzTx/>
-              <a:buFontTx/>
-              <a:buNone/>
-              <a:tabLst/>
-              <a:defRPr/>
-            </a:pPr>
-            <a:r>
-              <a:rPr lang="en-US" sz="1200" kern="1200" dirty="0">
-                <a:solidFill>
-                  <a:schemeClr val="tx1"/>
-                </a:solidFill>
-                <a:effectLst/>
-                <a:latin typeface="+mn-lt"/>
-                <a:ea typeface="+mn-ea"/>
-                <a:cs typeface="+mn-cs"/>
-              </a:rPr>
-              <a:t>J_{k+1}^*(\x_{k+1}) = \frac{1}{2}\x_{k+1}^T </a:t>
-            </a:r>
-            <a:r>
-              <a:rPr lang="en-US" sz="1200" kern="1200" dirty="0" err="1">
-                <a:solidFill>
-                  <a:schemeClr val="tx1"/>
-                </a:solidFill>
-                <a:effectLst/>
-                <a:latin typeface="+mn-lt"/>
-                <a:ea typeface="+mn-ea"/>
-                <a:cs typeface="+mn-cs"/>
-              </a:rPr>
-              <a:t>P_k</a:t>
-            </a:r>
-            <a:r>
-              <a:rPr lang="en-US" sz="1200" kern="1200" dirty="0">
-                <a:solidFill>
-                  <a:schemeClr val="tx1"/>
-                </a:solidFill>
-                <a:effectLst/>
-                <a:latin typeface="+mn-lt"/>
-                <a:ea typeface="+mn-ea"/>
-                <a:cs typeface="+mn-cs"/>
-              </a:rPr>
-              <a:t> \x_{k+1}</a:t>
-            </a:r>
-          </a:p>
-          <a:p>
-            <a:pPr marL="0" marR="0" lvl="0" indent="0" algn="l" defTabSz="914400" rtl="0" eaLnBrk="1" fontAlgn="auto" latinLnBrk="0" hangingPunct="1">
-              <a:lnSpc>
-                <a:spcPct val="100000"/>
-              </a:lnSpc>
-              <a:spcBef>
-                <a:spcPts val="0"/>
-              </a:spcBef>
-              <a:spcAft>
-                <a:spcPts val="0"/>
-              </a:spcAft>
-              <a:buClrTx/>
-              <a:buSzTx/>
-              <a:buFontTx/>
-              <a:buNone/>
-              <a:tabLst/>
-              <a:defRPr/>
-            </a:pPr>
-            <a:endParaRPr lang="en-US" sz="1200" kern="1200" dirty="0">
-              <a:solidFill>
-                <a:schemeClr val="tx1"/>
-              </a:solidFill>
-              <a:effectLst/>
-              <a:latin typeface="+mn-lt"/>
-              <a:ea typeface="+mn-ea"/>
-              <a:cs typeface="+mn-cs"/>
-            </a:endParaRPr>
-          </a:p>
-          <a:p>
-            <a:r>
-              <a:rPr lang="en-US" sz="1200" kern="1200" dirty="0">
-                <a:solidFill>
-                  <a:schemeClr val="tx1"/>
-                </a:solidFill>
-                <a:effectLst/>
-                <a:latin typeface="+mn-lt"/>
-                <a:ea typeface="+mn-ea"/>
-                <a:cs typeface="+mn-cs"/>
-              </a:rPr>
-              <a:t>J_{k}^*(\x_{k+1}) &amp;= \min_{\</a:t>
-            </a:r>
-            <a:r>
-              <a:rPr lang="en-US" sz="1200" kern="1200" dirty="0" err="1">
-                <a:solidFill>
-                  <a:schemeClr val="tx1"/>
-                </a:solidFill>
-                <a:effectLst/>
-                <a:latin typeface="+mn-lt"/>
-                <a:ea typeface="+mn-ea"/>
-                <a:cs typeface="+mn-cs"/>
-              </a:rPr>
-              <a:t>u_k</a:t>
-            </a:r>
-            <a:r>
-              <a:rPr lang="en-US" sz="1200" kern="1200" dirty="0">
-                <a:solidFill>
-                  <a:schemeClr val="tx1"/>
-                </a:solidFill>
-                <a:effectLst/>
-                <a:latin typeface="+mn-lt"/>
-                <a:ea typeface="+mn-ea"/>
-                <a:cs typeface="+mn-cs"/>
-              </a:rPr>
-              <a:t>}\E_{\</a:t>
-            </a:r>
-            <a:r>
-              <a:rPr lang="en-US" sz="1200" kern="1200" dirty="0" err="1">
-                <a:solidFill>
-                  <a:schemeClr val="tx1"/>
-                </a:solidFill>
-                <a:effectLst/>
-                <a:latin typeface="+mn-lt"/>
-                <a:ea typeface="+mn-ea"/>
-                <a:cs typeface="+mn-cs"/>
-              </a:rPr>
-              <a:t>w_k</a:t>
-            </a:r>
-            <a:r>
-              <a:rPr lang="en-US" sz="1200" kern="1200" dirty="0">
-                <a:solidFill>
-                  <a:schemeClr val="tx1"/>
-                </a:solidFill>
-                <a:effectLst/>
-                <a:latin typeface="+mn-lt"/>
-                <a:ea typeface="+mn-ea"/>
-                <a:cs typeface="+mn-cs"/>
-              </a:rPr>
-              <a:t>}\left[</a:t>
-            </a:r>
-            <a:r>
-              <a:rPr lang="en-US" sz="1200" kern="1200" dirty="0" err="1">
-                <a:solidFill>
-                  <a:schemeClr val="tx1"/>
-                </a:solidFill>
-                <a:effectLst/>
-                <a:latin typeface="+mn-lt"/>
-                <a:ea typeface="+mn-ea"/>
-                <a:cs typeface="+mn-cs"/>
-              </a:rPr>
-              <a:t>g_k</a:t>
-            </a:r>
-            <a:r>
-              <a:rPr lang="en-US" sz="1200" kern="1200" dirty="0">
-                <a:solidFill>
-                  <a:schemeClr val="tx1"/>
-                </a:solidFill>
-                <a:effectLst/>
-                <a:latin typeface="+mn-lt"/>
-                <a:ea typeface="+mn-ea"/>
-                <a:cs typeface="+mn-cs"/>
-              </a:rPr>
-              <a:t>(\</a:t>
-            </a:r>
-            <a:r>
-              <a:rPr lang="en-US" sz="1200" kern="1200" dirty="0" err="1">
-                <a:solidFill>
-                  <a:schemeClr val="tx1"/>
-                </a:solidFill>
-                <a:effectLst/>
-                <a:latin typeface="+mn-lt"/>
-                <a:ea typeface="+mn-ea"/>
-                <a:cs typeface="+mn-cs"/>
-              </a:rPr>
-              <a:t>x_k</a:t>
-            </a:r>
-            <a:r>
-              <a:rPr lang="en-US" sz="1200" kern="1200" dirty="0">
-                <a:solidFill>
-                  <a:schemeClr val="tx1"/>
-                </a:solidFill>
-                <a:effectLst/>
-                <a:latin typeface="+mn-lt"/>
-                <a:ea typeface="+mn-ea"/>
-                <a:cs typeface="+mn-cs"/>
-              </a:rPr>
-              <a:t>, \</a:t>
-            </a:r>
-            <a:r>
-              <a:rPr lang="en-US" sz="1200" kern="1200" dirty="0" err="1">
-                <a:solidFill>
-                  <a:schemeClr val="tx1"/>
-                </a:solidFill>
-                <a:effectLst/>
-                <a:latin typeface="+mn-lt"/>
-                <a:ea typeface="+mn-ea"/>
-                <a:cs typeface="+mn-cs"/>
-              </a:rPr>
-              <a:t>u_k</a:t>
-            </a:r>
-            <a:r>
-              <a:rPr lang="en-US" sz="1200" kern="1200" dirty="0">
-                <a:solidFill>
-                  <a:schemeClr val="tx1"/>
-                </a:solidFill>
-                <a:effectLst/>
-                <a:latin typeface="+mn-lt"/>
-                <a:ea typeface="+mn-ea"/>
-                <a:cs typeface="+mn-cs"/>
-              </a:rPr>
-              <a:t>, \</a:t>
-            </a:r>
-            <a:r>
-              <a:rPr lang="en-US" sz="1200" kern="1200" dirty="0" err="1">
-                <a:solidFill>
-                  <a:schemeClr val="tx1"/>
-                </a:solidFill>
-                <a:effectLst/>
-                <a:latin typeface="+mn-lt"/>
-                <a:ea typeface="+mn-ea"/>
-                <a:cs typeface="+mn-cs"/>
-              </a:rPr>
-              <a:t>w_k</a:t>
-            </a:r>
-            <a:r>
-              <a:rPr lang="en-US" sz="1200" kern="1200" dirty="0">
-                <a:solidFill>
-                  <a:schemeClr val="tx1"/>
-                </a:solidFill>
-                <a:effectLst/>
-                <a:latin typeface="+mn-lt"/>
-                <a:ea typeface="+mn-ea"/>
-                <a:cs typeface="+mn-cs"/>
-              </a:rPr>
-              <a:t>) + J_{k+1}^*(f(\</a:t>
-            </a:r>
-            <a:r>
-              <a:rPr lang="en-US" sz="1200" kern="1200" dirty="0" err="1">
-                <a:solidFill>
-                  <a:schemeClr val="tx1"/>
-                </a:solidFill>
-                <a:effectLst/>
-                <a:latin typeface="+mn-lt"/>
-                <a:ea typeface="+mn-ea"/>
-                <a:cs typeface="+mn-cs"/>
-              </a:rPr>
-              <a:t>x_k</a:t>
-            </a:r>
-            <a:r>
-              <a:rPr lang="en-US" sz="1200" kern="1200" dirty="0">
-                <a:solidFill>
-                  <a:schemeClr val="tx1"/>
-                </a:solidFill>
-                <a:effectLst/>
-                <a:latin typeface="+mn-lt"/>
-                <a:ea typeface="+mn-ea"/>
-                <a:cs typeface="+mn-cs"/>
-              </a:rPr>
-              <a:t>, \</a:t>
-            </a:r>
-            <a:r>
-              <a:rPr lang="en-US" sz="1200" kern="1200" dirty="0" err="1">
-                <a:solidFill>
-                  <a:schemeClr val="tx1"/>
-                </a:solidFill>
-                <a:effectLst/>
-                <a:latin typeface="+mn-lt"/>
-                <a:ea typeface="+mn-ea"/>
-                <a:cs typeface="+mn-cs"/>
-              </a:rPr>
-              <a:t>u_k</a:t>
-            </a:r>
-            <a:r>
-              <a:rPr lang="en-US" sz="1200" kern="1200" dirty="0">
-                <a:solidFill>
-                  <a:schemeClr val="tx1"/>
-                </a:solidFill>
-                <a:effectLst/>
-                <a:latin typeface="+mn-lt"/>
-                <a:ea typeface="+mn-ea"/>
-                <a:cs typeface="+mn-cs"/>
-              </a:rPr>
-              <a:t>, \</a:t>
-            </a:r>
-            <a:r>
-              <a:rPr lang="en-US" sz="1200" kern="1200" dirty="0" err="1">
-                <a:solidFill>
-                  <a:schemeClr val="tx1"/>
-                </a:solidFill>
-                <a:effectLst/>
-                <a:latin typeface="+mn-lt"/>
-                <a:ea typeface="+mn-ea"/>
-                <a:cs typeface="+mn-cs"/>
-              </a:rPr>
-              <a:t>w_k</a:t>
-            </a:r>
-            <a:r>
-              <a:rPr lang="en-US" sz="1200" kern="1200" dirty="0">
-                <a:solidFill>
-                  <a:schemeClr val="tx1"/>
-                </a:solidFill>
-                <a:effectLst/>
-                <a:latin typeface="+mn-lt"/>
-                <a:ea typeface="+mn-ea"/>
-                <a:cs typeface="+mn-cs"/>
-              </a:rPr>
-              <a:t>))\right]\\</a:t>
-            </a:r>
-          </a:p>
-          <a:p>
-            <a:r>
-              <a:rPr lang="en-US" sz="1200" kern="1200" dirty="0">
-                <a:solidFill>
-                  <a:schemeClr val="tx1"/>
-                </a:solidFill>
-                <a:effectLst/>
-                <a:latin typeface="+mn-lt"/>
-                <a:ea typeface="+mn-ea"/>
-                <a:cs typeface="+mn-cs"/>
-              </a:rPr>
-              <a:t>                  &amp;= \min_{\</a:t>
-            </a:r>
-            <a:r>
-              <a:rPr lang="en-US" sz="1200" kern="1200" dirty="0" err="1">
-                <a:solidFill>
-                  <a:schemeClr val="tx1"/>
-                </a:solidFill>
-                <a:effectLst/>
-                <a:latin typeface="+mn-lt"/>
-                <a:ea typeface="+mn-ea"/>
-                <a:cs typeface="+mn-cs"/>
-              </a:rPr>
-              <a:t>u_k</a:t>
-            </a:r>
-            <a:r>
-              <a:rPr lang="en-US" sz="1200" kern="1200" dirty="0">
-                <a:solidFill>
-                  <a:schemeClr val="tx1"/>
-                </a:solidFill>
-                <a:effectLst/>
-                <a:latin typeface="+mn-lt"/>
-                <a:ea typeface="+mn-ea"/>
-                <a:cs typeface="+mn-cs"/>
-              </a:rPr>
-              <a:t>}\frac{1}{2}\E_{\</a:t>
-            </a:r>
-            <a:r>
-              <a:rPr lang="en-US" sz="1200" kern="1200" dirty="0" err="1">
-                <a:solidFill>
-                  <a:schemeClr val="tx1"/>
-                </a:solidFill>
-                <a:effectLst/>
-                <a:latin typeface="+mn-lt"/>
-                <a:ea typeface="+mn-ea"/>
-                <a:cs typeface="+mn-cs"/>
-              </a:rPr>
-              <a:t>w_k</a:t>
-            </a:r>
-            <a:r>
-              <a:rPr lang="en-US" sz="1200" kern="1200" dirty="0">
-                <a:solidFill>
-                  <a:schemeClr val="tx1"/>
-                </a:solidFill>
-                <a:effectLst/>
-                <a:latin typeface="+mn-lt"/>
-                <a:ea typeface="+mn-ea"/>
-                <a:cs typeface="+mn-cs"/>
-              </a:rPr>
-              <a:t>}\left[\</a:t>
-            </a:r>
-            <a:r>
-              <a:rPr lang="en-US" sz="1200" kern="1200" dirty="0" err="1">
-                <a:solidFill>
-                  <a:schemeClr val="tx1"/>
-                </a:solidFill>
-                <a:effectLst/>
-                <a:latin typeface="+mn-lt"/>
-                <a:ea typeface="+mn-ea"/>
-                <a:cs typeface="+mn-cs"/>
-              </a:rPr>
-              <a:t>x_k^T</a:t>
-            </a:r>
-            <a:r>
-              <a:rPr lang="en-US" sz="1200" kern="1200" dirty="0">
-                <a:solidFill>
-                  <a:schemeClr val="tx1"/>
-                </a:solidFill>
-                <a:effectLst/>
-                <a:latin typeface="+mn-lt"/>
-                <a:ea typeface="+mn-ea"/>
-                <a:cs typeface="+mn-cs"/>
-              </a:rPr>
-              <a:t> </a:t>
-            </a:r>
-            <a:r>
-              <a:rPr lang="en-US" sz="1200" kern="1200" dirty="0" err="1">
-                <a:solidFill>
-                  <a:schemeClr val="tx1"/>
-                </a:solidFill>
-                <a:effectLst/>
-                <a:latin typeface="+mn-lt"/>
-                <a:ea typeface="+mn-ea"/>
-                <a:cs typeface="+mn-cs"/>
-              </a:rPr>
-              <a:t>Q_k</a:t>
-            </a:r>
-            <a:r>
-              <a:rPr lang="en-US" sz="1200" kern="1200" dirty="0">
-                <a:solidFill>
-                  <a:schemeClr val="tx1"/>
-                </a:solidFill>
-                <a:effectLst/>
-                <a:latin typeface="+mn-lt"/>
-                <a:ea typeface="+mn-ea"/>
-                <a:cs typeface="+mn-cs"/>
-              </a:rPr>
-              <a:t> \</a:t>
-            </a:r>
-            <a:r>
-              <a:rPr lang="en-US" sz="1200" kern="1200" dirty="0" err="1">
-                <a:solidFill>
-                  <a:schemeClr val="tx1"/>
-                </a:solidFill>
-                <a:effectLst/>
-                <a:latin typeface="+mn-lt"/>
-                <a:ea typeface="+mn-ea"/>
-                <a:cs typeface="+mn-cs"/>
-              </a:rPr>
-              <a:t>x_k</a:t>
-            </a:r>
-            <a:r>
-              <a:rPr lang="en-US" sz="1200" kern="1200" dirty="0">
-                <a:solidFill>
-                  <a:schemeClr val="tx1"/>
-                </a:solidFill>
-                <a:effectLst/>
-                <a:latin typeface="+mn-lt"/>
-                <a:ea typeface="+mn-ea"/>
-                <a:cs typeface="+mn-cs"/>
-              </a:rPr>
-              <a:t> + \</a:t>
-            </a:r>
-            <a:r>
-              <a:rPr lang="en-US" sz="1200" kern="1200" dirty="0" err="1">
-                <a:solidFill>
-                  <a:schemeClr val="tx1"/>
-                </a:solidFill>
-                <a:effectLst/>
-                <a:latin typeface="+mn-lt"/>
-                <a:ea typeface="+mn-ea"/>
-                <a:cs typeface="+mn-cs"/>
-              </a:rPr>
-              <a:t>u_k^T</a:t>
-            </a:r>
-            <a:r>
-              <a:rPr lang="en-US" sz="1200" kern="1200" dirty="0">
-                <a:solidFill>
-                  <a:schemeClr val="tx1"/>
-                </a:solidFill>
-                <a:effectLst/>
-                <a:latin typeface="+mn-lt"/>
-                <a:ea typeface="+mn-ea"/>
-                <a:cs typeface="+mn-cs"/>
-              </a:rPr>
-              <a:t> </a:t>
-            </a:r>
-            <a:r>
-              <a:rPr lang="en-US" sz="1200" kern="1200" dirty="0" err="1">
-                <a:solidFill>
-                  <a:schemeClr val="tx1"/>
-                </a:solidFill>
-                <a:effectLst/>
-                <a:latin typeface="+mn-lt"/>
-                <a:ea typeface="+mn-ea"/>
-                <a:cs typeface="+mn-cs"/>
-              </a:rPr>
-              <a:t>R_k</a:t>
-            </a:r>
-            <a:r>
-              <a:rPr lang="en-US" sz="1200" kern="1200" dirty="0">
-                <a:solidFill>
-                  <a:schemeClr val="tx1"/>
-                </a:solidFill>
-                <a:effectLst/>
-                <a:latin typeface="+mn-lt"/>
-                <a:ea typeface="+mn-ea"/>
-                <a:cs typeface="+mn-cs"/>
-              </a:rPr>
-              <a:t> \</a:t>
-            </a:r>
-            <a:r>
-              <a:rPr lang="en-US" sz="1200" kern="1200" dirty="0" err="1">
-                <a:solidFill>
-                  <a:schemeClr val="tx1"/>
-                </a:solidFill>
-                <a:effectLst/>
-                <a:latin typeface="+mn-lt"/>
-                <a:ea typeface="+mn-ea"/>
-                <a:cs typeface="+mn-cs"/>
-              </a:rPr>
-              <a:t>u_k</a:t>
-            </a:r>
-            <a:r>
-              <a:rPr lang="en-US" sz="1200" kern="1200" dirty="0">
-                <a:solidFill>
-                  <a:schemeClr val="tx1"/>
-                </a:solidFill>
-                <a:effectLst/>
-                <a:latin typeface="+mn-lt"/>
-                <a:ea typeface="+mn-ea"/>
-                <a:cs typeface="+mn-cs"/>
-              </a:rPr>
-              <a:t> + (</a:t>
-            </a:r>
-            <a:r>
-              <a:rPr lang="en-US" sz="1200" kern="1200" dirty="0" err="1">
-                <a:solidFill>
-                  <a:schemeClr val="tx1"/>
-                </a:solidFill>
-                <a:effectLst/>
-                <a:latin typeface="+mn-lt"/>
-                <a:ea typeface="+mn-ea"/>
-                <a:cs typeface="+mn-cs"/>
-              </a:rPr>
-              <a:t>A_k</a:t>
-            </a:r>
-            <a:r>
-              <a:rPr lang="en-US" sz="1200" kern="1200" dirty="0">
-                <a:solidFill>
-                  <a:schemeClr val="tx1"/>
-                </a:solidFill>
-                <a:effectLst/>
-                <a:latin typeface="+mn-lt"/>
-                <a:ea typeface="+mn-ea"/>
-                <a:cs typeface="+mn-cs"/>
-              </a:rPr>
-              <a:t>\</a:t>
-            </a:r>
-            <a:r>
-              <a:rPr lang="en-US" sz="1200" kern="1200" dirty="0" err="1">
-                <a:solidFill>
-                  <a:schemeClr val="tx1"/>
-                </a:solidFill>
-                <a:effectLst/>
-                <a:latin typeface="+mn-lt"/>
-                <a:ea typeface="+mn-ea"/>
-                <a:cs typeface="+mn-cs"/>
-              </a:rPr>
-              <a:t>x_k</a:t>
-            </a:r>
-            <a:r>
-              <a:rPr lang="en-US" sz="1200" kern="1200" dirty="0">
-                <a:solidFill>
-                  <a:schemeClr val="tx1"/>
-                </a:solidFill>
-                <a:effectLst/>
-                <a:latin typeface="+mn-lt"/>
-                <a:ea typeface="+mn-ea"/>
-                <a:cs typeface="+mn-cs"/>
-              </a:rPr>
-              <a:t> + </a:t>
-            </a:r>
-            <a:r>
-              <a:rPr lang="en-US" sz="1200" kern="1200" dirty="0" err="1">
-                <a:solidFill>
-                  <a:schemeClr val="tx1"/>
-                </a:solidFill>
-                <a:effectLst/>
-                <a:latin typeface="+mn-lt"/>
-                <a:ea typeface="+mn-ea"/>
-                <a:cs typeface="+mn-cs"/>
-              </a:rPr>
-              <a:t>B_k</a:t>
-            </a:r>
-            <a:r>
-              <a:rPr lang="en-US" sz="1200" kern="1200" dirty="0">
-                <a:solidFill>
-                  <a:schemeClr val="tx1"/>
-                </a:solidFill>
-                <a:effectLst/>
-                <a:latin typeface="+mn-lt"/>
-                <a:ea typeface="+mn-ea"/>
-                <a:cs typeface="+mn-cs"/>
-              </a:rPr>
-              <a:t>\</a:t>
-            </a:r>
-            <a:r>
-              <a:rPr lang="en-US" sz="1200" kern="1200" dirty="0" err="1">
-                <a:solidFill>
-                  <a:schemeClr val="tx1"/>
-                </a:solidFill>
-                <a:effectLst/>
-                <a:latin typeface="+mn-lt"/>
-                <a:ea typeface="+mn-ea"/>
-                <a:cs typeface="+mn-cs"/>
-              </a:rPr>
-              <a:t>u_k</a:t>
-            </a:r>
-            <a:r>
-              <a:rPr lang="en-US" sz="1200" kern="1200" dirty="0">
-                <a:solidFill>
-                  <a:schemeClr val="tx1"/>
-                </a:solidFill>
-                <a:effectLst/>
-                <a:latin typeface="+mn-lt"/>
-                <a:ea typeface="+mn-ea"/>
-                <a:cs typeface="+mn-cs"/>
-              </a:rPr>
-              <a:t> + \</a:t>
-            </a:r>
-            <a:r>
-              <a:rPr lang="en-US" sz="1200" kern="1200" dirty="0" err="1">
-                <a:solidFill>
-                  <a:schemeClr val="tx1"/>
-                </a:solidFill>
-                <a:effectLst/>
-                <a:latin typeface="+mn-lt"/>
-                <a:ea typeface="+mn-ea"/>
-                <a:cs typeface="+mn-cs"/>
-              </a:rPr>
-              <a:t>w_k</a:t>
-            </a:r>
-            <a:r>
-              <a:rPr lang="en-US" sz="1200" kern="1200" dirty="0">
-                <a:solidFill>
-                  <a:schemeClr val="tx1"/>
-                </a:solidFill>
-                <a:effectLst/>
-                <a:latin typeface="+mn-lt"/>
-                <a:ea typeface="+mn-ea"/>
-                <a:cs typeface="+mn-cs"/>
-              </a:rPr>
-              <a:t>)^T P_{k+1}(</a:t>
-            </a:r>
-            <a:r>
-              <a:rPr lang="en-US" sz="1200" kern="1200" dirty="0" err="1">
-                <a:solidFill>
-                  <a:schemeClr val="tx1"/>
-                </a:solidFill>
-                <a:effectLst/>
-                <a:latin typeface="+mn-lt"/>
-                <a:ea typeface="+mn-ea"/>
-                <a:cs typeface="+mn-cs"/>
-              </a:rPr>
-              <a:t>A_k</a:t>
-            </a:r>
-            <a:r>
-              <a:rPr lang="en-US" sz="1200" kern="1200" dirty="0">
-                <a:solidFill>
-                  <a:schemeClr val="tx1"/>
-                </a:solidFill>
-                <a:effectLst/>
-                <a:latin typeface="+mn-lt"/>
-                <a:ea typeface="+mn-ea"/>
-                <a:cs typeface="+mn-cs"/>
-              </a:rPr>
-              <a:t>\</a:t>
-            </a:r>
-            <a:r>
-              <a:rPr lang="en-US" sz="1200" kern="1200" dirty="0" err="1">
-                <a:solidFill>
-                  <a:schemeClr val="tx1"/>
-                </a:solidFill>
-                <a:effectLst/>
-                <a:latin typeface="+mn-lt"/>
-                <a:ea typeface="+mn-ea"/>
-                <a:cs typeface="+mn-cs"/>
-              </a:rPr>
-              <a:t>x_k</a:t>
-            </a:r>
-            <a:r>
-              <a:rPr lang="en-US" sz="1200" kern="1200" dirty="0">
-                <a:solidFill>
-                  <a:schemeClr val="tx1"/>
-                </a:solidFill>
-                <a:effectLst/>
-                <a:latin typeface="+mn-lt"/>
-                <a:ea typeface="+mn-ea"/>
-                <a:cs typeface="+mn-cs"/>
-              </a:rPr>
-              <a:t> + </a:t>
-            </a:r>
-            <a:r>
-              <a:rPr lang="en-US" sz="1200" kern="1200" dirty="0" err="1">
-                <a:solidFill>
-                  <a:schemeClr val="tx1"/>
-                </a:solidFill>
-                <a:effectLst/>
-                <a:latin typeface="+mn-lt"/>
-                <a:ea typeface="+mn-ea"/>
-                <a:cs typeface="+mn-cs"/>
-              </a:rPr>
-              <a:t>B_k</a:t>
-            </a:r>
-            <a:r>
-              <a:rPr lang="en-US" sz="1200" kern="1200" dirty="0">
-                <a:solidFill>
-                  <a:schemeClr val="tx1"/>
-                </a:solidFill>
-                <a:effectLst/>
-                <a:latin typeface="+mn-lt"/>
-                <a:ea typeface="+mn-ea"/>
-                <a:cs typeface="+mn-cs"/>
-              </a:rPr>
-              <a:t>\</a:t>
-            </a:r>
-            <a:r>
-              <a:rPr lang="en-US" sz="1200" kern="1200" dirty="0" err="1">
-                <a:solidFill>
-                  <a:schemeClr val="tx1"/>
-                </a:solidFill>
-                <a:effectLst/>
-                <a:latin typeface="+mn-lt"/>
-                <a:ea typeface="+mn-ea"/>
-                <a:cs typeface="+mn-cs"/>
-              </a:rPr>
-              <a:t>u_k</a:t>
-            </a:r>
-            <a:r>
-              <a:rPr lang="en-US" sz="1200" kern="1200" dirty="0">
-                <a:solidFill>
-                  <a:schemeClr val="tx1"/>
-                </a:solidFill>
-                <a:effectLst/>
-                <a:latin typeface="+mn-lt"/>
-                <a:ea typeface="+mn-ea"/>
-                <a:cs typeface="+mn-cs"/>
-              </a:rPr>
-              <a:t> + \</a:t>
-            </a:r>
-            <a:r>
-              <a:rPr lang="en-US" sz="1200" kern="1200" dirty="0" err="1">
-                <a:solidFill>
-                  <a:schemeClr val="tx1"/>
-                </a:solidFill>
-                <a:effectLst/>
-                <a:latin typeface="+mn-lt"/>
-                <a:ea typeface="+mn-ea"/>
-                <a:cs typeface="+mn-cs"/>
-              </a:rPr>
-              <a:t>w_k</a:t>
-            </a:r>
-            <a:r>
-              <a:rPr lang="en-US" sz="1200" kern="1200" dirty="0">
-                <a:solidFill>
-                  <a:schemeClr val="tx1"/>
-                </a:solidFill>
-                <a:effectLst/>
-                <a:latin typeface="+mn-lt"/>
-                <a:ea typeface="+mn-ea"/>
-                <a:cs typeface="+mn-cs"/>
-              </a:rPr>
-              <a:t>)\right]\\</a:t>
-            </a:r>
-          </a:p>
-          <a:p>
-            <a:r>
-              <a:rPr lang="en-US" sz="1200" kern="1200" dirty="0">
-                <a:solidFill>
-                  <a:schemeClr val="tx1"/>
-                </a:solidFill>
-                <a:effectLst/>
-                <a:latin typeface="+mn-lt"/>
-                <a:ea typeface="+mn-ea"/>
-                <a:cs typeface="+mn-cs"/>
-              </a:rPr>
-              <a:t>                  &amp;= \min_{\</a:t>
-            </a:r>
-            <a:r>
-              <a:rPr lang="en-US" sz="1200" kern="1200" dirty="0" err="1">
-                <a:solidFill>
-                  <a:schemeClr val="tx1"/>
-                </a:solidFill>
-                <a:effectLst/>
-                <a:latin typeface="+mn-lt"/>
-                <a:ea typeface="+mn-ea"/>
-                <a:cs typeface="+mn-cs"/>
-              </a:rPr>
-              <a:t>u_k</a:t>
-            </a:r>
-            <a:r>
-              <a:rPr lang="en-US" sz="1200" kern="1200" dirty="0">
-                <a:solidFill>
-                  <a:schemeClr val="tx1"/>
-                </a:solidFill>
-                <a:effectLst/>
-                <a:latin typeface="+mn-lt"/>
-                <a:ea typeface="+mn-ea"/>
-                <a:cs typeface="+mn-cs"/>
-              </a:rPr>
-              <a:t>}\frac{1}{2}\E_{\</a:t>
-            </a:r>
-            <a:r>
-              <a:rPr lang="en-US" sz="1200" kern="1200" dirty="0" err="1">
-                <a:solidFill>
-                  <a:schemeClr val="tx1"/>
-                </a:solidFill>
-                <a:effectLst/>
-                <a:latin typeface="+mn-lt"/>
-                <a:ea typeface="+mn-ea"/>
-                <a:cs typeface="+mn-cs"/>
-              </a:rPr>
-              <a:t>w_k</a:t>
-            </a:r>
-            <a:r>
-              <a:rPr lang="en-US" sz="1200" kern="1200" dirty="0">
-                <a:solidFill>
-                  <a:schemeClr val="tx1"/>
-                </a:solidFill>
-                <a:effectLst/>
-                <a:latin typeface="+mn-lt"/>
-                <a:ea typeface="+mn-ea"/>
-                <a:cs typeface="+mn-cs"/>
-              </a:rPr>
-              <a:t>}\left[\</a:t>
-            </a:r>
-            <a:r>
-              <a:rPr lang="en-US" sz="1200" kern="1200" dirty="0" err="1">
-                <a:solidFill>
-                  <a:schemeClr val="tx1"/>
-                </a:solidFill>
-                <a:effectLst/>
-                <a:latin typeface="+mn-lt"/>
-                <a:ea typeface="+mn-ea"/>
-                <a:cs typeface="+mn-cs"/>
-              </a:rPr>
-              <a:t>x_k^T</a:t>
-            </a:r>
-            <a:r>
-              <a:rPr lang="en-US" sz="1200" kern="1200" dirty="0">
-                <a:solidFill>
-                  <a:schemeClr val="tx1"/>
-                </a:solidFill>
-                <a:effectLst/>
-                <a:latin typeface="+mn-lt"/>
-                <a:ea typeface="+mn-ea"/>
-                <a:cs typeface="+mn-cs"/>
-              </a:rPr>
-              <a:t> </a:t>
-            </a:r>
-            <a:r>
-              <a:rPr lang="en-US" sz="1200" kern="1200" dirty="0" err="1">
-                <a:solidFill>
-                  <a:schemeClr val="tx1"/>
-                </a:solidFill>
-                <a:effectLst/>
-                <a:latin typeface="+mn-lt"/>
-                <a:ea typeface="+mn-ea"/>
-                <a:cs typeface="+mn-cs"/>
-              </a:rPr>
-              <a:t>Q_k</a:t>
-            </a:r>
-            <a:r>
-              <a:rPr lang="en-US" sz="1200" kern="1200" dirty="0">
-                <a:solidFill>
-                  <a:schemeClr val="tx1"/>
-                </a:solidFill>
-                <a:effectLst/>
-                <a:latin typeface="+mn-lt"/>
-                <a:ea typeface="+mn-ea"/>
-                <a:cs typeface="+mn-cs"/>
-              </a:rPr>
-              <a:t> \</a:t>
-            </a:r>
-            <a:r>
-              <a:rPr lang="en-US" sz="1200" kern="1200" dirty="0" err="1">
-                <a:solidFill>
-                  <a:schemeClr val="tx1"/>
-                </a:solidFill>
-                <a:effectLst/>
-                <a:latin typeface="+mn-lt"/>
-                <a:ea typeface="+mn-ea"/>
-                <a:cs typeface="+mn-cs"/>
-              </a:rPr>
-              <a:t>x_k</a:t>
-            </a:r>
-            <a:r>
-              <a:rPr lang="en-US" sz="1200" kern="1200" dirty="0">
-                <a:solidFill>
-                  <a:schemeClr val="tx1"/>
-                </a:solidFill>
-                <a:effectLst/>
-                <a:latin typeface="+mn-lt"/>
-                <a:ea typeface="+mn-ea"/>
-                <a:cs typeface="+mn-cs"/>
-              </a:rPr>
-              <a:t> + \</a:t>
-            </a:r>
-            <a:r>
-              <a:rPr lang="en-US" sz="1200" kern="1200" dirty="0" err="1">
-                <a:solidFill>
-                  <a:schemeClr val="tx1"/>
-                </a:solidFill>
-                <a:effectLst/>
-                <a:latin typeface="+mn-lt"/>
-                <a:ea typeface="+mn-ea"/>
-                <a:cs typeface="+mn-cs"/>
-              </a:rPr>
-              <a:t>u_k^T</a:t>
-            </a:r>
-            <a:r>
-              <a:rPr lang="en-US" sz="1200" kern="1200" dirty="0">
-                <a:solidFill>
-                  <a:schemeClr val="tx1"/>
-                </a:solidFill>
-                <a:effectLst/>
-                <a:latin typeface="+mn-lt"/>
-                <a:ea typeface="+mn-ea"/>
-                <a:cs typeface="+mn-cs"/>
-              </a:rPr>
-              <a:t> </a:t>
-            </a:r>
-            <a:r>
-              <a:rPr lang="en-US" sz="1200" kern="1200" dirty="0" err="1">
-                <a:solidFill>
-                  <a:schemeClr val="tx1"/>
-                </a:solidFill>
-                <a:effectLst/>
-                <a:latin typeface="+mn-lt"/>
-                <a:ea typeface="+mn-ea"/>
-                <a:cs typeface="+mn-cs"/>
-              </a:rPr>
-              <a:t>R_k</a:t>
-            </a:r>
-            <a:r>
-              <a:rPr lang="en-US" sz="1200" kern="1200" dirty="0">
-                <a:solidFill>
-                  <a:schemeClr val="tx1"/>
-                </a:solidFill>
-                <a:effectLst/>
-                <a:latin typeface="+mn-lt"/>
-                <a:ea typeface="+mn-ea"/>
-                <a:cs typeface="+mn-cs"/>
-              </a:rPr>
-              <a:t> \</a:t>
-            </a:r>
-            <a:r>
-              <a:rPr lang="en-US" sz="1200" kern="1200" dirty="0" err="1">
-                <a:solidFill>
-                  <a:schemeClr val="tx1"/>
-                </a:solidFill>
-                <a:effectLst/>
-                <a:latin typeface="+mn-lt"/>
-                <a:ea typeface="+mn-ea"/>
-                <a:cs typeface="+mn-cs"/>
-              </a:rPr>
-              <a:t>u_k</a:t>
-            </a:r>
-            <a:r>
-              <a:rPr lang="en-US" sz="1200" kern="1200" dirty="0">
-                <a:solidFill>
-                  <a:schemeClr val="tx1"/>
-                </a:solidFill>
-                <a:effectLst/>
-                <a:latin typeface="+mn-lt"/>
-                <a:ea typeface="+mn-ea"/>
-                <a:cs typeface="+mn-cs"/>
-              </a:rPr>
-              <a:t> + (</a:t>
-            </a:r>
-            <a:r>
-              <a:rPr lang="en-US" sz="1200" kern="1200" dirty="0" err="1">
-                <a:solidFill>
-                  <a:schemeClr val="tx1"/>
-                </a:solidFill>
-                <a:effectLst/>
-                <a:latin typeface="+mn-lt"/>
-                <a:ea typeface="+mn-ea"/>
-                <a:cs typeface="+mn-cs"/>
-              </a:rPr>
-              <a:t>A_k</a:t>
-            </a:r>
-            <a:r>
-              <a:rPr lang="en-US" sz="1200" kern="1200" dirty="0">
-                <a:solidFill>
-                  <a:schemeClr val="tx1"/>
-                </a:solidFill>
-                <a:effectLst/>
-                <a:latin typeface="+mn-lt"/>
-                <a:ea typeface="+mn-ea"/>
-                <a:cs typeface="+mn-cs"/>
-              </a:rPr>
-              <a:t>\</a:t>
-            </a:r>
-            <a:r>
-              <a:rPr lang="en-US" sz="1200" kern="1200" dirty="0" err="1">
-                <a:solidFill>
-                  <a:schemeClr val="tx1"/>
-                </a:solidFill>
-                <a:effectLst/>
-                <a:latin typeface="+mn-lt"/>
-                <a:ea typeface="+mn-ea"/>
-                <a:cs typeface="+mn-cs"/>
-              </a:rPr>
-              <a:t>x_k</a:t>
-            </a:r>
-            <a:r>
-              <a:rPr lang="en-US" sz="1200" kern="1200" dirty="0">
-                <a:solidFill>
-                  <a:schemeClr val="tx1"/>
-                </a:solidFill>
-                <a:effectLst/>
-                <a:latin typeface="+mn-lt"/>
-                <a:ea typeface="+mn-ea"/>
-                <a:cs typeface="+mn-cs"/>
-              </a:rPr>
-              <a:t> + </a:t>
-            </a:r>
-            <a:r>
-              <a:rPr lang="en-US" sz="1200" kern="1200" dirty="0" err="1">
-                <a:solidFill>
-                  <a:schemeClr val="tx1"/>
-                </a:solidFill>
-                <a:effectLst/>
-                <a:latin typeface="+mn-lt"/>
-                <a:ea typeface="+mn-ea"/>
-                <a:cs typeface="+mn-cs"/>
-              </a:rPr>
-              <a:t>B_k</a:t>
-            </a:r>
-            <a:r>
-              <a:rPr lang="en-US" sz="1200" kern="1200" dirty="0">
-                <a:solidFill>
-                  <a:schemeClr val="tx1"/>
-                </a:solidFill>
-                <a:effectLst/>
-                <a:latin typeface="+mn-lt"/>
-                <a:ea typeface="+mn-ea"/>
-                <a:cs typeface="+mn-cs"/>
-              </a:rPr>
-              <a:t>\</a:t>
-            </a:r>
-            <a:r>
-              <a:rPr lang="en-US" sz="1200" kern="1200" dirty="0" err="1">
-                <a:solidFill>
-                  <a:schemeClr val="tx1"/>
-                </a:solidFill>
-                <a:effectLst/>
-                <a:latin typeface="+mn-lt"/>
-                <a:ea typeface="+mn-ea"/>
-                <a:cs typeface="+mn-cs"/>
-              </a:rPr>
-              <a:t>u_k</a:t>
-            </a:r>
-            <a:r>
-              <a:rPr lang="en-US" sz="1200" kern="1200" dirty="0">
-                <a:solidFill>
-                  <a:schemeClr val="tx1"/>
-                </a:solidFill>
-                <a:effectLst/>
-                <a:latin typeface="+mn-lt"/>
-                <a:ea typeface="+mn-ea"/>
-                <a:cs typeface="+mn-cs"/>
-              </a:rPr>
-              <a:t>)^T P_{k+1}(</a:t>
-            </a:r>
-            <a:r>
-              <a:rPr lang="en-US" sz="1200" kern="1200" dirty="0" err="1">
-                <a:solidFill>
-                  <a:schemeClr val="tx1"/>
-                </a:solidFill>
-                <a:effectLst/>
-                <a:latin typeface="+mn-lt"/>
-                <a:ea typeface="+mn-ea"/>
-                <a:cs typeface="+mn-cs"/>
-              </a:rPr>
-              <a:t>A_k</a:t>
-            </a:r>
-            <a:r>
-              <a:rPr lang="en-US" sz="1200" kern="1200" dirty="0">
-                <a:solidFill>
-                  <a:schemeClr val="tx1"/>
-                </a:solidFill>
-                <a:effectLst/>
-                <a:latin typeface="+mn-lt"/>
-                <a:ea typeface="+mn-ea"/>
-                <a:cs typeface="+mn-cs"/>
-              </a:rPr>
-              <a:t>\</a:t>
-            </a:r>
-            <a:r>
-              <a:rPr lang="en-US" sz="1200" kern="1200" dirty="0" err="1">
-                <a:solidFill>
-                  <a:schemeClr val="tx1"/>
-                </a:solidFill>
-                <a:effectLst/>
-                <a:latin typeface="+mn-lt"/>
-                <a:ea typeface="+mn-ea"/>
-                <a:cs typeface="+mn-cs"/>
-              </a:rPr>
-              <a:t>x_k</a:t>
-            </a:r>
-            <a:r>
-              <a:rPr lang="en-US" sz="1200" kern="1200" dirty="0">
-                <a:solidFill>
-                  <a:schemeClr val="tx1"/>
-                </a:solidFill>
-                <a:effectLst/>
-                <a:latin typeface="+mn-lt"/>
-                <a:ea typeface="+mn-ea"/>
-                <a:cs typeface="+mn-cs"/>
-              </a:rPr>
-              <a:t> + </a:t>
-            </a:r>
-            <a:r>
-              <a:rPr lang="en-US" sz="1200" kern="1200" dirty="0" err="1">
-                <a:solidFill>
-                  <a:schemeClr val="tx1"/>
-                </a:solidFill>
-                <a:effectLst/>
-                <a:latin typeface="+mn-lt"/>
-                <a:ea typeface="+mn-ea"/>
-                <a:cs typeface="+mn-cs"/>
-              </a:rPr>
-              <a:t>B_k</a:t>
-            </a:r>
-            <a:r>
-              <a:rPr lang="en-US" sz="1200" kern="1200" dirty="0">
-                <a:solidFill>
-                  <a:schemeClr val="tx1"/>
-                </a:solidFill>
-                <a:effectLst/>
-                <a:latin typeface="+mn-lt"/>
-                <a:ea typeface="+mn-ea"/>
-                <a:cs typeface="+mn-cs"/>
-              </a:rPr>
-              <a:t>\</a:t>
-            </a:r>
-            <a:r>
-              <a:rPr lang="en-US" sz="1200" kern="1200" dirty="0" err="1">
-                <a:solidFill>
-                  <a:schemeClr val="tx1"/>
-                </a:solidFill>
-                <a:effectLst/>
-                <a:latin typeface="+mn-lt"/>
-                <a:ea typeface="+mn-ea"/>
-                <a:cs typeface="+mn-cs"/>
-              </a:rPr>
-              <a:t>u_k</a:t>
-            </a:r>
-            <a:r>
-              <a:rPr lang="en-US" sz="1200" kern="1200" dirty="0">
-                <a:solidFill>
-                  <a:schemeClr val="tx1"/>
-                </a:solidFill>
-                <a:effectLst/>
-                <a:latin typeface="+mn-lt"/>
-                <a:ea typeface="+mn-ea"/>
-                <a:cs typeface="+mn-cs"/>
-              </a:rPr>
-              <a:t>)\right.\\</a:t>
-            </a:r>
-          </a:p>
-          <a:p>
-            <a:r>
-              <a:rPr lang="en-US" sz="1200" kern="1200" dirty="0">
-                <a:solidFill>
-                  <a:schemeClr val="tx1"/>
-                </a:solidFill>
-                <a:effectLst/>
-                <a:latin typeface="+mn-lt"/>
-                <a:ea typeface="+mn-ea"/>
-                <a:cs typeface="+mn-cs"/>
-              </a:rPr>
-              <a:t>                  &amp;\</a:t>
-            </a:r>
-            <a:r>
-              <a:rPr lang="en-US" sz="1200" kern="1200" dirty="0" err="1">
-                <a:solidFill>
-                  <a:schemeClr val="tx1"/>
-                </a:solidFill>
-                <a:effectLst/>
-                <a:latin typeface="+mn-lt"/>
-                <a:ea typeface="+mn-ea"/>
-                <a:cs typeface="+mn-cs"/>
-              </a:rPr>
-              <a:t>qquad</a:t>
-            </a:r>
-            <a:r>
-              <a:rPr lang="en-US" sz="1200" kern="1200" dirty="0">
-                <a:solidFill>
-                  <a:schemeClr val="tx1"/>
-                </a:solidFill>
-                <a:effectLst/>
-                <a:latin typeface="+mn-lt"/>
-                <a:ea typeface="+mn-ea"/>
-                <a:cs typeface="+mn-cs"/>
-              </a:rPr>
-              <a:t>\</a:t>
-            </a:r>
-            <a:r>
-              <a:rPr lang="en-US" sz="1200" kern="1200" dirty="0" err="1">
-                <a:solidFill>
-                  <a:schemeClr val="tx1"/>
-                </a:solidFill>
-                <a:effectLst/>
-                <a:latin typeface="+mn-lt"/>
-                <a:ea typeface="+mn-ea"/>
-                <a:cs typeface="+mn-cs"/>
-              </a:rPr>
-              <a:t>qquad</a:t>
-            </a:r>
-            <a:r>
-              <a:rPr lang="en-US" sz="1200" kern="1200" dirty="0">
-                <a:solidFill>
-                  <a:schemeClr val="tx1"/>
-                </a:solidFill>
-                <a:effectLst/>
-                <a:latin typeface="+mn-lt"/>
-                <a:ea typeface="+mn-ea"/>
-                <a:cs typeface="+mn-cs"/>
-              </a:rPr>
-              <a:t>\</a:t>
-            </a:r>
-            <a:r>
-              <a:rPr lang="en-US" sz="1200" kern="1200" dirty="0" err="1">
-                <a:solidFill>
-                  <a:schemeClr val="tx1"/>
-                </a:solidFill>
-                <a:effectLst/>
-                <a:latin typeface="+mn-lt"/>
-                <a:ea typeface="+mn-ea"/>
-                <a:cs typeface="+mn-cs"/>
-              </a:rPr>
-              <a:t>qquad</a:t>
-            </a:r>
-            <a:r>
-              <a:rPr lang="en-US" sz="1200" kern="1200" dirty="0">
-                <a:solidFill>
-                  <a:schemeClr val="tx1"/>
-                </a:solidFill>
-                <a:effectLst/>
-                <a:latin typeface="+mn-lt"/>
-                <a:ea typeface="+mn-ea"/>
-                <a:cs typeface="+mn-cs"/>
-              </a:rPr>
-              <a:t>\</a:t>
-            </a:r>
-            <a:r>
-              <a:rPr lang="en-US" sz="1200" kern="1200" dirty="0" err="1">
-                <a:solidFill>
-                  <a:schemeClr val="tx1"/>
-                </a:solidFill>
-                <a:effectLst/>
-                <a:latin typeface="+mn-lt"/>
-                <a:ea typeface="+mn-ea"/>
-                <a:cs typeface="+mn-cs"/>
-              </a:rPr>
-              <a:t>qquad</a:t>
-            </a:r>
-            <a:r>
-              <a:rPr lang="en-US" sz="1200" kern="1200" dirty="0">
-                <a:solidFill>
-                  <a:schemeClr val="tx1"/>
-                </a:solidFill>
-                <a:effectLst/>
-                <a:latin typeface="+mn-lt"/>
-                <a:ea typeface="+mn-ea"/>
-                <a:cs typeface="+mn-cs"/>
-              </a:rPr>
-              <a:t>\left. 2(</a:t>
-            </a:r>
-            <a:r>
-              <a:rPr lang="en-US" sz="1200" kern="1200" dirty="0" err="1">
-                <a:solidFill>
-                  <a:schemeClr val="tx1"/>
-                </a:solidFill>
-                <a:effectLst/>
-                <a:latin typeface="+mn-lt"/>
-                <a:ea typeface="+mn-ea"/>
-                <a:cs typeface="+mn-cs"/>
-              </a:rPr>
-              <a:t>A_k</a:t>
-            </a:r>
-            <a:r>
-              <a:rPr lang="en-US" sz="1200" kern="1200" dirty="0">
-                <a:solidFill>
-                  <a:schemeClr val="tx1"/>
-                </a:solidFill>
-                <a:effectLst/>
-                <a:latin typeface="+mn-lt"/>
-                <a:ea typeface="+mn-ea"/>
-                <a:cs typeface="+mn-cs"/>
-              </a:rPr>
-              <a:t>\</a:t>
-            </a:r>
-            <a:r>
-              <a:rPr lang="en-US" sz="1200" kern="1200" dirty="0" err="1">
-                <a:solidFill>
-                  <a:schemeClr val="tx1"/>
-                </a:solidFill>
-                <a:effectLst/>
-                <a:latin typeface="+mn-lt"/>
-                <a:ea typeface="+mn-ea"/>
-                <a:cs typeface="+mn-cs"/>
-              </a:rPr>
-              <a:t>x_k</a:t>
-            </a:r>
-            <a:r>
-              <a:rPr lang="en-US" sz="1200" kern="1200" dirty="0">
-                <a:solidFill>
-                  <a:schemeClr val="tx1"/>
-                </a:solidFill>
-                <a:effectLst/>
-                <a:latin typeface="+mn-lt"/>
-                <a:ea typeface="+mn-ea"/>
-                <a:cs typeface="+mn-cs"/>
-              </a:rPr>
-              <a:t> + </a:t>
-            </a:r>
-            <a:r>
-              <a:rPr lang="en-US" sz="1200" kern="1200" dirty="0" err="1">
-                <a:solidFill>
-                  <a:schemeClr val="tx1"/>
-                </a:solidFill>
-                <a:effectLst/>
-                <a:latin typeface="+mn-lt"/>
-                <a:ea typeface="+mn-ea"/>
-                <a:cs typeface="+mn-cs"/>
-              </a:rPr>
-              <a:t>B_k</a:t>
-            </a:r>
-            <a:r>
-              <a:rPr lang="en-US" sz="1200" kern="1200" dirty="0">
-                <a:solidFill>
-                  <a:schemeClr val="tx1"/>
-                </a:solidFill>
-                <a:effectLst/>
-                <a:latin typeface="+mn-lt"/>
-                <a:ea typeface="+mn-ea"/>
-                <a:cs typeface="+mn-cs"/>
-              </a:rPr>
-              <a:t>\</a:t>
-            </a:r>
-            <a:r>
-              <a:rPr lang="en-US" sz="1200" kern="1200" dirty="0" err="1">
-                <a:solidFill>
-                  <a:schemeClr val="tx1"/>
-                </a:solidFill>
-                <a:effectLst/>
-                <a:latin typeface="+mn-lt"/>
-                <a:ea typeface="+mn-ea"/>
-                <a:cs typeface="+mn-cs"/>
-              </a:rPr>
-              <a:t>u_k</a:t>
-            </a:r>
-            <a:r>
-              <a:rPr lang="en-US" sz="1200" kern="1200" dirty="0">
-                <a:solidFill>
-                  <a:schemeClr val="tx1"/>
-                </a:solidFill>
-                <a:effectLst/>
-                <a:latin typeface="+mn-lt"/>
-                <a:ea typeface="+mn-ea"/>
-                <a:cs typeface="+mn-cs"/>
-              </a:rPr>
-              <a:t>)^T P_{k+1}\</a:t>
-            </a:r>
-            <a:r>
-              <a:rPr lang="en-US" sz="1200" kern="1200" dirty="0" err="1">
-                <a:solidFill>
-                  <a:schemeClr val="tx1"/>
-                </a:solidFill>
-                <a:effectLst/>
-                <a:latin typeface="+mn-lt"/>
-                <a:ea typeface="+mn-ea"/>
-                <a:cs typeface="+mn-cs"/>
-              </a:rPr>
-              <a:t>w_k</a:t>
-            </a:r>
-            <a:r>
-              <a:rPr lang="en-US" sz="1200" kern="1200" dirty="0">
-                <a:solidFill>
-                  <a:schemeClr val="tx1"/>
-                </a:solidFill>
-                <a:effectLst/>
-                <a:latin typeface="+mn-lt"/>
-                <a:ea typeface="+mn-ea"/>
-                <a:cs typeface="+mn-cs"/>
-              </a:rPr>
-              <a:t> + \</a:t>
-            </a:r>
-            <a:r>
-              <a:rPr lang="en-US" sz="1200" kern="1200" dirty="0" err="1">
-                <a:solidFill>
-                  <a:schemeClr val="tx1"/>
-                </a:solidFill>
-                <a:effectLst/>
-                <a:latin typeface="+mn-lt"/>
-                <a:ea typeface="+mn-ea"/>
-                <a:cs typeface="+mn-cs"/>
-              </a:rPr>
-              <a:t>w_k^T</a:t>
-            </a:r>
-            <a:r>
-              <a:rPr lang="en-US" sz="1200" kern="1200" dirty="0">
-                <a:solidFill>
-                  <a:schemeClr val="tx1"/>
-                </a:solidFill>
-                <a:effectLst/>
-                <a:latin typeface="+mn-lt"/>
-                <a:ea typeface="+mn-ea"/>
-                <a:cs typeface="+mn-cs"/>
-              </a:rPr>
-              <a:t> P_{k+1}\</a:t>
-            </a:r>
-            <a:r>
-              <a:rPr lang="en-US" sz="1200" kern="1200" dirty="0" err="1">
-                <a:solidFill>
-                  <a:schemeClr val="tx1"/>
-                </a:solidFill>
-                <a:effectLst/>
-                <a:latin typeface="+mn-lt"/>
-                <a:ea typeface="+mn-ea"/>
-                <a:cs typeface="+mn-cs"/>
-              </a:rPr>
-              <a:t>w_k</a:t>
-            </a:r>
-            <a:r>
-              <a:rPr lang="en-US" sz="1200" kern="1200" dirty="0">
-                <a:solidFill>
-                  <a:schemeClr val="tx1"/>
-                </a:solidFill>
-                <a:effectLst/>
-                <a:latin typeface="+mn-lt"/>
-                <a:ea typeface="+mn-ea"/>
-                <a:cs typeface="+mn-cs"/>
-              </a:rPr>
-              <a:t> \right]\\</a:t>
-            </a:r>
-          </a:p>
-          <a:p>
-            <a:r>
-              <a:rPr lang="en-US" sz="1200" kern="1200" dirty="0">
-                <a:solidFill>
-                  <a:schemeClr val="tx1"/>
-                </a:solidFill>
-                <a:effectLst/>
-                <a:latin typeface="+mn-lt"/>
-                <a:ea typeface="+mn-ea"/>
-                <a:cs typeface="+mn-cs"/>
-              </a:rPr>
-              <a:t>                  &amp;= \min_{\</a:t>
-            </a:r>
-            <a:r>
-              <a:rPr lang="en-US" sz="1200" kern="1200" dirty="0" err="1">
-                <a:solidFill>
-                  <a:schemeClr val="tx1"/>
-                </a:solidFill>
-                <a:effectLst/>
-                <a:latin typeface="+mn-lt"/>
-                <a:ea typeface="+mn-ea"/>
-                <a:cs typeface="+mn-cs"/>
-              </a:rPr>
-              <a:t>u_k</a:t>
-            </a:r>
-            <a:r>
-              <a:rPr lang="en-US" sz="1200" kern="1200" dirty="0">
-                <a:solidFill>
-                  <a:schemeClr val="tx1"/>
-                </a:solidFill>
-                <a:effectLst/>
-                <a:latin typeface="+mn-lt"/>
-                <a:ea typeface="+mn-ea"/>
-                <a:cs typeface="+mn-cs"/>
-              </a:rPr>
-              <a:t>}\frac{1}{2}\left(\</a:t>
-            </a:r>
-            <a:r>
-              <a:rPr lang="en-US" sz="1200" kern="1200" dirty="0" err="1">
-                <a:solidFill>
-                  <a:schemeClr val="tx1"/>
-                </a:solidFill>
-                <a:effectLst/>
-                <a:latin typeface="+mn-lt"/>
-                <a:ea typeface="+mn-ea"/>
-                <a:cs typeface="+mn-cs"/>
-              </a:rPr>
-              <a:t>x_k^T</a:t>
-            </a:r>
-            <a:r>
-              <a:rPr lang="en-US" sz="1200" kern="1200" dirty="0">
-                <a:solidFill>
-                  <a:schemeClr val="tx1"/>
-                </a:solidFill>
-                <a:effectLst/>
-                <a:latin typeface="+mn-lt"/>
-                <a:ea typeface="+mn-ea"/>
-                <a:cs typeface="+mn-cs"/>
-              </a:rPr>
-              <a:t> </a:t>
-            </a:r>
-            <a:r>
-              <a:rPr lang="en-US" sz="1200" kern="1200" dirty="0" err="1">
-                <a:solidFill>
-                  <a:schemeClr val="tx1"/>
-                </a:solidFill>
-                <a:effectLst/>
-                <a:latin typeface="+mn-lt"/>
-                <a:ea typeface="+mn-ea"/>
-                <a:cs typeface="+mn-cs"/>
-              </a:rPr>
-              <a:t>Q_k</a:t>
-            </a:r>
-            <a:r>
-              <a:rPr lang="en-US" sz="1200" kern="1200" dirty="0">
-                <a:solidFill>
-                  <a:schemeClr val="tx1"/>
-                </a:solidFill>
-                <a:effectLst/>
-                <a:latin typeface="+mn-lt"/>
-                <a:ea typeface="+mn-ea"/>
-                <a:cs typeface="+mn-cs"/>
-              </a:rPr>
-              <a:t> \</a:t>
-            </a:r>
-            <a:r>
-              <a:rPr lang="en-US" sz="1200" kern="1200" dirty="0" err="1">
-                <a:solidFill>
-                  <a:schemeClr val="tx1"/>
-                </a:solidFill>
-                <a:effectLst/>
-                <a:latin typeface="+mn-lt"/>
-                <a:ea typeface="+mn-ea"/>
-                <a:cs typeface="+mn-cs"/>
-              </a:rPr>
-              <a:t>x_k</a:t>
-            </a:r>
-            <a:r>
-              <a:rPr lang="en-US" sz="1200" kern="1200" dirty="0">
-                <a:solidFill>
-                  <a:schemeClr val="tx1"/>
-                </a:solidFill>
-                <a:effectLst/>
-                <a:latin typeface="+mn-lt"/>
-                <a:ea typeface="+mn-ea"/>
-                <a:cs typeface="+mn-cs"/>
-              </a:rPr>
-              <a:t> + \</a:t>
-            </a:r>
-            <a:r>
-              <a:rPr lang="en-US" sz="1200" kern="1200" dirty="0" err="1">
-                <a:solidFill>
-                  <a:schemeClr val="tx1"/>
-                </a:solidFill>
-                <a:effectLst/>
-                <a:latin typeface="+mn-lt"/>
-                <a:ea typeface="+mn-ea"/>
-                <a:cs typeface="+mn-cs"/>
-              </a:rPr>
-              <a:t>u_k^T</a:t>
-            </a:r>
-            <a:r>
-              <a:rPr lang="en-US" sz="1200" kern="1200" dirty="0">
-                <a:solidFill>
-                  <a:schemeClr val="tx1"/>
-                </a:solidFill>
-                <a:effectLst/>
-                <a:latin typeface="+mn-lt"/>
-                <a:ea typeface="+mn-ea"/>
-                <a:cs typeface="+mn-cs"/>
-              </a:rPr>
-              <a:t> </a:t>
-            </a:r>
-            <a:r>
-              <a:rPr lang="en-US" sz="1200" kern="1200" dirty="0" err="1">
-                <a:solidFill>
-                  <a:schemeClr val="tx1"/>
-                </a:solidFill>
-                <a:effectLst/>
-                <a:latin typeface="+mn-lt"/>
-                <a:ea typeface="+mn-ea"/>
-                <a:cs typeface="+mn-cs"/>
-              </a:rPr>
-              <a:t>R_k</a:t>
-            </a:r>
-            <a:r>
-              <a:rPr lang="en-US" sz="1200" kern="1200" dirty="0">
-                <a:solidFill>
-                  <a:schemeClr val="tx1"/>
-                </a:solidFill>
-                <a:effectLst/>
-                <a:latin typeface="+mn-lt"/>
-                <a:ea typeface="+mn-ea"/>
-                <a:cs typeface="+mn-cs"/>
-              </a:rPr>
-              <a:t> \</a:t>
-            </a:r>
-            <a:r>
-              <a:rPr lang="en-US" sz="1200" kern="1200" dirty="0" err="1">
-                <a:solidFill>
-                  <a:schemeClr val="tx1"/>
-                </a:solidFill>
-                <a:effectLst/>
-                <a:latin typeface="+mn-lt"/>
-                <a:ea typeface="+mn-ea"/>
-                <a:cs typeface="+mn-cs"/>
-              </a:rPr>
-              <a:t>u_k</a:t>
-            </a:r>
-            <a:r>
-              <a:rPr lang="en-US" sz="1200" kern="1200" dirty="0">
-                <a:solidFill>
-                  <a:schemeClr val="tx1"/>
-                </a:solidFill>
-                <a:effectLst/>
-                <a:latin typeface="+mn-lt"/>
-                <a:ea typeface="+mn-ea"/>
-                <a:cs typeface="+mn-cs"/>
-              </a:rPr>
-              <a:t> + (</a:t>
-            </a:r>
-            <a:r>
-              <a:rPr lang="en-US" sz="1200" kern="1200" dirty="0" err="1">
-                <a:solidFill>
-                  <a:schemeClr val="tx1"/>
-                </a:solidFill>
-                <a:effectLst/>
-                <a:latin typeface="+mn-lt"/>
-                <a:ea typeface="+mn-ea"/>
-                <a:cs typeface="+mn-cs"/>
-              </a:rPr>
-              <a:t>A_k</a:t>
-            </a:r>
-            <a:r>
-              <a:rPr lang="en-US" sz="1200" kern="1200" dirty="0">
-                <a:solidFill>
-                  <a:schemeClr val="tx1"/>
-                </a:solidFill>
-                <a:effectLst/>
-                <a:latin typeface="+mn-lt"/>
-                <a:ea typeface="+mn-ea"/>
-                <a:cs typeface="+mn-cs"/>
-              </a:rPr>
-              <a:t>\</a:t>
-            </a:r>
-            <a:r>
-              <a:rPr lang="en-US" sz="1200" kern="1200" dirty="0" err="1">
-                <a:solidFill>
-                  <a:schemeClr val="tx1"/>
-                </a:solidFill>
-                <a:effectLst/>
-                <a:latin typeface="+mn-lt"/>
-                <a:ea typeface="+mn-ea"/>
-                <a:cs typeface="+mn-cs"/>
-              </a:rPr>
-              <a:t>x_k</a:t>
-            </a:r>
-            <a:r>
-              <a:rPr lang="en-US" sz="1200" kern="1200" dirty="0">
-                <a:solidFill>
-                  <a:schemeClr val="tx1"/>
-                </a:solidFill>
-                <a:effectLst/>
-                <a:latin typeface="+mn-lt"/>
-                <a:ea typeface="+mn-ea"/>
-                <a:cs typeface="+mn-cs"/>
-              </a:rPr>
-              <a:t> + </a:t>
-            </a:r>
-            <a:r>
-              <a:rPr lang="en-US" sz="1200" kern="1200" dirty="0" err="1">
-                <a:solidFill>
-                  <a:schemeClr val="tx1"/>
-                </a:solidFill>
-                <a:effectLst/>
-                <a:latin typeface="+mn-lt"/>
-                <a:ea typeface="+mn-ea"/>
-                <a:cs typeface="+mn-cs"/>
-              </a:rPr>
-              <a:t>B_k</a:t>
-            </a:r>
-            <a:r>
-              <a:rPr lang="en-US" sz="1200" kern="1200" dirty="0">
-                <a:solidFill>
-                  <a:schemeClr val="tx1"/>
-                </a:solidFill>
-                <a:effectLst/>
-                <a:latin typeface="+mn-lt"/>
-                <a:ea typeface="+mn-ea"/>
-                <a:cs typeface="+mn-cs"/>
-              </a:rPr>
-              <a:t>\</a:t>
-            </a:r>
-            <a:r>
-              <a:rPr lang="en-US" sz="1200" kern="1200" dirty="0" err="1">
-                <a:solidFill>
-                  <a:schemeClr val="tx1"/>
-                </a:solidFill>
-                <a:effectLst/>
-                <a:latin typeface="+mn-lt"/>
-                <a:ea typeface="+mn-ea"/>
-                <a:cs typeface="+mn-cs"/>
-              </a:rPr>
-              <a:t>u_k</a:t>
-            </a:r>
-            <a:r>
-              <a:rPr lang="en-US" sz="1200" kern="1200" dirty="0">
-                <a:solidFill>
-                  <a:schemeClr val="tx1"/>
-                </a:solidFill>
-                <a:effectLst/>
-                <a:latin typeface="+mn-lt"/>
-                <a:ea typeface="+mn-ea"/>
-                <a:cs typeface="+mn-cs"/>
-              </a:rPr>
-              <a:t>)^T P_{k+1}(</a:t>
-            </a:r>
-            <a:r>
-              <a:rPr lang="en-US" sz="1200" kern="1200" dirty="0" err="1">
-                <a:solidFill>
-                  <a:schemeClr val="tx1"/>
-                </a:solidFill>
-                <a:effectLst/>
-                <a:latin typeface="+mn-lt"/>
-                <a:ea typeface="+mn-ea"/>
-                <a:cs typeface="+mn-cs"/>
-              </a:rPr>
-              <a:t>A_k</a:t>
-            </a:r>
-            <a:r>
-              <a:rPr lang="en-US" sz="1200" kern="1200" dirty="0">
-                <a:solidFill>
-                  <a:schemeClr val="tx1"/>
-                </a:solidFill>
-                <a:effectLst/>
-                <a:latin typeface="+mn-lt"/>
-                <a:ea typeface="+mn-ea"/>
-                <a:cs typeface="+mn-cs"/>
-              </a:rPr>
-              <a:t>\</a:t>
-            </a:r>
-            <a:r>
-              <a:rPr lang="en-US" sz="1200" kern="1200" dirty="0" err="1">
-                <a:solidFill>
-                  <a:schemeClr val="tx1"/>
-                </a:solidFill>
-                <a:effectLst/>
-                <a:latin typeface="+mn-lt"/>
-                <a:ea typeface="+mn-ea"/>
-                <a:cs typeface="+mn-cs"/>
-              </a:rPr>
-              <a:t>x_k</a:t>
-            </a:r>
-            <a:r>
-              <a:rPr lang="en-US" sz="1200" kern="1200" dirty="0">
-                <a:solidFill>
-                  <a:schemeClr val="tx1"/>
-                </a:solidFill>
-                <a:effectLst/>
-                <a:latin typeface="+mn-lt"/>
-                <a:ea typeface="+mn-ea"/>
-                <a:cs typeface="+mn-cs"/>
-              </a:rPr>
-              <a:t> + </a:t>
-            </a:r>
-            <a:r>
-              <a:rPr lang="en-US" sz="1200" kern="1200" dirty="0" err="1">
-                <a:solidFill>
-                  <a:schemeClr val="tx1"/>
-                </a:solidFill>
-                <a:effectLst/>
-                <a:latin typeface="+mn-lt"/>
-                <a:ea typeface="+mn-ea"/>
-                <a:cs typeface="+mn-cs"/>
-              </a:rPr>
-              <a:t>B_k</a:t>
-            </a:r>
-            <a:r>
-              <a:rPr lang="en-US" sz="1200" kern="1200" dirty="0">
-                <a:solidFill>
-                  <a:schemeClr val="tx1"/>
-                </a:solidFill>
-                <a:effectLst/>
-                <a:latin typeface="+mn-lt"/>
-                <a:ea typeface="+mn-ea"/>
-                <a:cs typeface="+mn-cs"/>
-              </a:rPr>
-              <a:t>\</a:t>
-            </a:r>
-            <a:r>
-              <a:rPr lang="en-US" sz="1200" kern="1200" dirty="0" err="1">
-                <a:solidFill>
-                  <a:schemeClr val="tx1"/>
-                </a:solidFill>
-                <a:effectLst/>
-                <a:latin typeface="+mn-lt"/>
-                <a:ea typeface="+mn-ea"/>
-                <a:cs typeface="+mn-cs"/>
-              </a:rPr>
-              <a:t>u_k</a:t>
-            </a:r>
-            <a:r>
-              <a:rPr lang="en-US" sz="1200" kern="1200" dirty="0">
-                <a:solidFill>
-                  <a:schemeClr val="tx1"/>
-                </a:solidFill>
-                <a:effectLst/>
-                <a:latin typeface="+mn-lt"/>
-                <a:ea typeface="+mn-ea"/>
-                <a:cs typeface="+mn-cs"/>
-              </a:rPr>
-              <a:t>) + \</a:t>
-            </a:r>
-            <a:r>
-              <a:rPr lang="en-US" sz="1200" kern="1200" dirty="0" err="1">
-                <a:solidFill>
-                  <a:schemeClr val="tx1"/>
-                </a:solidFill>
-                <a:effectLst/>
-                <a:latin typeface="+mn-lt"/>
-                <a:ea typeface="+mn-ea"/>
-                <a:cs typeface="+mn-cs"/>
-              </a:rPr>
-              <a:t>mathrm</a:t>
-            </a:r>
-            <a:r>
-              <a:rPr lang="en-US" sz="1200" kern="1200" dirty="0">
-                <a:solidFill>
-                  <a:schemeClr val="tx1"/>
-                </a:solidFill>
-                <a:effectLst/>
-                <a:latin typeface="+mn-lt"/>
-                <a:ea typeface="+mn-ea"/>
-                <a:cs typeface="+mn-cs"/>
-              </a:rPr>
-              <a:t>{tr}(P_{k+1}\Sigma_{\</a:t>
-            </a:r>
-            <a:r>
-              <a:rPr lang="en-US" sz="1200" kern="1200" dirty="0" err="1">
-                <a:solidFill>
-                  <a:schemeClr val="tx1"/>
-                </a:solidFill>
-                <a:effectLst/>
-                <a:latin typeface="+mn-lt"/>
-                <a:ea typeface="+mn-ea"/>
-                <a:cs typeface="+mn-cs"/>
-              </a:rPr>
-              <a:t>w_k</a:t>
-            </a:r>
-            <a:r>
-              <a:rPr lang="en-US" sz="1200" kern="1200">
-                <a:solidFill>
-                  <a:schemeClr val="tx1"/>
-                </a:solidFill>
-                <a:effectLst/>
-                <a:latin typeface="+mn-lt"/>
-                <a:ea typeface="+mn-ea"/>
-                <a:cs typeface="+mn-cs"/>
-              </a:rPr>
-              <a:t>})\right)</a:t>
-            </a:r>
-          </a:p>
-          <a:p>
-            <a:pPr marL="0" marR="0" lvl="0" indent="0" algn="l" defTabSz="914400" rtl="0" eaLnBrk="1" fontAlgn="auto" latinLnBrk="0" hangingPunct="1">
-              <a:lnSpc>
-                <a:spcPct val="100000"/>
-              </a:lnSpc>
-              <a:spcBef>
-                <a:spcPts val="0"/>
-              </a:spcBef>
-              <a:spcAft>
-                <a:spcPts val="0"/>
-              </a:spcAft>
-              <a:buClrTx/>
-              <a:buSzTx/>
-              <a:buFontTx/>
-              <a:buNone/>
-              <a:tabLst/>
-              <a:defRPr/>
-            </a:pPr>
-            <a:endParaRPr lang="en-US" sz="1200" kern="1200" dirty="0">
-              <a:solidFill>
-                <a:schemeClr val="tx1"/>
-              </a:solidFill>
-              <a:effectLst/>
-              <a:latin typeface="+mn-lt"/>
-              <a:ea typeface="+mn-ea"/>
-              <a:cs typeface="+mn-cs"/>
-            </a:endParaRPr>
-          </a:p>
           <a:p>
             <a:endParaRPr lang="en-US" dirty="0"/>
           </a:p>
@@ -8349,127 +870,6 @@
         <p:txBody>
           <a:bodyPr/>
           <a:lstStyle/>
-          <a:p>
-            <a:pPr marL="285750" indent="-285750">
-              <a:buFont typeface="Arial" panose="020B0604020202020204" pitchFamily="34" charset="0"/>
-              <a:buChar char="•"/>
-            </a:pPr>
-            <a:r>
-              <a:rPr lang="en-US" sz="1800" dirty="0">
-                <a:effectLst/>
-                <a:latin typeface="CMR10"/>
-              </a:rPr>
-              <a:t>The RL framework will be framed in the context of infinite-horizon problems</a:t>
-            </a:r>
-          </a:p>
-          <a:p>
-            <a:pPr marL="285750" indent="-285750">
-              <a:buFont typeface="Arial" panose="020B0604020202020204" pitchFamily="34" charset="0"/>
-              <a:buChar char="•"/>
-            </a:pPr>
-            <a:r>
-              <a:rPr lang="en-US" sz="1800" dirty="0">
-                <a:effectLst/>
-                <a:latin typeface="CMR10"/>
-              </a:rPr>
-              <a:t>Infinite horizon problems differ from their finite horizon counterparts in two main respects: </a:t>
-            </a:r>
-            <a:endParaRPr lang="en-US" dirty="0"/>
-          </a:p>
-          <a:p>
-            <a:r>
-              <a:rPr lang="en-US" sz="1800" dirty="0">
-                <a:effectLst/>
-                <a:latin typeface="CMR10"/>
-              </a:rPr>
-              <a:t>(a) The number of stages is infinite. </a:t>
-            </a:r>
-            <a:endParaRPr lang="en-US" dirty="0"/>
-          </a:p>
-          <a:p>
-            <a:r>
-              <a:rPr lang="en-US" sz="1800" dirty="0">
-                <a:effectLst/>
-                <a:latin typeface="CMR10"/>
-              </a:rPr>
-              <a:t>(b) The system is stationary, i.e., the system equation, the cost per stage, and the random disturbance statistics do not change from one stage to the next. </a:t>
-            </a:r>
-          </a:p>
-          <a:p>
-            <a:pPr marL="285750" marR="0" lvl="0" indent="-285750" algn="l" defTabSz="914400" rtl="0" eaLnBrk="1" fontAlgn="auto" latinLnBrk="0" hangingPunct="1">
-              <a:lnSpc>
-                <a:spcPct val="100000"/>
-              </a:lnSpc>
-              <a:spcBef>
-                <a:spcPts val="0"/>
-              </a:spcBef>
-              <a:spcAft>
-                <a:spcPts val="0"/>
-              </a:spcAft>
-              <a:buClrTx/>
-              <a:buSzTx/>
-              <a:buFont typeface="Arial" panose="020B0604020202020204" pitchFamily="34" charset="0"/>
-              <a:buChar char="•"/>
-              <a:tabLst/>
-              <a:defRPr/>
-            </a:pPr>
-            <a:r>
-              <a:rPr lang="en-US" sz="1800" dirty="0">
-                <a:effectLst/>
-                <a:latin typeface="CMR10"/>
-              </a:rPr>
-              <a:t>The assumption of an infinite number of stages is never satisfied in practice, but is a reasonable approximation for problems involving a finite but very large number of stages. The assumption of stationarity is often satisfied in practice, and in other cases it approximates well a situation where the system parameters vary relatively slowly with time. </a:t>
-            </a:r>
-          </a:p>
-          <a:p>
-            <a:pPr marL="285750" marR="0" lvl="0" indent="-285750" algn="l" defTabSz="914400" rtl="0" eaLnBrk="1" fontAlgn="auto" latinLnBrk="0" hangingPunct="1">
-              <a:lnSpc>
-                <a:spcPct val="100000"/>
-              </a:lnSpc>
-              <a:spcBef>
-                <a:spcPts val="0"/>
-              </a:spcBef>
-              <a:spcAft>
-                <a:spcPts val="0"/>
-              </a:spcAft>
-              <a:buClrTx/>
-              <a:buSzTx/>
-              <a:buFont typeface="Arial" panose="020B0604020202020204" pitchFamily="34" charset="0"/>
-              <a:buChar char="•"/>
-              <a:tabLst/>
-              <a:defRPr/>
-            </a:pPr>
-            <a:r>
-              <a:rPr lang="en-US" sz="1200" dirty="0">
-                <a:effectLst/>
-                <a:latin typeface="CMR10"/>
-              </a:rPr>
-              <a:t>We’ll be using a few notational conventions as detailed here</a:t>
-            </a:r>
-          </a:p>
-          <a:p>
-            <a:pPr marL="285750" marR="0" lvl="0" indent="-285750" algn="l" defTabSz="914400" rtl="0" eaLnBrk="1" fontAlgn="auto" latinLnBrk="0" hangingPunct="1">
-              <a:lnSpc>
-                <a:spcPct val="100000"/>
-              </a:lnSpc>
-              <a:spcBef>
-                <a:spcPts val="0"/>
-              </a:spcBef>
-              <a:spcAft>
-                <a:spcPts val="0"/>
-              </a:spcAft>
-              <a:buClrTx/>
-              <a:buSzTx/>
-              <a:buFont typeface="Arial" panose="020B0604020202020204" pitchFamily="34" charset="0"/>
-              <a:buChar char="•"/>
-              <a:tabLst/>
-              <a:defRPr/>
-            </a:pPr>
-            <a:endParaRPr lang="en-US" dirty="0"/>
-          </a:p>
-          <a:p>
-            <a:endParaRPr lang="en-US" dirty="0"/>
-          </a:p>
           <a:p>
             <a:endParaRPr lang="en-US" dirty="0"/>
           </a:p>
@@ -8559,30 +959,7 @@
               <a:buFont typeface="Arial" panose="020B0604020202020204" pitchFamily="34" charset="0"/>
               <a:buChar char="•"/>
             </a:pPr>
-            <a:r>
-              <a:rPr lang="en-US" dirty="0"/>
-              <a:t>The discount factor:</a:t>
-            </a:r>
-          </a:p>
-          <a:p>
-            <a:pPr marL="628650" lvl="1" indent="-171450">
-              <a:buFont typeface="Arial" panose="020B0604020202020204" pitchFamily="34" charset="0"/>
-              <a:buChar char="•"/>
-            </a:pPr>
-            <a:r>
-              <a:rPr lang="en-US" dirty="0"/>
-              <a:t>Guarantees that the cost is finite</a:t>
-            </a:r>
-          </a:p>
-          <a:p>
-            <a:pPr marL="628650" lvl="1" indent="-171450">
-              <a:buFont typeface="Arial" panose="020B0604020202020204" pitchFamily="34" charset="0"/>
-              <a:buChar char="•"/>
-            </a:pPr>
-            <a:r>
-              <a:rPr lang="en-US" dirty="0"/>
-              <a:t>Makes sense</a:t>
-            </a:r>
+            <a:endParaRPr lang="en-US" dirty="0"/>
           </a:p>
         </p:txBody>
       </p:sp>
@@ -8665,78 +1042,6 @@
         <p:txBody>
           <a:bodyPr/>
           <a:lstStyle/>
-          <a:p>
-            <a:pPr marL="171450" indent="-171450">
-              <a:buFont typeface="Arial" panose="020B0604020202020204" pitchFamily="34" charset="0"/>
-              <a:buChar char="•"/>
-            </a:pPr>
-            <a:r>
-              <a:rPr lang="en-US" sz="1200" b="0" i="0" kern="1200" dirty="0">
-                <a:solidFill>
-                  <a:schemeClr val="tx1"/>
-                </a:solidFill>
-                <a:effectLst/>
-                <a:latin typeface="+mn-lt"/>
-                <a:ea typeface="+mn-ea"/>
-                <a:cs typeface="+mn-cs"/>
-              </a:rPr>
-              <a:t>The Q function is defined as the “value” of starting in state x, applying control u, and then following the optimal  policy for the remaining time</a:t>
-            </a:r>
-          </a:p>
-          <a:p>
-            <a:pPr marL="171450" marR="0" lvl="0" indent="-171450" algn="l" defTabSz="914400" rtl="0" eaLnBrk="1" fontAlgn="auto" latinLnBrk="0" hangingPunct="1">
-              <a:lnSpc>
-                <a:spcPct val="100000"/>
-              </a:lnSpc>
-              <a:spcBef>
-                <a:spcPts val="0"/>
-              </a:spcBef>
-              <a:spcAft>
-                <a:spcPts val="0"/>
-              </a:spcAft>
-              <a:buClrTx/>
-              <a:buSzTx/>
-              <a:buFont typeface="Arial" panose="020B0604020202020204" pitchFamily="34" charset="0"/>
-              <a:buChar char="•"/>
-              <a:tabLst/>
-              <a:defRPr/>
-            </a:pPr>
-            <a:r>
-              <a:rPr lang="en-US" sz="1800" dirty="0">
-                <a:effectLst/>
-                <a:latin typeface="Arial" panose="020B0604020202020204" pitchFamily="34" charset="0"/>
-              </a:rPr>
-              <a:t>A convenient aspect of this approach is that if you know Q*, then it’s really easy to compute the optimal action in a state. All you have to do is take the action that gives the largest Q value in that state. </a:t>
-            </a:r>
-            <a:r>
-              <a:rPr lang="en-US" sz="1800" dirty="0"/>
-              <a:t>We can immediately back up the optimal policy!</a:t>
-            </a:r>
-          </a:p>
-          <a:p>
-            <a:pPr marL="171450" indent="-171450">
-              <a:buFont typeface="Arial" panose="020B0604020202020204" pitchFamily="34" charset="0"/>
-              <a:buChar char="•"/>
-            </a:pPr>
-            <a:endParaRPr lang="en-US" sz="1800" dirty="0">
-              <a:effectLst/>
-              <a:latin typeface="Arial" panose="020B0604020202020204" pitchFamily="34" charset="0"/>
-            </a:endParaRPr>
-          </a:p>
-          <a:p>
-            <a:pPr marL="171450" indent="-171450">
-              <a:buFont typeface="Arial" panose="020B0604020202020204" pitchFamily="34" charset="0"/>
-              <a:buChar char="•"/>
-            </a:pPr>
-            <a:r>
-              <a:rPr lang="en-US" sz="1800" dirty="0">
-                <a:effectLst/>
-                <a:latin typeface="Arial" panose="020B0604020202020204" pitchFamily="34" charset="0"/>
-              </a:rPr>
-              <a:t>(Back when we were using V*, it required knowing the transition probabilities to compute the optimal action, so this is considerably simpler. And it will be effective when the model is not explicitly known). </a:t>
-            </a:r>
-            <a:endParaRPr lang="en-US" dirty="0"/>
-          </a:p>
           <a:p>
             <a:endParaRPr lang="it-IT" dirty="0"/>
           </a:p>
@@ -8822,10 +1127,7 @@
           <a:bodyPr/>
           <a:lstStyle/>
           <a:p>
-            <a:r>
-              <a:rPr lang="en-US" dirty="0"/>
-              <a:t>Intuition: increasingly consider longer and longer problems, eventually we will converge</a:t>
-            </a:r>
+            <a:endParaRPr lang="en-US" dirty="0"/>
           </a:p>
         </p:txBody>
       </p:sp>
@@ -8994,7 +1296,7 @@
           <a:p>
             <a:fld id="{48198E64-2A29-7C48-BC66-C285AEA4C58C}" type="datetime1">
               <a:rPr lang="en-US" smtClean="0"/>
-              <a:t>4/26/26</a:t>
+              <a:t>8/13/26</a:t>
             </a:fld>
             <a:endParaRPr lang="en-US" dirty="0"/>
           </a:p>
@@ -9220,7 +1522,7 @@
           <a:p>
             <a:fld id="{661C89CC-0039-E74A-829E-86976022470A}" type="datetime1">
               <a:rPr lang="en-US" smtClean="0"/>
-              <a:t>4/26/26</a:t>
+              <a:t>8/13/26</a:t>
             </a:fld>
             <a:endParaRPr lang="en-US"/>
           </a:p>
@@ -9410,7 +1712,7 @@
           <a:p>
             <a:fld id="{F20F86FB-F5D3-4A4B-99B7-AD68E25C84DB}" type="datetime1">
               <a:rPr lang="en-US" smtClean="0"/>
-              <a:t>4/26/26</a:t>
+              <a:t>8/13/26</a:t>
             </a:fld>
             <a:endParaRPr lang="en-US"/>
           </a:p>
@@ -9626,7 +1928,7 @@
           <a:p>
             <a:fld id="{88269DAD-E26C-514E-A50B-0D07533F788F}" type="datetime1">
               <a:rPr lang="en-US" smtClean="0"/>
-              <a:t>4/26/26</a:t>
+              <a:t>8/13/26</a:t>
             </a:fld>
             <a:endParaRPr lang="en-US" dirty="0"/>
           </a:p>
@@ -9940,7 +2242,7 @@
           <a:p>
             <a:fld id="{BA6E0476-5671-D841-A6F4-4E1C5BAD0186}" type="datetime1">
               <a:rPr lang="en-US" smtClean="0"/>
-              <a:t>4/26/26</a:t>
+              <a:t>8/13/26</a:t>
             </a:fld>
             <a:endParaRPr lang="en-US"/>
           </a:p>
@@ -10193,7 +2495,7 @@
           <a:p>
             <a:fld id="{7EC1C67A-D6DD-E74C-B11B-8F1FC49B7B53}" type="datetime1">
               <a:rPr lang="en-US" smtClean="0"/>
-              <a:t>4/26/26</a:t>
+              <a:t>8/13/26</a:t>
             </a:fld>
             <a:endParaRPr lang="en-US"/>
           </a:p>
@@ -10569,7 +2871,7 @@
           <a:p>
             <a:fld id="{233FE95A-A8B5-4748-B27B-5EB17BCC4F69}" type="datetime1">
               <a:rPr lang="en-US" smtClean="0"/>
-              <a:t>4/26/26</a:t>
+              <a:t>8/13/26</a:t>
             </a:fld>
             <a:endParaRPr lang="en-US"/>
           </a:p>
@@ -10698,7 +3000,7 @@
           <a:p>
             <a:fld id="{128832AE-EA0C-0949-9025-C095AA5CD7CC}" type="datetime1">
               <a:rPr lang="en-US" smtClean="0"/>
-              <a:t>4/26/26</a:t>
+              <a:t>8/13/26</a:t>
             </a:fld>
             <a:endParaRPr lang="en-US"/>
           </a:p>
@@ -10805,7 +3107,7 @@
           <a:p>
             <a:fld id="{A2915314-F58A-4D41-83BD-E127A2E78029}" type="datetime1">
               <a:rPr lang="en-US" smtClean="0"/>
-              <a:t>4/26/26</a:t>
+              <a:t>8/13/26</a:t>
             </a:fld>
             <a:endParaRPr lang="en-US"/>
           </a:p>
@@ -11092,7 +3394,7 @@
           <a:p>
             <a:fld id="{35FFE03F-5167-6E48-A93F-7FD9CD09B193}" type="datetime1">
               <a:rPr lang="en-US" smtClean="0"/>
-              <a:t>4/26/26</a:t>
+              <a:t>8/13/26</a:t>
             </a:fld>
             <a:endParaRPr lang="en-US"/>
           </a:p>
@@ -11356,7 +3658,7 @@
           <a:p>
             <a:fld id="{9CF74146-780F-0541-BBCA-2F56BE88E35B}" type="datetime1">
               <a:rPr lang="en-US" smtClean="0"/>
-              <a:t>4/26/26</a:t>
+              <a:t>8/13/26</a:t>
             </a:fld>
             <a:endParaRPr lang="en-US"/>
           </a:p>
@@ -11579,7 +3881,7 @@
           <a:p>
             <a:fld id="{5DDCDEA9-36AB-2343-A1DB-343C7E4DBA40}" type="datetime1">
               <a:rPr lang="en-US" smtClean="0"/>
-              <a:t>4/26/26</a:t>
+              <a:t>8/13/26</a:t>
             </a:fld>
             <a:endParaRPr lang="en-US" dirty="0"/>
           </a:p>
@@ -12173,10 +4475,7 @@
                 </a:pPr>
                 <a14:m>
                   <m:oMathPara xmlns:m="http://schemas.openxmlformats.org/officeDocument/2006/math">
-                    <m:oMathParaPr>
-                      <m:jc m:val="centerGroup"/>
-                    </m:oMathParaPr>
-                    <m:oMath xmlns:m="http://schemas.openxmlformats.org/officeDocument/2006/math">
+                    <m:oMath>
                       <m:sSub>
                         <m:sSubPr>
                           <m:ctrlPr>
@@ -12256,7 +4555,7 @@
                           <m:limLow>
                             <m:limLowPr>
                               <m:ctrlPr>
-                                <a:rPr lang="en-US" i="1">
+                                <a:rPr lang="en-US">
                                   <a:latin typeface="Cambria Math" panose="02040503050406030204" pitchFamily="18" charset="0"/>
                                 </a:rPr>
                               </m:ctrlPr>
@@ -12603,7 +4902,7 @@
                         <m:func>
                           <m:funcPr>
                             <m:ctrlPr>
-                              <a:rPr lang="en-US" i="1">
+                              <a:rPr lang="en-US">
                                 <a:latin typeface="Cambria Math" panose="02040503050406030204" pitchFamily="18" charset="0"/>
                               </a:rPr>
                             </m:ctrlPr>
@@ -12859,7 +5158,7 @@
                     <m:limLow>
                       <m:limLowPr>
                         <m:ctrlPr>
-                          <a:rPr lang="pl" i="1">
+                          <a:rPr lang="pl" i="0">
                             <a:latin typeface="Cambria Math" panose="02040503050406030204" pitchFamily="18" charset="0"/>
                           </a:rPr>
                         </m:ctrlPr>
@@ -12879,7 +5178,7 @@
                         <m:sSub>
                           <m:sSubPr>
                             <m:ctrlPr>
-                              <a:rPr lang="en-US" b="0" i="1" smtClean="0">
+                              <a:rPr lang="pl" i="1">
                                 <a:latin typeface="Cambria Math" panose="02040503050406030204" pitchFamily="18" charset="0"/>
                               </a:rPr>
                             </m:ctrlPr>
@@ -12964,7 +5263,7 @@
                         <m:begChr m:val="["/>
                         <m:endChr m:val="]"/>
                         <m:ctrlPr>
-                          <a:rPr lang="en-US" b="0" i="1" smtClean="0">
+                          <a:rPr lang="pl" i="1">
                             <a:latin typeface="Cambria Math" panose="02040503050406030204" pitchFamily="18" charset="0"/>
                           </a:rPr>
                         </m:ctrlPr>
@@ -13124,7 +5423,7 @@
                     <m:limLow>
                       <m:limLowPr>
                         <m:ctrlPr>
-                          <a:rPr lang="pl" i="1">
+                          <a:rPr lang="pl">
                             <a:latin typeface="Cambria Math" panose="02040503050406030204" pitchFamily="18" charset="0"/>
                           </a:rPr>
                         </m:ctrlPr>
@@ -13144,7 +5443,7 @@
                         <m:sSub>
                           <m:sSubPr>
                             <m:ctrlPr>
-                              <a:rPr lang="en-US" i="1">
+                              <a:rPr lang="pl" i="1">
                                 <a:latin typeface="Cambria Math" panose="02040503050406030204" pitchFamily="18" charset="0"/>
                               </a:rPr>
                             </m:ctrlPr>
@@ -13601,7 +5900,7 @@
           <a:p>
             <a:fld id="{530C07AF-3678-F648-BC25-790959120E44}" type="datetime1">
               <a:rPr lang="en-US" smtClean="0"/>
-              <a:t>4/26/26</a:t>
+              <a:t>8/13/26</a:t>
             </a:fld>
             <a:endParaRPr lang="en-US" dirty="0"/>
           </a:p>
@@ -13982,7 +6281,7 @@
           <a:p>
             <a:fld id="{04DFE4F6-CC57-264C-94DB-75135DBEDE54}" type="datetime1">
               <a:rPr lang="en-US" smtClean="0"/>
-              <a:t>4/26/26</a:t>
+              <a:t>8/13/26</a:t>
             </a:fld>
             <a:endParaRPr lang="en-US" dirty="0"/>
           </a:p>
@@ -14143,10 +6442,7 @@
                 </a:pPr>
                 <a14:m>
                   <m:oMathPara xmlns:m="http://schemas.openxmlformats.org/officeDocument/2006/math">
-                    <m:oMathParaPr>
-                      <m:jc m:val="centerGroup"/>
-                    </m:oMathParaPr>
-                    <m:oMath xmlns:m="http://schemas.openxmlformats.org/officeDocument/2006/math">
+                    <m:oMath>
                       <m:r>
                         <a:rPr lang="en-US" i="1" dirty="0">
                           <a:latin typeface="Cambria Math" panose="02040503050406030204" pitchFamily="18" charset="0"/>
@@ -14167,7 +6463,7 @@
                           <m:sSubSup>
                             <m:sSubSupPr>
                               <m:ctrlPr>
-                                <a:rPr lang="en-US" i="1">
+                                <a:rPr lang="en-US" i="1" smtClean="0">
                                   <a:latin typeface="Cambria Math" panose="02040503050406030204" pitchFamily="18" charset="0"/>
                                 </a:rPr>
                               </m:ctrlPr>
@@ -14176,7 +6472,7 @@
                               <m:f>
                                 <m:fPr>
                                   <m:ctrlPr>
-                                    <a:rPr lang="en-US" i="1" smtClean="0">
+                                    <a:rPr lang="en-US" b="0" i="1" smtClean="0">
                                       <a:latin typeface="Cambria Math" panose="02040503050406030204" pitchFamily="18" charset="0"/>
                                     </a:rPr>
                                   </m:ctrlPr>
@@ -14231,7 +6527,7 @@
                           <m:sSub>
                             <m:sSubPr>
                               <m:ctrlPr>
-                                <a:rPr lang="en-US" i="1">
+                                <a:rPr lang="en-US" b="1" i="1">
                                   <a:latin typeface="Cambria Math" panose="02040503050406030204" pitchFamily="18" charset="0"/>
                                 </a:rPr>
                               </m:ctrlPr>
@@ -14337,7 +6633,7 @@
                                   <m:sSubSup>
                                     <m:sSubSupPr>
                                       <m:ctrlPr>
-                                        <a:rPr lang="en-US" i="1" dirty="0">
+                                        <a:rPr lang="en-US" b="1" i="1" dirty="0">
                                           <a:latin typeface="Cambria Math" panose="02040503050406030204" pitchFamily="18" charset="0"/>
                                         </a:rPr>
                                       </m:ctrlPr>
@@ -14426,7 +6722,7 @@
                                   <m:sSubSup>
                                     <m:sSubSupPr>
                                       <m:ctrlPr>
-                                        <a:rPr lang="en-US" i="1" dirty="0">
+                                        <a:rPr lang="en-US" b="1" i="1" dirty="0">
                                           <a:latin typeface="Cambria Math" panose="02040503050406030204" pitchFamily="18" charset="0"/>
                                         </a:rPr>
                                       </m:ctrlPr>
@@ -14484,7 +6780,7 @@
                                   <m:sSub>
                                     <m:sSubPr>
                                       <m:ctrlPr>
-                                        <a:rPr lang="en-US" i="1" dirty="0">
+                                        <a:rPr lang="en-US" b="1" i="1" dirty="0">
                                           <a:latin typeface="Cambria Math" panose="02040503050406030204" pitchFamily="18" charset="0"/>
                                         </a:rPr>
                                       </m:ctrlPr>
@@ -14542,7 +6838,7 @@
                     <m:sSub>
                       <m:sSubPr>
                         <m:ctrlPr>
-                          <a:rPr lang="en-US" i="1">
+                          <a:rPr lang="en-US" b="1" i="1">
                             <a:latin typeface="Cambria Math" panose="02040503050406030204" pitchFamily="18" charset="0"/>
                           </a:rPr>
                         </m:ctrlPr>
@@ -14604,7 +6900,7 @@
                     <m:sSub>
                       <m:sSubPr>
                         <m:ctrlPr>
-                          <a:rPr lang="en-US" i="1">
+                          <a:rPr lang="en-US" b="1" i="1">
                             <a:latin typeface="Cambria Math" panose="02040503050406030204" pitchFamily="18" charset="0"/>
                           </a:rPr>
                         </m:ctrlPr>
@@ -14660,7 +6956,7 @@
                     <m:sSub>
                       <m:sSubPr>
                         <m:ctrlPr>
-                          <a:rPr lang="en-US" i="1">
+                          <a:rPr lang="en-US" b="1" i="1">
                             <a:latin typeface="Cambria Math" panose="02040503050406030204" pitchFamily="18" charset="0"/>
                           </a:rPr>
                         </m:ctrlPr>
@@ -14691,7 +6987,7 @@
                     <m:sSub>
                       <m:sSubPr>
                         <m:ctrlPr>
-                          <a:rPr lang="en-US" i="1">
+                          <a:rPr lang="en-US" b="1" i="1">
                             <a:latin typeface="Cambria Math" panose="02040503050406030204" pitchFamily="18" charset="0"/>
                           </a:rPr>
                         </m:ctrlPr>
@@ -14733,7 +7029,7 @@
                     <m:sSub>
                       <m:sSubPr>
                         <m:ctrlPr>
-                          <a:rPr lang="en-US" i="1">
+                          <a:rPr lang="en-US" b="1" i="1">
                             <a:latin typeface="Cambria Math" panose="02040503050406030204" pitchFamily="18" charset="0"/>
                           </a:rPr>
                         </m:ctrlPr>
@@ -14779,9 +7075,8 @@
                       <m:accPr>
                         <m:chr m:val="̅"/>
                         <m:ctrlPr>
-                          <a:rPr lang="en-US" b="0" i="1" smtClean="0">
-                            <a:latin typeface="Cambria Math" panose="02040503050406030204" pitchFamily="18" charset="0"/>
-                            <a:ea typeface="Cambria Math" panose="02040503050406030204" pitchFamily="18" charset="0"/>
+                          <a:rPr lang="en-US" i="1">
+                            <a:latin typeface="Cambria Math" panose="02040503050406030204" pitchFamily="18" charset="0"/>
                           </a:rPr>
                         </m:ctrlPr>
                       </m:accPr>
@@ -14789,7 +7084,7 @@
                         <m:sSub>
                           <m:sSubPr>
                             <m:ctrlPr>
-                              <a:rPr lang="en-US" i="1">
+                              <a:rPr lang="en-US" b="1" i="1">
                                 <a:latin typeface="Cambria Math" panose="02040503050406030204" pitchFamily="18" charset="0"/>
                               </a:rPr>
                             </m:ctrlPr>
@@ -14822,7 +7117,7 @@
                     <m:sSub>
                       <m:sSubPr>
                         <m:ctrlPr>
-                          <a:rPr lang="en-US" b="0" i="1" smtClean="0">
+                          <a:rPr lang="el-GR" b="0" i="1" smtClean="0">
                             <a:latin typeface="Cambria Math" panose="02040503050406030204" pitchFamily="18" charset="0"/>
                             <a:ea typeface="Cambria Math" panose="02040503050406030204" pitchFamily="18" charset="0"/>
                           </a:rPr>
@@ -14844,7 +7139,7 @@
                         <m:sSub>
                           <m:sSubPr>
                             <m:ctrlPr>
-                              <a:rPr lang="en-US" i="1">
+                              <a:rPr lang="en-US" b="1" i="1">
                                 <a:latin typeface="Cambria Math" panose="02040503050406030204" pitchFamily="18" charset="0"/>
                               </a:rPr>
                             </m:ctrlPr>
@@ -14896,7 +7191,7 @@
                         <m:sSub>
                           <m:sSubPr>
                             <m:ctrlPr>
-                              <a:rPr lang="en-US" i="1">
+                              <a:rPr lang="en-US" b="1" i="1">
                                 <a:latin typeface="Cambria Math" panose="02040503050406030204" pitchFamily="18" charset="0"/>
                               </a:rPr>
                             </m:ctrlPr>
@@ -14954,7 +7249,7 @@
                         <m:sSub>
                           <m:sSubPr>
                             <m:ctrlPr>
-                              <a:rPr lang="en-US" i="1">
+                              <a:rPr lang="el-GR" i="1">
                                 <a:latin typeface="Cambria Math" panose="02040503050406030204" pitchFamily="18" charset="0"/>
                                 <a:ea typeface="Cambria Math" panose="02040503050406030204" pitchFamily="18" charset="0"/>
                               </a:rPr>
@@ -14976,7 +7271,7 @@
                             <m:sSub>
                               <m:sSubPr>
                                 <m:ctrlPr>
-                                  <a:rPr lang="en-US" i="1">
+                                  <a:rPr lang="en-US" b="1" i="1">
                                     <a:latin typeface="Cambria Math" panose="02040503050406030204" pitchFamily="18" charset="0"/>
                                   </a:rPr>
                                 </m:ctrlPr>
@@ -15081,7 +7376,7 @@
           <a:p>
             <a:fld id="{FACFD665-B3B4-4E4C-95A5-BABD492E1EC2}" type="datetime1">
               <a:rPr lang="en-US" smtClean="0"/>
-              <a:t>4/26/26</a:t>
+              <a:t>8/13/26</a:t>
             </a:fld>
             <a:endParaRPr lang="en-US" dirty="0"/>
           </a:p>
@@ -15322,7 +7617,7 @@
           <a:p>
             <a:fld id="{9B9B6339-69FD-9C4D-B7BE-A1DCAA21F94D}" type="datetime1">
               <a:rPr lang="en-US" smtClean="0"/>
-              <a:t>4/26/26</a:t>
+              <a:t>8/13/26</a:t>
             </a:fld>
             <a:endParaRPr lang="en-US" dirty="0"/>
           </a:p>
@@ -15619,7 +7914,7 @@
           <a:p>
             <a:fld id="{3029F2B9-4BD3-8041-B302-1B2D04B1394A}" type="datetime1">
               <a:rPr lang="en-US" smtClean="0"/>
-              <a:t>4/26/26</a:t>
+              <a:t>8/13/26</a:t>
             </a:fld>
             <a:endParaRPr lang="en-US" dirty="0"/>
           </a:p>
@@ -16007,7 +8302,7 @@
                       <m:dPr>
                         <m:endChr m:val="|"/>
                         <m:ctrlPr>
-                          <a:rPr lang="en-US" i="1" dirty="0" smtClean="0">
+                          <a:rPr lang="en-US" i="1" dirty="0" err="1" smtClean="0">
                             <a:latin typeface="Cambria Math" panose="02040503050406030204" pitchFamily="18" charset="0"/>
                           </a:rPr>
                         </m:ctrlPr>
@@ -16016,7 +8311,7 @@
                         <m:sSub>
                           <m:sSubPr>
                             <m:ctrlPr>
-                              <a:rPr lang="en-US" i="1" dirty="0" err="1" smtClean="0">
+                              <a:rPr lang="en-US" b="0" i="1" dirty="0" err="1" smtClean="0">
                                 <a:latin typeface="Cambria Math" panose="02040503050406030204" pitchFamily="18" charset="0"/>
                               </a:rPr>
                             </m:ctrlPr>
@@ -16049,7 +8344,7 @@
                     <m:sSub>
                       <m:sSubPr>
                         <m:ctrlPr>
-                          <a:rPr lang="en-US" i="1" dirty="0" smtClean="0">
+                          <a:rPr lang="en-US" b="0" i="1" dirty="0" smtClean="0">
                             <a:latin typeface="Cambria Math" panose="02040503050406030204" pitchFamily="18" charset="0"/>
                           </a:rPr>
                         </m:ctrlPr>
@@ -16086,7 +8381,7 @@
                     <m:sSub>
                       <m:sSubPr>
                         <m:ctrlPr>
-                          <a:rPr lang="en-US" i="1" dirty="0" smtClean="0">
+                          <a:rPr lang="en-US" b="0" i="1" dirty="0" smtClean="0">
                             <a:latin typeface="Cambria Math" panose="02040503050406030204" pitchFamily="18" charset="0"/>
                           </a:rPr>
                         </m:ctrlPr>
@@ -16135,7 +8430,7 @@
                     <m:sSub>
                       <m:sSubPr>
                         <m:ctrlPr>
-                          <a:rPr lang="en-US" i="1" dirty="0" smtClean="0">
+                          <a:rPr lang="en-US" b="0" i="1" dirty="0" smtClean="0">
                             <a:latin typeface="Cambria Math" panose="02040503050406030204" pitchFamily="18" charset="0"/>
                           </a:rPr>
                         </m:ctrlPr>
@@ -16166,7 +8461,7 @@
                     <m:sSub>
                       <m:sSubPr>
                         <m:ctrlPr>
-                          <a:rPr lang="en-US" i="1" dirty="0" smtClean="0">
+                          <a:rPr lang="en-US" b="0" i="1" dirty="0" smtClean="0">
                             <a:latin typeface="Cambria Math" panose="02040503050406030204" pitchFamily="18" charset="0"/>
                           </a:rPr>
                         </m:ctrlPr>
@@ -16203,7 +8498,7 @@
                     <m:sSub>
                       <m:sSubPr>
                         <m:ctrlPr>
-                          <a:rPr lang="en-US" i="1" dirty="0" smtClean="0">
+                          <a:rPr lang="en-US" b="0" i="1" dirty="0" smtClean="0">
                             <a:latin typeface="Cambria Math" panose="02040503050406030204" pitchFamily="18" charset="0"/>
                           </a:rPr>
                         </m:ctrlPr>
@@ -16260,7 +8555,7 @@
                     <m:sSub>
                       <m:sSubPr>
                         <m:ctrlPr>
-                          <a:rPr lang="en-US" i="1" dirty="0" smtClean="0">
+                          <a:rPr lang="en-US" b="0" i="1" dirty="0" smtClean="0">
                             <a:latin typeface="Cambria Math" panose="02040503050406030204" pitchFamily="18" charset="0"/>
                           </a:rPr>
                         </m:ctrlPr>
@@ -16303,7 +8598,7 @@
                     <m:sSub>
                       <m:sSubPr>
                         <m:ctrlPr>
-                          <a:rPr lang="en-US" i="1" dirty="0" err="1" smtClean="0">
+                          <a:rPr lang="en-US" b="0" i="1" dirty="0" err="1" smtClean="0">
                             <a:latin typeface="Cambria Math" panose="02040503050406030204" pitchFamily="18" charset="0"/>
                           </a:rPr>
                         </m:ctrlPr>
@@ -16334,7 +8629,7 @@
                     <m:sSub>
                       <m:sSubPr>
                         <m:ctrlPr>
-                          <a:rPr lang="en-US" i="1" dirty="0" err="1" smtClean="0">
+                          <a:rPr lang="en-US" b="0" i="1" dirty="0" err="1" smtClean="0">
                             <a:latin typeface="Cambria Math" panose="02040503050406030204" pitchFamily="18" charset="0"/>
                           </a:rPr>
                         </m:ctrlPr>
@@ -16592,7 +8887,7 @@
           <a:p>
             <a:fld id="{E1070F89-E531-544C-A850-5EF309CEA661}" type="datetime1">
               <a:rPr lang="en-US" smtClean="0"/>
-              <a:t>4/26/26</a:t>
+              <a:t>8/13/26</a:t>
             </a:fld>
             <a:endParaRPr lang="en-US" dirty="0"/>
           </a:p>
@@ -17203,7 +9498,7 @@
                     <m:sSub>
                       <m:sSubPr>
                         <m:ctrlPr>
-                          <a:rPr lang="en-US" i="1" dirty="0" smtClean="0">
+                          <a:rPr lang="en-US" b="0" i="1" dirty="0" smtClean="0">
                             <a:latin typeface="Cambria Math" panose="02040503050406030204" pitchFamily="18" charset="0"/>
                           </a:rPr>
                         </m:ctrlPr>
@@ -17246,7 +9541,7 @@
                     <m:sSub>
                       <m:sSubPr>
                         <m:ctrlPr>
-                          <a:rPr lang="en-US" i="1" dirty="0" err="1" smtClean="0">
+                          <a:rPr lang="en-US" b="0" i="1" dirty="0" smtClean="0">
                             <a:latin typeface="Cambria Math" panose="02040503050406030204" pitchFamily="18" charset="0"/>
                           </a:rPr>
                         </m:ctrlPr>
@@ -17353,11 +9648,11 @@
                     <m:oMathParaPr>
                       <m:jc m:val="center"/>
                     </m:oMathParaPr>
-                    <m:oMath xmlns:m="http://schemas.openxmlformats.org/officeDocument/2006/math">
+                    <m:oMath>
                       <m:sSup>
                         <m:sSupPr>
                           <m:ctrlPr>
-                            <a:rPr lang="en-US" i="1" smtClean="0">
+                            <a:rPr lang="en-US" b="0" i="1" smtClean="0">
                               <a:latin typeface="Cambria Math" panose="02040503050406030204" pitchFamily="18" charset="0"/>
                             </a:rPr>
                           </m:ctrlPr>
@@ -17397,7 +9692,7 @@
                           <m:limLow>
                             <m:limLowPr>
                               <m:ctrlPr>
-                                <a:rPr lang="en-US" i="1">
+                                <a:rPr lang="en-US">
                                   <a:latin typeface="Cambria Math" panose="02040503050406030204" pitchFamily="18" charset="0"/>
                                 </a:rPr>
                               </m:ctrlPr>
@@ -17622,7 +9917,7 @@
                     <m:oMathParaPr>
                       <m:jc m:val="center"/>
                     </m:oMathParaPr>
-                    <m:oMath xmlns:m="http://schemas.openxmlformats.org/officeDocument/2006/math">
+                    <m:oMath>
                       <m:sSup>
                         <m:sSupPr>
                           <m:ctrlPr>
@@ -17666,7 +9961,7 @@
                           <m:limLow>
                             <m:limLowPr>
                               <m:ctrlPr>
-                                <a:rPr lang="en-US" i="1" smtClean="0">
+                                <a:rPr lang="en-US" b="0" i="0" smtClean="0">
                                   <a:latin typeface="Cambria Math" panose="02040503050406030204" pitchFamily="18" charset="0"/>
                                 </a:rPr>
                               </m:ctrlPr>
@@ -17730,7 +10025,7 @@
                                   <m:chr m:val="∑"/>
                                   <m:supHide m:val="on"/>
                                   <m:ctrlPr>
-                                    <a:rPr lang="en-US" i="1" smtClean="0">
+                                    <a:rPr lang="en-US" b="0" i="1">
                                       <a:latin typeface="Cambria Math" panose="02040503050406030204" pitchFamily="18" charset="0"/>
                                     </a:rPr>
                                   </m:ctrlPr>
@@ -17761,7 +10056,7 @@
                                   <m:sSup>
                                     <m:sSupPr>
                                       <m:ctrlPr>
-                                        <a:rPr lang="en-US" i="1">
+                                        <a:rPr lang="en-US" b="0" i="1">
                                           <a:latin typeface="Cambria Math" panose="02040503050406030204" pitchFamily="18" charset="0"/>
                                         </a:rPr>
                                       </m:ctrlPr>
@@ -17801,7 +10096,7 @@
                                       <m:sSub>
                                         <m:sSubPr>
                                           <m:ctrlPr>
-                                            <a:rPr lang="en-US" i="1">
+                                            <a:rPr lang="en-US" b="0" i="1">
                                               <a:latin typeface="Cambria Math" panose="02040503050406030204" pitchFamily="18" charset="0"/>
                                             </a:rPr>
                                           </m:ctrlPr>
@@ -17847,7 +10142,7 @@
                                           <m:sSub>
                                             <m:sSubPr>
                                               <m:ctrlPr>
-                                                <a:rPr lang="en-US" i="1">
+                                                <a:rPr lang="en-US" b="0" i="1">
                                                   <a:latin typeface="Cambria Math" panose="02040503050406030204" pitchFamily="18" charset="0"/>
                                                 </a:rPr>
                                               </m:ctrlPr>
@@ -17959,7 +10254,7 @@
           <a:p>
             <a:fld id="{EA071E4B-06A8-A643-88A1-9B8339A95DFC}" type="datetime1">
               <a:rPr lang="en-US" smtClean="0"/>
-              <a:t>4/26/26</a:t>
+              <a:t>8/13/26</a:t>
             </a:fld>
             <a:endParaRPr lang="en-US" dirty="0"/>
           </a:p>
@@ -18174,10 +10469,7 @@
                 </a:pPr>
                 <a14:m>
                   <m:oMathPara xmlns:m="http://schemas.openxmlformats.org/officeDocument/2006/math">
-                    <m:oMathParaPr>
-                      <m:jc m:val="centerGroup"/>
-                    </m:oMathParaPr>
-                    <m:oMath xmlns:m="http://schemas.openxmlformats.org/officeDocument/2006/math">
+                    <m:oMath>
                       <m:sSup>
                         <m:sSupPr>
                           <m:ctrlPr>
@@ -18233,7 +10525,7 @@
                           <m:limLow>
                             <m:limLowPr>
                               <m:ctrlPr>
-                                <a:rPr lang="en-US" i="1">
+                                <a:rPr lang="en-US">
                                   <a:latin typeface="Cambria Math" panose="02040503050406030204" pitchFamily="18" charset="0"/>
                                 </a:rPr>
                               </m:ctrlPr>
@@ -18568,7 +10860,7 @@
                     <m:d>
                       <m:dPr>
                         <m:ctrlPr>
-                          <a:rPr lang="en-US" sz="2400" b="0" i="1" smtClean="0">
+                          <a:rPr lang="en-US" sz="2400" i="1">
                             <a:latin typeface="Cambria Math" panose="02040503050406030204" pitchFamily="18" charset="0"/>
                           </a:rPr>
                         </m:ctrlPr>
@@ -18821,10 +11113,7 @@
                 </a:pPr>
                 <a14:m>
                   <m:oMathPara xmlns:m="http://schemas.openxmlformats.org/officeDocument/2006/math">
-                    <m:oMathParaPr>
-                      <m:jc m:val="centerGroup"/>
-                    </m:oMathParaPr>
-                    <m:oMath xmlns:m="http://schemas.openxmlformats.org/officeDocument/2006/math">
+                    <m:oMath>
                       <m:sSub>
                         <m:sSubPr>
                           <m:ctrlPr>
@@ -19201,7 +11490,7 @@
           <a:p>
             <a:fld id="{750DC275-A5B0-E24F-A67A-AB169CEC08F3}" type="datetime1">
               <a:rPr lang="en-US" smtClean="0"/>
-              <a:t>4/26/26</a:t>
+              <a:t>8/13/26</a:t>
             </a:fld>
             <a:endParaRPr lang="en-US" dirty="0"/>
           </a:p>
@@ -19395,10 +11684,7 @@
                 </a:pPr>
                 <a14:m>
                   <m:oMathPara xmlns:m="http://schemas.openxmlformats.org/officeDocument/2006/math">
-                    <m:oMathParaPr>
-                      <m:jc m:val="centerGroup"/>
-                    </m:oMathParaPr>
-                    <m:oMath xmlns:m="http://schemas.openxmlformats.org/officeDocument/2006/math">
+                    <m:oMath>
                       <m:sSup>
                         <m:sSupPr>
                           <m:ctrlPr>
@@ -19454,7 +11740,7 @@
                           <m:limLow>
                             <m:limLowPr>
                               <m:ctrlPr>
-                                <a:rPr lang="en-US" sz="2600" i="1">
+                                <a:rPr lang="en-US" sz="2600">
                                   <a:latin typeface="Cambria Math" panose="02040503050406030204" pitchFamily="18" charset="0"/>
                                 </a:rPr>
                               </m:ctrlPr>
@@ -19823,10 +12109,7 @@
                 </a:pPr>
                 <a14:m>
                   <m:oMathPara xmlns:m="http://schemas.openxmlformats.org/officeDocument/2006/math">
-                    <m:oMathParaPr>
-                      <m:jc m:val="centerGroup"/>
-                    </m:oMathParaPr>
-                    <m:oMath xmlns:m="http://schemas.openxmlformats.org/officeDocument/2006/math">
+                    <m:oMath>
                       <m:sSup>
                         <m:sSupPr>
                           <m:ctrlPr>
@@ -19855,7 +12138,7 @@
                       <m:d>
                         <m:dPr>
                           <m:ctrlPr>
-                            <a:rPr lang="en-US" sz="2600" b="0" i="1">
+                            <a:rPr lang="en-US" sz="2600" i="1">
                               <a:latin typeface="Cambria Math" panose="02040503050406030204" pitchFamily="18" charset="0"/>
                             </a:rPr>
                           </m:ctrlPr>
@@ -20061,7 +12344,7 @@
                           <m:limLow>
                             <m:limLowPr>
                               <m:ctrlPr>
-                                <a:rPr lang="en-US" sz="2600" i="1">
+                                <a:rPr lang="en-US" sz="2600">
                                   <a:latin typeface="Cambria Math" panose="02040503050406030204" pitchFamily="18" charset="0"/>
                                 </a:rPr>
                               </m:ctrlPr>
@@ -20249,14 +12532,11 @@
                 </a:pPr>
                 <a14:m>
                   <m:oMathPara xmlns:m="http://schemas.openxmlformats.org/officeDocument/2006/math">
-                    <m:oMathParaPr>
-                      <m:jc m:val="centerGroup"/>
-                    </m:oMathParaPr>
-                    <m:oMath xmlns:m="http://schemas.openxmlformats.org/officeDocument/2006/math">
+                    <m:oMath>
                       <m:sSub>
                         <m:sSubPr>
                           <m:ctrlPr>
-                            <a:rPr lang="en-US" sz="2600" i="1" smtClean="0">
+                            <a:rPr lang="en-US" sz="2600" b="0" i="1" smtClean="0">
                               <a:latin typeface="Cambria Math" panose="02040503050406030204" pitchFamily="18" charset="0"/>
                             </a:rPr>
                           </m:ctrlPr>
@@ -20474,7 +12754,7 @@
                       <m:sSub>
                         <m:sSubPr>
                           <m:ctrlPr>
-                            <a:rPr lang="en-US" sz="2600" i="1">
+                            <a:rPr lang="en-US" sz="2600" b="0" i="1" smtClean="0">
                               <a:latin typeface="Cambria Math" panose="02040503050406030204" pitchFamily="18" charset="0"/>
                             </a:rPr>
                           </m:ctrlPr>
@@ -20721,7 +13001,7 @@
           <a:p>
             <a:fld id="{37E620BB-B3A6-B24F-BAFD-896DB018EA2A}" type="datetime1">
               <a:rPr lang="en-US" smtClean="0"/>
-              <a:t>4/26/26</a:t>
+              <a:t>8/13/26</a:t>
             </a:fld>
             <a:endParaRPr lang="en-US" dirty="0"/>
           </a:p>
@@ -20760,14 +13040,11 @@
                 <a:pPr/>
                 <a14:m>
                   <m:oMathPara xmlns:m="http://schemas.openxmlformats.org/officeDocument/2006/math">
-                    <m:oMathParaPr>
-                      <m:jc m:val="centerGroup"/>
-                    </m:oMathParaPr>
-                    <m:oMath xmlns:m="http://schemas.openxmlformats.org/officeDocument/2006/math">
+                    <m:oMath>
                       <m:sSup>
                         <m:sSupPr>
                           <m:ctrlPr>
-                            <a:rPr lang="en-US" sz="2000" i="1" smtClean="0">
+                            <a:rPr lang="en-US" sz="2000" i="1">
                               <a:latin typeface="Cambria Math" panose="02040503050406030204" pitchFamily="18" charset="0"/>
                             </a:rPr>
                           </m:ctrlPr>
@@ -21184,7 +13461,7 @@
           <a:p>
             <a:fld id="{ECB1C172-B482-E249-A79C-9C3C3BFC2E60}" type="datetime1">
               <a:rPr lang="en-US" smtClean="0"/>
-              <a:t>4/26/26</a:t>
+              <a:t>8/13/26</a:t>
             </a:fld>
             <a:endParaRPr lang="en-US"/>
           </a:p>
@@ -24048,7 +16325,7 @@
           <a:p>
             <a:fld id="{47FF302C-A39D-3F48-B47A-99FC97DEBBA9}" type="datetime1">
               <a:rPr lang="en-US" smtClean="0"/>
-              <a:t>4/26/26</a:t>
+              <a:t>8/13/26</a:t>
             </a:fld>
             <a:endParaRPr lang="en-US" dirty="0"/>
           </a:p>
@@ -24369,7 +16646,7 @@
           <a:p>
             <a:fld id="{ECB1C172-B482-E249-A79C-9C3C3BFC2E60}" type="datetime1">
               <a:rPr lang="en-US" smtClean="0"/>
-              <a:t>4/26/26</a:t>
+              <a:t>8/13/26</a:t>
             </a:fld>
             <a:endParaRPr lang="en-US"/>
           </a:p>
@@ -24606,10 +16883,7 @@
                 </a:pPr>
                 <a14:m>
                   <m:oMathPara xmlns:m="http://schemas.openxmlformats.org/officeDocument/2006/math">
-                    <m:oMathParaPr>
-                      <m:jc m:val="centerGroup"/>
-                    </m:oMathParaPr>
-                    <m:oMath xmlns:m="http://schemas.openxmlformats.org/officeDocument/2006/math">
+                    <m:oMath>
                       <m:sSub>
                         <m:sSubPr>
                           <m:ctrlPr>
@@ -24671,7 +16945,7 @@
                           <m:limLow>
                             <m:limLowPr>
                               <m:ctrlPr>
-                                <a:rPr lang="en-US" b="0" i="1" smtClean="0">
+                                <a:rPr lang="en-US" b="0" i="0" smtClean="0">
                                   <a:latin typeface="Cambria Math" panose="02040503050406030204" pitchFamily="18" charset="0"/>
                                 </a:rPr>
                               </m:ctrlPr>
@@ -24975,10 +17249,7 @@
                 </a:pPr>
                 <a14:m>
                   <m:oMathPara xmlns:m="http://schemas.openxmlformats.org/officeDocument/2006/math">
-                    <m:oMathParaPr>
-                      <m:jc m:val="centerGroup"/>
-                    </m:oMathParaPr>
-                    <m:oMath xmlns:m="http://schemas.openxmlformats.org/officeDocument/2006/math">
+                    <m:oMath>
                       <m:sSub>
                         <m:sSubPr>
                           <m:ctrlPr>
@@ -25219,7 +17490,7 @@
                           <m:limLow>
                             <m:limLowPr>
                               <m:ctrlPr>
-                                <a:rPr lang="en-US" i="1">
+                                <a:rPr lang="en-US">
                                   <a:latin typeface="Cambria Math" panose="02040503050406030204" pitchFamily="18" charset="0"/>
                                 </a:rPr>
                               </m:ctrlPr>
@@ -25239,7 +17510,7 @@
                               <m:sSup>
                                 <m:sSupPr>
                                   <m:ctrlPr>
-                                    <a:rPr lang="en-US" b="0" i="1" smtClean="0">
+                                    <a:rPr lang="en-US" i="1">
                                       <a:latin typeface="Cambria Math" panose="02040503050406030204" pitchFamily="18" charset="0"/>
                                     </a:rPr>
                                   </m:ctrlPr>
@@ -25293,7 +17564,7 @@
                           <m:d>
                             <m:dPr>
                               <m:ctrlPr>
-                                <a:rPr lang="en-US" i="1">
+                                <a:rPr lang="en-US" b="0" i="1" smtClean="0">
                                   <a:latin typeface="Cambria Math" panose="02040503050406030204" pitchFamily="18" charset="0"/>
                                 </a:rPr>
                               </m:ctrlPr>
@@ -25302,7 +17573,7 @@
                               <m:sSup>
                                 <m:sSupPr>
                                   <m:ctrlPr>
-                                    <a:rPr lang="en-US" b="0" i="1" smtClean="0">
+                                    <a:rPr lang="en-US" i="1">
                                       <a:latin typeface="Cambria Math" panose="02040503050406030204" pitchFamily="18" charset="0"/>
                                     </a:rPr>
                                   </m:ctrlPr>
@@ -25421,7 +17692,7 @@
           <a:p>
             <a:fld id="{E57DA185-FCCA-6542-AD27-A07821271D7F}" type="datetime1">
               <a:rPr lang="en-US" smtClean="0"/>
-              <a:t>4/26/26</a:t>
+              <a:t>8/13/26</a:t>
             </a:fld>
             <a:endParaRPr lang="en-US"/>
           </a:p>
@@ -25858,7 +18129,7 @@
                         <m:sSub>
                           <m:sSubPr>
                             <m:ctrlPr>
-                              <a:rPr lang="en-US" b="0" i="1" smtClean="0">
+                              <a:rPr lang="en-US" i="1">
                                 <a:latin typeface="Cambria Math" panose="02040503050406030204" pitchFamily="18" charset="0"/>
                               </a:rPr>
                             </m:ctrlPr>
@@ -26120,7 +18391,7 @@
                     <m:sSub>
                       <m:sSubPr>
                         <m:ctrlPr>
-                          <a:rPr lang="en-US" i="1" smtClean="0">
+                          <a:rPr lang="en-US" i="1">
                             <a:latin typeface="Cambria Math" panose="02040503050406030204" pitchFamily="18" charset="0"/>
                           </a:rPr>
                         </m:ctrlPr>
@@ -26137,7 +18408,7 @@
                         <m:sSub>
                           <m:sSubPr>
                             <m:ctrlPr>
-                              <a:rPr lang="en-US" b="0" i="1" smtClean="0">
+                              <a:rPr lang="en-US" i="1">
                                 <a:latin typeface="Cambria Math" panose="02040503050406030204" pitchFamily="18" charset="0"/>
                               </a:rPr>
                             </m:ctrlPr>
@@ -26252,7 +18523,7 @@
                     <m:d>
                       <m:dPr>
                         <m:ctrlPr>
-                          <a:rPr lang="en-US" b="0" i="1" dirty="0" smtClean="0">
+                          <a:rPr lang="en-US" i="1" dirty="0" smtClean="0">
                             <a:latin typeface="Cambria Math" panose="02040503050406030204" pitchFamily="18" charset="0"/>
                           </a:rPr>
                         </m:ctrlPr>
@@ -26275,7 +18546,7 @@
                     <m:func>
                       <m:funcPr>
                         <m:ctrlPr>
-                          <a:rPr lang="en-US" i="1" dirty="0" smtClean="0">
+                          <a:rPr lang="en-US" i="0" dirty="0" err="1" smtClean="0">
                             <a:latin typeface="Cambria Math" panose="02040503050406030204" pitchFamily="18" charset="0"/>
                           </a:rPr>
                         </m:ctrlPr>
@@ -26295,7 +18566,7 @@
                         <m:limLow>
                           <m:limLowPr>
                             <m:ctrlPr>
-                              <a:rPr lang="en-US" b="0" i="1" dirty="0" smtClean="0">
+                              <a:rPr lang="en-US" i="0" dirty="0" err="1" smtClean="0">
                                 <a:latin typeface="Cambria Math" panose="02040503050406030204" pitchFamily="18" charset="0"/>
                               </a:rPr>
                             </m:ctrlPr>
@@ -26325,7 +18596,7 @@
                     <m:d>
                       <m:dPr>
                         <m:ctrlPr>
-                          <a:rPr lang="en-US" b="0" i="1" dirty="0" smtClean="0">
+                          <a:rPr lang="en-US" i="1">
                             <a:latin typeface="Cambria Math" panose="02040503050406030204" pitchFamily="18" charset="0"/>
                           </a:rPr>
                         </m:ctrlPr>
@@ -26513,7 +18784,7 @@
                             <m:sSub>
                               <m:sSubPr>
                                 <m:ctrlPr>
-                                  <a:rPr lang="en-US" b="0" i="1" smtClean="0">
+                                  <a:rPr lang="en-US" i="1">
                                     <a:latin typeface="Cambria Math" panose="02040503050406030204" pitchFamily="18" charset="0"/>
                                   </a:rPr>
                                 </m:ctrlPr>
@@ -26646,7 +18917,7 @@
                     <m:d>
                       <m:dPr>
                         <m:ctrlPr>
-                          <a:rPr lang="en-US" i="1" dirty="0" smtClean="0">
+                          <a:rPr lang="en-US" i="1" dirty="0" err="1" smtClean="0">
                             <a:latin typeface="Cambria Math" panose="02040503050406030204" pitchFamily="18" charset="0"/>
                           </a:rPr>
                         </m:ctrlPr>
@@ -26713,7 +18984,7 @@
                     <m:d>
                       <m:dPr>
                         <m:ctrlPr>
-                          <a:rPr lang="en-US" i="1" dirty="0" smtClean="0">
+                          <a:rPr lang="en-US" i="1" dirty="0" err="1" smtClean="0">
                             <a:latin typeface="Cambria Math" panose="02040503050406030204" pitchFamily="18" charset="0"/>
                           </a:rPr>
                         </m:ctrlPr>
@@ -26771,7 +19042,7 @@
                     <m:sSub>
                       <m:sSubPr>
                         <m:ctrlPr>
-                          <a:rPr lang="en-US" b="0" i="1" dirty="0" smtClean="0">
+                          <a:rPr lang="en-US" i="1" dirty="0" smtClean="0">
                             <a:latin typeface="Cambria Math" panose="02040503050406030204" pitchFamily="18" charset="0"/>
                           </a:rPr>
                         </m:ctrlPr>
@@ -26879,7 +19150,7 @@
           <a:p>
             <a:fld id="{436DC2F1-D165-2B46-BDAB-2EFA12EBA847}" type="datetime1">
               <a:rPr lang="en-US" smtClean="0"/>
-              <a:t>4/26/26</a:t>
+              <a:t>8/13/26</a:t>
             </a:fld>
             <a:endParaRPr lang="en-US" dirty="0"/>
           </a:p>
@@ -27113,7 +19384,7 @@
           <a:p>
             <a:fld id="{78DFE479-B548-6B48-A4C6-2080CAE75706}" type="datetime1">
               <a:rPr lang="en-US" smtClean="0"/>
-              <a:t>4/26/26</a:t>
+              <a:t>8/13/26</a:t>
             </a:fld>
             <a:endParaRPr lang="en-US"/>
           </a:p>
@@ -27457,7 +19728,7 @@
           <a:p>
             <a:fld id="{E85AD42E-947C-5E4C-A00F-B9B12C365D43}" type="datetime1">
               <a:rPr lang="en-US" smtClean="0"/>
-              <a:t>4/26/26</a:t>
+              <a:t>8/13/26</a:t>
             </a:fld>
             <a:endParaRPr lang="en-US" dirty="0"/>
           </a:p>
@@ -27632,7 +19903,7 @@
                     <m:sSub>
                       <m:sSubPr>
                         <m:ctrlPr>
-                          <a:rPr lang="en-US" i="1" dirty="0" smtClean="0">
+                          <a:rPr lang="en-US" b="1" i="1" dirty="0" smtClean="0">
                             <a:latin typeface="Cambria Math" panose="02040503050406030204" pitchFamily="18" charset="0"/>
                           </a:rPr>
                         </m:ctrlPr>
@@ -27669,7 +19940,7 @@
                     <m:sSub>
                       <m:sSubPr>
                         <m:ctrlPr>
-                          <a:rPr lang="en-US" i="1" dirty="0" err="1">
+                          <a:rPr lang="en-US" b="1" i="1" dirty="0" err="1">
                             <a:latin typeface="Cambria Math" panose="02040503050406030204" pitchFamily="18" charset="0"/>
                           </a:rPr>
                         </m:ctrlPr>
@@ -27700,7 +19971,7 @@
                     <m:sSub>
                       <m:sSubPr>
                         <m:ctrlPr>
-                          <a:rPr lang="en-US" i="1" dirty="0" err="1">
+                          <a:rPr lang="en-US" b="1" i="1" dirty="0" err="1">
                             <a:latin typeface="Cambria Math" panose="02040503050406030204" pitchFamily="18" charset="0"/>
                           </a:rPr>
                         </m:ctrlPr>
@@ -27731,7 +20002,7 @@
                     <m:sSub>
                       <m:sSubPr>
                         <m:ctrlPr>
-                          <a:rPr lang="en-US" i="1" dirty="0" err="1">
+                          <a:rPr lang="en-US" b="1" i="1" dirty="0" smtClean="0">
                             <a:latin typeface="Cambria Math" panose="02040503050406030204" pitchFamily="18" charset="0"/>
                           </a:rPr>
                         </m:ctrlPr>
@@ -27762,7 +20033,7 @@
                     <m:sSub>
                       <m:sSubPr>
                         <m:ctrlPr>
-                          <a:rPr lang="en-US" i="1" dirty="0" err="1">
+                          <a:rPr lang="en-US" b="1" i="1" dirty="0" err="1">
                             <a:latin typeface="Cambria Math" panose="02040503050406030204" pitchFamily="18" charset="0"/>
                           </a:rPr>
                         </m:ctrlPr>
@@ -27855,7 +20126,7 @@
                     <m:sSub>
                       <m:sSubPr>
                         <m:ctrlPr>
-                          <a:rPr lang="en-US" i="1" dirty="0" smtClean="0">
+                          <a:rPr lang="en-US" b="1" i="1" dirty="0" smtClean="0">
                             <a:latin typeface="Cambria Math" panose="02040503050406030204" pitchFamily="18" charset="0"/>
                           </a:rPr>
                         </m:ctrlPr>
@@ -27904,7 +20175,7 @@
                     <m:sSub>
                       <m:sSubPr>
                         <m:ctrlPr>
-                          <a:rPr lang="en-US" i="1" dirty="0" err="1">
+                          <a:rPr lang="en-US" b="1" i="1" dirty="0" err="1">
                             <a:latin typeface="Cambria Math" panose="02040503050406030204" pitchFamily="18" charset="0"/>
                           </a:rPr>
                         </m:ctrlPr>
@@ -27962,7 +20233,7 @@
                     <m:sSub>
                       <m:sSubPr>
                         <m:ctrlPr>
-                          <a:rPr lang="en-US" i="1" dirty="0" err="1" smtClean="0">
+                          <a:rPr lang="en-US" i="1" dirty="0">
                             <a:latin typeface="Cambria Math" panose="02040503050406030204" pitchFamily="18" charset="0"/>
                           </a:rPr>
                         </m:ctrlPr>
@@ -27971,7 +20242,7 @@
                         <m:sSub>
                           <m:sSubPr>
                             <m:ctrlPr>
-                              <a:rPr lang="en-US" i="1" dirty="0">
+                              <a:rPr lang="en-US" b="1" i="1" dirty="0">
                                 <a:latin typeface="Cambria Math" panose="02040503050406030204" pitchFamily="18" charset="0"/>
                               </a:rPr>
                             </m:ctrlPr>
@@ -28036,7 +20307,7 @@
                     <m:sSub>
                       <m:sSubPr>
                         <m:ctrlPr>
-                          <a:rPr lang="en-US" i="1" dirty="0" err="1" smtClean="0">
+                          <a:rPr lang="en-US" b="1" i="1" dirty="0" err="1">
                             <a:latin typeface="Cambria Math" panose="02040503050406030204" pitchFamily="18" charset="0"/>
                           </a:rPr>
                         </m:ctrlPr>
@@ -28067,7 +20338,7 @@
                     <m:sSub>
                       <m:sSubPr>
                         <m:ctrlPr>
-                          <a:rPr lang="en-US" i="1" dirty="0" err="1">
+                          <a:rPr lang="en-US" b="1" i="1" dirty="0" err="1">
                             <a:latin typeface="Cambria Math" panose="02040503050406030204" pitchFamily="18" charset="0"/>
                           </a:rPr>
                         </m:ctrlPr>
@@ -28195,7 +20466,7 @@
                     <m:sSub>
                       <m:sSubPr>
                         <m:ctrlPr>
-                          <a:rPr lang="en-US" i="1" dirty="0">
+                          <a:rPr lang="en-US" i="1" dirty="0" smtClean="0">
                             <a:latin typeface="Cambria Math" panose="02040503050406030204" pitchFamily="18" charset="0"/>
                           </a:rPr>
                         </m:ctrlPr>
@@ -28249,7 +20520,7 @@
                     <m:sSub>
                       <m:sSubPr>
                         <m:ctrlPr>
-                          <a:rPr lang="en-US" i="1" dirty="0" smtClean="0">
+                          <a:rPr lang="en-US" b="1" i="1" dirty="0" smtClean="0">
                             <a:latin typeface="Cambria Math" panose="02040503050406030204" pitchFamily="18" charset="0"/>
                           </a:rPr>
                         </m:ctrlPr>
@@ -28280,7 +20551,7 @@
                     <m:sSub>
                       <m:sSubPr>
                         <m:ctrlPr>
-                          <a:rPr lang="en-US" i="1" dirty="0" err="1" smtClean="0">
+                          <a:rPr lang="en-US" i="1" dirty="0" smtClean="0">
                             <a:latin typeface="Cambria Math" panose="02040503050406030204" pitchFamily="18" charset="0"/>
                           </a:rPr>
                         </m:ctrlPr>
@@ -28375,10 +20646,7 @@
                 </a:pPr>
                 <a14:m>
                   <m:oMathPara xmlns:m="http://schemas.openxmlformats.org/officeDocument/2006/math">
-                    <m:oMathParaPr>
-                      <m:jc m:val="centerGroup"/>
-                    </m:oMathParaPr>
-                    <m:oMath xmlns:m="http://schemas.openxmlformats.org/officeDocument/2006/math">
+                    <m:oMath>
                       <m:sSub>
                         <m:sSubPr>
                           <m:ctrlPr>
@@ -28416,7 +20684,7 @@
                           <m:sSub>
                             <m:sSubPr>
                               <m:ctrlPr>
-                                <a:rPr lang="en-US" i="1" dirty="0" smtClean="0">
+                                <a:rPr lang="en-US" b="1" i="1" dirty="0">
                                   <a:latin typeface="Cambria Math" panose="02040503050406030204" pitchFamily="18" charset="0"/>
                                 </a:rPr>
                               </m:ctrlPr>
@@ -28466,7 +20734,7 @@
                           <m:sSub>
                             <m:sSubPr>
                               <m:ctrlPr>
-                                <a:rPr lang="en-US" b="0" i="1" dirty="0" smtClean="0">
+                                <a:rPr lang="en-US" b="1" i="1" dirty="0" smtClean="0">
                                   <a:latin typeface="Cambria Math" panose="02040503050406030204" pitchFamily="18" charset="0"/>
                                 </a:rPr>
                               </m:ctrlPr>
@@ -28525,7 +20793,7 @@
                           <m:begChr m:val="["/>
                           <m:endChr m:val="]"/>
                           <m:ctrlPr>
-                            <a:rPr lang="en-US" i="1">
+                            <a:rPr lang="en-US" i="1" dirty="0">
                               <a:latin typeface="Cambria Math" panose="02040503050406030204" pitchFamily="18" charset="0"/>
                             </a:rPr>
                           </m:ctrlPr>
@@ -28534,7 +20802,7 @@
                           <m:sSub>
                             <m:sSubPr>
                               <m:ctrlPr>
-                                <a:rPr lang="en-US" i="1" dirty="0">
+                                <a:rPr lang="en-US" i="1" dirty="0" err="1">
                                   <a:latin typeface="Cambria Math" panose="02040503050406030204" pitchFamily="18" charset="0"/>
                                 </a:rPr>
                               </m:ctrlPr>
@@ -28559,7 +20827,7 @@
                           <m:d>
                             <m:dPr>
                               <m:ctrlPr>
-                                <a:rPr lang="en-US" i="1" dirty="0">
+                                <a:rPr lang="en-US" b="1" i="1" dirty="0">
                                   <a:latin typeface="Cambria Math" panose="02040503050406030204" pitchFamily="18" charset="0"/>
                                 </a:rPr>
                               </m:ctrlPr>
@@ -28568,7 +20836,7 @@
                               <m:sSub>
                                 <m:sSubPr>
                                   <m:ctrlPr>
-                                    <a:rPr lang="en-US" b="1" i="1" dirty="0">
+                                    <a:rPr lang="en-US" b="1" i="1" dirty="0" err="1">
                                       <a:latin typeface="Cambria Math" panose="02040503050406030204" pitchFamily="18" charset="0"/>
                                     </a:rPr>
                                   </m:ctrlPr>
@@ -28667,7 +20935,7 @@
                               <m:d>
                                 <m:dPr>
                                   <m:ctrlPr>
-                                    <a:rPr lang="en-US" i="1" dirty="0">
+                                    <a:rPr lang="en-US" i="1" dirty="0" err="1">
                                       <a:latin typeface="Cambria Math" panose="02040503050406030204" pitchFamily="18" charset="0"/>
                                     </a:rPr>
                                   </m:ctrlPr>
@@ -28676,7 +20944,7 @@
                                   <m:sSub>
                                     <m:sSubPr>
                                       <m:ctrlPr>
-                                        <a:rPr lang="en-US" i="1" dirty="0" err="1">
+                                        <a:rPr lang="en-US" b="1" i="1" dirty="0" err="1">
                                           <a:latin typeface="Cambria Math" panose="02040503050406030204" pitchFamily="18" charset="0"/>
                                         </a:rPr>
                                       </m:ctrlPr>
@@ -28707,7 +20975,7 @@
                                   <m:sSub>
                                     <m:sSubPr>
                                       <m:ctrlPr>
-                                        <a:rPr lang="en-US" i="1" dirty="0" err="1">
+                                        <a:rPr lang="en-US" i="1" dirty="0">
                                           <a:latin typeface="Cambria Math" panose="02040503050406030204" pitchFamily="18" charset="0"/>
                                         </a:rPr>
                                       </m:ctrlPr>
@@ -28741,7 +21009,7 @@
                                       <m:sSub>
                                         <m:sSubPr>
                                           <m:ctrlPr>
-                                            <a:rPr lang="en-US" i="1" dirty="0" err="1">
+                                            <a:rPr lang="en-US" b="1" i="1" dirty="0" err="1">
                                               <a:latin typeface="Cambria Math" panose="02040503050406030204" pitchFamily="18" charset="0"/>
                                             </a:rPr>
                                           </m:ctrlPr>
@@ -28774,7 +21042,7 @@
                                   <m:sSub>
                                     <m:sSubPr>
                                       <m:ctrlPr>
-                                        <a:rPr lang="en-US" i="1" dirty="0" err="1">
+                                        <a:rPr lang="en-US" b="1" i="1" dirty="0" err="1">
                                           <a:latin typeface="Cambria Math" panose="02040503050406030204" pitchFamily="18" charset="0"/>
                                         </a:rPr>
                                       </m:ctrlPr>
@@ -28841,10 +21109,7 @@
                 </a:pPr>
                 <a14:m>
                   <m:oMathPara xmlns:m="http://schemas.openxmlformats.org/officeDocument/2006/math">
-                    <m:oMathParaPr>
-                      <m:jc m:val="centerGroup"/>
-                    </m:oMathParaPr>
-                    <m:oMath xmlns:m="http://schemas.openxmlformats.org/officeDocument/2006/math">
+                    <m:oMath>
                       <m:sSup>
                         <m:sSupPr>
                           <m:ctrlPr>
@@ -28882,7 +21147,7 @@
                           <m:sSub>
                             <m:sSubPr>
                               <m:ctrlPr>
-                                <a:rPr lang="en-US" b="0" i="1" dirty="0" smtClean="0">
+                                <a:rPr lang="en-US" i="1" dirty="0">
                                   <a:latin typeface="Cambria Math" panose="02040503050406030204" pitchFamily="18" charset="0"/>
                                 </a:rPr>
                               </m:ctrlPr>
@@ -28915,7 +21180,7 @@
                       <m:limLow>
                         <m:limLowPr>
                           <m:ctrlPr>
-                            <a:rPr lang="en-US" b="0" i="1" dirty="0" smtClean="0">
+                            <a:rPr lang="en-US" b="0" i="0" dirty="0" smtClean="0">
                               <a:latin typeface="Cambria Math" panose="02040503050406030204" pitchFamily="18" charset="0"/>
                             </a:rPr>
                           </m:ctrlPr>
@@ -28980,7 +21245,7 @@
                       <m:sSub>
                         <m:sSubPr>
                           <m:ctrlPr>
-                            <a:rPr lang="en-US" i="1" dirty="0" smtClean="0">
+                            <a:rPr lang="en-US" b="1" i="1" dirty="0">
                               <a:latin typeface="Cambria Math" panose="02040503050406030204" pitchFamily="18" charset="0"/>
                             </a:rPr>
                           </m:ctrlPr>
@@ -29091,7 +21356,7 @@
           <a:p>
             <a:fld id="{7C8AACB2-BD01-C343-B849-091359D77C1B}" type="datetime1">
               <a:rPr lang="en-US" smtClean="0"/>
-              <a:t>4/26/26</a:t>
+              <a:t>8/13/26</a:t>
             </a:fld>
             <a:endParaRPr lang="en-US" dirty="0"/>
           </a:p>
@@ -29324,7 +21589,7 @@
           <a:p>
             <a:fld id="{6A2CEBC0-A5BD-964F-BC86-C1AEB478976D}" type="datetime1">
               <a:rPr lang="en-US" smtClean="0"/>
-              <a:t>4/26/26</a:t>
+              <a:t>8/13/26</a:t>
             </a:fld>
             <a:endParaRPr lang="en-US" dirty="0"/>
           </a:p>
@@ -29594,7 +21859,7 @@
           <a:p>
             <a:fld id="{B659F2F2-CE91-104A-AB83-43BFC693AEF4}" type="datetime1">
               <a:rPr lang="en-US" smtClean="0"/>
-              <a:t>4/26/26</a:t>
+              <a:t>8/13/26</a:t>
             </a:fld>
             <a:endParaRPr lang="en-US" dirty="0"/>
           </a:p>
@@ -29881,7 +22146,7 @@
                     <m:sSubSup>
                       <m:sSubSupPr>
                         <m:ctrlPr>
-                          <a:rPr lang="en-US" i="1" dirty="0">
+                          <a:rPr lang="en-US" i="1" dirty="0" smtClean="0">
                             <a:latin typeface="Cambria Math" panose="02040503050406030204" pitchFamily="18" charset="0"/>
                           </a:rPr>
                         </m:ctrlPr>
@@ -29967,10 +22232,7 @@
                 </a:pPr>
                 <a14:m>
                   <m:oMathPara xmlns:m="http://schemas.openxmlformats.org/officeDocument/2006/math">
-                    <m:oMathParaPr>
-                      <m:jc m:val="centerGroup"/>
-                    </m:oMathParaPr>
-                    <m:oMath xmlns:m="http://schemas.openxmlformats.org/officeDocument/2006/math">
+                    <m:oMath>
                       <m:r>
                         <a:rPr lang="en-US" b="0" i="1" smtClean="0">
                           <a:latin typeface="Cambria Math" panose="02040503050406030204" pitchFamily="18" charset="0"/>
@@ -29982,7 +22244,7 @@
                           <m:begChr m:val="["/>
                           <m:endChr m:val="]"/>
                           <m:ctrlPr>
-                            <a:rPr lang="en-US" b="0" i="1" smtClean="0">
+                            <a:rPr lang="en-US" i="1">
                               <a:latin typeface="Cambria Math" panose="02040503050406030204" pitchFamily="18" charset="0"/>
                             </a:rPr>
                           </m:ctrlPr>
@@ -30054,7 +22316,7 @@
                             <m:naryPr>
                               <m:chr m:val="∑"/>
                               <m:ctrlPr>
-                                <a:rPr lang="en-US" i="1" smtClean="0">
+                                <a:rPr lang="en-US" b="0" i="1" smtClean="0">
                                   <a:latin typeface="Cambria Math" panose="02040503050406030204" pitchFamily="18" charset="0"/>
                                 </a:rPr>
                               </m:ctrlPr>
@@ -30134,7 +22396,7 @@
                               <m:sSub>
                                 <m:sSubPr>
                                   <m:ctrlPr>
-                                    <a:rPr lang="en-US" i="1">
+                                    <a:rPr lang="en-US" b="1" i="1">
                                       <a:latin typeface="Cambria Math" panose="02040503050406030204" pitchFamily="18" charset="0"/>
                                     </a:rPr>
                                   </m:ctrlPr>
@@ -30165,7 +22427,7 @@
                               <m:sSub>
                                 <m:sSubPr>
                                   <m:ctrlPr>
-                                    <a:rPr lang="en-US" i="1">
+                                    <a:rPr lang="en-US" i="1" smtClean="0">
                                       <a:latin typeface="Cambria Math" panose="02040503050406030204" pitchFamily="18" charset="0"/>
                                     </a:rPr>
                                   </m:ctrlPr>
@@ -30196,7 +22458,7 @@
                               <m:sSub>
                                 <m:sSubPr>
                                   <m:ctrlPr>
-                                    <a:rPr lang="en-US" i="1">
+                                    <a:rPr lang="en-US" b="1" i="1">
                                       <a:latin typeface="Cambria Math" panose="02040503050406030204" pitchFamily="18" charset="0"/>
                                     </a:rPr>
                                   </m:ctrlPr>
@@ -30227,7 +22489,7 @@
                               <m:sSub>
                                 <m:sSubPr>
                                   <m:ctrlPr>
-                                    <a:rPr lang="en-US" i="1">
+                                    <a:rPr lang="en-US" b="1" i="1">
                                       <a:latin typeface="Cambria Math" panose="02040503050406030204" pitchFamily="18" charset="0"/>
                                     </a:rPr>
                                   </m:ctrlPr>
@@ -30499,7 +22761,7 @@
           <a:p>
             <a:fld id="{2F3AA625-AE0D-DD4F-8874-276B779D2686}" type="datetime1">
               <a:rPr lang="en-US" smtClean="0"/>
-              <a:t>4/26/26</a:t>
+              <a:t>8/13/26</a:t>
             </a:fld>
             <a:endParaRPr lang="en-US" dirty="0"/>
           </a:p>
@@ -30699,7 +22961,7 @@
           <a:p>
             <a:fld id="{9F5D9066-BBBD-5441-B441-64916303149D}" type="datetime1">
               <a:rPr lang="en-US" smtClean="0"/>
-              <a:t>4/26/26</a:t>
+              <a:t>8/13/26</a:t>
             </a:fld>
             <a:endParaRPr lang="en-US" dirty="0"/>
           </a:p>
@@ -30876,7 +23138,7 @@
                     <m:oMathParaPr>
                       <m:jc m:val="center"/>
                     </m:oMathParaPr>
-                    <m:oMath xmlns:m="http://schemas.openxmlformats.org/officeDocument/2006/math">
+                    <m:oMath>
                       <m:sSub>
                         <m:sSubPr>
                           <m:ctrlPr>
@@ -30911,7 +23173,7 @@
                       <m:sSub>
                         <m:sSubPr>
                           <m:ctrlPr>
-                            <a:rPr lang="pt" i="1">
+                            <a:rPr lang="pt" b="1" i="1">
                               <a:latin typeface="Cambria Math" panose="02040503050406030204" pitchFamily="18" charset="0"/>
                             </a:rPr>
                           </m:ctrlPr>
@@ -30973,7 +23235,7 @@
                       <m:sSub>
                         <m:sSubPr>
                           <m:ctrlPr>
-                            <a:rPr lang="pt" i="1">
+                            <a:rPr lang="pt" b="1" i="1">
                               <a:latin typeface="Cambria Math" panose="02040503050406030204" pitchFamily="18" charset="0"/>
                             </a:rPr>
                           </m:ctrlPr>
@@ -31030,7 +23292,7 @@
                     <m:oMathParaPr>
                       <m:jc m:val="center"/>
                     </m:oMathParaPr>
-                    <m:oMath xmlns:m="http://schemas.openxmlformats.org/officeDocument/2006/math">
+                    <m:oMath>
                       <m:sSub>
                         <m:sSubPr>
                           <m:ctrlPr>
@@ -31068,7 +23330,7 @@
                           <m:sSub>
                             <m:sSubPr>
                               <m:ctrlPr>
-                                <a:rPr lang="en-US" i="1">
+                                <a:rPr lang="en-US" b="1" i="1">
                                   <a:latin typeface="Cambria Math" panose="02040503050406030204" pitchFamily="18" charset="0"/>
                                 </a:rPr>
                               </m:ctrlPr>
@@ -31101,7 +23363,7 @@
                       <m:limLow>
                         <m:limLowPr>
                           <m:ctrlPr>
-                            <a:rPr lang="en-US" i="1">
+                            <a:rPr lang="en-US" i="0">
                               <a:latin typeface="Cambria Math" panose="02040503050406030204" pitchFamily="18" charset="0"/>
                             </a:rPr>
                           </m:ctrlPr>
@@ -31121,7 +23383,7 @@
                           <m:sSub>
                             <m:sSubPr>
                               <m:ctrlPr>
-                                <a:rPr lang="en-US" b="0" i="1" smtClean="0">
+                                <a:rPr lang="en-US" b="1" i="1">
                                   <a:latin typeface="Cambria Math" panose="02040503050406030204" pitchFamily="18" charset="0"/>
                                 </a:rPr>
                               </m:ctrlPr>
@@ -31164,7 +23426,7 @@
                           <m:sSub>
                             <m:sSubPr>
                               <m:ctrlPr>
-                                <a:rPr lang="en-US" b="0" i="1" smtClean="0">
+                                <a:rPr lang="en-US" b="1" i="1" smtClean="0">
                                   <a:latin typeface="Cambria Math" panose="02040503050406030204" pitchFamily="18" charset="0"/>
                                 </a:rPr>
                               </m:ctrlPr>
@@ -31197,7 +23459,7 @@
                       <m:sSub>
                         <m:sSubPr>
                           <m:ctrlPr>
-                            <a:rPr lang="en-US" i="1" smtClean="0">
+                            <a:rPr lang="en-US" i="1">
                               <a:solidFill>
                                 <a:srgbClr val="C00000"/>
                               </a:solidFill>
@@ -31220,7 +23482,7 @@
                           <m:sSub>
                             <m:sSubPr>
                               <m:ctrlPr>
-                                <a:rPr lang="en-US" b="0" i="1" smtClean="0">
+                                <a:rPr lang="en-US" i="1">
                                   <a:solidFill>
                                     <a:srgbClr val="C00000"/>
                                   </a:solidFill>
@@ -31264,7 +23526,7 @@
                           <m:begChr m:val="["/>
                           <m:endChr m:val="]"/>
                           <m:ctrlPr>
-                            <a:rPr lang="en-US" b="0" i="1" smtClean="0">
+                            <a:rPr lang="en-US" i="1">
                               <a:latin typeface="Cambria Math" panose="02040503050406030204" pitchFamily="18" charset="0"/>
                             </a:rPr>
                           </m:ctrlPr>
@@ -31307,7 +23569,7 @@
                               <m:sSub>
                                 <m:sSubPr>
                                   <m:ctrlPr>
-                                    <a:rPr lang="en-US" i="1">
+                                    <a:rPr lang="en-US" b="1" i="1">
                                       <a:latin typeface="Cambria Math" panose="02040503050406030204" pitchFamily="18" charset="0"/>
                                     </a:rPr>
                                   </m:ctrlPr>
@@ -31338,7 +23600,7 @@
                               <m:sSub>
                                 <m:sSubPr>
                                   <m:ctrlPr>
-                                    <a:rPr lang="en-US" i="1">
+                                    <a:rPr lang="en-US" b="1" i="1">
                                       <a:latin typeface="Cambria Math" panose="02040503050406030204" pitchFamily="18" charset="0"/>
                                     </a:rPr>
                                   </m:ctrlPr>
@@ -31369,7 +23631,7 @@
                               <m:sSub>
                                 <m:sSubPr>
                                   <m:ctrlPr>
-                                    <a:rPr lang="en-US" i="1">
+                                    <a:rPr lang="en-US" b="1" i="1">
                                       <a:latin typeface="Cambria Math" panose="02040503050406030204" pitchFamily="18" charset="0"/>
                                     </a:rPr>
                                   </m:ctrlPr>
@@ -31460,7 +23722,7 @@
                               <m:sSub>
                                 <m:sSubPr>
                                   <m:ctrlPr>
-                                    <a:rPr lang="en-US" i="1">
+                                    <a:rPr lang="en-US" b="1" i="1">
                                       <a:latin typeface="Cambria Math" panose="02040503050406030204" pitchFamily="18" charset="0"/>
                                     </a:rPr>
                                   </m:ctrlPr>
@@ -31491,7 +23753,7 @@
                               <m:sSub>
                                 <m:sSubPr>
                                   <m:ctrlPr>
-                                    <a:rPr lang="en-US" i="1">
+                                    <a:rPr lang="en-US" b="1" i="1">
                                       <a:latin typeface="Cambria Math" panose="02040503050406030204" pitchFamily="18" charset="0"/>
                                     </a:rPr>
                                   </m:ctrlPr>
@@ -31522,7 +23784,7 @@
                               <m:sSub>
                                 <m:sSubPr>
                                   <m:ctrlPr>
-                                    <a:rPr lang="en-US" i="1">
+                                    <a:rPr lang="en-US" b="1" i="1">
                                       <a:latin typeface="Cambria Math" panose="02040503050406030204" pitchFamily="18" charset="0"/>
                                     </a:rPr>
                                   </m:ctrlPr>
@@ -31650,7 +23912,7 @@
                     <m:sSub>
                       <m:sSubPr>
                         <m:ctrlPr>
-                          <a:rPr lang="en-US" i="1" dirty="0" smtClean="0">
+                          <a:rPr lang="en-US" b="1" i="1" dirty="0" smtClean="0">
                             <a:latin typeface="Cambria Math" panose="02040503050406030204" pitchFamily="18" charset="0"/>
                           </a:rPr>
                         </m:ctrlPr>
@@ -31712,7 +23974,7 @@
                     <m:sSub>
                       <m:sSubPr>
                         <m:ctrlPr>
-                          <a:rPr lang="en-US" i="1" dirty="0" smtClean="0">
+                          <a:rPr lang="en-US" b="1" i="1" dirty="0" smtClean="0">
                             <a:latin typeface="Cambria Math" panose="02040503050406030204" pitchFamily="18" charset="0"/>
                           </a:rPr>
                         </m:ctrlPr>
@@ -31793,7 +24055,7 @@
                     <m:sSub>
                       <m:sSubPr>
                         <m:ctrlPr>
-                          <a:rPr lang="en-US" b="0" i="1" dirty="0" err="1" smtClean="0">
+                          <a:rPr lang="en-US" b="1" i="1" dirty="0" err="1">
                             <a:latin typeface="Cambria Math" panose="02040503050406030204" pitchFamily="18" charset="0"/>
                           </a:rPr>
                         </m:ctrlPr>
@@ -31824,7 +24086,7 @@
                     <m:limLow>
                       <m:limLowPr>
                         <m:ctrlPr>
-                          <a:rPr lang="en-US" i="1">
+                          <a:rPr lang="en-US" b="0" i="0" smtClean="0">
                             <a:latin typeface="Cambria Math" panose="02040503050406030204" pitchFamily="18" charset="0"/>
                           </a:rPr>
                         </m:ctrlPr>
@@ -31853,7 +24115,7 @@
                         <m:sSub>
                           <m:sSubPr>
                             <m:ctrlPr>
-                              <a:rPr lang="en-US" i="1">
+                              <a:rPr lang="en-US" b="1" i="1">
                                 <a:latin typeface="Cambria Math" panose="02040503050406030204" pitchFamily="18" charset="0"/>
                               </a:rPr>
                             </m:ctrlPr>
@@ -31896,7 +24158,7 @@
                         <m:sSub>
                           <m:sSubPr>
                             <m:ctrlPr>
-                              <a:rPr lang="en-US" i="1">
+                              <a:rPr lang="en-US" b="1" i="1">
                                 <a:latin typeface="Cambria Math" panose="02040503050406030204" pitchFamily="18" charset="0"/>
                               </a:rPr>
                             </m:ctrlPr>
@@ -32024,7 +24286,7 @@
                             <m:sSub>
                               <m:sSubPr>
                                 <m:ctrlPr>
-                                  <a:rPr lang="en-US" i="1">
+                                  <a:rPr lang="en-US" b="1" i="1">
                                     <a:latin typeface="Cambria Math" panose="02040503050406030204" pitchFamily="18" charset="0"/>
                                   </a:rPr>
                                 </m:ctrlPr>
@@ -32055,7 +24317,7 @@
                             <m:sSub>
                               <m:sSubPr>
                                 <m:ctrlPr>
-                                  <a:rPr lang="en-US" i="1">
+                                  <a:rPr lang="en-US" b="1" i="1">
                                     <a:latin typeface="Cambria Math" panose="02040503050406030204" pitchFamily="18" charset="0"/>
                                   </a:rPr>
                                 </m:ctrlPr>
@@ -32086,7 +24348,7 @@
                             <m:sSub>
                               <m:sSubPr>
                                 <m:ctrlPr>
-                                  <a:rPr lang="en-US" i="1">
+                                  <a:rPr lang="en-US" b="1" i="1">
                                     <a:latin typeface="Cambria Math" panose="02040503050406030204" pitchFamily="18" charset="0"/>
                                   </a:rPr>
                                 </m:ctrlPr>
@@ -32156,7 +24418,7 @@
                         <m:sSub>
                           <m:sSubPr>
                             <m:ctrlPr>
-                              <a:rPr lang="en-US" b="1" i="1" smtClean="0">
+                              <a:rPr lang="en-US" b="1" i="1">
                                 <a:latin typeface="Cambria Math" panose="02040503050406030204" pitchFamily="18" charset="0"/>
                               </a:rPr>
                             </m:ctrlPr>
@@ -32190,7 +24452,7 @@
                             <m:sSub>
                               <m:sSubPr>
                                 <m:ctrlPr>
-                                  <a:rPr lang="en-US" i="1">
+                                  <a:rPr lang="en-US" b="1" i="1">
                                     <a:latin typeface="Cambria Math" panose="02040503050406030204" pitchFamily="18" charset="0"/>
                                   </a:rPr>
                                 </m:ctrlPr>
@@ -32221,7 +24483,7 @@
                             <m:sSub>
                               <m:sSubPr>
                                 <m:ctrlPr>
-                                  <a:rPr lang="en-US" i="1">
+                                  <a:rPr lang="en-US" b="1" i="1">
                                     <a:latin typeface="Cambria Math" panose="02040503050406030204" pitchFamily="18" charset="0"/>
                                   </a:rPr>
                                 </m:ctrlPr>
@@ -32252,7 +24514,7 @@
                             <m:sSub>
                               <m:sSubPr>
                                 <m:ctrlPr>
-                                  <a:rPr lang="en-US" i="1">
+                                  <a:rPr lang="en-US" b="1" i="1">
                                     <a:latin typeface="Cambria Math" panose="02040503050406030204" pitchFamily="18" charset="0"/>
                                   </a:rPr>
                                 </m:ctrlPr>
@@ -32357,7 +24619,7 @@
           <a:p>
             <a:fld id="{009455BD-F4DA-9A49-BF42-EA7B89FD3FA6}" type="datetime1">
               <a:rPr lang="en-US" smtClean="0"/>
-              <a:t>4/26/26</a:t>
+              <a:t>8/13/26</a:t>
             </a:fld>
             <a:endParaRPr lang="en-US" dirty="0"/>
           </a:p>
@@ -32521,7 +24783,7 @@
                     <m:sSub>
                       <m:sSubPr>
                         <m:ctrlPr>
-                          <a:rPr lang="en-US" i="1" dirty="0" err="1" smtClean="0">
+                          <a:rPr lang="en-US" i="1" dirty="0" err="1">
                             <a:latin typeface="Cambria Math" panose="02040503050406030204" pitchFamily="18" charset="0"/>
                           </a:rPr>
                         </m:ctrlPr>
@@ -32625,7 +24887,7 @@
                     <m:sSub>
                       <m:sSubPr>
                         <m:ctrlPr>
-                          <a:rPr lang="en-US" i="1" dirty="0" err="1" smtClean="0">
+                          <a:rPr lang="en-US" i="1" dirty="0" smtClean="0">
                             <a:latin typeface="Cambria Math" panose="02040503050406030204" pitchFamily="18" charset="0"/>
                           </a:rPr>
                         </m:ctrlPr>
@@ -32946,7 +25208,7 @@
                     <m:sSub>
                       <m:sSubPr>
                         <m:ctrlPr>
-                          <a:rPr lang="en-US" i="1" dirty="0" err="1" smtClean="0">
+                          <a:rPr lang="en-US" i="1" dirty="0" err="1">
                             <a:latin typeface="Cambria Math" panose="02040503050406030204" pitchFamily="18" charset="0"/>
                           </a:rPr>
                         </m:ctrlPr>
@@ -33000,7 +25262,7 @@
                     <m:sSub>
                       <m:sSubPr>
                         <m:ctrlPr>
-                          <a:rPr lang="en-US" i="1" dirty="0" err="1" smtClean="0">
+                          <a:rPr lang="en-US" i="1" dirty="0" err="1">
                             <a:latin typeface="Cambria Math" panose="02040503050406030204" pitchFamily="18" charset="0"/>
                           </a:rPr>
                         </m:ctrlPr>
@@ -33054,7 +25316,7 @@
                     <m:sSub>
                       <m:sSubPr>
                         <m:ctrlPr>
-                          <a:rPr lang="en-US" i="1" dirty="0" err="1" smtClean="0">
+                          <a:rPr lang="en-US" i="1" dirty="0" err="1">
                             <a:latin typeface="Cambria Math" panose="02040503050406030204" pitchFamily="18" charset="0"/>
                           </a:rPr>
                         </m:ctrlPr>
@@ -33104,10 +25366,7 @@
                 </a:pPr>
                 <a14:m>
                   <m:oMathPara xmlns:m="http://schemas.openxmlformats.org/officeDocument/2006/math">
-                    <m:oMathParaPr>
-                      <m:jc m:val="centerGroup"/>
-                    </m:oMathParaPr>
-                    <m:oMath xmlns:m="http://schemas.openxmlformats.org/officeDocument/2006/math">
+                    <m:oMath>
                       <m:r>
                         <a:rPr lang="en-US" b="0" i="1" smtClean="0">
                           <a:latin typeface="Cambria Math" panose="02040503050406030204" pitchFamily="18" charset="0"/>
@@ -33516,10 +25775,7 @@
                 <a:pPr/>
                 <a14:m>
                   <m:oMathPara xmlns:m="http://schemas.openxmlformats.org/officeDocument/2006/math">
-                    <m:oMathParaPr>
-                      <m:jc m:val="centerGroup"/>
-                    </m:oMathParaPr>
-                    <m:oMath xmlns:m="http://schemas.openxmlformats.org/officeDocument/2006/math">
+                    <m:oMath>
                       <m:sSub>
                         <m:sSubPr>
                           <m:ctrlPr>
@@ -33668,10 +25924,7 @@
                 <a:pPr/>
                 <a14:m>
                   <m:oMathPara xmlns:m="http://schemas.openxmlformats.org/officeDocument/2006/math">
-                    <m:oMathParaPr>
-                      <m:jc m:val="centerGroup"/>
-                    </m:oMathParaPr>
-                    <m:oMath xmlns:m="http://schemas.openxmlformats.org/officeDocument/2006/math">
+                    <m:oMath>
                       <m:sSub>
                         <m:sSubPr>
                           <m:ctrlPr>
@@ -33872,7 +26125,7 @@
           <a:p>
             <a:fld id="{7AD8228F-9FFA-3848-9A6D-057706F43CB9}" type="datetime1">
               <a:rPr lang="en-US" smtClean="0"/>
-              <a:t>4/26/26</a:t>
+              <a:t>8/13/26</a:t>
             </a:fld>
             <a:endParaRPr lang="en-US" dirty="0"/>
           </a:p>
@@ -34472,6 +26725,15 @@
 </file>
 
 <file path=customXml/item1.xml><?xml version="1.0" encoding="utf-8"?>
+<?mso-contentType ?>
+<FormTemplates xmlns="http://schemas.microsoft.com/sharepoint/v3/contenttype/forms">
+  <Display>DocumentLibraryForm</Display>
+  <Edit>DocumentLibraryForm</Edit>
+  <New>DocumentLibraryForm</New>
+</FormTemplates>
+</file>
+
+<file path=customXml/item2.xml><?xml version="1.0" encoding="utf-8"?>
 <ct:contentTypeSchema xmlns:ct="http://schemas.microsoft.com/office/2006/metadata/contentType" xmlns:ma="http://schemas.microsoft.com/office/2006/metadata/properties/metaAttributes" ct:_="" ma:_="" ma:contentTypeName="Document" ma:contentTypeID="0x0101001AFBB6EF975807449194B44213CB1385" ma:contentTypeVersion="5" ma:contentTypeDescription="Create a new document." ma:contentTypeScope="" ma:versionID="6297688411df770d7ba805098bf03ebd">
   <xsd:schema xmlns:xsd="http://www.w3.org/2001/XMLSchema" xmlns:xs="http://www.w3.org/2001/XMLSchema" xmlns:p="http://schemas.microsoft.com/office/2006/metadata/properties" xmlns:ns3="d1af692f-475c-46b5-a87d-a47813ac8995" xmlns:ns4="ec38afac-11fd-4f05-b2a5-9d8ac7fc116b" targetNamespace="http://schemas.microsoft.com/office/2006/metadata/properties" ma:root="true" ma:fieldsID="a8acf1f0a3134d6bce4e4716f1f754da" ns3:_="" ns4:_="">
     <xsd:import namespace="d1af692f-475c-46b5-a87d-a47813ac8995"/>
@@ -34642,15 +26904,6 @@
 </ct:contentTypeSchema>
 </file>
 
-<file path=customXml/item2.xml><?xml version="1.0" encoding="utf-8"?>
-<?mso-contentType ?>
-<FormTemplates xmlns="http://schemas.microsoft.com/sharepoint/v3/contenttype/forms">
-  <Display>DocumentLibraryForm</Display>
-  <Edit>DocumentLibraryForm</Edit>
-  <New>DocumentLibraryForm</New>
-</FormTemplates>
-</file>
-
 <file path=customXml/item3.xml><?xml version="1.0" encoding="utf-8"?>
 <p:properties xmlns:p="http://schemas.microsoft.com/office/2006/metadata/properties" xmlns:xsi="http://www.w3.org/2001/XMLSchema-instance" xmlns:pc="http://schemas.microsoft.com/office/infopath/2007/PartnerControls">
   <documentManagement/>
@@ -34658,6 +26911,14 @@
 </file>
 
 <file path=customXml/itemProps1.xml><?xml version="1.0" encoding="utf-8"?>
+<ds:datastoreItem xmlns:ds="http://schemas.openxmlformats.org/officeDocument/2006/customXml" ds:itemID="{594D6842-5AF1-4CA0-B76F-093B6178E8FD}">
+  <ds:schemaRefs>
+    <ds:schemaRef ds:uri="http://schemas.microsoft.com/sharepoint/v3/contenttype/forms"/>
+  </ds:schemaRefs>
+</ds:datastoreItem>
+</file>
+
+<file path=customXml/itemProps2.xml><?xml version="1.0" encoding="utf-8"?>
 <ds:datastoreItem xmlns:ds="http://schemas.openxmlformats.org/officeDocument/2006/customXml" ds:itemID="{7352FE36-E18B-45C1-ABA4-61143D2DEFCD}">
   <ds:schemaRefs>
     <ds:schemaRef ds:uri="http://schemas.microsoft.com/office/2006/metadata/contentType"/>
@@ -34676,27 +26937,19 @@
 </ds:datastoreItem>
 </file>
 
-<file path=customXml/itemProps2.xml><?xml version="1.0" encoding="utf-8"?>
-<ds:datastoreItem xmlns:ds="http://schemas.openxmlformats.org/officeDocument/2006/customXml" ds:itemID="{594D6842-5AF1-4CA0-B76F-093B6178E8FD}">
-  <ds:schemaRefs>
-    <ds:schemaRef ds:uri="http://schemas.microsoft.com/sharepoint/v3/contenttype/forms"/>
-  </ds:schemaRefs>
-</ds:datastoreItem>
-</file>
-
 <file path=customXml/itemProps3.xml><?xml version="1.0" encoding="utf-8"?>
 <ds:datastoreItem xmlns:ds="http://schemas.openxmlformats.org/officeDocument/2006/customXml" ds:itemID="{5FACCD53-02B1-42CE-97F7-33D2ABD17827}">
   <ds:schemaRefs>
     <ds:schemaRef ds:uri="http://schemas.microsoft.com/office/2006/documentManagement/types"/>
+    <ds:schemaRef ds:uri="http://schemas.openxmlformats.org/package/2006/metadata/core-properties"/>
+    <ds:schemaRef ds:uri="http://purl.org/dc/dcmitype/"/>
     <ds:schemaRef ds:uri="http://purl.org/dc/elements/1.1/"/>
-    <ds:schemaRef ds:uri="http://www.w3.org/XML/1998/namespace"/>
+    <ds:schemaRef ds:uri="ec38afac-11fd-4f05-b2a5-9d8ac7fc116b"/>
+    <ds:schemaRef ds:uri="d1af692f-475c-46b5-a87d-a47813ac8995"/>
     <ds:schemaRef ds:uri="http://purl.org/dc/terms/"/>
-    <ds:schemaRef ds:uri="ec38afac-11fd-4f05-b2a5-9d8ac7fc116b"/>
     <ds:schemaRef ds:uri="http://schemas.microsoft.com/office/infopath/2007/PartnerControls"/>
     <ds:schemaRef ds:uri="http://schemas.microsoft.com/office/2006/metadata/properties"/>
-    <ds:schemaRef ds:uri="http://schemas.openxmlformats.org/package/2006/metadata/core-properties"/>
-    <ds:schemaRef ds:uri="d1af692f-475c-46b5-a87d-a47813ac8995"/>
-    <ds:schemaRef ds:uri="http://purl.org/dc/dcmitype/"/>
+    <ds:schemaRef ds:uri="http://www.w3.org/XML/1998/namespace"/>
   </ds:schemaRefs>
 </ds:datastoreItem>
 </file>